--- a/flowchart.pptx
+++ b/flowchart.pptx
@@ -2,10 +2,13 @@
 <file path=ppt/presentation.xml><?xml version="1.0" encoding="utf-8"?>
 <p:presentation xmlns:a="http://schemas.openxmlformats.org/drawingml/2006/main" xmlns:r="http://schemas.openxmlformats.org/officeDocument/2006/relationships" xmlns:p="http://schemas.openxmlformats.org/presentationml/2006/main" saveSubsetFonts="1">
   <p:sldMasterIdLst>
-    <p:sldMasterId id="2147483672" r:id="rId1"/>
+    <p:sldMasterId id="2147483672" r:id="rId4"/>
   </p:sldMasterIdLst>
+  <p:notesMasterIdLst>
+    <p:notesMasterId r:id="rId6"/>
+  </p:notesMasterIdLst>
   <p:sldIdLst>
-    <p:sldId id="257" r:id="rId2"/>
+    <p:sldId id="257" r:id="rId5"/>
   </p:sldIdLst>
   <p:sldSz cx="19110325" cy="9236075"/>
   <p:notesSz cx="6858000" cy="9144000"/>
@@ -104,7 +107,380 @@
       </a:defRPr>
     </a:lvl9pPr>
   </p:defaultTextStyle>
+  <p:extLst>
+    <p:ext uri="{EFAFB233-063F-42B5-8137-9DF3F51BA10A}">
+      <p15:sldGuideLst xmlns:p15="http://schemas.microsoft.com/office/powerpoint/2012/main">
+        <p15:guide id="1" orient="horz" pos="2909" userDrawn="1">
+          <p15:clr>
+            <a:srgbClr val="A4A3A4"/>
+          </p15:clr>
+        </p15:guide>
+        <p15:guide id="2" pos="6019" userDrawn="1">
+          <p15:clr>
+            <a:srgbClr val="A4A3A4"/>
+          </p15:clr>
+        </p15:guide>
+      </p15:sldGuideLst>
+    </p:ext>
+  </p:extLst>
 </p:presentation>
+</file>
+
+<file path=ppt/revisionInfo.xml><?xml version="1.0" encoding="utf-8"?>
+<p1510:revInfo xmlns:a="http://schemas.openxmlformats.org/drawingml/2006/main" xmlns:r="http://schemas.openxmlformats.org/officeDocument/2006/relationships" xmlns:p1510="http://schemas.microsoft.com/office/powerpoint/2015/10/main">
+  <p1510:revLst>
+    <p1510:client id="{4D51907C-C93B-4E1A-A96D-58F65D9A539C}" v="259" dt="2025-11-19T22:17:20"/>
+  </p1510:revLst>
+</p1510:revInfo>
+</file>
+
+<file path=ppt/notesMasters/notesMaster1.xml><?xml version="1.0" encoding="utf-8"?>
+<p:notesMaster xmlns:a="http://schemas.openxmlformats.org/drawingml/2006/main" xmlns:r="http://schemas.openxmlformats.org/officeDocument/2006/relationships" xmlns:p="http://schemas.openxmlformats.org/presentationml/2006/main">
+  <p:cSld>
+    <p:bg>
+      <p:bgRef idx="1001">
+        <a:schemeClr val="bg1"/>
+      </p:bgRef>
+    </p:bg>
+    <p:spTree>
+      <p:nvGrpSpPr>
+        <p:cNvPr id="1" name=""/>
+        <p:cNvGrpSpPr/>
+        <p:nvPr/>
+      </p:nvGrpSpPr>
+      <p:grpSpPr>
+        <a:xfrm>
+          <a:off x="0" y="0"/>
+          <a:ext cx="0" cy="0"/>
+          <a:chOff x="0" y="0"/>
+          <a:chExt cx="0" cy="0"/>
+        </a:xfrm>
+      </p:grpSpPr>
+      <p:sp>
+        <p:nvSpPr>
+          <p:cNvPr id="2" name="Header Placeholder 1"/>
+          <p:cNvSpPr>
+            <a:spLocks noGrp="1"/>
+          </p:cNvSpPr>
+          <p:nvPr>
+            <p:ph type="hdr" sz="quarter"/>
+          </p:nvPr>
+        </p:nvSpPr>
+        <p:spPr>
+          <a:xfrm>
+            <a:off x="0" y="0"/>
+            <a:ext cx="2971800" cy="458788"/>
+          </a:xfrm>
+          <a:prstGeom prst="rect">
+            <a:avLst/>
+          </a:prstGeom>
+        </p:spPr>
+        <p:txBody>
+          <a:bodyPr vert="horz" lIns="91440" tIns="45720" rIns="91440" bIns="45720" rtlCol="0"/>
+          <a:lstStyle>
+            <a:lvl1pPr algn="l">
+              <a:defRPr sz="1200"/>
+            </a:lvl1pPr>
+          </a:lstStyle>
+          <a:p>
+            <a:endParaRPr lang="en-US"/>
+          </a:p>
+        </p:txBody>
+      </p:sp>
+      <p:sp>
+        <p:nvSpPr>
+          <p:cNvPr id="3" name="Date Placeholder 2"/>
+          <p:cNvSpPr>
+            <a:spLocks noGrp="1"/>
+          </p:cNvSpPr>
+          <p:nvPr>
+            <p:ph type="dt" idx="1"/>
+          </p:nvPr>
+        </p:nvSpPr>
+        <p:spPr>
+          <a:xfrm>
+            <a:off x="3884613" y="0"/>
+            <a:ext cx="2971800" cy="458788"/>
+          </a:xfrm>
+          <a:prstGeom prst="rect">
+            <a:avLst/>
+          </a:prstGeom>
+        </p:spPr>
+        <p:txBody>
+          <a:bodyPr vert="horz" lIns="91440" tIns="45720" rIns="91440" bIns="45720" rtlCol="0"/>
+          <a:lstStyle>
+            <a:lvl1pPr algn="r">
+              <a:defRPr sz="1200"/>
+            </a:lvl1pPr>
+          </a:lstStyle>
+          <a:p>
+            <a:fld id="{861AD860-6EA9-4119-A999-7E65F9394C29}" type="datetimeFigureOut">
+              <a:rPr lang="en-US" smtClean="0"/>
+              <a:t>11/19/2025</a:t>
+            </a:fld>
+            <a:endParaRPr lang="en-US"/>
+          </a:p>
+        </p:txBody>
+      </p:sp>
+      <p:sp>
+        <p:nvSpPr>
+          <p:cNvPr id="4" name="Slide Image Placeholder 3"/>
+          <p:cNvSpPr>
+            <a:spLocks noGrp="1" noRot="1" noChangeAspect="1"/>
+          </p:cNvSpPr>
+          <p:nvPr>
+            <p:ph type="sldImg" idx="2"/>
+          </p:nvPr>
+        </p:nvSpPr>
+        <p:spPr>
+          <a:xfrm>
+            <a:off x="236538" y="1143000"/>
+            <a:ext cx="6384925" cy="3086100"/>
+          </a:xfrm>
+          <a:prstGeom prst="rect">
+            <a:avLst/>
+          </a:prstGeom>
+          <a:noFill/>
+          <a:ln w="12700">
+            <a:solidFill>
+              <a:prstClr val="black"/>
+            </a:solidFill>
+          </a:ln>
+        </p:spPr>
+        <p:txBody>
+          <a:bodyPr vert="horz" lIns="91440" tIns="45720" rIns="91440" bIns="45720" rtlCol="0" anchor="ctr"/>
+          <a:lstStyle/>
+          <a:p>
+            <a:endParaRPr lang="en-US"/>
+          </a:p>
+        </p:txBody>
+      </p:sp>
+      <p:sp>
+        <p:nvSpPr>
+          <p:cNvPr id="5" name="Notes Placeholder 4"/>
+          <p:cNvSpPr>
+            <a:spLocks noGrp="1"/>
+          </p:cNvSpPr>
+          <p:nvPr>
+            <p:ph type="body" sz="quarter" idx="3"/>
+          </p:nvPr>
+        </p:nvSpPr>
+        <p:spPr>
+          <a:xfrm>
+            <a:off x="685800" y="4400550"/>
+            <a:ext cx="5486400" cy="3600450"/>
+          </a:xfrm>
+          <a:prstGeom prst="rect">
+            <a:avLst/>
+          </a:prstGeom>
+        </p:spPr>
+        <p:txBody>
+          <a:bodyPr vert="horz" lIns="91440" tIns="45720" rIns="91440" bIns="45720" rtlCol="0"/>
+          <a:lstStyle/>
+          <a:p>
+            <a:pPr lvl="0"/>
+            <a:r>
+              <a:rPr lang="en-US"/>
+              <a:t>Click to edit Master text styles</a:t>
+            </a:r>
+          </a:p>
+          <a:p>
+            <a:pPr lvl="1"/>
+            <a:r>
+              <a:rPr lang="en-US"/>
+              <a:t>Second level</a:t>
+            </a:r>
+          </a:p>
+          <a:p>
+            <a:pPr lvl="2"/>
+            <a:r>
+              <a:rPr lang="en-US"/>
+              <a:t>Third level</a:t>
+            </a:r>
+          </a:p>
+          <a:p>
+            <a:pPr lvl="3"/>
+            <a:r>
+              <a:rPr lang="en-US"/>
+              <a:t>Fourth level</a:t>
+            </a:r>
+          </a:p>
+          <a:p>
+            <a:pPr lvl="4"/>
+            <a:r>
+              <a:rPr lang="en-US"/>
+              <a:t>Fifth level</a:t>
+            </a:r>
+          </a:p>
+        </p:txBody>
+      </p:sp>
+      <p:sp>
+        <p:nvSpPr>
+          <p:cNvPr id="6" name="Footer Placeholder 5"/>
+          <p:cNvSpPr>
+            <a:spLocks noGrp="1"/>
+          </p:cNvSpPr>
+          <p:nvPr>
+            <p:ph type="ftr" sz="quarter" idx="4"/>
+          </p:nvPr>
+        </p:nvSpPr>
+        <p:spPr>
+          <a:xfrm>
+            <a:off x="0" y="8685213"/>
+            <a:ext cx="2971800" cy="458787"/>
+          </a:xfrm>
+          <a:prstGeom prst="rect">
+            <a:avLst/>
+          </a:prstGeom>
+        </p:spPr>
+        <p:txBody>
+          <a:bodyPr vert="horz" lIns="91440" tIns="45720" rIns="91440" bIns="45720" rtlCol="0" anchor="b"/>
+          <a:lstStyle>
+            <a:lvl1pPr algn="l">
+              <a:defRPr sz="1200"/>
+            </a:lvl1pPr>
+          </a:lstStyle>
+          <a:p>
+            <a:endParaRPr lang="en-US"/>
+          </a:p>
+        </p:txBody>
+      </p:sp>
+      <p:sp>
+        <p:nvSpPr>
+          <p:cNvPr id="7" name="Slide Number Placeholder 6"/>
+          <p:cNvSpPr>
+            <a:spLocks noGrp="1"/>
+          </p:cNvSpPr>
+          <p:nvPr>
+            <p:ph type="sldNum" sz="quarter" idx="5"/>
+          </p:nvPr>
+        </p:nvSpPr>
+        <p:spPr>
+          <a:xfrm>
+            <a:off x="3884613" y="8685213"/>
+            <a:ext cx="2971800" cy="458787"/>
+          </a:xfrm>
+          <a:prstGeom prst="rect">
+            <a:avLst/>
+          </a:prstGeom>
+        </p:spPr>
+        <p:txBody>
+          <a:bodyPr vert="horz" lIns="91440" tIns="45720" rIns="91440" bIns="45720" rtlCol="0" anchor="b"/>
+          <a:lstStyle>
+            <a:lvl1pPr algn="r">
+              <a:defRPr sz="1200"/>
+            </a:lvl1pPr>
+          </a:lstStyle>
+          <a:p>
+            <a:fld id="{21B62E4E-FD9A-47D0-96B9-D05EB556C573}" type="slidenum">
+              <a:rPr lang="en-US" smtClean="0"/>
+              <a:t>‹#›</a:t>
+            </a:fld>
+            <a:endParaRPr lang="en-US"/>
+          </a:p>
+        </p:txBody>
+      </p:sp>
+    </p:spTree>
+    <p:extLst>
+      <p:ext uri="{BB962C8B-B14F-4D97-AF65-F5344CB8AC3E}">
+        <p14:creationId xmlns:p14="http://schemas.microsoft.com/office/powerpoint/2010/main" val="3893206567"/>
+      </p:ext>
+    </p:extLst>
+  </p:cSld>
+  <p:clrMap bg1="lt1" tx1="dk1" bg2="lt2" tx2="dk2" accent1="accent1" accent2="accent2" accent3="accent3" accent4="accent4" accent5="accent5" accent6="accent6" hlink="hlink" folHlink="folHlink"/>
+  <p:notesStyle>
+    <a:lvl1pPr marL="0" algn="l" defTabSz="1360291" rtl="0" eaLnBrk="1" latinLnBrk="0" hangingPunct="1">
+      <a:defRPr sz="1785" kern="1200">
+        <a:solidFill>
+          <a:schemeClr val="tx1"/>
+        </a:solidFill>
+        <a:latin typeface="+mn-lt"/>
+        <a:ea typeface="+mn-ea"/>
+        <a:cs typeface="+mn-cs"/>
+      </a:defRPr>
+    </a:lvl1pPr>
+    <a:lvl2pPr marL="680144" algn="l" defTabSz="1360291" rtl="0" eaLnBrk="1" latinLnBrk="0" hangingPunct="1">
+      <a:defRPr sz="1785" kern="1200">
+        <a:solidFill>
+          <a:schemeClr val="tx1"/>
+        </a:solidFill>
+        <a:latin typeface="+mn-lt"/>
+        <a:ea typeface="+mn-ea"/>
+        <a:cs typeface="+mn-cs"/>
+      </a:defRPr>
+    </a:lvl2pPr>
+    <a:lvl3pPr marL="1360291" algn="l" defTabSz="1360291" rtl="0" eaLnBrk="1" latinLnBrk="0" hangingPunct="1">
+      <a:defRPr sz="1785" kern="1200">
+        <a:solidFill>
+          <a:schemeClr val="tx1"/>
+        </a:solidFill>
+        <a:latin typeface="+mn-lt"/>
+        <a:ea typeface="+mn-ea"/>
+        <a:cs typeface="+mn-cs"/>
+      </a:defRPr>
+    </a:lvl3pPr>
+    <a:lvl4pPr marL="2040435" algn="l" defTabSz="1360291" rtl="0" eaLnBrk="1" latinLnBrk="0" hangingPunct="1">
+      <a:defRPr sz="1785" kern="1200">
+        <a:solidFill>
+          <a:schemeClr val="tx1"/>
+        </a:solidFill>
+        <a:latin typeface="+mn-lt"/>
+        <a:ea typeface="+mn-ea"/>
+        <a:cs typeface="+mn-cs"/>
+      </a:defRPr>
+    </a:lvl4pPr>
+    <a:lvl5pPr marL="2720580" algn="l" defTabSz="1360291" rtl="0" eaLnBrk="1" latinLnBrk="0" hangingPunct="1">
+      <a:defRPr sz="1785" kern="1200">
+        <a:solidFill>
+          <a:schemeClr val="tx1"/>
+        </a:solidFill>
+        <a:latin typeface="+mn-lt"/>
+        <a:ea typeface="+mn-ea"/>
+        <a:cs typeface="+mn-cs"/>
+      </a:defRPr>
+    </a:lvl5pPr>
+    <a:lvl6pPr marL="3400725" algn="l" defTabSz="1360291" rtl="0" eaLnBrk="1" latinLnBrk="0" hangingPunct="1">
+      <a:defRPr sz="1785" kern="1200">
+        <a:solidFill>
+          <a:schemeClr val="tx1"/>
+        </a:solidFill>
+        <a:latin typeface="+mn-lt"/>
+        <a:ea typeface="+mn-ea"/>
+        <a:cs typeface="+mn-cs"/>
+      </a:defRPr>
+    </a:lvl6pPr>
+    <a:lvl7pPr marL="4080871" algn="l" defTabSz="1360291" rtl="0" eaLnBrk="1" latinLnBrk="0" hangingPunct="1">
+      <a:defRPr sz="1785" kern="1200">
+        <a:solidFill>
+          <a:schemeClr val="tx1"/>
+        </a:solidFill>
+        <a:latin typeface="+mn-lt"/>
+        <a:ea typeface="+mn-ea"/>
+        <a:cs typeface="+mn-cs"/>
+      </a:defRPr>
+    </a:lvl7pPr>
+    <a:lvl8pPr marL="4761015" algn="l" defTabSz="1360291" rtl="0" eaLnBrk="1" latinLnBrk="0" hangingPunct="1">
+      <a:defRPr sz="1785" kern="1200">
+        <a:solidFill>
+          <a:schemeClr val="tx1"/>
+        </a:solidFill>
+        <a:latin typeface="+mn-lt"/>
+        <a:ea typeface="+mn-ea"/>
+        <a:cs typeface="+mn-cs"/>
+      </a:defRPr>
+    </a:lvl8pPr>
+    <a:lvl9pPr marL="5441161" algn="l" defTabSz="1360291" rtl="0" eaLnBrk="1" latinLnBrk="0" hangingPunct="1">
+      <a:defRPr sz="1785" kern="1200">
+        <a:solidFill>
+          <a:schemeClr val="tx1"/>
+        </a:solidFill>
+        <a:latin typeface="+mn-lt"/>
+        <a:ea typeface="+mn-ea"/>
+        <a:cs typeface="+mn-cs"/>
+      </a:defRPr>
+    </a:lvl9pPr>
+  </p:notesStyle>
+</p:notesMaster>
 </file>
 
 <file path=ppt/slideLayouts/slideLayout1.xml><?xml version="1.0" encoding="utf-8"?>
@@ -3373,7 +3749,7 @@
         </p:nvSpPr>
         <p:spPr>
           <a:xfrm>
-            <a:off x="6465955" y="391832"/>
+            <a:off x="6454312" y="391832"/>
             <a:ext cx="11792846" cy="2864892"/>
           </a:xfrm>
           <a:prstGeom prst="roundRect">
@@ -3413,44 +3789,147 @@
           </a:p>
         </p:txBody>
       </p:sp>
-      <p:sp>
-        <p:nvSpPr>
-          <p:cNvPr id="43" name="TextBox 42">
-            <a:extLst>
-              <a:ext uri="{FF2B5EF4-FFF2-40B4-BE49-F238E27FC236}">
-                <a16:creationId xmlns:a16="http://schemas.microsoft.com/office/drawing/2014/main" id="{912DA76F-B000-7CFF-FEA2-7E30552A362A}"/>
-              </a:ext>
-            </a:extLst>
-          </p:cNvPr>
-          <p:cNvSpPr txBox="1"/>
-          <p:nvPr/>
-        </p:nvSpPr>
-        <p:spPr>
-          <a:xfrm>
-            <a:off x="6465955" y="413419"/>
-            <a:ext cx="1446230" cy="521681"/>
-          </a:xfrm>
-          <a:prstGeom prst="rect">
-            <a:avLst/>
-          </a:prstGeom>
-          <a:noFill/>
-        </p:spPr>
-        <p:txBody>
-          <a:bodyPr wrap="none" rtlCol="0">
-            <a:spAutoFit/>
-          </a:bodyPr>
-          <a:lstStyle/>
-          <a:p>
-            <a:r>
-              <a:rPr lang="en-US" sz="2790" b="1" dirty="0">
-                <a:latin typeface="Times New Roman" panose="02020603050405020304" pitchFamily="18" charset="0"/>
-                <a:cs typeface="Times New Roman" panose="02020603050405020304" pitchFamily="18" charset="0"/>
-              </a:rPr>
-              <a:t>(b) Data</a:t>
-            </a:r>
-          </a:p>
-        </p:txBody>
-      </p:sp>
+      <mc:AlternateContent xmlns:mc="http://schemas.openxmlformats.org/markup-compatibility/2006" xmlns:a14="http://schemas.microsoft.com/office/drawing/2010/main">
+        <mc:Choice Requires="a14">
+          <p:sp>
+            <p:nvSpPr>
+              <p:cNvPr id="43" name="TextBox 42">
+                <a:extLst>
+                  <a:ext uri="{FF2B5EF4-FFF2-40B4-BE49-F238E27FC236}">
+                    <a16:creationId xmlns:a16="http://schemas.microsoft.com/office/drawing/2014/main" id="{912DA76F-B000-7CFF-FEA2-7E30552A362A}"/>
+                  </a:ext>
+                </a:extLst>
+              </p:cNvPr>
+              <p:cNvSpPr txBox="1"/>
+              <p:nvPr/>
+            </p:nvSpPr>
+            <p:spPr>
+              <a:xfrm>
+                <a:off x="6465954" y="413419"/>
+                <a:ext cx="3583871" cy="521681"/>
+              </a:xfrm>
+              <a:prstGeom prst="rect">
+                <a:avLst/>
+              </a:prstGeom>
+              <a:noFill/>
+            </p:spPr>
+            <p:txBody>
+              <a:bodyPr wrap="square" rtlCol="0">
+                <a:spAutoFit/>
+              </a:bodyPr>
+              <a:lstStyle/>
+              <a:p>
+                <a:r>
+                  <a:rPr lang="en-US" sz="2790" b="1" dirty="0">
+                    <a:latin typeface="Times New Roman" panose="02020603050405020304" pitchFamily="18" charset="0"/>
+                    <a:cs typeface="Times New Roman" panose="02020603050405020304" pitchFamily="18" charset="0"/>
+                  </a:rPr>
+                  <a:t>(b) Data</a:t>
+                </a:r>
+                <a14:m>
+                  <m:oMath xmlns:m="http://schemas.openxmlformats.org/officeDocument/2006/math">
+                    <m:r>
+                      <a:rPr lang="en-US" sz="2790" b="1" i="1" baseline="-25000" dirty="0" smtClean="0">
+                        <a:latin typeface="Cambria Math" panose="02040503050406030204" pitchFamily="18" charset="0"/>
+                        <a:cs typeface="Times New Roman" panose="02020603050405020304" pitchFamily="18" charset="0"/>
+                      </a:rPr>
+                      <m:t>𝒊</m:t>
+                    </m:r>
+                  </m:oMath>
+                </a14:m>
+                <a:r>
+                  <a:rPr lang="en-US" sz="2790" b="1" dirty="0">
+                    <a:latin typeface="Times New Roman" panose="02020603050405020304" pitchFamily="18" charset="0"/>
+                    <a:cs typeface="Times New Roman" panose="02020603050405020304" pitchFamily="18" charset="0"/>
+                  </a:rPr>
+                  <a:t> (point </a:t>
+                </a:r>
+                <a14:m>
+                  <m:oMath xmlns:m="http://schemas.openxmlformats.org/officeDocument/2006/math">
+                    <m:r>
+                      <a:rPr lang="en-US" sz="2790" b="1" i="1" dirty="0" smtClean="0">
+                        <a:latin typeface="Cambria Math" panose="02040503050406030204" pitchFamily="18" charset="0"/>
+                        <a:cs typeface="Times New Roman" panose="02020603050405020304" pitchFamily="18" charset="0"/>
+                      </a:rPr>
+                      <m:t>𝒊</m:t>
+                    </m:r>
+                  </m:oMath>
+                </a14:m>
+                <a:r>
+                  <a:rPr lang="en-US" sz="2790" b="1" dirty="0">
+                    <a:latin typeface="Times New Roman" panose="02020603050405020304" pitchFamily="18" charset="0"/>
+                    <a:cs typeface="Times New Roman" panose="02020603050405020304" pitchFamily="18" charset="0"/>
+                  </a:rPr>
+                  <a:t>   ) </a:t>
+                </a:r>
+                <a:r>
+                  <a:rPr lang="en-US" sz="2790" b="1" dirty="0">
+                    <a:latin typeface="Univers" panose="020F0502020204030204" pitchFamily="34" charset="0"/>
+                    <a:cs typeface="Times New Roman" panose="02020603050405020304" pitchFamily="18" charset="0"/>
+                  </a:rPr>
+                  <a:t> </a:t>
+                </a:r>
+                <a:r>
+                  <a:rPr lang="en-US" sz="2790" b="1" dirty="0">
+                    <a:latin typeface="HGGothicE" panose="020B0400000000000000" pitchFamily="49" charset="-128"/>
+                    <a:ea typeface="HGGothicE" panose="020B0400000000000000" pitchFamily="49" charset="-128"/>
+                    <a:cs typeface="Times New Roman" panose="02020603050405020304" pitchFamily="18" charset="0"/>
+                  </a:rPr>
+                  <a:t> </a:t>
+                </a:r>
+                <a:endParaRPr lang="en-US" sz="2790" b="1" dirty="0">
+                  <a:latin typeface="Times New Roman" panose="02020603050405020304" pitchFamily="18" charset="0"/>
+                  <a:cs typeface="Times New Roman" panose="02020603050405020304" pitchFamily="18" charset="0"/>
+                </a:endParaRPr>
+              </a:p>
+            </p:txBody>
+          </p:sp>
+        </mc:Choice>
+        <mc:Fallback xmlns="">
+          <p:sp>
+            <p:nvSpPr>
+              <p:cNvPr id="43" name="TextBox 42">
+                <a:extLst>
+                  <a:ext uri="{FF2B5EF4-FFF2-40B4-BE49-F238E27FC236}">
+                    <a16:creationId xmlns:a16="http://schemas.microsoft.com/office/drawing/2014/main" id="{912DA76F-B000-7CFF-FEA2-7E30552A362A}"/>
+                  </a:ext>
+                </a:extLst>
+              </p:cNvPr>
+              <p:cNvSpPr txBox="1">
+                <a:spLocks noRot="1" noChangeAspect="1" noMove="1" noResize="1" noEditPoints="1" noAdjustHandles="1" noChangeArrowheads="1" noChangeShapeType="1" noTextEdit="1"/>
+              </p:cNvSpPr>
+              <p:nvPr/>
+            </p:nvSpPr>
+            <p:spPr>
+              <a:xfrm>
+                <a:off x="6465954" y="413419"/>
+                <a:ext cx="3583871" cy="521681"/>
+              </a:xfrm>
+              <a:prstGeom prst="rect">
+                <a:avLst/>
+              </a:prstGeom>
+              <a:blipFill>
+                <a:blip r:embed="rId7"/>
+                <a:stretch>
+                  <a:fillRect l="-3571" t="-12941" b="-32941"/>
+                </a:stretch>
+              </a:blipFill>
+            </p:spPr>
+            <p:txBody>
+              <a:bodyPr/>
+              <a:lstStyle/>
+              <a:p>
+                <a:r>
+                  <a:rPr lang="en-US">
+                    <a:noFill/>
+                  </a:rPr>
+                  <a:t> </a:t>
+                </a:r>
+              </a:p>
+            </p:txBody>
+          </p:sp>
+        </mc:Fallback>
+      </mc:AlternateContent>
       <p:sp>
         <p:nvSpPr>
           <p:cNvPr id="44" name="Arrow: Right 43">
@@ -3522,7 +4001,7 @@
         </p:nvSpPr>
         <p:spPr>
           <a:xfrm>
-            <a:off x="6717164" y="1027959"/>
+            <a:off x="6554022" y="1006443"/>
             <a:ext cx="839076" cy="338554"/>
           </a:xfrm>
           <a:prstGeom prst="rect">
@@ -3560,7 +4039,7 @@
         </p:nvSpPr>
         <p:spPr>
           <a:xfrm>
-            <a:off x="6785681" y="1973064"/>
+            <a:off x="6667015" y="1801792"/>
             <a:ext cx="604653" cy="338554"/>
           </a:xfrm>
           <a:prstGeom prst="rect">
@@ -3598,7 +4077,7 @@
         </p:nvSpPr>
         <p:spPr>
           <a:xfrm>
-            <a:off x="6667388" y="2707956"/>
+            <a:off x="6558145" y="2647990"/>
             <a:ext cx="1043363" cy="338554"/>
           </a:xfrm>
           <a:prstGeom prst="rect">
@@ -3636,8 +4115,8 @@
         </p:nvSpPr>
         <p:spPr>
           <a:xfrm rot="5400000">
-            <a:off x="9017435" y="1616752"/>
-            <a:ext cx="175773" cy="2609540"/>
+            <a:off x="9100112" y="1534076"/>
+            <a:ext cx="175773" cy="2774894"/>
           </a:xfrm>
           <a:prstGeom prst="rightBracket">
             <a:avLst>
@@ -3804,8 +4283,8 @@
         </p:nvSpPr>
         <p:spPr>
           <a:xfrm>
-            <a:off x="17473582" y="2939757"/>
-            <a:ext cx="583814" cy="338554"/>
+            <a:off x="17422286" y="2939757"/>
+            <a:ext cx="686406" cy="338554"/>
           </a:xfrm>
           <a:prstGeom prst="rect">
             <a:avLst/>
@@ -3823,11 +4302,4019 @@
                 <a:latin typeface="Times New Roman" panose="02020603050405020304" pitchFamily="18" charset="0"/>
                 <a:cs typeface="Times New Roman" panose="02020603050405020304" pitchFamily="18" charset="0"/>
               </a:rPr>
-              <a:t>52e4</a:t>
+              <a:t>183e4</a:t>
             </a:r>
           </a:p>
         </p:txBody>
       </p:sp>
+      <p:sp>
+        <p:nvSpPr>
+          <p:cNvPr id="61" name="TextBox 60">
+            <a:extLst>
+              <a:ext uri="{FF2B5EF4-FFF2-40B4-BE49-F238E27FC236}">
+                <a16:creationId xmlns:a16="http://schemas.microsoft.com/office/drawing/2014/main" id="{DCD4FAE9-C2E4-C527-0C42-2223295E88C1}"/>
+              </a:ext>
+            </a:extLst>
+          </p:cNvPr>
+          <p:cNvSpPr txBox="1"/>
+          <p:nvPr/>
+        </p:nvSpPr>
+        <p:spPr>
+          <a:xfrm>
+            <a:off x="8592616" y="2664358"/>
+            <a:ext cx="1025409" cy="338554"/>
+          </a:xfrm>
+          <a:prstGeom prst="rect">
+            <a:avLst/>
+          </a:prstGeom>
+          <a:noFill/>
+        </p:spPr>
+        <p:txBody>
+          <a:bodyPr wrap="none" rtlCol="0">
+            <a:spAutoFit/>
+          </a:bodyPr>
+          <a:lstStyle/>
+          <a:p>
+            <a:r>
+              <a:rPr lang="en-US" sz="1600" b="1" dirty="0">
+                <a:latin typeface="Times New Roman" panose="02020603050405020304" pitchFamily="18" charset="0"/>
+                <a:cs typeface="Times New Roman" panose="02020603050405020304" pitchFamily="18" charset="0"/>
+              </a:rPr>
+              <a:t>Transient</a:t>
+            </a:r>
+          </a:p>
+        </p:txBody>
+      </p:sp>
+      <mc:AlternateContent xmlns:mc="http://schemas.openxmlformats.org/markup-compatibility/2006" xmlns:a14="http://schemas.microsoft.com/office/drawing/2010/main">
+        <mc:Choice Requires="a14">
+          <p:sp>
+            <p:nvSpPr>
+              <p:cNvPr id="62" name="TextBox 61">
+                <a:extLst>
+                  <a:ext uri="{FF2B5EF4-FFF2-40B4-BE49-F238E27FC236}">
+                    <a16:creationId xmlns:a16="http://schemas.microsoft.com/office/drawing/2014/main" id="{9F88FB59-E6CE-843E-4D1A-D775A2E23FC0}"/>
+                  </a:ext>
+                </a:extLst>
+              </p:cNvPr>
+              <p:cNvSpPr txBox="1"/>
+              <p:nvPr/>
+            </p:nvSpPr>
+            <p:spPr>
+              <a:xfrm>
+                <a:off x="11074590" y="2654912"/>
+                <a:ext cx="470513" cy="356380"/>
+              </a:xfrm>
+              <a:prstGeom prst="rect">
+                <a:avLst/>
+              </a:prstGeom>
+              <a:noFill/>
+            </p:spPr>
+            <p:txBody>
+              <a:bodyPr wrap="none" rtlCol="0">
+                <a:spAutoFit/>
+              </a:bodyPr>
+              <a:lstStyle/>
+              <a:p>
+                <a:pPr/>
+                <a14:m>
+                  <m:oMathPara xmlns:m="http://schemas.openxmlformats.org/officeDocument/2006/math">
+                    <m:oMathParaPr>
+                      <m:jc m:val="centerGroup"/>
+                    </m:oMathParaPr>
+                    <m:oMath xmlns:m="http://schemas.openxmlformats.org/officeDocument/2006/math">
+                      <m:sSubSup>
+                        <m:sSubSupPr>
+                          <m:ctrlPr>
+                            <a:rPr lang="en-US" sz="1600" b="1" i="1" dirty="0" smtClean="0">
+                              <a:latin typeface="Cambria Math" panose="02040503050406030204" pitchFamily="18" charset="0"/>
+                              <a:cs typeface="Times New Roman" panose="02020603050405020304" pitchFamily="18" charset="0"/>
+                            </a:rPr>
+                          </m:ctrlPr>
+                        </m:sSubSupPr>
+                        <m:e>
+                          <m:r>
+                            <a:rPr lang="en-US" sz="1600" b="1" i="1" dirty="0" smtClean="0">
+                              <a:latin typeface="Cambria Math" panose="02040503050406030204" pitchFamily="18" charset="0"/>
+                              <a:cs typeface="Times New Roman" panose="02020603050405020304" pitchFamily="18" charset="0"/>
+                            </a:rPr>
+                            <m:t>𝑹</m:t>
+                          </m:r>
+                        </m:e>
+                        <m:sub>
+                          <m:r>
+                            <a:rPr lang="en-US" sz="1600" b="1" i="1" dirty="0" smtClean="0">
+                              <a:latin typeface="Cambria Math" panose="02040503050406030204" pitchFamily="18" charset="0"/>
+                              <a:cs typeface="Times New Roman" panose="02020603050405020304" pitchFamily="18" charset="0"/>
+                            </a:rPr>
+                            <m:t>𝒊</m:t>
+                          </m:r>
+                        </m:sub>
+                        <m:sup>
+                          <m:r>
+                            <a:rPr lang="en-US" sz="1600" b="1" i="1" dirty="0" smtClean="0">
+                              <a:latin typeface="Cambria Math" panose="02040503050406030204" pitchFamily="18" charset="0"/>
+                              <a:cs typeface="Times New Roman" panose="02020603050405020304" pitchFamily="18" charset="0"/>
+                            </a:rPr>
+                            <m:t>𝟏</m:t>
+                          </m:r>
+                        </m:sup>
+                      </m:sSubSup>
+                    </m:oMath>
+                  </m:oMathPara>
+                </a14:m>
+                <a:endParaRPr lang="en-US" sz="1600" b="1" i="1" dirty="0">
+                  <a:latin typeface="Cambria Math" panose="02040503050406030204" pitchFamily="18" charset="0"/>
+                  <a:cs typeface="Times New Roman" panose="02020603050405020304" pitchFamily="18" charset="0"/>
+                </a:endParaRPr>
+              </a:p>
+            </p:txBody>
+          </p:sp>
+        </mc:Choice>
+        <mc:Fallback xmlns="">
+          <p:sp>
+            <p:nvSpPr>
+              <p:cNvPr id="62" name="TextBox 61">
+                <a:extLst>
+                  <a:ext uri="{FF2B5EF4-FFF2-40B4-BE49-F238E27FC236}">
+                    <a16:creationId xmlns:a16="http://schemas.microsoft.com/office/drawing/2014/main" id="{9F88FB59-E6CE-843E-4D1A-D775A2E23FC0}"/>
+                  </a:ext>
+                </a:extLst>
+              </p:cNvPr>
+              <p:cNvSpPr txBox="1">
+                <a:spLocks noRot="1" noChangeAspect="1" noMove="1" noResize="1" noEditPoints="1" noAdjustHandles="1" noChangeArrowheads="1" noChangeShapeType="1" noTextEdit="1"/>
+              </p:cNvSpPr>
+              <p:nvPr/>
+            </p:nvSpPr>
+            <p:spPr>
+              <a:xfrm>
+                <a:off x="11074590" y="2654912"/>
+                <a:ext cx="470513" cy="356380"/>
+              </a:xfrm>
+              <a:prstGeom prst="rect">
+                <a:avLst/>
+              </a:prstGeom>
+              <a:blipFill>
+                <a:blip r:embed="rId8"/>
+                <a:stretch>
+                  <a:fillRect b="-3448"/>
+                </a:stretch>
+              </a:blipFill>
+            </p:spPr>
+            <p:txBody>
+              <a:bodyPr/>
+              <a:lstStyle/>
+              <a:p>
+                <a:r>
+                  <a:rPr lang="en-US">
+                    <a:noFill/>
+                  </a:rPr>
+                  <a:t> </a:t>
+                </a:r>
+              </a:p>
+            </p:txBody>
+          </p:sp>
+        </mc:Fallback>
+      </mc:AlternateContent>
+      <p:cxnSp>
+        <p:nvCxnSpPr>
+          <p:cNvPr id="1024" name="Straight Connector 1023">
+            <a:extLst>
+              <a:ext uri="{FF2B5EF4-FFF2-40B4-BE49-F238E27FC236}">
+                <a16:creationId xmlns:a16="http://schemas.microsoft.com/office/drawing/2014/main" id="{4946AA7C-CB48-5A18-7ADE-39BE3F83FF51}"/>
+              </a:ext>
+            </a:extLst>
+          </p:cNvPr>
+          <p:cNvCxnSpPr>
+            <a:cxnSpLocks/>
+          </p:cNvCxnSpPr>
+          <p:nvPr/>
+        </p:nvCxnSpPr>
+        <p:spPr>
+          <a:xfrm>
+            <a:off x="12062984" y="489624"/>
+            <a:ext cx="0" cy="2470286"/>
+          </a:xfrm>
+          <a:prstGeom prst="line">
+            <a:avLst/>
+          </a:prstGeom>
+          <a:ln>
+            <a:prstDash val="dash"/>
+          </a:ln>
+        </p:spPr>
+        <p:style>
+          <a:lnRef idx="2">
+            <a:schemeClr val="accent1"/>
+          </a:lnRef>
+          <a:fillRef idx="0">
+            <a:schemeClr val="accent1"/>
+          </a:fillRef>
+          <a:effectRef idx="1">
+            <a:schemeClr val="accent1"/>
+          </a:effectRef>
+          <a:fontRef idx="minor">
+            <a:schemeClr val="tx1"/>
+          </a:fontRef>
+        </p:style>
+      </p:cxnSp>
+      <p:cxnSp>
+        <p:nvCxnSpPr>
+          <p:cNvPr id="1027" name="Straight Connector 1026">
+            <a:extLst>
+              <a:ext uri="{FF2B5EF4-FFF2-40B4-BE49-F238E27FC236}">
+                <a16:creationId xmlns:a16="http://schemas.microsoft.com/office/drawing/2014/main" id="{7F7F6CDD-156F-A296-75B1-3B7D59B12BFA}"/>
+              </a:ext>
+            </a:extLst>
+          </p:cNvPr>
+          <p:cNvCxnSpPr>
+            <a:cxnSpLocks/>
+          </p:cNvCxnSpPr>
+          <p:nvPr/>
+        </p:nvCxnSpPr>
+        <p:spPr>
+          <a:xfrm>
+            <a:off x="14902941" y="500993"/>
+            <a:ext cx="0" cy="2470286"/>
+          </a:xfrm>
+          <a:prstGeom prst="line">
+            <a:avLst/>
+          </a:prstGeom>
+          <a:ln>
+            <a:prstDash val="dash"/>
+          </a:ln>
+        </p:spPr>
+        <p:style>
+          <a:lnRef idx="2">
+            <a:schemeClr val="accent1"/>
+          </a:lnRef>
+          <a:fillRef idx="0">
+            <a:schemeClr val="accent1"/>
+          </a:fillRef>
+          <a:effectRef idx="1">
+            <a:schemeClr val="accent1"/>
+          </a:effectRef>
+          <a:fontRef idx="minor">
+            <a:schemeClr val="tx1"/>
+          </a:fontRef>
+        </p:style>
+      </p:cxnSp>
+      <p:cxnSp>
+        <p:nvCxnSpPr>
+          <p:cNvPr id="1028" name="Straight Connector 1027">
+            <a:extLst>
+              <a:ext uri="{FF2B5EF4-FFF2-40B4-BE49-F238E27FC236}">
+                <a16:creationId xmlns:a16="http://schemas.microsoft.com/office/drawing/2014/main" id="{BA9370D3-32C4-642F-AF64-D81E35437F6B}"/>
+              </a:ext>
+            </a:extLst>
+          </p:cNvPr>
+          <p:cNvCxnSpPr>
+            <a:cxnSpLocks/>
+          </p:cNvCxnSpPr>
+          <p:nvPr/>
+        </p:nvCxnSpPr>
+        <p:spPr>
+          <a:xfrm>
+            <a:off x="13483898" y="499672"/>
+            <a:ext cx="0" cy="2470286"/>
+          </a:xfrm>
+          <a:prstGeom prst="line">
+            <a:avLst/>
+          </a:prstGeom>
+          <a:ln>
+            <a:prstDash val="dash"/>
+          </a:ln>
+        </p:spPr>
+        <p:style>
+          <a:lnRef idx="2">
+            <a:schemeClr val="accent1"/>
+          </a:lnRef>
+          <a:fillRef idx="0">
+            <a:schemeClr val="accent1"/>
+          </a:fillRef>
+          <a:effectRef idx="1">
+            <a:schemeClr val="accent1"/>
+          </a:effectRef>
+          <a:fontRef idx="minor">
+            <a:schemeClr val="tx1"/>
+          </a:fontRef>
+        </p:style>
+      </p:cxnSp>
+      <p:cxnSp>
+        <p:nvCxnSpPr>
+          <p:cNvPr id="1029" name="Straight Connector 1028">
+            <a:extLst>
+              <a:ext uri="{FF2B5EF4-FFF2-40B4-BE49-F238E27FC236}">
+                <a16:creationId xmlns:a16="http://schemas.microsoft.com/office/drawing/2014/main" id="{47A4D54A-E5C5-EAD5-4D6E-742726AD8112}"/>
+              </a:ext>
+            </a:extLst>
+          </p:cNvPr>
+          <p:cNvCxnSpPr>
+            <a:cxnSpLocks/>
+          </p:cNvCxnSpPr>
+          <p:nvPr/>
+        </p:nvCxnSpPr>
+        <p:spPr>
+          <a:xfrm>
+            <a:off x="16314783" y="489624"/>
+            <a:ext cx="0" cy="2470286"/>
+          </a:xfrm>
+          <a:prstGeom prst="line">
+            <a:avLst/>
+          </a:prstGeom>
+          <a:ln>
+            <a:prstDash val="dash"/>
+          </a:ln>
+        </p:spPr>
+        <p:style>
+          <a:lnRef idx="2">
+            <a:schemeClr val="accent1"/>
+          </a:lnRef>
+          <a:fillRef idx="0">
+            <a:schemeClr val="accent1"/>
+          </a:fillRef>
+          <a:effectRef idx="1">
+            <a:schemeClr val="accent1"/>
+          </a:effectRef>
+          <a:fontRef idx="minor">
+            <a:schemeClr val="tx1"/>
+          </a:fontRef>
+        </p:style>
+      </p:cxnSp>
+      <mc:AlternateContent xmlns:mc="http://schemas.openxmlformats.org/markup-compatibility/2006" xmlns:a14="http://schemas.microsoft.com/office/drawing/2010/main">
+        <mc:Choice Requires="a14">
+          <p:sp>
+            <p:nvSpPr>
+              <p:cNvPr id="1030" name="TextBox 1029">
+                <a:extLst>
+                  <a:ext uri="{FF2B5EF4-FFF2-40B4-BE49-F238E27FC236}">
+                    <a16:creationId xmlns:a16="http://schemas.microsoft.com/office/drawing/2014/main" id="{FE120585-4A03-887A-ACFD-6D5D2C62268C}"/>
+                  </a:ext>
+                </a:extLst>
+              </p:cNvPr>
+              <p:cNvSpPr txBox="1"/>
+              <p:nvPr/>
+            </p:nvSpPr>
+            <p:spPr>
+              <a:xfrm>
+                <a:off x="12576506" y="2657516"/>
+                <a:ext cx="470513" cy="356380"/>
+              </a:xfrm>
+              <a:prstGeom prst="rect">
+                <a:avLst/>
+              </a:prstGeom>
+              <a:noFill/>
+            </p:spPr>
+            <p:txBody>
+              <a:bodyPr wrap="none" rtlCol="0">
+                <a:spAutoFit/>
+              </a:bodyPr>
+              <a:lstStyle/>
+              <a:p>
+                <a:pPr/>
+                <a14:m>
+                  <m:oMathPara xmlns:m="http://schemas.openxmlformats.org/officeDocument/2006/math">
+                    <m:oMathParaPr>
+                      <m:jc m:val="centerGroup"/>
+                    </m:oMathParaPr>
+                    <m:oMath xmlns:m="http://schemas.openxmlformats.org/officeDocument/2006/math">
+                      <m:sSubSup>
+                        <m:sSubSupPr>
+                          <m:ctrlPr>
+                            <a:rPr lang="en-US" sz="1600" b="1" i="1" dirty="0" smtClean="0">
+                              <a:latin typeface="Cambria Math" panose="02040503050406030204" pitchFamily="18" charset="0"/>
+                              <a:cs typeface="Times New Roman" panose="02020603050405020304" pitchFamily="18" charset="0"/>
+                            </a:rPr>
+                          </m:ctrlPr>
+                        </m:sSubSupPr>
+                        <m:e>
+                          <m:r>
+                            <a:rPr lang="en-US" sz="1600" b="1" i="1" dirty="0">
+                              <a:latin typeface="Cambria Math" panose="02040503050406030204" pitchFamily="18" charset="0"/>
+                              <a:cs typeface="Times New Roman" panose="02020603050405020304" pitchFamily="18" charset="0"/>
+                            </a:rPr>
+                            <m:t>𝑹</m:t>
+                          </m:r>
+                        </m:e>
+                        <m:sub>
+                          <m:r>
+                            <a:rPr lang="en-US" sz="1600" b="1" i="1" dirty="0">
+                              <a:latin typeface="Cambria Math" panose="02040503050406030204" pitchFamily="18" charset="0"/>
+                              <a:cs typeface="Times New Roman" panose="02020603050405020304" pitchFamily="18" charset="0"/>
+                            </a:rPr>
+                            <m:t>𝒊</m:t>
+                          </m:r>
+                        </m:sub>
+                        <m:sup>
+                          <m:r>
+                            <a:rPr lang="en-US" sz="1600" b="1" i="1" dirty="0" smtClean="0">
+                              <a:latin typeface="Cambria Math" panose="02040503050406030204" pitchFamily="18" charset="0"/>
+                              <a:cs typeface="Times New Roman" panose="02020603050405020304" pitchFamily="18" charset="0"/>
+                            </a:rPr>
+                            <m:t>𝟐</m:t>
+                          </m:r>
+                        </m:sup>
+                      </m:sSubSup>
+                    </m:oMath>
+                  </m:oMathPara>
+                </a14:m>
+                <a:endParaRPr lang="en-US" sz="1600" b="1" i="1" dirty="0">
+                  <a:latin typeface="Cambria Math" panose="02040503050406030204" pitchFamily="18" charset="0"/>
+                  <a:cs typeface="Times New Roman" panose="02020603050405020304" pitchFamily="18" charset="0"/>
+                </a:endParaRPr>
+              </a:p>
+            </p:txBody>
+          </p:sp>
+        </mc:Choice>
+        <mc:Fallback xmlns="">
+          <p:sp>
+            <p:nvSpPr>
+              <p:cNvPr id="1030" name="TextBox 1029">
+                <a:extLst>
+                  <a:ext uri="{FF2B5EF4-FFF2-40B4-BE49-F238E27FC236}">
+                    <a16:creationId xmlns:a16="http://schemas.microsoft.com/office/drawing/2014/main" id="{FE120585-4A03-887A-ACFD-6D5D2C62268C}"/>
+                  </a:ext>
+                </a:extLst>
+              </p:cNvPr>
+              <p:cNvSpPr txBox="1">
+                <a:spLocks noRot="1" noChangeAspect="1" noMove="1" noResize="1" noEditPoints="1" noAdjustHandles="1" noChangeArrowheads="1" noChangeShapeType="1" noTextEdit="1"/>
+              </p:cNvSpPr>
+              <p:nvPr/>
+            </p:nvSpPr>
+            <p:spPr>
+              <a:xfrm>
+                <a:off x="12576506" y="2657516"/>
+                <a:ext cx="470513" cy="356380"/>
+              </a:xfrm>
+              <a:prstGeom prst="rect">
+                <a:avLst/>
+              </a:prstGeom>
+              <a:blipFill>
+                <a:blip r:embed="rId9"/>
+                <a:stretch>
+                  <a:fillRect b="-3448"/>
+                </a:stretch>
+              </a:blipFill>
+            </p:spPr>
+            <p:txBody>
+              <a:bodyPr/>
+              <a:lstStyle/>
+              <a:p>
+                <a:r>
+                  <a:rPr lang="en-US">
+                    <a:noFill/>
+                  </a:rPr>
+                  <a:t> </a:t>
+                </a:r>
+              </a:p>
+            </p:txBody>
+          </p:sp>
+        </mc:Fallback>
+      </mc:AlternateContent>
+      <mc:AlternateContent xmlns:mc="http://schemas.openxmlformats.org/markup-compatibility/2006" xmlns:a14="http://schemas.microsoft.com/office/drawing/2010/main">
+        <mc:Choice Requires="a14">
+          <p:sp>
+            <p:nvSpPr>
+              <p:cNvPr id="1031" name="TextBox 1030">
+                <a:extLst>
+                  <a:ext uri="{FF2B5EF4-FFF2-40B4-BE49-F238E27FC236}">
+                    <a16:creationId xmlns:a16="http://schemas.microsoft.com/office/drawing/2014/main" id="{EC765801-CB5A-6CD2-2FE1-B9D571E0766B}"/>
+                  </a:ext>
+                </a:extLst>
+              </p:cNvPr>
+              <p:cNvSpPr txBox="1"/>
+              <p:nvPr/>
+            </p:nvSpPr>
+            <p:spPr>
+              <a:xfrm>
+                <a:off x="14005365" y="2656539"/>
+                <a:ext cx="470513" cy="357534"/>
+              </a:xfrm>
+              <a:prstGeom prst="rect">
+                <a:avLst/>
+              </a:prstGeom>
+              <a:noFill/>
+            </p:spPr>
+            <p:txBody>
+              <a:bodyPr wrap="none" rtlCol="0">
+                <a:spAutoFit/>
+              </a:bodyPr>
+              <a:lstStyle/>
+              <a:p>
+                <a:pPr/>
+                <a14:m>
+                  <m:oMathPara xmlns:m="http://schemas.openxmlformats.org/officeDocument/2006/math">
+                    <m:oMathParaPr>
+                      <m:jc m:val="centerGroup"/>
+                    </m:oMathParaPr>
+                    <m:oMath xmlns:m="http://schemas.openxmlformats.org/officeDocument/2006/math">
+                      <m:sSubSup>
+                        <m:sSubSupPr>
+                          <m:ctrlPr>
+                            <a:rPr lang="en-US" sz="1600" b="1" i="1" dirty="0" smtClean="0">
+                              <a:latin typeface="Cambria Math" panose="02040503050406030204" pitchFamily="18" charset="0"/>
+                              <a:cs typeface="Times New Roman" panose="02020603050405020304" pitchFamily="18" charset="0"/>
+                            </a:rPr>
+                          </m:ctrlPr>
+                        </m:sSubSupPr>
+                        <m:e>
+                          <m:r>
+                            <a:rPr lang="en-US" sz="1600" b="1" i="1" dirty="0">
+                              <a:latin typeface="Cambria Math" panose="02040503050406030204" pitchFamily="18" charset="0"/>
+                              <a:cs typeface="Times New Roman" panose="02020603050405020304" pitchFamily="18" charset="0"/>
+                            </a:rPr>
+                            <m:t>𝑹</m:t>
+                          </m:r>
+                        </m:e>
+                        <m:sub>
+                          <m:r>
+                            <a:rPr lang="en-US" sz="1600" b="1" i="1" dirty="0">
+                              <a:latin typeface="Cambria Math" panose="02040503050406030204" pitchFamily="18" charset="0"/>
+                              <a:cs typeface="Times New Roman" panose="02020603050405020304" pitchFamily="18" charset="0"/>
+                            </a:rPr>
+                            <m:t>𝒊</m:t>
+                          </m:r>
+                        </m:sub>
+                        <m:sup>
+                          <m:r>
+                            <a:rPr lang="en-US" sz="1600" b="1" i="1" dirty="0" smtClean="0">
+                              <a:latin typeface="Cambria Math" panose="02040503050406030204" pitchFamily="18" charset="0"/>
+                              <a:cs typeface="Times New Roman" panose="02020603050405020304" pitchFamily="18" charset="0"/>
+                            </a:rPr>
+                            <m:t>𝟑</m:t>
+                          </m:r>
+                        </m:sup>
+                      </m:sSubSup>
+                    </m:oMath>
+                  </m:oMathPara>
+                </a14:m>
+                <a:endParaRPr lang="en-US" sz="1600" b="1" i="1" dirty="0">
+                  <a:latin typeface="Cambria Math" panose="02040503050406030204" pitchFamily="18" charset="0"/>
+                  <a:cs typeface="Times New Roman" panose="02020603050405020304" pitchFamily="18" charset="0"/>
+                </a:endParaRPr>
+              </a:p>
+            </p:txBody>
+          </p:sp>
+        </mc:Choice>
+        <mc:Fallback xmlns="">
+          <p:sp>
+            <p:nvSpPr>
+              <p:cNvPr id="1031" name="TextBox 1030">
+                <a:extLst>
+                  <a:ext uri="{FF2B5EF4-FFF2-40B4-BE49-F238E27FC236}">
+                    <a16:creationId xmlns:a16="http://schemas.microsoft.com/office/drawing/2014/main" id="{EC765801-CB5A-6CD2-2FE1-B9D571E0766B}"/>
+                  </a:ext>
+                </a:extLst>
+              </p:cNvPr>
+              <p:cNvSpPr txBox="1">
+                <a:spLocks noRot="1" noChangeAspect="1" noMove="1" noResize="1" noEditPoints="1" noAdjustHandles="1" noChangeArrowheads="1" noChangeShapeType="1" noTextEdit="1"/>
+              </p:cNvSpPr>
+              <p:nvPr/>
+            </p:nvSpPr>
+            <p:spPr>
+              <a:xfrm>
+                <a:off x="14005365" y="2656539"/>
+                <a:ext cx="470513" cy="357534"/>
+              </a:xfrm>
+              <a:prstGeom prst="rect">
+                <a:avLst/>
+              </a:prstGeom>
+              <a:blipFill>
+                <a:blip r:embed="rId10"/>
+                <a:stretch>
+                  <a:fillRect b="-3448"/>
+                </a:stretch>
+              </a:blipFill>
+            </p:spPr>
+            <p:txBody>
+              <a:bodyPr/>
+              <a:lstStyle/>
+              <a:p>
+                <a:r>
+                  <a:rPr lang="en-US">
+                    <a:noFill/>
+                  </a:rPr>
+                  <a:t> </a:t>
+                </a:r>
+              </a:p>
+            </p:txBody>
+          </p:sp>
+        </mc:Fallback>
+      </mc:AlternateContent>
+      <mc:AlternateContent xmlns:mc="http://schemas.openxmlformats.org/markup-compatibility/2006" xmlns:a14="http://schemas.microsoft.com/office/drawing/2010/main">
+        <mc:Choice Requires="a14">
+          <p:sp>
+            <p:nvSpPr>
+              <p:cNvPr id="1032" name="TextBox 1031">
+                <a:extLst>
+                  <a:ext uri="{FF2B5EF4-FFF2-40B4-BE49-F238E27FC236}">
+                    <a16:creationId xmlns:a16="http://schemas.microsoft.com/office/drawing/2014/main" id="{126295C8-8CEF-EADA-D9CC-DBF46765A895}"/>
+                  </a:ext>
+                </a:extLst>
+              </p:cNvPr>
+              <p:cNvSpPr txBox="1"/>
+              <p:nvPr/>
+            </p:nvSpPr>
+            <p:spPr>
+              <a:xfrm>
+                <a:off x="15390281" y="2656490"/>
+                <a:ext cx="470513" cy="355738"/>
+              </a:xfrm>
+              <a:prstGeom prst="rect">
+                <a:avLst/>
+              </a:prstGeom>
+              <a:noFill/>
+            </p:spPr>
+            <p:txBody>
+              <a:bodyPr wrap="none" rtlCol="0">
+                <a:spAutoFit/>
+              </a:bodyPr>
+              <a:lstStyle/>
+              <a:p>
+                <a:pPr/>
+                <a14:m>
+                  <m:oMathPara xmlns:m="http://schemas.openxmlformats.org/officeDocument/2006/math">
+                    <m:oMathParaPr>
+                      <m:jc m:val="centerGroup"/>
+                    </m:oMathParaPr>
+                    <m:oMath xmlns:m="http://schemas.openxmlformats.org/officeDocument/2006/math">
+                      <m:sSubSup>
+                        <m:sSubSupPr>
+                          <m:ctrlPr>
+                            <a:rPr lang="en-US" sz="1600" b="1" i="1" dirty="0" smtClean="0">
+                              <a:latin typeface="Cambria Math" panose="02040503050406030204" pitchFamily="18" charset="0"/>
+                              <a:cs typeface="Times New Roman" panose="02020603050405020304" pitchFamily="18" charset="0"/>
+                            </a:rPr>
+                          </m:ctrlPr>
+                        </m:sSubSupPr>
+                        <m:e>
+                          <m:r>
+                            <a:rPr lang="en-US" sz="1600" b="1" i="1" dirty="0">
+                              <a:latin typeface="Cambria Math" panose="02040503050406030204" pitchFamily="18" charset="0"/>
+                              <a:cs typeface="Times New Roman" panose="02020603050405020304" pitchFamily="18" charset="0"/>
+                            </a:rPr>
+                            <m:t>𝑹</m:t>
+                          </m:r>
+                        </m:e>
+                        <m:sub>
+                          <m:r>
+                            <a:rPr lang="en-US" sz="1600" b="1" i="1" dirty="0">
+                              <a:latin typeface="Cambria Math" panose="02040503050406030204" pitchFamily="18" charset="0"/>
+                              <a:cs typeface="Times New Roman" panose="02020603050405020304" pitchFamily="18" charset="0"/>
+                            </a:rPr>
+                            <m:t>𝒊</m:t>
+                          </m:r>
+                        </m:sub>
+                        <m:sup>
+                          <m:r>
+                            <a:rPr lang="en-US" sz="1600" b="1" i="1" dirty="0" smtClean="0">
+                              <a:latin typeface="Cambria Math" panose="02040503050406030204" pitchFamily="18" charset="0"/>
+                              <a:cs typeface="Times New Roman" panose="02020603050405020304" pitchFamily="18" charset="0"/>
+                            </a:rPr>
+                            <m:t>𝟒</m:t>
+                          </m:r>
+                        </m:sup>
+                      </m:sSubSup>
+                    </m:oMath>
+                  </m:oMathPara>
+                </a14:m>
+                <a:endParaRPr lang="en-US" sz="1600" b="1" i="1" dirty="0">
+                  <a:latin typeface="Cambria Math" panose="02040503050406030204" pitchFamily="18" charset="0"/>
+                  <a:cs typeface="Times New Roman" panose="02020603050405020304" pitchFamily="18" charset="0"/>
+                </a:endParaRPr>
+              </a:p>
+            </p:txBody>
+          </p:sp>
+        </mc:Choice>
+        <mc:Fallback xmlns="">
+          <p:sp>
+            <p:nvSpPr>
+              <p:cNvPr id="1032" name="TextBox 1031">
+                <a:extLst>
+                  <a:ext uri="{FF2B5EF4-FFF2-40B4-BE49-F238E27FC236}">
+                    <a16:creationId xmlns:a16="http://schemas.microsoft.com/office/drawing/2014/main" id="{126295C8-8CEF-EADA-D9CC-DBF46765A895}"/>
+                  </a:ext>
+                </a:extLst>
+              </p:cNvPr>
+              <p:cNvSpPr txBox="1">
+                <a:spLocks noRot="1" noChangeAspect="1" noMove="1" noResize="1" noEditPoints="1" noAdjustHandles="1" noChangeArrowheads="1" noChangeShapeType="1" noTextEdit="1"/>
+              </p:cNvSpPr>
+              <p:nvPr/>
+            </p:nvSpPr>
+            <p:spPr>
+              <a:xfrm>
+                <a:off x="15390281" y="2656490"/>
+                <a:ext cx="470513" cy="355738"/>
+              </a:xfrm>
+              <a:prstGeom prst="rect">
+                <a:avLst/>
+              </a:prstGeom>
+              <a:blipFill>
+                <a:blip r:embed="rId11"/>
+                <a:stretch>
+                  <a:fillRect b="-3448"/>
+                </a:stretch>
+              </a:blipFill>
+            </p:spPr>
+            <p:txBody>
+              <a:bodyPr/>
+              <a:lstStyle/>
+              <a:p>
+                <a:r>
+                  <a:rPr lang="en-US">
+                    <a:noFill/>
+                  </a:rPr>
+                  <a:t> </a:t>
+                </a:r>
+              </a:p>
+            </p:txBody>
+          </p:sp>
+        </mc:Fallback>
+      </mc:AlternateContent>
+      <mc:AlternateContent xmlns:mc="http://schemas.openxmlformats.org/markup-compatibility/2006" xmlns:a14="http://schemas.microsoft.com/office/drawing/2010/main">
+        <mc:Choice Requires="a14">
+          <p:sp>
+            <p:nvSpPr>
+              <p:cNvPr id="1035" name="TextBox 1034">
+                <a:extLst>
+                  <a:ext uri="{FF2B5EF4-FFF2-40B4-BE49-F238E27FC236}">
+                    <a16:creationId xmlns:a16="http://schemas.microsoft.com/office/drawing/2014/main" id="{134937C0-D935-37E4-319C-F5924A14EEF5}"/>
+                  </a:ext>
+                </a:extLst>
+              </p:cNvPr>
+              <p:cNvSpPr txBox="1"/>
+              <p:nvPr/>
+            </p:nvSpPr>
+            <p:spPr>
+              <a:xfrm>
+                <a:off x="16826315" y="2654832"/>
+                <a:ext cx="470513" cy="361189"/>
+              </a:xfrm>
+              <a:prstGeom prst="rect">
+                <a:avLst/>
+              </a:prstGeom>
+              <a:noFill/>
+            </p:spPr>
+            <p:txBody>
+              <a:bodyPr wrap="none" rtlCol="0">
+                <a:spAutoFit/>
+              </a:bodyPr>
+              <a:lstStyle/>
+              <a:p>
+                <a:pPr/>
+                <a14:m>
+                  <m:oMathPara xmlns:m="http://schemas.openxmlformats.org/officeDocument/2006/math">
+                    <m:oMathParaPr>
+                      <m:jc m:val="centerGroup"/>
+                    </m:oMathParaPr>
+                    <m:oMath xmlns:m="http://schemas.openxmlformats.org/officeDocument/2006/math">
+                      <m:sSubSup>
+                        <m:sSubSupPr>
+                          <m:ctrlPr>
+                            <a:rPr lang="en-US" sz="1600" b="1" i="1" dirty="0" smtClean="0">
+                              <a:latin typeface="Cambria Math" panose="02040503050406030204" pitchFamily="18" charset="0"/>
+                              <a:cs typeface="Times New Roman" panose="02020603050405020304" pitchFamily="18" charset="0"/>
+                            </a:rPr>
+                          </m:ctrlPr>
+                        </m:sSubSupPr>
+                        <m:e>
+                          <m:r>
+                            <a:rPr lang="en-US" sz="1600" b="1" i="1" dirty="0">
+                              <a:latin typeface="Cambria Math" panose="02040503050406030204" pitchFamily="18" charset="0"/>
+                              <a:cs typeface="Times New Roman" panose="02020603050405020304" pitchFamily="18" charset="0"/>
+                            </a:rPr>
+                            <m:t>𝑹</m:t>
+                          </m:r>
+                        </m:e>
+                        <m:sub>
+                          <m:r>
+                            <a:rPr lang="en-US" sz="1600" b="1" i="1" dirty="0">
+                              <a:latin typeface="Cambria Math" panose="02040503050406030204" pitchFamily="18" charset="0"/>
+                              <a:cs typeface="Times New Roman" panose="02020603050405020304" pitchFamily="18" charset="0"/>
+                            </a:rPr>
+                            <m:t>𝒊</m:t>
+                          </m:r>
+                        </m:sub>
+                        <m:sup>
+                          <m:r>
+                            <a:rPr lang="en-US" sz="1600" b="1" i="1" dirty="0" smtClean="0">
+                              <a:latin typeface="Cambria Math" panose="02040503050406030204" pitchFamily="18" charset="0"/>
+                              <a:cs typeface="Times New Roman" panose="02020603050405020304" pitchFamily="18" charset="0"/>
+                            </a:rPr>
+                            <m:t>𝟓</m:t>
+                          </m:r>
+                        </m:sup>
+                      </m:sSubSup>
+                    </m:oMath>
+                  </m:oMathPara>
+                </a14:m>
+                <a:endParaRPr lang="en-US" sz="1600" b="1" i="1" dirty="0">
+                  <a:latin typeface="Cambria Math" panose="02040503050406030204" pitchFamily="18" charset="0"/>
+                  <a:cs typeface="Times New Roman" panose="02020603050405020304" pitchFamily="18" charset="0"/>
+                </a:endParaRPr>
+              </a:p>
+            </p:txBody>
+          </p:sp>
+        </mc:Choice>
+        <mc:Fallback xmlns="">
+          <p:sp>
+            <p:nvSpPr>
+              <p:cNvPr id="1035" name="TextBox 1034">
+                <a:extLst>
+                  <a:ext uri="{FF2B5EF4-FFF2-40B4-BE49-F238E27FC236}">
+                    <a16:creationId xmlns:a16="http://schemas.microsoft.com/office/drawing/2014/main" id="{134937C0-D935-37E4-319C-F5924A14EEF5}"/>
+                  </a:ext>
+                </a:extLst>
+              </p:cNvPr>
+              <p:cNvSpPr txBox="1">
+                <a:spLocks noRot="1" noChangeAspect="1" noMove="1" noResize="1" noEditPoints="1" noAdjustHandles="1" noChangeArrowheads="1" noChangeShapeType="1" noTextEdit="1"/>
+              </p:cNvSpPr>
+              <p:nvPr/>
+            </p:nvSpPr>
+            <p:spPr>
+              <a:xfrm>
+                <a:off x="16826315" y="2654832"/>
+                <a:ext cx="470513" cy="361189"/>
+              </a:xfrm>
+              <a:prstGeom prst="rect">
+                <a:avLst/>
+              </a:prstGeom>
+              <a:blipFill>
+                <a:blip r:embed="rId12"/>
+                <a:stretch>
+                  <a:fillRect b="-1695"/>
+                </a:stretch>
+              </a:blipFill>
+            </p:spPr>
+            <p:txBody>
+              <a:bodyPr/>
+              <a:lstStyle/>
+              <a:p>
+                <a:r>
+                  <a:rPr lang="en-US">
+                    <a:noFill/>
+                  </a:rPr>
+                  <a:t> </a:t>
+                </a:r>
+              </a:p>
+            </p:txBody>
+          </p:sp>
+        </mc:Fallback>
+      </mc:AlternateContent>
+      <p:sp>
+        <p:nvSpPr>
+          <p:cNvPr id="1058" name="Flowchart: Connector 1057">
+            <a:extLst>
+              <a:ext uri="{FF2B5EF4-FFF2-40B4-BE49-F238E27FC236}">
+                <a16:creationId xmlns:a16="http://schemas.microsoft.com/office/drawing/2014/main" id="{4DDC754D-AEAC-030E-C166-7E928C19AC55}"/>
+              </a:ext>
+            </a:extLst>
+          </p:cNvPr>
+          <p:cNvSpPr/>
+          <p:nvPr/>
+        </p:nvSpPr>
+        <p:spPr>
+          <a:xfrm>
+            <a:off x="5196739" y="1389956"/>
+            <a:ext cx="150725" cy="144208"/>
+          </a:xfrm>
+          <a:prstGeom prst="flowChartConnector">
+            <a:avLst/>
+          </a:prstGeom>
+          <a:solidFill>
+            <a:srgbClr val="FF0000"/>
+          </a:solidFill>
+        </p:spPr>
+        <p:style>
+          <a:lnRef idx="2">
+            <a:schemeClr val="accent2">
+              <a:shade val="15000"/>
+            </a:schemeClr>
+          </a:lnRef>
+          <a:fillRef idx="1">
+            <a:schemeClr val="accent2"/>
+          </a:fillRef>
+          <a:effectRef idx="0">
+            <a:schemeClr val="accent2"/>
+          </a:effectRef>
+          <a:fontRef idx="minor">
+            <a:schemeClr val="lt1"/>
+          </a:fontRef>
+        </p:style>
+        <p:txBody>
+          <a:bodyPr rtlCol="0" anchor="ctr"/>
+          <a:lstStyle/>
+          <a:p>
+            <a:pPr algn="ctr"/>
+            <a:endParaRPr lang="en-US"/>
+          </a:p>
+        </p:txBody>
+      </p:sp>
+      <p:sp>
+        <p:nvSpPr>
+          <p:cNvPr id="1059" name="Flowchart: Connector 1058">
+            <a:extLst>
+              <a:ext uri="{FF2B5EF4-FFF2-40B4-BE49-F238E27FC236}">
+                <a16:creationId xmlns:a16="http://schemas.microsoft.com/office/drawing/2014/main" id="{AB2FF581-FDAF-19FB-4997-0B12E9EADCA2}"/>
+              </a:ext>
+            </a:extLst>
+          </p:cNvPr>
+          <p:cNvSpPr/>
+          <p:nvPr/>
+        </p:nvSpPr>
+        <p:spPr>
+          <a:xfrm>
+            <a:off x="9161386" y="639917"/>
+            <a:ext cx="150725" cy="144208"/>
+          </a:xfrm>
+          <a:prstGeom prst="flowChartConnector">
+            <a:avLst/>
+          </a:prstGeom>
+          <a:solidFill>
+            <a:srgbClr val="FF0000"/>
+          </a:solidFill>
+        </p:spPr>
+        <p:style>
+          <a:lnRef idx="2">
+            <a:schemeClr val="accent2">
+              <a:shade val="15000"/>
+            </a:schemeClr>
+          </a:lnRef>
+          <a:fillRef idx="1">
+            <a:schemeClr val="accent2"/>
+          </a:fillRef>
+          <a:effectRef idx="0">
+            <a:schemeClr val="accent2"/>
+          </a:effectRef>
+          <a:fontRef idx="minor">
+            <a:schemeClr val="lt1"/>
+          </a:fontRef>
+        </p:style>
+        <p:txBody>
+          <a:bodyPr rtlCol="0" anchor="ctr"/>
+          <a:lstStyle/>
+          <a:p>
+            <a:pPr algn="ctr"/>
+            <a:endParaRPr lang="en-US"/>
+          </a:p>
+        </p:txBody>
+      </p:sp>
+      <p:pic>
+        <p:nvPicPr>
+          <p:cNvPr id="1062" name="V 1">
+            <a:extLst>
+              <a:ext uri="{FF2B5EF4-FFF2-40B4-BE49-F238E27FC236}">
+                <a16:creationId xmlns:a16="http://schemas.microsoft.com/office/drawing/2014/main" id="{E5D1DF12-9651-FF0B-AD04-2A4C7E0E5F1D}"/>
+              </a:ext>
+            </a:extLst>
+          </p:cNvPr>
+          <p:cNvPicPr>
+            <a:picLocks noChangeAspect="1"/>
+          </p:cNvPicPr>
+          <p:nvPr/>
+        </p:nvPicPr>
+        <p:blipFill>
+          <a:blip r:embed="rId13">
+            <a:extLst>
+              <a:ext uri="{96DAC541-7B7A-43D3-8B79-37D633B846F1}">
+                <asvg:svgBlip xmlns:asvg="http://schemas.microsoft.com/office/drawing/2016/SVG/main" r:embed="rId14"/>
+              </a:ext>
+            </a:extLst>
+          </a:blip>
+          <a:stretch>
+            <a:fillRect/>
+          </a:stretch>
+        </p:blipFill>
+        <p:spPr>
+          <a:xfrm>
+            <a:off x="7780025" y="890245"/>
+            <a:ext cx="3920320" cy="630936"/>
+          </a:xfrm>
+          <a:prstGeom prst="rect">
+            <a:avLst/>
+          </a:prstGeom>
+        </p:spPr>
+      </p:pic>
+      <p:cxnSp>
+        <p:nvCxnSpPr>
+          <p:cNvPr id="1065" name="Straight Connector 1064">
+            <a:extLst>
+              <a:ext uri="{FF2B5EF4-FFF2-40B4-BE49-F238E27FC236}">
+                <a16:creationId xmlns:a16="http://schemas.microsoft.com/office/drawing/2014/main" id="{81190BD8-39F4-F9D3-1678-F2F9C32EA2AB}"/>
+              </a:ext>
+            </a:extLst>
+          </p:cNvPr>
+          <p:cNvCxnSpPr>
+            <a:cxnSpLocks/>
+          </p:cNvCxnSpPr>
+          <p:nvPr/>
+        </p:nvCxnSpPr>
+        <p:spPr>
+          <a:xfrm>
+            <a:off x="10644553" y="457534"/>
+            <a:ext cx="0" cy="2470286"/>
+          </a:xfrm>
+          <a:prstGeom prst="line">
+            <a:avLst/>
+          </a:prstGeom>
+          <a:ln>
+            <a:prstDash val="dash"/>
+          </a:ln>
+        </p:spPr>
+        <p:style>
+          <a:lnRef idx="2">
+            <a:schemeClr val="accent1"/>
+          </a:lnRef>
+          <a:fillRef idx="0">
+            <a:schemeClr val="accent1"/>
+          </a:fillRef>
+          <a:effectRef idx="1">
+            <a:schemeClr val="accent1"/>
+          </a:effectRef>
+          <a:fontRef idx="minor">
+            <a:schemeClr val="tx1"/>
+          </a:fontRef>
+        </p:style>
+      </p:cxnSp>
+      <p:sp>
+        <p:nvSpPr>
+          <p:cNvPr id="1066" name="TextBox 1065">
+            <a:extLst>
+              <a:ext uri="{FF2B5EF4-FFF2-40B4-BE49-F238E27FC236}">
+                <a16:creationId xmlns:a16="http://schemas.microsoft.com/office/drawing/2014/main" id="{A1E3D48B-F4DA-0586-1B37-59C62EF6F158}"/>
+              </a:ext>
+            </a:extLst>
+          </p:cNvPr>
+          <p:cNvSpPr txBox="1"/>
+          <p:nvPr/>
+        </p:nvSpPr>
+        <p:spPr>
+          <a:xfrm>
+            <a:off x="11857501" y="1100743"/>
+            <a:ext cx="421910" cy="200055"/>
+          </a:xfrm>
+          <a:prstGeom prst="rect">
+            <a:avLst/>
+          </a:prstGeom>
+          <a:noFill/>
+        </p:spPr>
+        <p:txBody>
+          <a:bodyPr wrap="square" rtlCol="0">
+            <a:spAutoFit/>
+          </a:bodyPr>
+          <a:lstStyle/>
+          <a:p>
+            <a:r>
+              <a:rPr lang="en-US" sz="700" dirty="0"/>
+              <a:t>● ● ●</a:t>
+            </a:r>
+          </a:p>
+        </p:txBody>
+      </p:sp>
+      <p:sp>
+        <p:nvSpPr>
+          <p:cNvPr id="1068" name="TextBox 1067">
+            <a:extLst>
+              <a:ext uri="{FF2B5EF4-FFF2-40B4-BE49-F238E27FC236}">
+                <a16:creationId xmlns:a16="http://schemas.microsoft.com/office/drawing/2014/main" id="{E9728DF8-6483-954D-6F40-1E151C8A40BA}"/>
+              </a:ext>
+            </a:extLst>
+          </p:cNvPr>
+          <p:cNvSpPr txBox="1"/>
+          <p:nvPr/>
+        </p:nvSpPr>
+        <p:spPr>
+          <a:xfrm>
+            <a:off x="11845440" y="1870343"/>
+            <a:ext cx="421910" cy="200055"/>
+          </a:xfrm>
+          <a:prstGeom prst="rect">
+            <a:avLst/>
+          </a:prstGeom>
+          <a:noFill/>
+        </p:spPr>
+        <p:txBody>
+          <a:bodyPr wrap="square" rtlCol="0">
+            <a:spAutoFit/>
+          </a:bodyPr>
+          <a:lstStyle/>
+          <a:p>
+            <a:r>
+              <a:rPr lang="en-US" sz="700" dirty="0"/>
+              <a:t>● ● ●</a:t>
+            </a:r>
+          </a:p>
+        </p:txBody>
+      </p:sp>
+      <p:sp>
+        <p:nvSpPr>
+          <p:cNvPr id="1073" name="TextBox 1072">
+            <a:extLst>
+              <a:ext uri="{FF2B5EF4-FFF2-40B4-BE49-F238E27FC236}">
+                <a16:creationId xmlns:a16="http://schemas.microsoft.com/office/drawing/2014/main" id="{1B6E5C41-1AFB-4434-0562-98D54B2EF52F}"/>
+              </a:ext>
+            </a:extLst>
+          </p:cNvPr>
+          <p:cNvSpPr txBox="1"/>
+          <p:nvPr/>
+        </p:nvSpPr>
+        <p:spPr>
+          <a:xfrm>
+            <a:off x="7291734" y="1085354"/>
+            <a:ext cx="421910" cy="200055"/>
+          </a:xfrm>
+          <a:prstGeom prst="rect">
+            <a:avLst/>
+          </a:prstGeom>
+          <a:noFill/>
+        </p:spPr>
+        <p:txBody>
+          <a:bodyPr wrap="square" rtlCol="0">
+            <a:spAutoFit/>
+          </a:bodyPr>
+          <a:lstStyle/>
+          <a:p>
+            <a:r>
+              <a:rPr lang="en-US" sz="700" dirty="0"/>
+              <a:t>● ● ●</a:t>
+            </a:r>
+          </a:p>
+        </p:txBody>
+      </p:sp>
+      <p:sp>
+        <p:nvSpPr>
+          <p:cNvPr id="1074" name="TextBox 1073">
+            <a:extLst>
+              <a:ext uri="{FF2B5EF4-FFF2-40B4-BE49-F238E27FC236}">
+                <a16:creationId xmlns:a16="http://schemas.microsoft.com/office/drawing/2014/main" id="{5AC56F13-9511-5EB6-1E91-A87325E67F34}"/>
+              </a:ext>
+            </a:extLst>
+          </p:cNvPr>
+          <p:cNvSpPr txBox="1"/>
+          <p:nvPr/>
+        </p:nvSpPr>
+        <p:spPr>
+          <a:xfrm>
+            <a:off x="7289537" y="1870343"/>
+            <a:ext cx="421910" cy="200055"/>
+          </a:xfrm>
+          <a:prstGeom prst="rect">
+            <a:avLst/>
+          </a:prstGeom>
+          <a:noFill/>
+        </p:spPr>
+        <p:txBody>
+          <a:bodyPr wrap="square" rtlCol="0">
+            <a:spAutoFit/>
+          </a:bodyPr>
+          <a:lstStyle/>
+          <a:p>
+            <a:r>
+              <a:rPr lang="en-US" sz="700" dirty="0"/>
+              <a:t>● ● ●</a:t>
+            </a:r>
+          </a:p>
+        </p:txBody>
+      </p:sp>
+      <p:pic>
+        <p:nvPicPr>
+          <p:cNvPr id="1084" name="V2">
+            <a:extLst>
+              <a:ext uri="{FF2B5EF4-FFF2-40B4-BE49-F238E27FC236}">
+                <a16:creationId xmlns:a16="http://schemas.microsoft.com/office/drawing/2014/main" id="{C18B0D61-2EB4-CD21-5ADD-D50048D64612}"/>
+              </a:ext>
+            </a:extLst>
+          </p:cNvPr>
+          <p:cNvPicPr>
+            <a:picLocks noChangeAspect="1"/>
+          </p:cNvPicPr>
+          <p:nvPr/>
+        </p:nvPicPr>
+        <p:blipFill>
+          <a:blip r:embed="rId15">
+            <a:extLst>
+              <a:ext uri="{96DAC541-7B7A-43D3-8B79-37D633B846F1}">
+                <asvg:svgBlip xmlns:asvg="http://schemas.microsoft.com/office/drawing/2016/SVG/main" r:embed="rId16"/>
+              </a:ext>
+            </a:extLst>
+          </a:blip>
+          <a:srcRect r="72647"/>
+          <a:stretch>
+            <a:fillRect/>
+          </a:stretch>
+        </p:blipFill>
+        <p:spPr>
+          <a:xfrm>
+            <a:off x="11982203" y="876848"/>
+            <a:ext cx="1282698" cy="630936"/>
+          </a:xfrm>
+          <a:prstGeom prst="rect">
+            <a:avLst/>
+          </a:prstGeom>
+        </p:spPr>
+      </p:pic>
+      <p:pic>
+        <p:nvPicPr>
+          <p:cNvPr id="1085" name="V3">
+            <a:extLst>
+              <a:ext uri="{FF2B5EF4-FFF2-40B4-BE49-F238E27FC236}">
+                <a16:creationId xmlns:a16="http://schemas.microsoft.com/office/drawing/2014/main" id="{78657BC1-EAF9-C6AC-586F-14B75FD794AF}"/>
+              </a:ext>
+            </a:extLst>
+          </p:cNvPr>
+          <p:cNvPicPr>
+            <a:picLocks noChangeAspect="1"/>
+          </p:cNvPicPr>
+          <p:nvPr/>
+        </p:nvPicPr>
+        <p:blipFill>
+          <a:blip r:embed="rId15">
+            <a:extLst>
+              <a:ext uri="{96DAC541-7B7A-43D3-8B79-37D633B846F1}">
+                <asvg:svgBlip xmlns:asvg="http://schemas.microsoft.com/office/drawing/2016/SVG/main" r:embed="rId16"/>
+              </a:ext>
+            </a:extLst>
+          </a:blip>
+          <a:srcRect l="26941" r="54176"/>
+          <a:stretch>
+            <a:fillRect/>
+          </a:stretch>
+        </p:blipFill>
+        <p:spPr>
+          <a:xfrm>
+            <a:off x="13656707" y="890245"/>
+            <a:ext cx="1095135" cy="630936"/>
+          </a:xfrm>
+          <a:prstGeom prst="rect">
+            <a:avLst/>
+          </a:prstGeom>
+        </p:spPr>
+      </p:pic>
+      <p:sp>
+        <p:nvSpPr>
+          <p:cNvPr id="1086" name="TextBox 1085">
+            <a:extLst>
+              <a:ext uri="{FF2B5EF4-FFF2-40B4-BE49-F238E27FC236}">
+                <a16:creationId xmlns:a16="http://schemas.microsoft.com/office/drawing/2014/main" id="{09062B71-C14A-B111-40D7-B3D286653B62}"/>
+              </a:ext>
+            </a:extLst>
+          </p:cNvPr>
+          <p:cNvSpPr txBox="1"/>
+          <p:nvPr/>
+        </p:nvSpPr>
+        <p:spPr>
+          <a:xfrm>
+            <a:off x="13265689" y="1100743"/>
+            <a:ext cx="421910" cy="200055"/>
+          </a:xfrm>
+          <a:prstGeom prst="rect">
+            <a:avLst/>
+          </a:prstGeom>
+          <a:noFill/>
+        </p:spPr>
+        <p:txBody>
+          <a:bodyPr wrap="square" rtlCol="0">
+            <a:spAutoFit/>
+          </a:bodyPr>
+          <a:lstStyle/>
+          <a:p>
+            <a:r>
+              <a:rPr lang="en-US" sz="700" dirty="0"/>
+              <a:t>● ● ●</a:t>
+            </a:r>
+          </a:p>
+        </p:txBody>
+      </p:sp>
+      <p:sp>
+        <p:nvSpPr>
+          <p:cNvPr id="1088" name="TextBox 1087">
+            <a:extLst>
+              <a:ext uri="{FF2B5EF4-FFF2-40B4-BE49-F238E27FC236}">
+                <a16:creationId xmlns:a16="http://schemas.microsoft.com/office/drawing/2014/main" id="{F1A31DE8-889A-77EE-4693-21BEA5A377DF}"/>
+              </a:ext>
+            </a:extLst>
+          </p:cNvPr>
+          <p:cNvSpPr txBox="1"/>
+          <p:nvPr/>
+        </p:nvSpPr>
+        <p:spPr>
+          <a:xfrm>
+            <a:off x="14699241" y="1104206"/>
+            <a:ext cx="421910" cy="200055"/>
+          </a:xfrm>
+          <a:prstGeom prst="rect">
+            <a:avLst/>
+          </a:prstGeom>
+          <a:noFill/>
+        </p:spPr>
+        <p:txBody>
+          <a:bodyPr wrap="square" rtlCol="0">
+            <a:spAutoFit/>
+          </a:bodyPr>
+          <a:lstStyle/>
+          <a:p>
+            <a:r>
+              <a:rPr lang="en-US" sz="700" dirty="0"/>
+              <a:t>● ● ●</a:t>
+            </a:r>
+          </a:p>
+        </p:txBody>
+      </p:sp>
+      <p:sp>
+        <p:nvSpPr>
+          <p:cNvPr id="1089" name="TextBox 1088">
+            <a:extLst>
+              <a:ext uri="{FF2B5EF4-FFF2-40B4-BE49-F238E27FC236}">
+                <a16:creationId xmlns:a16="http://schemas.microsoft.com/office/drawing/2014/main" id="{2FCDC34B-04DD-5E4A-261C-84485EA60375}"/>
+              </a:ext>
+            </a:extLst>
+          </p:cNvPr>
+          <p:cNvSpPr txBox="1"/>
+          <p:nvPr/>
+        </p:nvSpPr>
+        <p:spPr>
+          <a:xfrm>
+            <a:off x="16098784" y="1100743"/>
+            <a:ext cx="421910" cy="200055"/>
+          </a:xfrm>
+          <a:prstGeom prst="rect">
+            <a:avLst/>
+          </a:prstGeom>
+          <a:noFill/>
+        </p:spPr>
+        <p:txBody>
+          <a:bodyPr wrap="square" rtlCol="0">
+            <a:spAutoFit/>
+          </a:bodyPr>
+          <a:lstStyle/>
+          <a:p>
+            <a:r>
+              <a:rPr lang="en-US" sz="700" dirty="0"/>
+              <a:t>● ● ●</a:t>
+            </a:r>
+          </a:p>
+        </p:txBody>
+      </p:sp>
+      <p:sp>
+        <p:nvSpPr>
+          <p:cNvPr id="1090" name="TextBox 1089">
+            <a:extLst>
+              <a:ext uri="{FF2B5EF4-FFF2-40B4-BE49-F238E27FC236}">
+                <a16:creationId xmlns:a16="http://schemas.microsoft.com/office/drawing/2014/main" id="{93C1D5FD-AE63-1F44-B2A1-49F9EC286AE7}"/>
+              </a:ext>
+            </a:extLst>
+          </p:cNvPr>
+          <p:cNvSpPr txBox="1"/>
+          <p:nvPr/>
+        </p:nvSpPr>
+        <p:spPr>
+          <a:xfrm>
+            <a:off x="16111029" y="1863982"/>
+            <a:ext cx="421910" cy="200055"/>
+          </a:xfrm>
+          <a:prstGeom prst="rect">
+            <a:avLst/>
+          </a:prstGeom>
+          <a:noFill/>
+        </p:spPr>
+        <p:txBody>
+          <a:bodyPr wrap="square" rtlCol="0">
+            <a:spAutoFit/>
+          </a:bodyPr>
+          <a:lstStyle/>
+          <a:p>
+            <a:r>
+              <a:rPr lang="en-US" sz="700" dirty="0"/>
+              <a:t>● ● ●</a:t>
+            </a:r>
+          </a:p>
+        </p:txBody>
+      </p:sp>
+      <p:sp>
+        <p:nvSpPr>
+          <p:cNvPr id="1091" name="TextBox 1090">
+            <a:extLst>
+              <a:ext uri="{FF2B5EF4-FFF2-40B4-BE49-F238E27FC236}">
+                <a16:creationId xmlns:a16="http://schemas.microsoft.com/office/drawing/2014/main" id="{5A189538-AC5A-39D0-C26C-A0F4E478579E}"/>
+              </a:ext>
+            </a:extLst>
+          </p:cNvPr>
+          <p:cNvSpPr txBox="1"/>
+          <p:nvPr/>
+        </p:nvSpPr>
+        <p:spPr>
+          <a:xfrm>
+            <a:off x="14691986" y="1863982"/>
+            <a:ext cx="421910" cy="200055"/>
+          </a:xfrm>
+          <a:prstGeom prst="rect">
+            <a:avLst/>
+          </a:prstGeom>
+          <a:noFill/>
+        </p:spPr>
+        <p:txBody>
+          <a:bodyPr wrap="square" rtlCol="0">
+            <a:spAutoFit/>
+          </a:bodyPr>
+          <a:lstStyle/>
+          <a:p>
+            <a:r>
+              <a:rPr lang="en-US" sz="700" dirty="0"/>
+              <a:t>● ● ●</a:t>
+            </a:r>
+          </a:p>
+        </p:txBody>
+      </p:sp>
+      <p:sp>
+        <p:nvSpPr>
+          <p:cNvPr id="1092" name="TextBox 1091">
+            <a:extLst>
+              <a:ext uri="{FF2B5EF4-FFF2-40B4-BE49-F238E27FC236}">
+                <a16:creationId xmlns:a16="http://schemas.microsoft.com/office/drawing/2014/main" id="{365E2280-A4B6-632C-5948-D5F86823F67A}"/>
+              </a:ext>
+            </a:extLst>
+          </p:cNvPr>
+          <p:cNvSpPr txBox="1"/>
+          <p:nvPr/>
+        </p:nvSpPr>
+        <p:spPr>
+          <a:xfrm>
+            <a:off x="13263870" y="1863982"/>
+            <a:ext cx="421910" cy="200055"/>
+          </a:xfrm>
+          <a:prstGeom prst="rect">
+            <a:avLst/>
+          </a:prstGeom>
+          <a:noFill/>
+        </p:spPr>
+        <p:txBody>
+          <a:bodyPr wrap="square" rtlCol="0">
+            <a:spAutoFit/>
+          </a:bodyPr>
+          <a:lstStyle/>
+          <a:p>
+            <a:r>
+              <a:rPr lang="en-US" sz="700" dirty="0"/>
+              <a:t>● ● ●</a:t>
+            </a:r>
+          </a:p>
+        </p:txBody>
+      </p:sp>
+      <p:pic>
+        <p:nvPicPr>
+          <p:cNvPr id="1094" name="V4">
+            <a:extLst>
+              <a:ext uri="{FF2B5EF4-FFF2-40B4-BE49-F238E27FC236}">
+                <a16:creationId xmlns:a16="http://schemas.microsoft.com/office/drawing/2014/main" id="{AFF7DB49-E195-8B03-F6A4-7FF58EAE3AC9}"/>
+              </a:ext>
+            </a:extLst>
+          </p:cNvPr>
+          <p:cNvPicPr>
+            <a:picLocks noChangeAspect="1"/>
+          </p:cNvPicPr>
+          <p:nvPr/>
+        </p:nvPicPr>
+        <p:blipFill>
+          <a:blip r:embed="rId15">
+            <a:extLst>
+              <a:ext uri="{96DAC541-7B7A-43D3-8B79-37D633B846F1}">
+                <asvg:svgBlip xmlns:asvg="http://schemas.microsoft.com/office/drawing/2016/SVG/main" r:embed="rId16"/>
+              </a:ext>
+            </a:extLst>
+          </a:blip>
+          <a:srcRect l="45842" r="28616"/>
+          <a:stretch>
+            <a:fillRect/>
+          </a:stretch>
+        </p:blipFill>
+        <p:spPr>
+          <a:xfrm>
+            <a:off x="15089296" y="885302"/>
+            <a:ext cx="1074389" cy="630936"/>
+          </a:xfrm>
+          <a:prstGeom prst="rect">
+            <a:avLst/>
+          </a:prstGeom>
+        </p:spPr>
+      </p:pic>
+      <p:pic>
+        <p:nvPicPr>
+          <p:cNvPr id="1096" name="V5">
+            <a:extLst>
+              <a:ext uri="{FF2B5EF4-FFF2-40B4-BE49-F238E27FC236}">
+                <a16:creationId xmlns:a16="http://schemas.microsoft.com/office/drawing/2014/main" id="{864972B0-0C7F-220A-3BAE-EDF430F99589}"/>
+              </a:ext>
+            </a:extLst>
+          </p:cNvPr>
+          <p:cNvPicPr>
+            <a:picLocks noChangeAspect="1"/>
+          </p:cNvPicPr>
+          <p:nvPr/>
+        </p:nvPicPr>
+        <p:blipFill>
+          <a:blip r:embed="rId15">
+            <a:extLst>
+              <a:ext uri="{96DAC541-7B7A-43D3-8B79-37D633B846F1}">
+                <asvg:svgBlip xmlns:asvg="http://schemas.microsoft.com/office/drawing/2016/SVG/main" r:embed="rId16"/>
+              </a:ext>
+            </a:extLst>
+          </a:blip>
+          <a:srcRect l="71634" r="3072"/>
+          <a:stretch>
+            <a:fillRect/>
+          </a:stretch>
+        </p:blipFill>
+        <p:spPr>
+          <a:xfrm>
+            <a:off x="16518483" y="885302"/>
+            <a:ext cx="1247004" cy="630936"/>
+          </a:xfrm>
+          <a:prstGeom prst="rect">
+            <a:avLst/>
+          </a:prstGeom>
+        </p:spPr>
+      </p:pic>
+      <p:pic>
+        <p:nvPicPr>
+          <p:cNvPr id="1133" name="APD1">
+            <a:extLst>
+              <a:ext uri="{FF2B5EF4-FFF2-40B4-BE49-F238E27FC236}">
+                <a16:creationId xmlns:a16="http://schemas.microsoft.com/office/drawing/2014/main" id="{8D921A0F-7D47-894B-F915-9CEC8A1E5482}"/>
+              </a:ext>
+            </a:extLst>
+          </p:cNvPr>
+          <p:cNvPicPr>
+            <a:picLocks noChangeAspect="1"/>
+          </p:cNvPicPr>
+          <p:nvPr/>
+        </p:nvPicPr>
+        <p:blipFill>
+          <a:blip r:embed="rId17">
+            <a:extLst>
+              <a:ext uri="{96DAC541-7B7A-43D3-8B79-37D633B846F1}">
+                <asvg:svgBlip xmlns:asvg="http://schemas.microsoft.com/office/drawing/2016/SVG/main" r:embed="rId18"/>
+              </a:ext>
+            </a:extLst>
+          </a:blip>
+          <a:stretch>
+            <a:fillRect/>
+          </a:stretch>
+        </p:blipFill>
+        <p:spPr>
+          <a:xfrm>
+            <a:off x="7676089" y="1592251"/>
+            <a:ext cx="4200013" cy="685800"/>
+          </a:xfrm>
+          <a:prstGeom prst="rect">
+            <a:avLst/>
+          </a:prstGeom>
+        </p:spPr>
+      </p:pic>
+      <p:pic>
+        <p:nvPicPr>
+          <p:cNvPr id="1135" name="APD2">
+            <a:extLst>
+              <a:ext uri="{FF2B5EF4-FFF2-40B4-BE49-F238E27FC236}">
+                <a16:creationId xmlns:a16="http://schemas.microsoft.com/office/drawing/2014/main" id="{0356A2DD-EFAA-0AAE-26CC-7582D298755A}"/>
+              </a:ext>
+            </a:extLst>
+          </p:cNvPr>
+          <p:cNvPicPr>
+            <a:picLocks noChangeAspect="1"/>
+          </p:cNvPicPr>
+          <p:nvPr/>
+        </p:nvPicPr>
+        <p:blipFill>
+          <a:blip r:embed="rId19">
+            <a:extLst>
+              <a:ext uri="{96DAC541-7B7A-43D3-8B79-37D633B846F1}">
+                <asvg:svgBlip xmlns:asvg="http://schemas.microsoft.com/office/drawing/2016/SVG/main" r:embed="rId20"/>
+              </a:ext>
+            </a:extLst>
+          </a:blip>
+          <a:stretch>
+            <a:fillRect/>
+          </a:stretch>
+        </p:blipFill>
+        <p:spPr>
+          <a:xfrm>
+            <a:off x="12347703" y="1664190"/>
+            <a:ext cx="856603" cy="685800"/>
+          </a:xfrm>
+          <a:prstGeom prst="rect">
+            <a:avLst/>
+          </a:prstGeom>
+        </p:spPr>
+      </p:pic>
+      <p:pic>
+        <p:nvPicPr>
+          <p:cNvPr id="1137" name="APD3">
+            <a:extLst>
+              <a:ext uri="{FF2B5EF4-FFF2-40B4-BE49-F238E27FC236}">
+                <a16:creationId xmlns:a16="http://schemas.microsoft.com/office/drawing/2014/main" id="{AEA3C279-34DA-6F57-7D57-04837B82C989}"/>
+              </a:ext>
+            </a:extLst>
+          </p:cNvPr>
+          <p:cNvPicPr>
+            <a:picLocks noChangeAspect="1"/>
+          </p:cNvPicPr>
+          <p:nvPr/>
+        </p:nvPicPr>
+        <p:blipFill>
+          <a:blip r:embed="rId21">
+            <a:extLst>
+              <a:ext uri="{96DAC541-7B7A-43D3-8B79-37D633B846F1}">
+                <asvg:svgBlip xmlns:asvg="http://schemas.microsoft.com/office/drawing/2016/SVG/main" r:embed="rId22"/>
+              </a:ext>
+            </a:extLst>
+          </a:blip>
+          <a:stretch>
+            <a:fillRect/>
+          </a:stretch>
+        </p:blipFill>
+        <p:spPr>
+          <a:xfrm>
+            <a:off x="13664460" y="1553481"/>
+            <a:ext cx="1092104" cy="685800"/>
+          </a:xfrm>
+          <a:prstGeom prst="rect">
+            <a:avLst/>
+          </a:prstGeom>
+        </p:spPr>
+      </p:pic>
+      <p:pic>
+        <p:nvPicPr>
+          <p:cNvPr id="1139" name="APD4">
+            <a:extLst>
+              <a:ext uri="{FF2B5EF4-FFF2-40B4-BE49-F238E27FC236}">
+                <a16:creationId xmlns:a16="http://schemas.microsoft.com/office/drawing/2014/main" id="{A56BF377-886B-4FF7-FECB-10517FEE2B8E}"/>
+              </a:ext>
+            </a:extLst>
+          </p:cNvPr>
+          <p:cNvPicPr>
+            <a:picLocks noChangeAspect="1"/>
+          </p:cNvPicPr>
+          <p:nvPr/>
+        </p:nvPicPr>
+        <p:blipFill>
+          <a:blip r:embed="rId23">
+            <a:extLst>
+              <a:ext uri="{96DAC541-7B7A-43D3-8B79-37D633B846F1}">
+                <asvg:svgBlip xmlns:asvg="http://schemas.microsoft.com/office/drawing/2016/SVG/main" r:embed="rId24"/>
+              </a:ext>
+            </a:extLst>
+          </a:blip>
+          <a:stretch>
+            <a:fillRect/>
+          </a:stretch>
+        </p:blipFill>
+        <p:spPr>
+          <a:xfrm>
+            <a:off x="15034589" y="1828374"/>
+            <a:ext cx="1129093" cy="685800"/>
+          </a:xfrm>
+          <a:prstGeom prst="rect">
+            <a:avLst/>
+          </a:prstGeom>
+        </p:spPr>
+      </p:pic>
+      <p:pic>
+        <p:nvPicPr>
+          <p:cNvPr id="1143" name="APD5">
+            <a:extLst>
+              <a:ext uri="{FF2B5EF4-FFF2-40B4-BE49-F238E27FC236}">
+                <a16:creationId xmlns:a16="http://schemas.microsoft.com/office/drawing/2014/main" id="{DA92AE34-3253-1DF3-B4B2-C7C37FEBCBFC}"/>
+              </a:ext>
+            </a:extLst>
+          </p:cNvPr>
+          <p:cNvPicPr>
+            <a:picLocks noChangeAspect="1"/>
+          </p:cNvPicPr>
+          <p:nvPr/>
+        </p:nvPicPr>
+        <p:blipFill>
+          <a:blip r:embed="rId25">
+            <a:extLst>
+              <a:ext uri="{96DAC541-7B7A-43D3-8B79-37D633B846F1}">
+                <asvg:svgBlip xmlns:asvg="http://schemas.microsoft.com/office/drawing/2016/SVG/main" r:embed="rId26"/>
+              </a:ext>
+            </a:extLst>
+          </a:blip>
+          <a:stretch>
+            <a:fillRect/>
+          </a:stretch>
+        </p:blipFill>
+        <p:spPr>
+          <a:xfrm>
+            <a:off x="16516664" y="1824277"/>
+            <a:ext cx="1092104" cy="685800"/>
+          </a:xfrm>
+          <a:prstGeom prst="rect">
+            <a:avLst/>
+          </a:prstGeom>
+        </p:spPr>
+      </p:pic>
+      <p:sp>
+        <p:nvSpPr>
+          <p:cNvPr id="1144" name="Rectangle: Rounded Corners 1143">
+            <a:extLst>
+              <a:ext uri="{FF2B5EF4-FFF2-40B4-BE49-F238E27FC236}">
+                <a16:creationId xmlns:a16="http://schemas.microsoft.com/office/drawing/2014/main" id="{685E78C0-45F4-3CF7-072A-65EE9825A70E}"/>
+              </a:ext>
+            </a:extLst>
+          </p:cNvPr>
+          <p:cNvSpPr/>
+          <p:nvPr/>
+        </p:nvSpPr>
+        <p:spPr>
+          <a:xfrm>
+            <a:off x="863167" y="3727214"/>
+            <a:ext cx="17383991" cy="2864892"/>
+          </a:xfrm>
+          <a:prstGeom prst="roundRect">
+            <a:avLst>
+              <a:gd name="adj" fmla="val 6239"/>
+            </a:avLst>
+          </a:prstGeom>
+          <a:solidFill>
+            <a:srgbClr val="F9FCF7"/>
+          </a:solidFill>
+          <a:ln w="28575">
+            <a:prstDash val="lgDash"/>
+          </a:ln>
+        </p:spPr>
+        <p:style>
+          <a:lnRef idx="2">
+            <a:schemeClr val="accent1">
+              <a:shade val="15000"/>
+            </a:schemeClr>
+          </a:lnRef>
+          <a:fillRef idx="1">
+            <a:schemeClr val="accent1"/>
+          </a:fillRef>
+          <a:effectRef idx="0">
+            <a:schemeClr val="accent1"/>
+          </a:effectRef>
+          <a:fontRef idx="minor">
+            <a:schemeClr val="lt1"/>
+          </a:fontRef>
+        </p:style>
+        <p:txBody>
+          <a:bodyPr rtlCol="0" anchor="ctr"/>
+          <a:lstStyle/>
+          <a:p>
+            <a:pPr algn="ctr"/>
+            <a:endParaRPr lang="en-US" sz="2790" dirty="0"/>
+          </a:p>
+        </p:txBody>
+      </p:sp>
+      <p:sp>
+        <p:nvSpPr>
+          <p:cNvPr id="1145" name="TextBox 1144">
+            <a:extLst>
+              <a:ext uri="{FF2B5EF4-FFF2-40B4-BE49-F238E27FC236}">
+                <a16:creationId xmlns:a16="http://schemas.microsoft.com/office/drawing/2014/main" id="{9C3546C0-D3D8-85F9-DE43-BC5FA48CC673}"/>
+              </a:ext>
+            </a:extLst>
+          </p:cNvPr>
+          <p:cNvSpPr txBox="1"/>
+          <p:nvPr/>
+        </p:nvSpPr>
+        <p:spPr>
+          <a:xfrm>
+            <a:off x="845667" y="3727213"/>
+            <a:ext cx="5485284" cy="521681"/>
+          </a:xfrm>
+          <a:prstGeom prst="rect">
+            <a:avLst/>
+          </a:prstGeom>
+          <a:noFill/>
+        </p:spPr>
+        <p:txBody>
+          <a:bodyPr wrap="none" rtlCol="0">
+            <a:spAutoFit/>
+          </a:bodyPr>
+          <a:lstStyle/>
+          <a:p>
+            <a:r>
+              <a:rPr lang="en-US" sz="2790" b="1" dirty="0">
+                <a:latin typeface="Times New Roman" panose="02020603050405020304" pitchFamily="18" charset="0"/>
+                <a:cs typeface="Times New Roman" panose="02020603050405020304" pitchFamily="18" charset="0"/>
+              </a:rPr>
+              <a:t>(c) Lyapunov Exponent Calculator</a:t>
+            </a:r>
+          </a:p>
+        </p:txBody>
+      </p:sp>
+      <p:cxnSp>
+        <p:nvCxnSpPr>
+          <p:cNvPr id="1146" name="Straight Connector 1145">
+            <a:extLst>
+              <a:ext uri="{FF2B5EF4-FFF2-40B4-BE49-F238E27FC236}">
+                <a16:creationId xmlns:a16="http://schemas.microsoft.com/office/drawing/2014/main" id="{AE674130-EA66-0BE1-8397-869597DBD814}"/>
+              </a:ext>
+            </a:extLst>
+          </p:cNvPr>
+          <p:cNvCxnSpPr>
+            <a:cxnSpLocks/>
+          </p:cNvCxnSpPr>
+          <p:nvPr/>
+        </p:nvCxnSpPr>
+        <p:spPr>
+          <a:xfrm>
+            <a:off x="10049825" y="3727213"/>
+            <a:ext cx="0" cy="2864893"/>
+          </a:xfrm>
+          <a:prstGeom prst="line">
+            <a:avLst/>
+          </a:prstGeom>
+          <a:ln>
+            <a:prstDash val="dash"/>
+          </a:ln>
+        </p:spPr>
+        <p:style>
+          <a:lnRef idx="2">
+            <a:schemeClr val="accent1"/>
+          </a:lnRef>
+          <a:fillRef idx="0">
+            <a:schemeClr val="accent1"/>
+          </a:fillRef>
+          <a:effectRef idx="1">
+            <a:schemeClr val="accent1"/>
+          </a:effectRef>
+          <a:fontRef idx="minor">
+            <a:schemeClr val="tx1"/>
+          </a:fontRef>
+        </p:style>
+      </p:cxnSp>
+      <mc:AlternateContent xmlns:mc="http://schemas.openxmlformats.org/markup-compatibility/2006" xmlns:a14="http://schemas.microsoft.com/office/drawing/2010/main">
+        <mc:Choice Requires="a14">
+          <p:sp>
+            <p:nvSpPr>
+              <p:cNvPr id="1149" name="Rectangle: Rounded Corners 1148">
+                <a:extLst>
+                  <a:ext uri="{FF2B5EF4-FFF2-40B4-BE49-F238E27FC236}">
+                    <a16:creationId xmlns:a16="http://schemas.microsoft.com/office/drawing/2014/main" id="{9DAC8150-E234-F814-A148-463D9EE3753A}"/>
+                  </a:ext>
+                </a:extLst>
+              </p:cNvPr>
+              <p:cNvSpPr/>
+              <p:nvPr/>
+            </p:nvSpPr>
+            <p:spPr>
+              <a:xfrm>
+                <a:off x="1356780" y="4251490"/>
+                <a:ext cx="1426552" cy="539330"/>
+              </a:xfrm>
+              <a:prstGeom prst="roundRect">
+                <a:avLst>
+                  <a:gd name="adj" fmla="val 6239"/>
+                </a:avLst>
+              </a:prstGeom>
+              <a:solidFill>
+                <a:schemeClr val="bg1">
+                  <a:lumMod val="95000"/>
+                </a:schemeClr>
+              </a:solidFill>
+              <a:ln w="28575">
+                <a:prstDash val="solid"/>
+              </a:ln>
+              <a:effectLst>
+                <a:outerShdw blurRad="50800" dist="38100" dir="5400000" algn="t" rotWithShape="0">
+                  <a:prstClr val="black">
+                    <a:alpha val="40000"/>
+                  </a:prstClr>
+                </a:outerShdw>
+              </a:effectLst>
+            </p:spPr>
+            <p:style>
+              <a:lnRef idx="2">
+                <a:schemeClr val="accent1">
+                  <a:shade val="15000"/>
+                </a:schemeClr>
+              </a:lnRef>
+              <a:fillRef idx="1">
+                <a:schemeClr val="accent1"/>
+              </a:fillRef>
+              <a:effectRef idx="0">
+                <a:schemeClr val="accent1"/>
+              </a:effectRef>
+              <a:fontRef idx="minor">
+                <a:schemeClr val="lt1"/>
+              </a:fontRef>
+            </p:style>
+            <p:txBody>
+              <a:bodyPr rtlCol="0" anchor="ctr"/>
+              <a:lstStyle/>
+              <a:p>
+                <a:pPr algn="ctr"/>
+                <a14:m>
+                  <m:oMathPara xmlns:m="http://schemas.openxmlformats.org/officeDocument/2006/math">
+                    <m:oMathParaPr>
+                      <m:jc m:val="centerGroup"/>
+                    </m:oMathParaPr>
+                    <m:oMath xmlns:m="http://schemas.openxmlformats.org/officeDocument/2006/math">
+                      <m:sSubSup>
+                        <m:sSubSupPr>
+                          <m:ctrlPr>
+                            <a:rPr lang="en-US" sz="2790" b="1" i="1" smtClean="0">
+                              <a:solidFill>
+                                <a:schemeClr val="tx1">
+                                  <a:lumMod val="95000"/>
+                                  <a:lumOff val="5000"/>
+                                </a:schemeClr>
+                              </a:solidFill>
+                              <a:latin typeface="Cambria Math" panose="02040503050406030204" pitchFamily="18" charset="0"/>
+                              <a:cs typeface="Times New Roman" panose="02020603050405020304" pitchFamily="18" charset="0"/>
+                            </a:rPr>
+                          </m:ctrlPr>
+                        </m:sSubSupPr>
+                        <m:e>
+                          <m:r>
+                            <a:rPr lang="en-US" sz="2790" b="1" i="1">
+                              <a:solidFill>
+                                <a:schemeClr val="tx1">
+                                  <a:lumMod val="95000"/>
+                                  <a:lumOff val="5000"/>
+                                </a:schemeClr>
+                              </a:solidFill>
+                              <a:latin typeface="Cambria Math" panose="02040503050406030204" pitchFamily="18" charset="0"/>
+                              <a:cs typeface="Times New Roman" panose="02020603050405020304" pitchFamily="18" charset="0"/>
+                            </a:rPr>
+                            <m:t>𝑹</m:t>
+                          </m:r>
+                        </m:e>
+                        <m:sub>
+                          <m:r>
+                            <a:rPr lang="en-US" sz="2790" b="1" i="1" smtClean="0">
+                              <a:solidFill>
+                                <a:schemeClr val="tx1">
+                                  <a:lumMod val="95000"/>
+                                  <a:lumOff val="5000"/>
+                                </a:schemeClr>
+                              </a:solidFill>
+                              <a:latin typeface="Cambria Math" panose="02040503050406030204" pitchFamily="18" charset="0"/>
+                              <a:cs typeface="Times New Roman" panose="02020603050405020304" pitchFamily="18" charset="0"/>
+                            </a:rPr>
+                            <m:t>𝒊</m:t>
+                          </m:r>
+                        </m:sub>
+                        <m:sup>
+                          <m:r>
+                            <a:rPr lang="en-US" sz="2790" b="1" i="1">
+                              <a:solidFill>
+                                <a:schemeClr val="tx1">
+                                  <a:lumMod val="95000"/>
+                                  <a:lumOff val="5000"/>
+                                </a:schemeClr>
+                              </a:solidFill>
+                              <a:latin typeface="Cambria Math" panose="02040503050406030204" pitchFamily="18" charset="0"/>
+                              <a:cs typeface="Times New Roman" panose="02020603050405020304" pitchFamily="18" charset="0"/>
+                            </a:rPr>
+                            <m:t>𝟏</m:t>
+                          </m:r>
+                        </m:sup>
+                      </m:sSubSup>
+                      <m:r>
+                        <a:rPr lang="en-US" sz="2790" b="1">
+                          <a:solidFill>
+                            <a:schemeClr val="tx1">
+                              <a:lumMod val="95000"/>
+                              <a:lumOff val="5000"/>
+                            </a:schemeClr>
+                          </a:solidFill>
+                          <a:latin typeface="Cambria Math" panose="02040503050406030204" pitchFamily="18" charset="0"/>
+                          <a:cs typeface="Times New Roman" panose="02020603050405020304" pitchFamily="18" charset="0"/>
+                        </a:rPr>
+                        <m:t>(</m:t>
+                      </m:r>
+                      <m:r>
+                        <a:rPr lang="en-US" sz="2790" b="1">
+                          <a:solidFill>
+                            <a:schemeClr val="tx1">
+                              <a:lumMod val="95000"/>
+                              <a:lumOff val="5000"/>
+                            </a:schemeClr>
+                          </a:solidFill>
+                          <a:latin typeface="Cambria Math" panose="02040503050406030204" pitchFamily="18" charset="0"/>
+                          <a:cs typeface="Times New Roman" panose="02020603050405020304" pitchFamily="18" charset="0"/>
+                        </a:rPr>
+                        <m:t>𝐯</m:t>
+                      </m:r>
+                      <m:r>
+                        <a:rPr lang="en-US" sz="2790" b="1">
+                          <a:solidFill>
+                            <a:schemeClr val="tx1">
+                              <a:lumMod val="95000"/>
+                              <a:lumOff val="5000"/>
+                            </a:schemeClr>
+                          </a:solidFill>
+                          <a:latin typeface="Cambria Math" panose="02040503050406030204" pitchFamily="18" charset="0"/>
+                          <a:cs typeface="Times New Roman" panose="02020603050405020304" pitchFamily="18" charset="0"/>
+                        </a:rPr>
+                        <m:t>)</m:t>
+                      </m:r>
+                    </m:oMath>
+                  </m:oMathPara>
+                </a14:m>
+                <a:endParaRPr lang="en-US" sz="2790" b="1" dirty="0">
+                  <a:solidFill>
+                    <a:schemeClr val="tx1">
+                      <a:lumMod val="95000"/>
+                      <a:lumOff val="5000"/>
+                    </a:schemeClr>
+                  </a:solidFill>
+                  <a:latin typeface="Times New Roman" panose="02020603050405020304" pitchFamily="18" charset="0"/>
+                  <a:cs typeface="Times New Roman" panose="02020603050405020304" pitchFamily="18" charset="0"/>
+                </a:endParaRPr>
+              </a:p>
+            </p:txBody>
+          </p:sp>
+        </mc:Choice>
+        <mc:Fallback xmlns="">
+          <p:sp>
+            <p:nvSpPr>
+              <p:cNvPr id="1149" name="Rectangle: Rounded Corners 1148">
+                <a:extLst>
+                  <a:ext uri="{FF2B5EF4-FFF2-40B4-BE49-F238E27FC236}">
+                    <a16:creationId xmlns:a16="http://schemas.microsoft.com/office/drawing/2014/main" id="{9DAC8150-E234-F814-A148-463D9EE3753A}"/>
+                  </a:ext>
+                </a:extLst>
+              </p:cNvPr>
+              <p:cNvSpPr>
+                <a:spLocks noRot="1" noChangeAspect="1" noMove="1" noResize="1" noEditPoints="1" noAdjustHandles="1" noChangeArrowheads="1" noChangeShapeType="1" noTextEdit="1"/>
+              </p:cNvSpPr>
+              <p:nvPr/>
+            </p:nvSpPr>
+            <p:spPr>
+              <a:xfrm>
+                <a:off x="1356780" y="4251490"/>
+                <a:ext cx="1426552" cy="539330"/>
+              </a:xfrm>
+              <a:prstGeom prst="roundRect">
+                <a:avLst>
+                  <a:gd name="adj" fmla="val 6239"/>
+                </a:avLst>
+              </a:prstGeom>
+              <a:blipFill>
+                <a:blip r:embed="rId27"/>
+                <a:stretch>
+                  <a:fillRect/>
+                </a:stretch>
+              </a:blipFill>
+              <a:ln w="28575">
+                <a:prstDash val="solid"/>
+              </a:ln>
+              <a:effectLst>
+                <a:outerShdw blurRad="50800" dist="38100" dir="5400000" algn="t" rotWithShape="0">
+                  <a:prstClr val="black">
+                    <a:alpha val="40000"/>
+                  </a:prstClr>
+                </a:outerShdw>
+              </a:effectLst>
+            </p:spPr>
+            <p:txBody>
+              <a:bodyPr/>
+              <a:lstStyle/>
+              <a:p>
+                <a:r>
+                  <a:rPr lang="en-US">
+                    <a:noFill/>
+                  </a:rPr>
+                  <a:t> </a:t>
+                </a:r>
+              </a:p>
+            </p:txBody>
+          </p:sp>
+        </mc:Fallback>
+      </mc:AlternateContent>
+      <mc:AlternateContent xmlns:mc="http://schemas.openxmlformats.org/markup-compatibility/2006" xmlns:a14="http://schemas.microsoft.com/office/drawing/2010/main">
+        <mc:Choice Requires="a14">
+          <p:sp>
+            <p:nvSpPr>
+              <p:cNvPr id="1150" name="Rectangle: Rounded Corners 1149">
+                <a:extLst>
+                  <a:ext uri="{FF2B5EF4-FFF2-40B4-BE49-F238E27FC236}">
+                    <a16:creationId xmlns:a16="http://schemas.microsoft.com/office/drawing/2014/main" id="{48EB1C92-A55D-06C4-8880-CDAF58DDF9F5}"/>
+                  </a:ext>
+                </a:extLst>
+              </p:cNvPr>
+              <p:cNvSpPr/>
+              <p:nvPr/>
+            </p:nvSpPr>
+            <p:spPr>
+              <a:xfrm>
+                <a:off x="1356779" y="4900433"/>
+                <a:ext cx="1426552" cy="539330"/>
+              </a:xfrm>
+              <a:prstGeom prst="roundRect">
+                <a:avLst>
+                  <a:gd name="adj" fmla="val 6239"/>
+                </a:avLst>
+              </a:prstGeom>
+              <a:solidFill>
+                <a:schemeClr val="bg1">
+                  <a:lumMod val="95000"/>
+                </a:schemeClr>
+              </a:solidFill>
+              <a:ln w="28575">
+                <a:prstDash val="solid"/>
+              </a:ln>
+              <a:effectLst>
+                <a:outerShdw blurRad="50800" dist="38100" dir="5400000" algn="t" rotWithShape="0">
+                  <a:prstClr val="black">
+                    <a:alpha val="40000"/>
+                  </a:prstClr>
+                </a:outerShdw>
+              </a:effectLst>
+            </p:spPr>
+            <p:style>
+              <a:lnRef idx="2">
+                <a:schemeClr val="accent1">
+                  <a:shade val="15000"/>
+                </a:schemeClr>
+              </a:lnRef>
+              <a:fillRef idx="1">
+                <a:schemeClr val="accent1"/>
+              </a:fillRef>
+              <a:effectRef idx="0">
+                <a:schemeClr val="accent1"/>
+              </a:effectRef>
+              <a:fontRef idx="minor">
+                <a:schemeClr val="lt1"/>
+              </a:fontRef>
+            </p:style>
+            <p:txBody>
+              <a:bodyPr rtlCol="0" anchor="ctr"/>
+              <a:lstStyle/>
+              <a:p>
+                <a:pPr algn="ctr"/>
+                <a14:m>
+                  <m:oMathPara xmlns:m="http://schemas.openxmlformats.org/officeDocument/2006/math">
+                    <m:oMathParaPr>
+                      <m:jc m:val="centerGroup"/>
+                    </m:oMathParaPr>
+                    <m:oMath xmlns:m="http://schemas.openxmlformats.org/officeDocument/2006/math">
+                      <m:sSubSup>
+                        <m:sSubSupPr>
+                          <m:ctrlPr>
+                            <a:rPr lang="en-US" sz="2790" b="1" i="1" smtClean="0">
+                              <a:solidFill>
+                                <a:schemeClr val="tx1">
+                                  <a:lumMod val="95000"/>
+                                  <a:lumOff val="5000"/>
+                                </a:schemeClr>
+                              </a:solidFill>
+                              <a:latin typeface="Cambria Math" panose="02040503050406030204" pitchFamily="18" charset="0"/>
+                              <a:cs typeface="Times New Roman" panose="02020603050405020304" pitchFamily="18" charset="0"/>
+                            </a:rPr>
+                          </m:ctrlPr>
+                        </m:sSubSupPr>
+                        <m:e>
+                          <m:r>
+                            <a:rPr lang="en-US" sz="2790" b="1" i="1">
+                              <a:solidFill>
+                                <a:schemeClr val="tx1">
+                                  <a:lumMod val="95000"/>
+                                  <a:lumOff val="5000"/>
+                                </a:schemeClr>
+                              </a:solidFill>
+                              <a:latin typeface="Cambria Math" panose="02040503050406030204" pitchFamily="18" charset="0"/>
+                              <a:cs typeface="Times New Roman" panose="02020603050405020304" pitchFamily="18" charset="0"/>
+                            </a:rPr>
+                            <m:t>𝑹</m:t>
+                          </m:r>
+                        </m:e>
+                        <m:sub>
+                          <m:r>
+                            <a:rPr lang="en-US" sz="2790" b="1" i="1" smtClean="0">
+                              <a:solidFill>
+                                <a:schemeClr val="tx1">
+                                  <a:lumMod val="95000"/>
+                                  <a:lumOff val="5000"/>
+                                </a:schemeClr>
+                              </a:solidFill>
+                              <a:latin typeface="Cambria Math" panose="02040503050406030204" pitchFamily="18" charset="0"/>
+                              <a:cs typeface="Times New Roman" panose="02020603050405020304" pitchFamily="18" charset="0"/>
+                            </a:rPr>
+                            <m:t>𝒊</m:t>
+                          </m:r>
+                          <m:r>
+                            <a:rPr lang="en-US" sz="2790" b="1" i="1" smtClean="0">
+                              <a:solidFill>
+                                <a:schemeClr val="tx1">
+                                  <a:lumMod val="95000"/>
+                                  <a:lumOff val="5000"/>
+                                </a:schemeClr>
+                              </a:solidFill>
+                              <a:latin typeface="Cambria Math" panose="02040503050406030204" pitchFamily="18" charset="0"/>
+                              <a:cs typeface="Times New Roman" panose="02020603050405020304" pitchFamily="18" charset="0"/>
+                            </a:rPr>
+                            <m:t>+</m:t>
+                          </m:r>
+                          <m:r>
+                            <a:rPr lang="en-US" sz="2790" b="1" i="1" smtClean="0">
+                              <a:solidFill>
+                                <a:schemeClr val="tx1">
+                                  <a:lumMod val="95000"/>
+                                  <a:lumOff val="5000"/>
+                                </a:schemeClr>
+                              </a:solidFill>
+                              <a:latin typeface="Cambria Math" panose="02040503050406030204" pitchFamily="18" charset="0"/>
+                              <a:cs typeface="Times New Roman" panose="02020603050405020304" pitchFamily="18" charset="0"/>
+                            </a:rPr>
+                            <m:t>𝟏</m:t>
+                          </m:r>
+                        </m:sub>
+                        <m:sup>
+                          <m:r>
+                            <a:rPr lang="en-US" sz="2790" b="1" i="1">
+                              <a:solidFill>
+                                <a:schemeClr val="tx1">
+                                  <a:lumMod val="95000"/>
+                                  <a:lumOff val="5000"/>
+                                </a:schemeClr>
+                              </a:solidFill>
+                              <a:latin typeface="Cambria Math" panose="02040503050406030204" pitchFamily="18" charset="0"/>
+                              <a:cs typeface="Times New Roman" panose="02020603050405020304" pitchFamily="18" charset="0"/>
+                            </a:rPr>
+                            <m:t>𝟏</m:t>
+                          </m:r>
+                        </m:sup>
+                      </m:sSubSup>
+                      <m:r>
+                        <a:rPr lang="en-US" sz="2790" b="1">
+                          <a:solidFill>
+                            <a:schemeClr val="tx1">
+                              <a:lumMod val="95000"/>
+                              <a:lumOff val="5000"/>
+                            </a:schemeClr>
+                          </a:solidFill>
+                          <a:latin typeface="Cambria Math" panose="02040503050406030204" pitchFamily="18" charset="0"/>
+                          <a:cs typeface="Times New Roman" panose="02020603050405020304" pitchFamily="18" charset="0"/>
+                        </a:rPr>
+                        <m:t>(</m:t>
+                      </m:r>
+                      <m:r>
+                        <a:rPr lang="en-US" sz="2790" b="1">
+                          <a:solidFill>
+                            <a:schemeClr val="tx1">
+                              <a:lumMod val="95000"/>
+                              <a:lumOff val="5000"/>
+                            </a:schemeClr>
+                          </a:solidFill>
+                          <a:latin typeface="Cambria Math" panose="02040503050406030204" pitchFamily="18" charset="0"/>
+                          <a:cs typeface="Times New Roman" panose="02020603050405020304" pitchFamily="18" charset="0"/>
+                        </a:rPr>
+                        <m:t>𝐯</m:t>
+                      </m:r>
+                      <m:r>
+                        <a:rPr lang="en-US" sz="2790" b="1">
+                          <a:solidFill>
+                            <a:schemeClr val="tx1">
+                              <a:lumMod val="95000"/>
+                              <a:lumOff val="5000"/>
+                            </a:schemeClr>
+                          </a:solidFill>
+                          <a:latin typeface="Cambria Math" panose="02040503050406030204" pitchFamily="18" charset="0"/>
+                          <a:cs typeface="Times New Roman" panose="02020603050405020304" pitchFamily="18" charset="0"/>
+                        </a:rPr>
+                        <m:t>)</m:t>
+                      </m:r>
+                    </m:oMath>
+                  </m:oMathPara>
+                </a14:m>
+                <a:endParaRPr lang="en-US" sz="2790" b="1" dirty="0">
+                  <a:solidFill>
+                    <a:schemeClr val="tx1">
+                      <a:lumMod val="95000"/>
+                      <a:lumOff val="5000"/>
+                    </a:schemeClr>
+                  </a:solidFill>
+                  <a:latin typeface="Times New Roman" panose="02020603050405020304" pitchFamily="18" charset="0"/>
+                  <a:cs typeface="Times New Roman" panose="02020603050405020304" pitchFamily="18" charset="0"/>
+                </a:endParaRPr>
+              </a:p>
+            </p:txBody>
+          </p:sp>
+        </mc:Choice>
+        <mc:Fallback xmlns="">
+          <p:sp>
+            <p:nvSpPr>
+              <p:cNvPr id="1150" name="Rectangle: Rounded Corners 1149">
+                <a:extLst>
+                  <a:ext uri="{FF2B5EF4-FFF2-40B4-BE49-F238E27FC236}">
+                    <a16:creationId xmlns:a16="http://schemas.microsoft.com/office/drawing/2014/main" id="{48EB1C92-A55D-06C4-8880-CDAF58DDF9F5}"/>
+                  </a:ext>
+                </a:extLst>
+              </p:cNvPr>
+              <p:cNvSpPr>
+                <a:spLocks noRot="1" noChangeAspect="1" noMove="1" noResize="1" noEditPoints="1" noAdjustHandles="1" noChangeArrowheads="1" noChangeShapeType="1" noTextEdit="1"/>
+              </p:cNvSpPr>
+              <p:nvPr/>
+            </p:nvSpPr>
+            <p:spPr>
+              <a:xfrm>
+                <a:off x="1356779" y="4900433"/>
+                <a:ext cx="1426552" cy="539330"/>
+              </a:xfrm>
+              <a:prstGeom prst="roundRect">
+                <a:avLst>
+                  <a:gd name="adj" fmla="val 6239"/>
+                </a:avLst>
+              </a:prstGeom>
+              <a:blipFill>
+                <a:blip r:embed="rId28"/>
+                <a:stretch>
+                  <a:fillRect/>
+                </a:stretch>
+              </a:blipFill>
+              <a:ln w="28575">
+                <a:prstDash val="solid"/>
+              </a:ln>
+              <a:effectLst>
+                <a:outerShdw blurRad="50800" dist="38100" dir="5400000" algn="t" rotWithShape="0">
+                  <a:prstClr val="black">
+                    <a:alpha val="40000"/>
+                  </a:prstClr>
+                </a:outerShdw>
+              </a:effectLst>
+            </p:spPr>
+            <p:txBody>
+              <a:bodyPr/>
+              <a:lstStyle/>
+              <a:p>
+                <a:r>
+                  <a:rPr lang="en-US">
+                    <a:noFill/>
+                  </a:rPr>
+                  <a:t> </a:t>
+                </a:r>
+              </a:p>
+            </p:txBody>
+          </p:sp>
+        </mc:Fallback>
+      </mc:AlternateContent>
+      <p:sp>
+        <p:nvSpPr>
+          <p:cNvPr id="1151" name="TextBox 1150">
+            <a:extLst>
+              <a:ext uri="{FF2B5EF4-FFF2-40B4-BE49-F238E27FC236}">
+                <a16:creationId xmlns:a16="http://schemas.microsoft.com/office/drawing/2014/main" id="{B10859FF-B9FF-EA29-F098-AEF7E9105A93}"/>
+              </a:ext>
+            </a:extLst>
+          </p:cNvPr>
+          <p:cNvSpPr txBox="1"/>
+          <p:nvPr/>
+        </p:nvSpPr>
+        <p:spPr>
+          <a:xfrm>
+            <a:off x="1832984" y="5568010"/>
+            <a:ext cx="421910" cy="200055"/>
+          </a:xfrm>
+          <a:prstGeom prst="rect">
+            <a:avLst/>
+          </a:prstGeom>
+          <a:noFill/>
+        </p:spPr>
+        <p:txBody>
+          <a:bodyPr wrap="square" rtlCol="0">
+            <a:spAutoFit/>
+          </a:bodyPr>
+          <a:lstStyle/>
+          <a:p>
+            <a:r>
+              <a:rPr lang="en-US" sz="700" dirty="0"/>
+              <a:t>● ● ●</a:t>
+            </a:r>
+          </a:p>
+        </p:txBody>
+      </p:sp>
+      <mc:AlternateContent xmlns:mc="http://schemas.openxmlformats.org/markup-compatibility/2006" xmlns:a14="http://schemas.microsoft.com/office/drawing/2010/main">
+        <mc:Choice Requires="a14">
+          <p:sp>
+            <p:nvSpPr>
+              <p:cNvPr id="1152" name="Rectangle: Rounded Corners 1151">
+                <a:extLst>
+                  <a:ext uri="{FF2B5EF4-FFF2-40B4-BE49-F238E27FC236}">
+                    <a16:creationId xmlns:a16="http://schemas.microsoft.com/office/drawing/2014/main" id="{BF5A8185-5F5F-03E2-4828-FC71BED88A0E}"/>
+                  </a:ext>
+                </a:extLst>
+              </p:cNvPr>
+              <p:cNvSpPr/>
+              <p:nvPr/>
+            </p:nvSpPr>
+            <p:spPr>
+              <a:xfrm>
+                <a:off x="1356780" y="5860407"/>
+                <a:ext cx="1426552" cy="539330"/>
+              </a:xfrm>
+              <a:prstGeom prst="roundRect">
+                <a:avLst>
+                  <a:gd name="adj" fmla="val 6239"/>
+                </a:avLst>
+              </a:prstGeom>
+              <a:solidFill>
+                <a:schemeClr val="bg1">
+                  <a:lumMod val="95000"/>
+                </a:schemeClr>
+              </a:solidFill>
+              <a:ln w="28575">
+                <a:prstDash val="solid"/>
+              </a:ln>
+              <a:effectLst>
+                <a:outerShdw blurRad="50800" dist="38100" dir="5400000" algn="t" rotWithShape="0">
+                  <a:prstClr val="black">
+                    <a:alpha val="40000"/>
+                  </a:prstClr>
+                </a:outerShdw>
+              </a:effectLst>
+            </p:spPr>
+            <p:style>
+              <a:lnRef idx="2">
+                <a:schemeClr val="accent1">
+                  <a:shade val="15000"/>
+                </a:schemeClr>
+              </a:lnRef>
+              <a:fillRef idx="1">
+                <a:schemeClr val="accent1"/>
+              </a:fillRef>
+              <a:effectRef idx="0">
+                <a:schemeClr val="accent1"/>
+              </a:effectRef>
+              <a:fontRef idx="minor">
+                <a:schemeClr val="lt1"/>
+              </a:fontRef>
+            </p:style>
+            <p:txBody>
+              <a:bodyPr rtlCol="0" anchor="ctr"/>
+              <a:lstStyle/>
+              <a:p>
+                <a:pPr algn="ctr"/>
+                <a14:m>
+                  <m:oMathPara xmlns:m="http://schemas.openxmlformats.org/officeDocument/2006/math">
+                    <m:oMathParaPr>
+                      <m:jc m:val="centerGroup"/>
+                    </m:oMathParaPr>
+                    <m:oMath xmlns:m="http://schemas.openxmlformats.org/officeDocument/2006/math">
+                      <m:sSubSup>
+                        <m:sSubSupPr>
+                          <m:ctrlPr>
+                            <a:rPr lang="en-US" sz="2790" b="1" i="1" smtClean="0">
+                              <a:solidFill>
+                                <a:schemeClr val="tx1">
+                                  <a:lumMod val="95000"/>
+                                  <a:lumOff val="5000"/>
+                                </a:schemeClr>
+                              </a:solidFill>
+                              <a:latin typeface="Cambria Math" panose="02040503050406030204" pitchFamily="18" charset="0"/>
+                              <a:cs typeface="Times New Roman" panose="02020603050405020304" pitchFamily="18" charset="0"/>
+                            </a:rPr>
+                          </m:ctrlPr>
+                        </m:sSubSupPr>
+                        <m:e>
+                          <m:r>
+                            <a:rPr lang="en-US" sz="2790" b="1" i="1">
+                              <a:solidFill>
+                                <a:schemeClr val="tx1">
+                                  <a:lumMod val="95000"/>
+                                  <a:lumOff val="5000"/>
+                                </a:schemeClr>
+                              </a:solidFill>
+                              <a:latin typeface="Cambria Math" panose="02040503050406030204" pitchFamily="18" charset="0"/>
+                              <a:cs typeface="Times New Roman" panose="02020603050405020304" pitchFamily="18" charset="0"/>
+                            </a:rPr>
+                            <m:t>𝑹</m:t>
+                          </m:r>
+                        </m:e>
+                        <m:sub>
+                          <m:r>
+                            <a:rPr lang="en-US" sz="2790" b="1" i="1" smtClean="0">
+                              <a:solidFill>
+                                <a:schemeClr val="tx1">
+                                  <a:lumMod val="95000"/>
+                                  <a:lumOff val="5000"/>
+                                </a:schemeClr>
+                              </a:solidFill>
+                              <a:latin typeface="Cambria Math" panose="02040503050406030204" pitchFamily="18" charset="0"/>
+                              <a:cs typeface="Times New Roman" panose="02020603050405020304" pitchFamily="18" charset="0"/>
+                            </a:rPr>
+                            <m:t>𝑵</m:t>
+                          </m:r>
+                        </m:sub>
+                        <m:sup>
+                          <m:r>
+                            <a:rPr lang="en-US" sz="2790" b="1" i="1">
+                              <a:solidFill>
+                                <a:schemeClr val="tx1">
+                                  <a:lumMod val="95000"/>
+                                  <a:lumOff val="5000"/>
+                                </a:schemeClr>
+                              </a:solidFill>
+                              <a:latin typeface="Cambria Math" panose="02040503050406030204" pitchFamily="18" charset="0"/>
+                              <a:cs typeface="Times New Roman" panose="02020603050405020304" pitchFamily="18" charset="0"/>
+                            </a:rPr>
+                            <m:t>𝟏</m:t>
+                          </m:r>
+                        </m:sup>
+                      </m:sSubSup>
+                      <m:r>
+                        <a:rPr lang="en-US" sz="2790" b="1" i="0" smtClean="0">
+                          <a:solidFill>
+                            <a:schemeClr val="tx1">
+                              <a:lumMod val="95000"/>
+                              <a:lumOff val="5000"/>
+                            </a:schemeClr>
+                          </a:solidFill>
+                          <a:latin typeface="Cambria Math" panose="02040503050406030204" pitchFamily="18" charset="0"/>
+                          <a:cs typeface="Times New Roman" panose="02020603050405020304" pitchFamily="18" charset="0"/>
+                        </a:rPr>
+                        <m:t>(</m:t>
+                      </m:r>
+                      <m:r>
+                        <a:rPr lang="en-US" sz="2790" b="1" i="0" smtClean="0">
+                          <a:solidFill>
+                            <a:schemeClr val="tx1">
+                              <a:lumMod val="95000"/>
+                              <a:lumOff val="5000"/>
+                            </a:schemeClr>
+                          </a:solidFill>
+                          <a:latin typeface="Cambria Math" panose="02040503050406030204" pitchFamily="18" charset="0"/>
+                          <a:cs typeface="Times New Roman" panose="02020603050405020304" pitchFamily="18" charset="0"/>
+                        </a:rPr>
+                        <m:t>𝐯</m:t>
+                      </m:r>
+                      <m:r>
+                        <a:rPr lang="en-US" sz="2790" b="1" i="0" smtClean="0">
+                          <a:solidFill>
+                            <a:schemeClr val="tx1">
+                              <a:lumMod val="95000"/>
+                              <a:lumOff val="5000"/>
+                            </a:schemeClr>
+                          </a:solidFill>
+                          <a:latin typeface="Cambria Math" panose="02040503050406030204" pitchFamily="18" charset="0"/>
+                          <a:cs typeface="Times New Roman" panose="02020603050405020304" pitchFamily="18" charset="0"/>
+                        </a:rPr>
+                        <m:t>)</m:t>
+                      </m:r>
+                    </m:oMath>
+                  </m:oMathPara>
+                </a14:m>
+                <a:endParaRPr lang="en-US" sz="2790" b="1" dirty="0">
+                  <a:solidFill>
+                    <a:schemeClr val="tx1">
+                      <a:lumMod val="95000"/>
+                      <a:lumOff val="5000"/>
+                    </a:schemeClr>
+                  </a:solidFill>
+                  <a:latin typeface="Times New Roman" panose="02020603050405020304" pitchFamily="18" charset="0"/>
+                  <a:cs typeface="Times New Roman" panose="02020603050405020304" pitchFamily="18" charset="0"/>
+                </a:endParaRPr>
+              </a:p>
+            </p:txBody>
+          </p:sp>
+        </mc:Choice>
+        <mc:Fallback xmlns="">
+          <p:sp>
+            <p:nvSpPr>
+              <p:cNvPr id="1152" name="Rectangle: Rounded Corners 1151">
+                <a:extLst>
+                  <a:ext uri="{FF2B5EF4-FFF2-40B4-BE49-F238E27FC236}">
+                    <a16:creationId xmlns:a16="http://schemas.microsoft.com/office/drawing/2014/main" id="{BF5A8185-5F5F-03E2-4828-FC71BED88A0E}"/>
+                  </a:ext>
+                </a:extLst>
+              </p:cNvPr>
+              <p:cNvSpPr>
+                <a:spLocks noRot="1" noChangeAspect="1" noMove="1" noResize="1" noEditPoints="1" noAdjustHandles="1" noChangeArrowheads="1" noChangeShapeType="1" noTextEdit="1"/>
+              </p:cNvSpPr>
+              <p:nvPr/>
+            </p:nvSpPr>
+            <p:spPr>
+              <a:xfrm>
+                <a:off x="1356780" y="5860407"/>
+                <a:ext cx="1426552" cy="539330"/>
+              </a:xfrm>
+              <a:prstGeom prst="roundRect">
+                <a:avLst>
+                  <a:gd name="adj" fmla="val 6239"/>
+                </a:avLst>
+              </a:prstGeom>
+              <a:blipFill>
+                <a:blip r:embed="rId29"/>
+                <a:stretch>
+                  <a:fillRect/>
+                </a:stretch>
+              </a:blipFill>
+              <a:ln w="28575">
+                <a:prstDash val="solid"/>
+              </a:ln>
+              <a:effectLst>
+                <a:outerShdw blurRad="50800" dist="38100" dir="5400000" algn="t" rotWithShape="0">
+                  <a:prstClr val="black">
+                    <a:alpha val="40000"/>
+                  </a:prstClr>
+                </a:outerShdw>
+              </a:effectLst>
+            </p:spPr>
+            <p:txBody>
+              <a:bodyPr/>
+              <a:lstStyle/>
+              <a:p>
+                <a:r>
+                  <a:rPr lang="en-US">
+                    <a:noFill/>
+                  </a:rPr>
+                  <a:t> </a:t>
+                </a:r>
+              </a:p>
+            </p:txBody>
+          </p:sp>
+        </mc:Fallback>
+      </mc:AlternateContent>
+      <p:sp>
+        <p:nvSpPr>
+          <p:cNvPr id="1153" name="Arrow: Right 1152">
+            <a:extLst>
+              <a:ext uri="{FF2B5EF4-FFF2-40B4-BE49-F238E27FC236}">
+                <a16:creationId xmlns:a16="http://schemas.microsoft.com/office/drawing/2014/main" id="{4F548775-4604-CF59-E6C7-8E3F0F3EA57F}"/>
+              </a:ext>
+            </a:extLst>
+          </p:cNvPr>
+          <p:cNvSpPr/>
+          <p:nvPr/>
+        </p:nvSpPr>
+        <p:spPr>
+          <a:xfrm>
+            <a:off x="2913921" y="4452659"/>
+            <a:ext cx="500610" cy="102690"/>
+          </a:xfrm>
+          <a:prstGeom prst="rightArrow">
+            <a:avLst>
+              <a:gd name="adj1" fmla="val 28497"/>
+              <a:gd name="adj2" fmla="val 69382"/>
+            </a:avLst>
+          </a:prstGeom>
+          <a:solidFill>
+            <a:schemeClr val="tx1"/>
+          </a:solidFill>
+          <a:ln>
+            <a:solidFill>
+              <a:schemeClr val="tx1"/>
+            </a:solidFill>
+          </a:ln>
+        </p:spPr>
+        <p:style>
+          <a:lnRef idx="2">
+            <a:schemeClr val="accent1">
+              <a:shade val="15000"/>
+            </a:schemeClr>
+          </a:lnRef>
+          <a:fillRef idx="1">
+            <a:schemeClr val="accent1"/>
+          </a:fillRef>
+          <a:effectRef idx="0">
+            <a:schemeClr val="accent1"/>
+          </a:effectRef>
+          <a:fontRef idx="minor">
+            <a:schemeClr val="lt1"/>
+          </a:fontRef>
+        </p:style>
+        <p:txBody>
+          <a:bodyPr rtlCol="0" anchor="ctr"/>
+          <a:lstStyle/>
+          <a:p>
+            <a:pPr algn="ctr"/>
+            <a:endParaRPr lang="en-US"/>
+          </a:p>
+        </p:txBody>
+      </p:sp>
+      <p:sp>
+        <p:nvSpPr>
+          <p:cNvPr id="1154" name="Arrow: Right 1153">
+            <a:extLst>
+              <a:ext uri="{FF2B5EF4-FFF2-40B4-BE49-F238E27FC236}">
+                <a16:creationId xmlns:a16="http://schemas.microsoft.com/office/drawing/2014/main" id="{6B5F8950-89C7-F6AD-7308-AAAE83BBCA88}"/>
+              </a:ext>
+            </a:extLst>
+          </p:cNvPr>
+          <p:cNvSpPr/>
+          <p:nvPr/>
+        </p:nvSpPr>
+        <p:spPr>
+          <a:xfrm>
+            <a:off x="2913920" y="5087558"/>
+            <a:ext cx="500610" cy="102690"/>
+          </a:xfrm>
+          <a:prstGeom prst="rightArrow">
+            <a:avLst>
+              <a:gd name="adj1" fmla="val 28497"/>
+              <a:gd name="adj2" fmla="val 69382"/>
+            </a:avLst>
+          </a:prstGeom>
+          <a:solidFill>
+            <a:schemeClr val="tx1"/>
+          </a:solidFill>
+          <a:ln>
+            <a:solidFill>
+              <a:schemeClr val="tx1"/>
+            </a:solidFill>
+          </a:ln>
+        </p:spPr>
+        <p:style>
+          <a:lnRef idx="2">
+            <a:schemeClr val="accent1">
+              <a:shade val="15000"/>
+            </a:schemeClr>
+          </a:lnRef>
+          <a:fillRef idx="1">
+            <a:schemeClr val="accent1"/>
+          </a:fillRef>
+          <a:effectRef idx="0">
+            <a:schemeClr val="accent1"/>
+          </a:effectRef>
+          <a:fontRef idx="minor">
+            <a:schemeClr val="lt1"/>
+          </a:fontRef>
+        </p:style>
+        <p:txBody>
+          <a:bodyPr rtlCol="0" anchor="ctr"/>
+          <a:lstStyle/>
+          <a:p>
+            <a:pPr algn="ctr"/>
+            <a:endParaRPr lang="en-US"/>
+          </a:p>
+        </p:txBody>
+      </p:sp>
+      <p:sp>
+        <p:nvSpPr>
+          <p:cNvPr id="1155" name="Arrow: Right 1154">
+            <a:extLst>
+              <a:ext uri="{FF2B5EF4-FFF2-40B4-BE49-F238E27FC236}">
+                <a16:creationId xmlns:a16="http://schemas.microsoft.com/office/drawing/2014/main" id="{76A45E06-872E-D4FE-6543-BEA8F8285509}"/>
+              </a:ext>
+            </a:extLst>
+          </p:cNvPr>
+          <p:cNvSpPr/>
+          <p:nvPr/>
+        </p:nvSpPr>
+        <p:spPr>
+          <a:xfrm>
+            <a:off x="2913919" y="6057969"/>
+            <a:ext cx="500610" cy="102690"/>
+          </a:xfrm>
+          <a:prstGeom prst="rightArrow">
+            <a:avLst>
+              <a:gd name="adj1" fmla="val 28497"/>
+              <a:gd name="adj2" fmla="val 69382"/>
+            </a:avLst>
+          </a:prstGeom>
+          <a:solidFill>
+            <a:schemeClr val="tx1"/>
+          </a:solidFill>
+          <a:ln>
+            <a:solidFill>
+              <a:schemeClr val="tx1"/>
+            </a:solidFill>
+          </a:ln>
+        </p:spPr>
+        <p:style>
+          <a:lnRef idx="2">
+            <a:schemeClr val="accent1">
+              <a:shade val="15000"/>
+            </a:schemeClr>
+          </a:lnRef>
+          <a:fillRef idx="1">
+            <a:schemeClr val="accent1"/>
+          </a:fillRef>
+          <a:effectRef idx="0">
+            <a:schemeClr val="accent1"/>
+          </a:effectRef>
+          <a:fontRef idx="minor">
+            <a:schemeClr val="lt1"/>
+          </a:fontRef>
+        </p:style>
+        <p:txBody>
+          <a:bodyPr rtlCol="0" anchor="ctr"/>
+          <a:lstStyle/>
+          <a:p>
+            <a:pPr algn="ctr"/>
+            <a:endParaRPr lang="en-US"/>
+          </a:p>
+        </p:txBody>
+      </p:sp>
+      <p:sp>
+        <p:nvSpPr>
+          <p:cNvPr id="1156" name="Rectangle: Rounded Corners 1155">
+            <a:extLst>
+              <a:ext uri="{FF2B5EF4-FFF2-40B4-BE49-F238E27FC236}">
+                <a16:creationId xmlns:a16="http://schemas.microsoft.com/office/drawing/2014/main" id="{DA7783F3-D10B-1F77-1292-4AF6DD11543E}"/>
+              </a:ext>
+            </a:extLst>
+          </p:cNvPr>
+          <p:cNvSpPr/>
+          <p:nvPr/>
+        </p:nvSpPr>
+        <p:spPr>
+          <a:xfrm>
+            <a:off x="3508520" y="4236714"/>
+            <a:ext cx="1064970" cy="539330"/>
+          </a:xfrm>
+          <a:prstGeom prst="roundRect">
+            <a:avLst>
+              <a:gd name="adj" fmla="val 6239"/>
+            </a:avLst>
+          </a:prstGeom>
+          <a:solidFill>
+            <a:schemeClr val="bg1">
+              <a:lumMod val="95000"/>
+            </a:schemeClr>
+          </a:solidFill>
+          <a:ln w="28575">
+            <a:prstDash val="solid"/>
+          </a:ln>
+          <a:effectLst>
+            <a:outerShdw blurRad="50800" dist="38100" dir="5400000" algn="t" rotWithShape="0">
+              <a:prstClr val="black">
+                <a:alpha val="40000"/>
+              </a:prstClr>
+            </a:outerShdw>
+          </a:effectLst>
+        </p:spPr>
+        <p:style>
+          <a:lnRef idx="2">
+            <a:schemeClr val="accent1">
+              <a:shade val="15000"/>
+            </a:schemeClr>
+          </a:lnRef>
+          <a:fillRef idx="1">
+            <a:schemeClr val="accent1"/>
+          </a:fillRef>
+          <a:effectRef idx="0">
+            <a:schemeClr val="accent1"/>
+          </a:effectRef>
+          <a:fontRef idx="minor">
+            <a:schemeClr val="lt1"/>
+          </a:fontRef>
+        </p:style>
+        <p:txBody>
+          <a:bodyPr rtlCol="0" anchor="ctr"/>
+          <a:lstStyle/>
+          <a:p>
+            <a:pPr algn="ctr"/>
+            <a:r>
+              <a:rPr lang="en-US" sz="2790" b="1" dirty="0">
+                <a:solidFill>
+                  <a:schemeClr val="tx1">
+                    <a:lumMod val="95000"/>
+                    <a:lumOff val="5000"/>
+                  </a:schemeClr>
+                </a:solidFill>
+                <a:latin typeface="Times New Roman" panose="02020603050405020304" pitchFamily="18" charset="0"/>
+                <a:cs typeface="Times New Roman" panose="02020603050405020304" pitchFamily="18" charset="0"/>
+              </a:rPr>
+              <a:t>TLE</a:t>
+            </a:r>
+          </a:p>
+        </p:txBody>
+      </p:sp>
+      <p:sp>
+        <p:nvSpPr>
+          <p:cNvPr id="1159" name="Rectangle: Rounded Corners 1158">
+            <a:extLst>
+              <a:ext uri="{FF2B5EF4-FFF2-40B4-BE49-F238E27FC236}">
+                <a16:creationId xmlns:a16="http://schemas.microsoft.com/office/drawing/2014/main" id="{D2F85AEE-683C-9EF5-3425-6E148E4759D1}"/>
+              </a:ext>
+            </a:extLst>
+          </p:cNvPr>
+          <p:cNvSpPr/>
+          <p:nvPr/>
+        </p:nvSpPr>
+        <p:spPr>
+          <a:xfrm>
+            <a:off x="3508520" y="4885657"/>
+            <a:ext cx="1064970" cy="539330"/>
+          </a:xfrm>
+          <a:prstGeom prst="roundRect">
+            <a:avLst>
+              <a:gd name="adj" fmla="val 6239"/>
+            </a:avLst>
+          </a:prstGeom>
+          <a:solidFill>
+            <a:schemeClr val="bg1">
+              <a:lumMod val="95000"/>
+            </a:schemeClr>
+          </a:solidFill>
+          <a:ln w="28575">
+            <a:prstDash val="solid"/>
+          </a:ln>
+          <a:effectLst>
+            <a:outerShdw blurRad="50800" dist="38100" dir="5400000" algn="t" rotWithShape="0">
+              <a:prstClr val="black">
+                <a:alpha val="40000"/>
+              </a:prstClr>
+            </a:outerShdw>
+          </a:effectLst>
+        </p:spPr>
+        <p:style>
+          <a:lnRef idx="2">
+            <a:schemeClr val="accent1">
+              <a:shade val="15000"/>
+            </a:schemeClr>
+          </a:lnRef>
+          <a:fillRef idx="1">
+            <a:schemeClr val="accent1"/>
+          </a:fillRef>
+          <a:effectRef idx="0">
+            <a:schemeClr val="accent1"/>
+          </a:effectRef>
+          <a:fontRef idx="minor">
+            <a:schemeClr val="lt1"/>
+          </a:fontRef>
+        </p:style>
+        <p:txBody>
+          <a:bodyPr rtlCol="0" anchor="ctr"/>
+          <a:lstStyle/>
+          <a:p>
+            <a:pPr algn="ctr"/>
+            <a:r>
+              <a:rPr lang="en-US" sz="2790" b="1" dirty="0">
+                <a:solidFill>
+                  <a:schemeClr val="tx1">
+                    <a:lumMod val="95000"/>
+                    <a:lumOff val="5000"/>
+                  </a:schemeClr>
+                </a:solidFill>
+                <a:latin typeface="Times New Roman" panose="02020603050405020304" pitchFamily="18" charset="0"/>
+                <a:cs typeface="Times New Roman" panose="02020603050405020304" pitchFamily="18" charset="0"/>
+              </a:rPr>
+              <a:t>TLE</a:t>
+            </a:r>
+          </a:p>
+        </p:txBody>
+      </p:sp>
+      <p:sp>
+        <p:nvSpPr>
+          <p:cNvPr id="1160" name="Rectangle: Rounded Corners 1159">
+            <a:extLst>
+              <a:ext uri="{FF2B5EF4-FFF2-40B4-BE49-F238E27FC236}">
+                <a16:creationId xmlns:a16="http://schemas.microsoft.com/office/drawing/2014/main" id="{EEA5ACEA-793C-403A-E877-1702A7E8C18D}"/>
+              </a:ext>
+            </a:extLst>
+          </p:cNvPr>
+          <p:cNvSpPr/>
+          <p:nvPr/>
+        </p:nvSpPr>
+        <p:spPr>
+          <a:xfrm>
+            <a:off x="3508520" y="5845631"/>
+            <a:ext cx="1064970" cy="539330"/>
+          </a:xfrm>
+          <a:prstGeom prst="roundRect">
+            <a:avLst>
+              <a:gd name="adj" fmla="val 6239"/>
+            </a:avLst>
+          </a:prstGeom>
+          <a:solidFill>
+            <a:schemeClr val="bg1">
+              <a:lumMod val="95000"/>
+            </a:schemeClr>
+          </a:solidFill>
+          <a:ln w="28575">
+            <a:prstDash val="solid"/>
+          </a:ln>
+          <a:effectLst>
+            <a:outerShdw blurRad="50800" dist="38100" dir="5400000" algn="t" rotWithShape="0">
+              <a:prstClr val="black">
+                <a:alpha val="40000"/>
+              </a:prstClr>
+            </a:outerShdw>
+          </a:effectLst>
+        </p:spPr>
+        <p:style>
+          <a:lnRef idx="2">
+            <a:schemeClr val="accent1">
+              <a:shade val="15000"/>
+            </a:schemeClr>
+          </a:lnRef>
+          <a:fillRef idx="1">
+            <a:schemeClr val="accent1"/>
+          </a:fillRef>
+          <a:effectRef idx="0">
+            <a:schemeClr val="accent1"/>
+          </a:effectRef>
+          <a:fontRef idx="minor">
+            <a:schemeClr val="lt1"/>
+          </a:fontRef>
+        </p:style>
+        <p:txBody>
+          <a:bodyPr rtlCol="0" anchor="ctr"/>
+          <a:lstStyle/>
+          <a:p>
+            <a:pPr algn="ctr"/>
+            <a:r>
+              <a:rPr lang="en-US" sz="2790" b="1" dirty="0">
+                <a:solidFill>
+                  <a:schemeClr val="tx1">
+                    <a:lumMod val="95000"/>
+                    <a:lumOff val="5000"/>
+                  </a:schemeClr>
+                </a:solidFill>
+                <a:latin typeface="Times New Roman" panose="02020603050405020304" pitchFamily="18" charset="0"/>
+                <a:cs typeface="Times New Roman" panose="02020603050405020304" pitchFamily="18" charset="0"/>
+              </a:rPr>
+              <a:t>TLE</a:t>
+            </a:r>
+          </a:p>
+        </p:txBody>
+      </p:sp>
+      <p:sp>
+        <p:nvSpPr>
+          <p:cNvPr id="1161" name="Arrow: Right 1160">
+            <a:extLst>
+              <a:ext uri="{FF2B5EF4-FFF2-40B4-BE49-F238E27FC236}">
+                <a16:creationId xmlns:a16="http://schemas.microsoft.com/office/drawing/2014/main" id="{2796C9CE-0804-2EFF-10EF-232BD4213C8A}"/>
+              </a:ext>
+            </a:extLst>
+          </p:cNvPr>
+          <p:cNvSpPr/>
+          <p:nvPr/>
+        </p:nvSpPr>
+        <p:spPr>
+          <a:xfrm>
+            <a:off x="4705581" y="4452659"/>
+            <a:ext cx="500610" cy="102690"/>
+          </a:xfrm>
+          <a:prstGeom prst="rightArrow">
+            <a:avLst>
+              <a:gd name="adj1" fmla="val 28497"/>
+              <a:gd name="adj2" fmla="val 69382"/>
+            </a:avLst>
+          </a:prstGeom>
+          <a:solidFill>
+            <a:schemeClr val="tx1"/>
+          </a:solidFill>
+          <a:ln>
+            <a:solidFill>
+              <a:schemeClr val="tx1"/>
+            </a:solidFill>
+          </a:ln>
+        </p:spPr>
+        <p:style>
+          <a:lnRef idx="2">
+            <a:schemeClr val="accent1">
+              <a:shade val="15000"/>
+            </a:schemeClr>
+          </a:lnRef>
+          <a:fillRef idx="1">
+            <a:schemeClr val="accent1"/>
+          </a:fillRef>
+          <a:effectRef idx="0">
+            <a:schemeClr val="accent1"/>
+          </a:effectRef>
+          <a:fontRef idx="minor">
+            <a:schemeClr val="lt1"/>
+          </a:fontRef>
+        </p:style>
+        <p:txBody>
+          <a:bodyPr rtlCol="0" anchor="ctr"/>
+          <a:lstStyle/>
+          <a:p>
+            <a:pPr algn="ctr"/>
+            <a:endParaRPr lang="en-US"/>
+          </a:p>
+        </p:txBody>
+      </p:sp>
+      <p:sp>
+        <p:nvSpPr>
+          <p:cNvPr id="1162" name="Arrow: Right 1161">
+            <a:extLst>
+              <a:ext uri="{FF2B5EF4-FFF2-40B4-BE49-F238E27FC236}">
+                <a16:creationId xmlns:a16="http://schemas.microsoft.com/office/drawing/2014/main" id="{0870D2F0-FE40-B1F0-E0DC-71CDF82190A4}"/>
+              </a:ext>
+            </a:extLst>
+          </p:cNvPr>
+          <p:cNvSpPr/>
+          <p:nvPr/>
+        </p:nvSpPr>
+        <p:spPr>
+          <a:xfrm>
+            <a:off x="4705581" y="5102308"/>
+            <a:ext cx="500610" cy="102690"/>
+          </a:xfrm>
+          <a:prstGeom prst="rightArrow">
+            <a:avLst>
+              <a:gd name="adj1" fmla="val 28497"/>
+              <a:gd name="adj2" fmla="val 69382"/>
+            </a:avLst>
+          </a:prstGeom>
+          <a:solidFill>
+            <a:schemeClr val="tx1"/>
+          </a:solidFill>
+          <a:ln>
+            <a:solidFill>
+              <a:schemeClr val="tx1"/>
+            </a:solidFill>
+          </a:ln>
+        </p:spPr>
+        <p:style>
+          <a:lnRef idx="2">
+            <a:schemeClr val="accent1">
+              <a:shade val="15000"/>
+            </a:schemeClr>
+          </a:lnRef>
+          <a:fillRef idx="1">
+            <a:schemeClr val="accent1"/>
+          </a:fillRef>
+          <a:effectRef idx="0">
+            <a:schemeClr val="accent1"/>
+          </a:effectRef>
+          <a:fontRef idx="minor">
+            <a:schemeClr val="lt1"/>
+          </a:fontRef>
+        </p:style>
+        <p:txBody>
+          <a:bodyPr rtlCol="0" anchor="ctr"/>
+          <a:lstStyle/>
+          <a:p>
+            <a:pPr algn="ctr"/>
+            <a:endParaRPr lang="en-US"/>
+          </a:p>
+        </p:txBody>
+      </p:sp>
+      <p:sp>
+        <p:nvSpPr>
+          <p:cNvPr id="1163" name="Arrow: Right 1162">
+            <a:extLst>
+              <a:ext uri="{FF2B5EF4-FFF2-40B4-BE49-F238E27FC236}">
+                <a16:creationId xmlns:a16="http://schemas.microsoft.com/office/drawing/2014/main" id="{8375402B-91D9-7884-CED2-EE96128669DA}"/>
+              </a:ext>
+            </a:extLst>
+          </p:cNvPr>
+          <p:cNvSpPr/>
+          <p:nvPr/>
+        </p:nvSpPr>
+        <p:spPr>
+          <a:xfrm>
+            <a:off x="4705581" y="6063935"/>
+            <a:ext cx="500610" cy="102690"/>
+          </a:xfrm>
+          <a:prstGeom prst="rightArrow">
+            <a:avLst>
+              <a:gd name="adj1" fmla="val 28497"/>
+              <a:gd name="adj2" fmla="val 69382"/>
+            </a:avLst>
+          </a:prstGeom>
+          <a:solidFill>
+            <a:schemeClr val="tx1"/>
+          </a:solidFill>
+          <a:ln>
+            <a:solidFill>
+              <a:schemeClr val="tx1"/>
+            </a:solidFill>
+          </a:ln>
+        </p:spPr>
+        <p:style>
+          <a:lnRef idx="2">
+            <a:schemeClr val="accent1">
+              <a:shade val="15000"/>
+            </a:schemeClr>
+          </a:lnRef>
+          <a:fillRef idx="1">
+            <a:schemeClr val="accent1"/>
+          </a:fillRef>
+          <a:effectRef idx="0">
+            <a:schemeClr val="accent1"/>
+          </a:effectRef>
+          <a:fontRef idx="minor">
+            <a:schemeClr val="lt1"/>
+          </a:fontRef>
+        </p:style>
+        <p:txBody>
+          <a:bodyPr rtlCol="0" anchor="ctr"/>
+          <a:lstStyle/>
+          <a:p>
+            <a:pPr algn="ctr"/>
+            <a:endParaRPr lang="en-US"/>
+          </a:p>
+        </p:txBody>
+      </p:sp>
+      <p:sp>
+        <p:nvSpPr>
+          <p:cNvPr id="1164" name="TextBox 1163">
+            <a:extLst>
+              <a:ext uri="{FF2B5EF4-FFF2-40B4-BE49-F238E27FC236}">
+                <a16:creationId xmlns:a16="http://schemas.microsoft.com/office/drawing/2014/main" id="{23A8EB5E-95C8-4503-9ADE-E1AD4AEFFE5C}"/>
+              </a:ext>
+            </a:extLst>
+          </p:cNvPr>
+          <p:cNvSpPr txBox="1"/>
+          <p:nvPr/>
+        </p:nvSpPr>
+        <p:spPr>
+          <a:xfrm>
+            <a:off x="3823537" y="5568010"/>
+            <a:ext cx="421910" cy="200055"/>
+          </a:xfrm>
+          <a:prstGeom prst="rect">
+            <a:avLst/>
+          </a:prstGeom>
+          <a:noFill/>
+        </p:spPr>
+        <p:txBody>
+          <a:bodyPr wrap="square" rtlCol="0">
+            <a:spAutoFit/>
+          </a:bodyPr>
+          <a:lstStyle/>
+          <a:p>
+            <a:r>
+              <a:rPr lang="en-US" sz="700" dirty="0"/>
+              <a:t>● ● ●</a:t>
+            </a:r>
+          </a:p>
+        </p:txBody>
+      </p:sp>
+      <mc:AlternateContent xmlns:mc="http://schemas.openxmlformats.org/markup-compatibility/2006" xmlns:a14="http://schemas.microsoft.com/office/drawing/2010/main">
+        <mc:Choice Requires="a14">
+          <p:sp>
+            <p:nvSpPr>
+              <p:cNvPr id="1165" name="Rectangle: Rounded Corners 1164">
+                <a:extLst>
+                  <a:ext uri="{FF2B5EF4-FFF2-40B4-BE49-F238E27FC236}">
+                    <a16:creationId xmlns:a16="http://schemas.microsoft.com/office/drawing/2014/main" id="{927E2461-3D19-B84F-3944-4063B36D01EF}"/>
+                  </a:ext>
+                </a:extLst>
+              </p:cNvPr>
+              <p:cNvSpPr/>
+              <p:nvPr/>
+            </p:nvSpPr>
+            <p:spPr>
+              <a:xfrm>
+                <a:off x="5298678" y="4236714"/>
+                <a:ext cx="1426552" cy="539330"/>
+              </a:xfrm>
+              <a:prstGeom prst="roundRect">
+                <a:avLst>
+                  <a:gd name="adj" fmla="val 6239"/>
+                </a:avLst>
+              </a:prstGeom>
+              <a:solidFill>
+                <a:schemeClr val="bg1">
+                  <a:lumMod val="95000"/>
+                </a:schemeClr>
+              </a:solidFill>
+              <a:ln w="28575">
+                <a:prstDash val="solid"/>
+              </a:ln>
+              <a:effectLst>
+                <a:outerShdw blurRad="50800" dist="38100" dir="5400000" algn="t" rotWithShape="0">
+                  <a:prstClr val="black">
+                    <a:alpha val="40000"/>
+                  </a:prstClr>
+                </a:outerShdw>
+              </a:effectLst>
+            </p:spPr>
+            <p:style>
+              <a:lnRef idx="2">
+                <a:schemeClr val="accent1">
+                  <a:shade val="15000"/>
+                </a:schemeClr>
+              </a:lnRef>
+              <a:fillRef idx="1">
+                <a:schemeClr val="accent1"/>
+              </a:fillRef>
+              <a:effectRef idx="0">
+                <a:schemeClr val="accent1"/>
+              </a:effectRef>
+              <a:fontRef idx="minor">
+                <a:schemeClr val="lt1"/>
+              </a:fontRef>
+            </p:style>
+            <p:txBody>
+              <a:bodyPr rtlCol="0" anchor="ctr"/>
+              <a:lstStyle/>
+              <a:p>
+                <a:pPr algn="ctr"/>
+                <a14:m>
+                  <m:oMathPara xmlns:m="http://schemas.openxmlformats.org/officeDocument/2006/math">
+                    <m:oMathParaPr>
+                      <m:jc m:val="centerGroup"/>
+                    </m:oMathParaPr>
+                    <m:oMath xmlns:m="http://schemas.openxmlformats.org/officeDocument/2006/math">
+                      <m:sSubSup>
+                        <m:sSubSupPr>
+                          <m:ctrlPr>
+                            <a:rPr lang="en-US" sz="2790" b="1" i="1" smtClean="0">
+                              <a:solidFill>
+                                <a:schemeClr val="tx1">
+                                  <a:lumMod val="95000"/>
+                                  <a:lumOff val="5000"/>
+                                </a:schemeClr>
+                              </a:solidFill>
+                              <a:latin typeface="Cambria Math" panose="02040503050406030204" pitchFamily="18" charset="0"/>
+                              <a:cs typeface="Times New Roman" panose="02020603050405020304" pitchFamily="18" charset="0"/>
+                            </a:rPr>
+                          </m:ctrlPr>
+                        </m:sSubSupPr>
+                        <m:e>
+                          <m:r>
+                            <a:rPr lang="en-US" sz="2790" b="1" i="1" smtClean="0">
+                              <a:solidFill>
+                                <a:schemeClr val="tx1">
+                                  <a:lumMod val="95000"/>
+                                  <a:lumOff val="5000"/>
+                                </a:schemeClr>
+                              </a:solidFill>
+                              <a:latin typeface="Cambria Math" panose="02040503050406030204" pitchFamily="18" charset="0"/>
+                              <a:cs typeface="Times New Roman" panose="02020603050405020304" pitchFamily="18" charset="0"/>
+                            </a:rPr>
+                            <m:t>𝑳𝑬</m:t>
+                          </m:r>
+                        </m:e>
+                        <m:sub>
+                          <m:r>
+                            <a:rPr lang="en-US" sz="2790" b="1" i="1" smtClean="0">
+                              <a:solidFill>
+                                <a:schemeClr val="tx1">
+                                  <a:lumMod val="95000"/>
+                                  <a:lumOff val="5000"/>
+                                </a:schemeClr>
+                              </a:solidFill>
+                              <a:latin typeface="Cambria Math" panose="02040503050406030204" pitchFamily="18" charset="0"/>
+                              <a:cs typeface="Times New Roman" panose="02020603050405020304" pitchFamily="18" charset="0"/>
+                            </a:rPr>
+                            <m:t>𝒊</m:t>
+                          </m:r>
+                        </m:sub>
+                        <m:sup>
+                          <m:r>
+                            <a:rPr lang="en-US" sz="2790" b="1" i="1">
+                              <a:solidFill>
+                                <a:schemeClr val="tx1">
+                                  <a:lumMod val="95000"/>
+                                  <a:lumOff val="5000"/>
+                                </a:schemeClr>
+                              </a:solidFill>
+                              <a:latin typeface="Cambria Math" panose="02040503050406030204" pitchFamily="18" charset="0"/>
+                              <a:cs typeface="Times New Roman" panose="02020603050405020304" pitchFamily="18" charset="0"/>
+                            </a:rPr>
+                            <m:t>𝟏</m:t>
+                          </m:r>
+                        </m:sup>
+                      </m:sSubSup>
+                      <m:r>
+                        <a:rPr lang="en-US" sz="2790" b="1">
+                          <a:solidFill>
+                            <a:schemeClr val="tx1">
+                              <a:lumMod val="95000"/>
+                              <a:lumOff val="5000"/>
+                            </a:schemeClr>
+                          </a:solidFill>
+                          <a:latin typeface="Cambria Math" panose="02040503050406030204" pitchFamily="18" charset="0"/>
+                          <a:cs typeface="Times New Roman" panose="02020603050405020304" pitchFamily="18" charset="0"/>
+                        </a:rPr>
+                        <m:t>(</m:t>
+                      </m:r>
+                      <m:r>
+                        <a:rPr lang="en-US" sz="2790" b="1">
+                          <a:solidFill>
+                            <a:schemeClr val="tx1">
+                              <a:lumMod val="95000"/>
+                              <a:lumOff val="5000"/>
+                            </a:schemeClr>
+                          </a:solidFill>
+                          <a:latin typeface="Cambria Math" panose="02040503050406030204" pitchFamily="18" charset="0"/>
+                          <a:cs typeface="Times New Roman" panose="02020603050405020304" pitchFamily="18" charset="0"/>
+                        </a:rPr>
+                        <m:t>𝐯</m:t>
+                      </m:r>
+                      <m:r>
+                        <a:rPr lang="en-US" sz="2790" b="1">
+                          <a:solidFill>
+                            <a:schemeClr val="tx1">
+                              <a:lumMod val="95000"/>
+                              <a:lumOff val="5000"/>
+                            </a:schemeClr>
+                          </a:solidFill>
+                          <a:latin typeface="Cambria Math" panose="02040503050406030204" pitchFamily="18" charset="0"/>
+                          <a:cs typeface="Times New Roman" panose="02020603050405020304" pitchFamily="18" charset="0"/>
+                        </a:rPr>
+                        <m:t>)</m:t>
+                      </m:r>
+                    </m:oMath>
+                  </m:oMathPara>
+                </a14:m>
+                <a:endParaRPr lang="en-US" sz="2790" b="1" dirty="0">
+                  <a:solidFill>
+                    <a:schemeClr val="tx1">
+                      <a:lumMod val="95000"/>
+                      <a:lumOff val="5000"/>
+                    </a:schemeClr>
+                  </a:solidFill>
+                  <a:latin typeface="Times New Roman" panose="02020603050405020304" pitchFamily="18" charset="0"/>
+                  <a:cs typeface="Times New Roman" panose="02020603050405020304" pitchFamily="18" charset="0"/>
+                </a:endParaRPr>
+              </a:p>
+            </p:txBody>
+          </p:sp>
+        </mc:Choice>
+        <mc:Fallback xmlns="">
+          <p:sp>
+            <p:nvSpPr>
+              <p:cNvPr id="1165" name="Rectangle: Rounded Corners 1164">
+                <a:extLst>
+                  <a:ext uri="{FF2B5EF4-FFF2-40B4-BE49-F238E27FC236}">
+                    <a16:creationId xmlns:a16="http://schemas.microsoft.com/office/drawing/2014/main" id="{927E2461-3D19-B84F-3944-4063B36D01EF}"/>
+                  </a:ext>
+                </a:extLst>
+              </p:cNvPr>
+              <p:cNvSpPr>
+                <a:spLocks noRot="1" noChangeAspect="1" noMove="1" noResize="1" noEditPoints="1" noAdjustHandles="1" noChangeArrowheads="1" noChangeShapeType="1" noTextEdit="1"/>
+              </p:cNvSpPr>
+              <p:nvPr/>
+            </p:nvSpPr>
+            <p:spPr>
+              <a:xfrm>
+                <a:off x="5298678" y="4236714"/>
+                <a:ext cx="1426552" cy="539330"/>
+              </a:xfrm>
+              <a:prstGeom prst="roundRect">
+                <a:avLst>
+                  <a:gd name="adj" fmla="val 6239"/>
+                </a:avLst>
+              </a:prstGeom>
+              <a:blipFill>
+                <a:blip r:embed="rId30"/>
+                <a:stretch>
+                  <a:fillRect/>
+                </a:stretch>
+              </a:blipFill>
+              <a:ln w="28575">
+                <a:prstDash val="solid"/>
+              </a:ln>
+              <a:effectLst>
+                <a:outerShdw blurRad="50800" dist="38100" dir="5400000" algn="t" rotWithShape="0">
+                  <a:prstClr val="black">
+                    <a:alpha val="40000"/>
+                  </a:prstClr>
+                </a:outerShdw>
+              </a:effectLst>
+            </p:spPr>
+            <p:txBody>
+              <a:bodyPr/>
+              <a:lstStyle/>
+              <a:p>
+                <a:r>
+                  <a:rPr lang="en-US">
+                    <a:noFill/>
+                  </a:rPr>
+                  <a:t> </a:t>
+                </a:r>
+              </a:p>
+            </p:txBody>
+          </p:sp>
+        </mc:Fallback>
+      </mc:AlternateContent>
+      <mc:AlternateContent xmlns:mc="http://schemas.openxmlformats.org/markup-compatibility/2006" xmlns:a14="http://schemas.microsoft.com/office/drawing/2010/main">
+        <mc:Choice Requires="a14">
+          <p:sp>
+            <p:nvSpPr>
+              <p:cNvPr id="1166" name="Rectangle: Rounded Corners 1165">
+                <a:extLst>
+                  <a:ext uri="{FF2B5EF4-FFF2-40B4-BE49-F238E27FC236}">
+                    <a16:creationId xmlns:a16="http://schemas.microsoft.com/office/drawing/2014/main" id="{B984E505-767F-7114-934C-D19FC3F81C13}"/>
+                  </a:ext>
+                </a:extLst>
+              </p:cNvPr>
+              <p:cNvSpPr/>
+              <p:nvPr/>
+            </p:nvSpPr>
+            <p:spPr>
+              <a:xfrm>
+                <a:off x="5298677" y="4885657"/>
+                <a:ext cx="1426552" cy="539330"/>
+              </a:xfrm>
+              <a:prstGeom prst="roundRect">
+                <a:avLst>
+                  <a:gd name="adj" fmla="val 6239"/>
+                </a:avLst>
+              </a:prstGeom>
+              <a:solidFill>
+                <a:schemeClr val="bg1">
+                  <a:lumMod val="95000"/>
+                </a:schemeClr>
+              </a:solidFill>
+              <a:ln w="28575">
+                <a:prstDash val="solid"/>
+              </a:ln>
+              <a:effectLst>
+                <a:outerShdw blurRad="50800" dist="38100" dir="5400000" algn="t" rotWithShape="0">
+                  <a:prstClr val="black">
+                    <a:alpha val="40000"/>
+                  </a:prstClr>
+                </a:outerShdw>
+              </a:effectLst>
+            </p:spPr>
+            <p:style>
+              <a:lnRef idx="2">
+                <a:schemeClr val="accent1">
+                  <a:shade val="15000"/>
+                </a:schemeClr>
+              </a:lnRef>
+              <a:fillRef idx="1">
+                <a:schemeClr val="accent1"/>
+              </a:fillRef>
+              <a:effectRef idx="0">
+                <a:schemeClr val="accent1"/>
+              </a:effectRef>
+              <a:fontRef idx="minor">
+                <a:schemeClr val="lt1"/>
+              </a:fontRef>
+            </p:style>
+            <p:txBody>
+              <a:bodyPr rtlCol="0" anchor="ctr"/>
+              <a:lstStyle/>
+              <a:p>
+                <a:pPr algn="ctr"/>
+                <a14:m>
+                  <m:oMathPara xmlns:m="http://schemas.openxmlformats.org/officeDocument/2006/math">
+                    <m:oMathParaPr>
+                      <m:jc m:val="centerGroup"/>
+                    </m:oMathParaPr>
+                    <m:oMath xmlns:m="http://schemas.openxmlformats.org/officeDocument/2006/math">
+                      <m:sSubSup>
+                        <m:sSubSupPr>
+                          <m:ctrlPr>
+                            <a:rPr lang="en-US" sz="2790" b="1" i="1" smtClean="0">
+                              <a:solidFill>
+                                <a:schemeClr val="tx1">
+                                  <a:lumMod val="95000"/>
+                                  <a:lumOff val="5000"/>
+                                </a:schemeClr>
+                              </a:solidFill>
+                              <a:latin typeface="Cambria Math" panose="02040503050406030204" pitchFamily="18" charset="0"/>
+                              <a:cs typeface="Times New Roman" panose="02020603050405020304" pitchFamily="18" charset="0"/>
+                            </a:rPr>
+                          </m:ctrlPr>
+                        </m:sSubSupPr>
+                        <m:e>
+                          <m:r>
+                            <a:rPr lang="en-US" sz="2790" b="1" i="1">
+                              <a:solidFill>
+                                <a:schemeClr val="tx1">
+                                  <a:lumMod val="95000"/>
+                                  <a:lumOff val="5000"/>
+                                </a:schemeClr>
+                              </a:solidFill>
+                              <a:latin typeface="Cambria Math" panose="02040503050406030204" pitchFamily="18" charset="0"/>
+                              <a:cs typeface="Times New Roman" panose="02020603050405020304" pitchFamily="18" charset="0"/>
+                            </a:rPr>
+                            <m:t>𝑹</m:t>
+                          </m:r>
+                        </m:e>
+                        <m:sub>
+                          <m:r>
+                            <a:rPr lang="en-US" sz="2790" b="1" i="1" smtClean="0">
+                              <a:solidFill>
+                                <a:schemeClr val="tx1">
+                                  <a:lumMod val="95000"/>
+                                  <a:lumOff val="5000"/>
+                                </a:schemeClr>
+                              </a:solidFill>
+                              <a:latin typeface="Cambria Math" panose="02040503050406030204" pitchFamily="18" charset="0"/>
+                              <a:cs typeface="Times New Roman" panose="02020603050405020304" pitchFamily="18" charset="0"/>
+                            </a:rPr>
+                            <m:t>𝒊</m:t>
+                          </m:r>
+                          <m:r>
+                            <a:rPr lang="en-US" sz="2790" b="1" i="1" smtClean="0">
+                              <a:solidFill>
+                                <a:schemeClr val="tx1">
+                                  <a:lumMod val="95000"/>
+                                  <a:lumOff val="5000"/>
+                                </a:schemeClr>
+                              </a:solidFill>
+                              <a:latin typeface="Cambria Math" panose="02040503050406030204" pitchFamily="18" charset="0"/>
+                              <a:cs typeface="Times New Roman" panose="02020603050405020304" pitchFamily="18" charset="0"/>
+                            </a:rPr>
+                            <m:t>+</m:t>
+                          </m:r>
+                          <m:r>
+                            <a:rPr lang="en-US" sz="2790" b="1" i="1" smtClean="0">
+                              <a:solidFill>
+                                <a:schemeClr val="tx1">
+                                  <a:lumMod val="95000"/>
+                                  <a:lumOff val="5000"/>
+                                </a:schemeClr>
+                              </a:solidFill>
+                              <a:latin typeface="Cambria Math" panose="02040503050406030204" pitchFamily="18" charset="0"/>
+                              <a:cs typeface="Times New Roman" panose="02020603050405020304" pitchFamily="18" charset="0"/>
+                            </a:rPr>
+                            <m:t>𝟏</m:t>
+                          </m:r>
+                        </m:sub>
+                        <m:sup>
+                          <m:r>
+                            <a:rPr lang="en-US" sz="2790" b="1" i="1">
+                              <a:solidFill>
+                                <a:schemeClr val="tx1">
+                                  <a:lumMod val="95000"/>
+                                  <a:lumOff val="5000"/>
+                                </a:schemeClr>
+                              </a:solidFill>
+                              <a:latin typeface="Cambria Math" panose="02040503050406030204" pitchFamily="18" charset="0"/>
+                              <a:cs typeface="Times New Roman" panose="02020603050405020304" pitchFamily="18" charset="0"/>
+                            </a:rPr>
+                            <m:t>𝟏</m:t>
+                          </m:r>
+                        </m:sup>
+                      </m:sSubSup>
+                      <m:r>
+                        <a:rPr lang="en-US" sz="2790" b="1">
+                          <a:solidFill>
+                            <a:schemeClr val="tx1">
+                              <a:lumMod val="95000"/>
+                              <a:lumOff val="5000"/>
+                            </a:schemeClr>
+                          </a:solidFill>
+                          <a:latin typeface="Cambria Math" panose="02040503050406030204" pitchFamily="18" charset="0"/>
+                          <a:cs typeface="Times New Roman" panose="02020603050405020304" pitchFamily="18" charset="0"/>
+                        </a:rPr>
+                        <m:t>(</m:t>
+                      </m:r>
+                      <m:r>
+                        <a:rPr lang="en-US" sz="2790" b="1">
+                          <a:solidFill>
+                            <a:schemeClr val="tx1">
+                              <a:lumMod val="95000"/>
+                              <a:lumOff val="5000"/>
+                            </a:schemeClr>
+                          </a:solidFill>
+                          <a:latin typeface="Cambria Math" panose="02040503050406030204" pitchFamily="18" charset="0"/>
+                          <a:cs typeface="Times New Roman" panose="02020603050405020304" pitchFamily="18" charset="0"/>
+                        </a:rPr>
+                        <m:t>𝐯</m:t>
+                      </m:r>
+                      <m:r>
+                        <a:rPr lang="en-US" sz="2790" b="1">
+                          <a:solidFill>
+                            <a:schemeClr val="tx1">
+                              <a:lumMod val="95000"/>
+                              <a:lumOff val="5000"/>
+                            </a:schemeClr>
+                          </a:solidFill>
+                          <a:latin typeface="Cambria Math" panose="02040503050406030204" pitchFamily="18" charset="0"/>
+                          <a:cs typeface="Times New Roman" panose="02020603050405020304" pitchFamily="18" charset="0"/>
+                        </a:rPr>
+                        <m:t>)</m:t>
+                      </m:r>
+                    </m:oMath>
+                  </m:oMathPara>
+                </a14:m>
+                <a:endParaRPr lang="en-US" sz="2790" b="1" dirty="0">
+                  <a:solidFill>
+                    <a:schemeClr val="tx1">
+                      <a:lumMod val="95000"/>
+                      <a:lumOff val="5000"/>
+                    </a:schemeClr>
+                  </a:solidFill>
+                  <a:latin typeface="Times New Roman" panose="02020603050405020304" pitchFamily="18" charset="0"/>
+                  <a:cs typeface="Times New Roman" panose="02020603050405020304" pitchFamily="18" charset="0"/>
+                </a:endParaRPr>
+              </a:p>
+            </p:txBody>
+          </p:sp>
+        </mc:Choice>
+        <mc:Fallback xmlns="">
+          <p:sp>
+            <p:nvSpPr>
+              <p:cNvPr id="1166" name="Rectangle: Rounded Corners 1165">
+                <a:extLst>
+                  <a:ext uri="{FF2B5EF4-FFF2-40B4-BE49-F238E27FC236}">
+                    <a16:creationId xmlns:a16="http://schemas.microsoft.com/office/drawing/2014/main" id="{B984E505-767F-7114-934C-D19FC3F81C13}"/>
+                  </a:ext>
+                </a:extLst>
+              </p:cNvPr>
+              <p:cNvSpPr>
+                <a:spLocks noRot="1" noChangeAspect="1" noMove="1" noResize="1" noEditPoints="1" noAdjustHandles="1" noChangeArrowheads="1" noChangeShapeType="1" noTextEdit="1"/>
+              </p:cNvSpPr>
+              <p:nvPr/>
+            </p:nvSpPr>
+            <p:spPr>
+              <a:xfrm>
+                <a:off x="5298677" y="4885657"/>
+                <a:ext cx="1426552" cy="539330"/>
+              </a:xfrm>
+              <a:prstGeom prst="roundRect">
+                <a:avLst>
+                  <a:gd name="adj" fmla="val 6239"/>
+                </a:avLst>
+              </a:prstGeom>
+              <a:blipFill>
+                <a:blip r:embed="rId31"/>
+                <a:stretch>
+                  <a:fillRect/>
+                </a:stretch>
+              </a:blipFill>
+              <a:ln w="28575">
+                <a:prstDash val="solid"/>
+              </a:ln>
+              <a:effectLst>
+                <a:outerShdw blurRad="50800" dist="38100" dir="5400000" algn="t" rotWithShape="0">
+                  <a:prstClr val="black">
+                    <a:alpha val="40000"/>
+                  </a:prstClr>
+                </a:outerShdw>
+              </a:effectLst>
+            </p:spPr>
+            <p:txBody>
+              <a:bodyPr/>
+              <a:lstStyle/>
+              <a:p>
+                <a:r>
+                  <a:rPr lang="en-US">
+                    <a:noFill/>
+                  </a:rPr>
+                  <a:t> </a:t>
+                </a:r>
+              </a:p>
+            </p:txBody>
+          </p:sp>
+        </mc:Fallback>
+      </mc:AlternateContent>
+      <p:sp>
+        <p:nvSpPr>
+          <p:cNvPr id="1167" name="TextBox 1166">
+            <a:extLst>
+              <a:ext uri="{FF2B5EF4-FFF2-40B4-BE49-F238E27FC236}">
+                <a16:creationId xmlns:a16="http://schemas.microsoft.com/office/drawing/2014/main" id="{73FC8785-C1C4-2A08-2C12-B46CB5C51BC9}"/>
+              </a:ext>
+            </a:extLst>
+          </p:cNvPr>
+          <p:cNvSpPr txBox="1"/>
+          <p:nvPr/>
+        </p:nvSpPr>
+        <p:spPr>
+          <a:xfrm>
+            <a:off x="5774882" y="5553234"/>
+            <a:ext cx="421910" cy="200055"/>
+          </a:xfrm>
+          <a:prstGeom prst="rect">
+            <a:avLst/>
+          </a:prstGeom>
+          <a:noFill/>
+        </p:spPr>
+        <p:txBody>
+          <a:bodyPr wrap="square" rtlCol="0">
+            <a:spAutoFit/>
+          </a:bodyPr>
+          <a:lstStyle/>
+          <a:p>
+            <a:r>
+              <a:rPr lang="en-US" sz="700" dirty="0"/>
+              <a:t>● ● ●</a:t>
+            </a:r>
+          </a:p>
+        </p:txBody>
+      </p:sp>
+      <mc:AlternateContent xmlns:mc="http://schemas.openxmlformats.org/markup-compatibility/2006" xmlns:a14="http://schemas.microsoft.com/office/drawing/2010/main">
+        <mc:Choice Requires="a14">
+          <p:sp>
+            <p:nvSpPr>
+              <p:cNvPr id="1168" name="Rectangle: Rounded Corners 1167">
+                <a:extLst>
+                  <a:ext uri="{FF2B5EF4-FFF2-40B4-BE49-F238E27FC236}">
+                    <a16:creationId xmlns:a16="http://schemas.microsoft.com/office/drawing/2014/main" id="{0C5D175D-1F8C-FEC4-63DC-96088FB8D69D}"/>
+                  </a:ext>
+                </a:extLst>
+              </p:cNvPr>
+              <p:cNvSpPr/>
+              <p:nvPr/>
+            </p:nvSpPr>
+            <p:spPr>
+              <a:xfrm>
+                <a:off x="5298678" y="5845631"/>
+                <a:ext cx="1426552" cy="539330"/>
+              </a:xfrm>
+              <a:prstGeom prst="roundRect">
+                <a:avLst>
+                  <a:gd name="adj" fmla="val 6239"/>
+                </a:avLst>
+              </a:prstGeom>
+              <a:solidFill>
+                <a:schemeClr val="bg1">
+                  <a:lumMod val="95000"/>
+                </a:schemeClr>
+              </a:solidFill>
+              <a:ln w="28575">
+                <a:prstDash val="solid"/>
+              </a:ln>
+              <a:effectLst>
+                <a:outerShdw blurRad="50800" dist="38100" dir="5400000" algn="t" rotWithShape="0">
+                  <a:prstClr val="black">
+                    <a:alpha val="40000"/>
+                  </a:prstClr>
+                </a:outerShdw>
+              </a:effectLst>
+            </p:spPr>
+            <p:style>
+              <a:lnRef idx="2">
+                <a:schemeClr val="accent1">
+                  <a:shade val="15000"/>
+                </a:schemeClr>
+              </a:lnRef>
+              <a:fillRef idx="1">
+                <a:schemeClr val="accent1"/>
+              </a:fillRef>
+              <a:effectRef idx="0">
+                <a:schemeClr val="accent1"/>
+              </a:effectRef>
+              <a:fontRef idx="minor">
+                <a:schemeClr val="lt1"/>
+              </a:fontRef>
+            </p:style>
+            <p:txBody>
+              <a:bodyPr rtlCol="0" anchor="ctr"/>
+              <a:lstStyle/>
+              <a:p>
+                <a:pPr algn="ctr"/>
+                <a14:m>
+                  <m:oMathPara xmlns:m="http://schemas.openxmlformats.org/officeDocument/2006/math">
+                    <m:oMathParaPr>
+                      <m:jc m:val="centerGroup"/>
+                    </m:oMathParaPr>
+                    <m:oMath xmlns:m="http://schemas.openxmlformats.org/officeDocument/2006/math">
+                      <m:sSubSup>
+                        <m:sSubSupPr>
+                          <m:ctrlPr>
+                            <a:rPr lang="en-US" sz="2790" b="1" i="1" smtClean="0">
+                              <a:solidFill>
+                                <a:schemeClr val="tx1">
+                                  <a:lumMod val="95000"/>
+                                  <a:lumOff val="5000"/>
+                                </a:schemeClr>
+                              </a:solidFill>
+                              <a:latin typeface="Cambria Math" panose="02040503050406030204" pitchFamily="18" charset="0"/>
+                              <a:cs typeface="Times New Roman" panose="02020603050405020304" pitchFamily="18" charset="0"/>
+                            </a:rPr>
+                          </m:ctrlPr>
+                        </m:sSubSupPr>
+                        <m:e>
+                          <m:r>
+                            <a:rPr lang="en-US" sz="2790" b="1" i="1">
+                              <a:solidFill>
+                                <a:schemeClr val="tx1">
+                                  <a:lumMod val="95000"/>
+                                  <a:lumOff val="5000"/>
+                                </a:schemeClr>
+                              </a:solidFill>
+                              <a:latin typeface="Cambria Math" panose="02040503050406030204" pitchFamily="18" charset="0"/>
+                              <a:cs typeface="Times New Roman" panose="02020603050405020304" pitchFamily="18" charset="0"/>
+                            </a:rPr>
+                            <m:t>𝑹</m:t>
+                          </m:r>
+                        </m:e>
+                        <m:sub>
+                          <m:r>
+                            <a:rPr lang="en-US" sz="2790" b="1" i="1" smtClean="0">
+                              <a:solidFill>
+                                <a:schemeClr val="tx1">
+                                  <a:lumMod val="95000"/>
+                                  <a:lumOff val="5000"/>
+                                </a:schemeClr>
+                              </a:solidFill>
+                              <a:latin typeface="Cambria Math" panose="02040503050406030204" pitchFamily="18" charset="0"/>
+                              <a:cs typeface="Times New Roman" panose="02020603050405020304" pitchFamily="18" charset="0"/>
+                            </a:rPr>
+                            <m:t>𝑵</m:t>
+                          </m:r>
+                        </m:sub>
+                        <m:sup>
+                          <m:r>
+                            <a:rPr lang="en-US" sz="2790" b="1" i="1">
+                              <a:solidFill>
+                                <a:schemeClr val="tx1">
+                                  <a:lumMod val="95000"/>
+                                  <a:lumOff val="5000"/>
+                                </a:schemeClr>
+                              </a:solidFill>
+                              <a:latin typeface="Cambria Math" panose="02040503050406030204" pitchFamily="18" charset="0"/>
+                              <a:cs typeface="Times New Roman" panose="02020603050405020304" pitchFamily="18" charset="0"/>
+                            </a:rPr>
+                            <m:t>𝟏</m:t>
+                          </m:r>
+                        </m:sup>
+                      </m:sSubSup>
+                      <m:r>
+                        <a:rPr lang="en-US" sz="2790" b="1" i="0" smtClean="0">
+                          <a:solidFill>
+                            <a:schemeClr val="tx1">
+                              <a:lumMod val="95000"/>
+                              <a:lumOff val="5000"/>
+                            </a:schemeClr>
+                          </a:solidFill>
+                          <a:latin typeface="Cambria Math" panose="02040503050406030204" pitchFamily="18" charset="0"/>
+                          <a:cs typeface="Times New Roman" panose="02020603050405020304" pitchFamily="18" charset="0"/>
+                        </a:rPr>
+                        <m:t>(</m:t>
+                      </m:r>
+                      <m:r>
+                        <a:rPr lang="en-US" sz="2790" b="1" i="0" smtClean="0">
+                          <a:solidFill>
+                            <a:schemeClr val="tx1">
+                              <a:lumMod val="95000"/>
+                              <a:lumOff val="5000"/>
+                            </a:schemeClr>
+                          </a:solidFill>
+                          <a:latin typeface="Cambria Math" panose="02040503050406030204" pitchFamily="18" charset="0"/>
+                          <a:cs typeface="Times New Roman" panose="02020603050405020304" pitchFamily="18" charset="0"/>
+                        </a:rPr>
+                        <m:t>𝐯</m:t>
+                      </m:r>
+                      <m:r>
+                        <a:rPr lang="en-US" sz="2790" b="1" i="0" smtClean="0">
+                          <a:solidFill>
+                            <a:schemeClr val="tx1">
+                              <a:lumMod val="95000"/>
+                              <a:lumOff val="5000"/>
+                            </a:schemeClr>
+                          </a:solidFill>
+                          <a:latin typeface="Cambria Math" panose="02040503050406030204" pitchFamily="18" charset="0"/>
+                          <a:cs typeface="Times New Roman" panose="02020603050405020304" pitchFamily="18" charset="0"/>
+                        </a:rPr>
+                        <m:t>)</m:t>
+                      </m:r>
+                    </m:oMath>
+                  </m:oMathPara>
+                </a14:m>
+                <a:endParaRPr lang="en-US" sz="2790" b="1" dirty="0">
+                  <a:solidFill>
+                    <a:schemeClr val="tx1">
+                      <a:lumMod val="95000"/>
+                      <a:lumOff val="5000"/>
+                    </a:schemeClr>
+                  </a:solidFill>
+                  <a:latin typeface="Times New Roman" panose="02020603050405020304" pitchFamily="18" charset="0"/>
+                  <a:cs typeface="Times New Roman" panose="02020603050405020304" pitchFamily="18" charset="0"/>
+                </a:endParaRPr>
+              </a:p>
+            </p:txBody>
+          </p:sp>
+        </mc:Choice>
+        <mc:Fallback xmlns="">
+          <p:sp>
+            <p:nvSpPr>
+              <p:cNvPr id="1168" name="Rectangle: Rounded Corners 1167">
+                <a:extLst>
+                  <a:ext uri="{FF2B5EF4-FFF2-40B4-BE49-F238E27FC236}">
+                    <a16:creationId xmlns:a16="http://schemas.microsoft.com/office/drawing/2014/main" id="{0C5D175D-1F8C-FEC4-63DC-96088FB8D69D}"/>
+                  </a:ext>
+                </a:extLst>
+              </p:cNvPr>
+              <p:cNvSpPr>
+                <a:spLocks noRot="1" noChangeAspect="1" noMove="1" noResize="1" noEditPoints="1" noAdjustHandles="1" noChangeArrowheads="1" noChangeShapeType="1" noTextEdit="1"/>
+              </p:cNvSpPr>
+              <p:nvPr/>
+            </p:nvSpPr>
+            <p:spPr>
+              <a:xfrm>
+                <a:off x="5298678" y="5845631"/>
+                <a:ext cx="1426552" cy="539330"/>
+              </a:xfrm>
+              <a:prstGeom prst="roundRect">
+                <a:avLst>
+                  <a:gd name="adj" fmla="val 6239"/>
+                </a:avLst>
+              </a:prstGeom>
+              <a:blipFill>
+                <a:blip r:embed="rId32"/>
+                <a:stretch>
+                  <a:fillRect/>
+                </a:stretch>
+              </a:blipFill>
+              <a:ln w="28575">
+                <a:prstDash val="solid"/>
+              </a:ln>
+              <a:effectLst>
+                <a:outerShdw blurRad="50800" dist="38100" dir="5400000" algn="t" rotWithShape="0">
+                  <a:prstClr val="black">
+                    <a:alpha val="40000"/>
+                  </a:prstClr>
+                </a:outerShdw>
+              </a:effectLst>
+            </p:spPr>
+            <p:txBody>
+              <a:bodyPr/>
+              <a:lstStyle/>
+              <a:p>
+                <a:r>
+                  <a:rPr lang="en-US">
+                    <a:noFill/>
+                  </a:rPr>
+                  <a:t> </a:t>
+                </a:r>
+              </a:p>
+            </p:txBody>
+          </p:sp>
+        </mc:Fallback>
+      </mc:AlternateContent>
     </p:spTree>
     <p:extLst>
       <p:ext uri="{BB962C8B-B14F-4D97-AF65-F5344CB8AC3E}">
@@ -4154,4 +8641,619 @@
     </a:ext>
   </a:extLst>
 </a:theme>
+</file>
+
+<file path=ppt/theme/theme2.xml><?xml version="1.0" encoding="utf-8"?>
+<a:theme xmlns:a="http://schemas.openxmlformats.org/drawingml/2006/main" name="Office Theme">
+  <a:themeElements>
+    <a:clrScheme name="Office">
+      <a:dk1>
+        <a:sysClr val="windowText" lastClr="000000"/>
+      </a:dk1>
+      <a:lt1>
+        <a:sysClr val="window" lastClr="FFFFFF"/>
+      </a:lt1>
+      <a:dk2>
+        <a:srgbClr val="0E2841"/>
+      </a:dk2>
+      <a:lt2>
+        <a:srgbClr val="E8E8E8"/>
+      </a:lt2>
+      <a:accent1>
+        <a:srgbClr val="156082"/>
+      </a:accent1>
+      <a:accent2>
+        <a:srgbClr val="E97132"/>
+      </a:accent2>
+      <a:accent3>
+        <a:srgbClr val="196B24"/>
+      </a:accent3>
+      <a:accent4>
+        <a:srgbClr val="0F9ED5"/>
+      </a:accent4>
+      <a:accent5>
+        <a:srgbClr val="A02B93"/>
+      </a:accent5>
+      <a:accent6>
+        <a:srgbClr val="4EA72E"/>
+      </a:accent6>
+      <a:hlink>
+        <a:srgbClr val="467886"/>
+      </a:hlink>
+      <a:folHlink>
+        <a:srgbClr val="96607D"/>
+      </a:folHlink>
+    </a:clrScheme>
+    <a:fontScheme name="Office">
+      <a:majorFont>
+        <a:latin typeface="Aptos Display" panose="02110004020202020204"/>
+        <a:ea typeface=""/>
+        <a:cs typeface=""/>
+        <a:font script="Jpan" typeface="游ゴシック Light"/>
+        <a:font script="Hang" typeface="맑은 고딕"/>
+        <a:font script="Hans" typeface="等线 Light"/>
+        <a:font script="Hant" typeface="新細明體"/>
+        <a:font script="Arab" typeface="Times New Roman"/>
+        <a:font script="Hebr" typeface="Times New Roman"/>
+        <a:font script="Thai" typeface="Angsana New"/>
+        <a:font script="Ethi" typeface="Nyala"/>
+        <a:font script="Beng" typeface="Vrinda"/>
+        <a:font script="Gujr" typeface="Shruti"/>
+        <a:font script="Khmr" typeface="MoolBoran"/>
+        <a:font script="Knda" typeface="Tunga"/>
+        <a:font script="Guru" typeface="Raavi"/>
+        <a:font script="Cans" typeface="Euphemia"/>
+        <a:font script="Cher" typeface="Plantagenet Cherokee"/>
+        <a:font script="Yiii" typeface="Microsoft Yi Baiti"/>
+        <a:font script="Tibt" typeface="Microsoft Himalaya"/>
+        <a:font script="Thaa" typeface="MV Boli"/>
+        <a:font script="Deva" typeface="Mangal"/>
+        <a:font script="Telu" typeface="Gautami"/>
+        <a:font script="Taml" typeface="Latha"/>
+        <a:font script="Syrc" typeface="Estrangelo Edessa"/>
+        <a:font script="Orya" typeface="Kalinga"/>
+        <a:font script="Mlym" typeface="Kartika"/>
+        <a:font script="Laoo" typeface="DokChampa"/>
+        <a:font script="Sinh" typeface="Iskoola Pota"/>
+        <a:font script="Mong" typeface="Mongolian Baiti"/>
+        <a:font script="Viet" typeface="Times New Roman"/>
+        <a:font script="Uigh" typeface="Microsoft Uighur"/>
+        <a:font script="Geor" typeface="Sylfaen"/>
+        <a:font script="Armn" typeface="Arial"/>
+        <a:font script="Bugi" typeface="Leelawadee UI"/>
+        <a:font script="Bopo" typeface="Microsoft JhengHei"/>
+        <a:font script="Java" typeface="Javanese Text"/>
+        <a:font script="Lisu" typeface="Segoe UI"/>
+        <a:font script="Mymr" typeface="Myanmar Text"/>
+        <a:font script="Nkoo" typeface="Ebrima"/>
+        <a:font script="Olck" typeface="Nirmala UI"/>
+        <a:font script="Osma" typeface="Ebrima"/>
+        <a:font script="Phag" typeface="Phagspa"/>
+        <a:font script="Syrn" typeface="Estrangelo Edessa"/>
+        <a:font script="Syrj" typeface="Estrangelo Edessa"/>
+        <a:font script="Syre" typeface="Estrangelo Edessa"/>
+        <a:font script="Sora" typeface="Nirmala UI"/>
+        <a:font script="Tale" typeface="Microsoft Tai Le"/>
+        <a:font script="Talu" typeface="Microsoft New Tai Lue"/>
+        <a:font script="Tfng" typeface="Ebrima"/>
+      </a:majorFont>
+      <a:minorFont>
+        <a:latin typeface="Aptos" panose="02110004020202020204"/>
+        <a:ea typeface=""/>
+        <a:cs typeface=""/>
+        <a:font script="Jpan" typeface="游ゴシック"/>
+        <a:font script="Hang" typeface="맑은 고딕"/>
+        <a:font script="Hans" typeface="等线"/>
+        <a:font script="Hant" typeface="新細明體"/>
+        <a:font script="Arab" typeface="Arial"/>
+        <a:font script="Hebr" typeface="Arial"/>
+        <a:font script="Thai" typeface="Cordia New"/>
+        <a:font script="Ethi" typeface="Nyala"/>
+        <a:font script="Beng" typeface="Vrinda"/>
+        <a:font script="Gujr" typeface="Shruti"/>
+        <a:font script="Khmr" typeface="DaunPenh"/>
+        <a:font script="Knda" typeface="Tunga"/>
+        <a:font script="Guru" typeface="Raavi"/>
+        <a:font script="Cans" typeface="Euphemia"/>
+        <a:font script="Cher" typeface="Plantagenet Cherokee"/>
+        <a:font script="Yiii" typeface="Microsoft Yi Baiti"/>
+        <a:font script="Tibt" typeface="Microsoft Himalaya"/>
+        <a:font script="Thaa" typeface="MV Boli"/>
+        <a:font script="Deva" typeface="Mangal"/>
+        <a:font script="Telu" typeface="Gautami"/>
+        <a:font script="Taml" typeface="Latha"/>
+        <a:font script="Syrc" typeface="Estrangelo Edessa"/>
+        <a:font script="Orya" typeface="Kalinga"/>
+        <a:font script="Mlym" typeface="Kartika"/>
+        <a:font script="Laoo" typeface="DokChampa"/>
+        <a:font script="Sinh" typeface="Iskoola Pota"/>
+        <a:font script="Mong" typeface="Mongolian Baiti"/>
+        <a:font script="Viet" typeface="Arial"/>
+        <a:font script="Uigh" typeface="Microsoft Uighur"/>
+        <a:font script="Geor" typeface="Sylfaen"/>
+        <a:font script="Armn" typeface="Arial"/>
+        <a:font script="Bugi" typeface="Leelawadee UI"/>
+        <a:font script="Bopo" typeface="Microsoft JhengHei"/>
+        <a:font script="Java" typeface="Javanese Text"/>
+        <a:font script="Lisu" typeface="Segoe UI"/>
+        <a:font script="Mymr" typeface="Myanmar Text"/>
+        <a:font script="Nkoo" typeface="Ebrima"/>
+        <a:font script="Olck" typeface="Nirmala UI"/>
+        <a:font script="Osma" typeface="Ebrima"/>
+        <a:font script="Phag" typeface="Phagspa"/>
+        <a:font script="Syrn" typeface="Estrangelo Edessa"/>
+        <a:font script="Syrj" typeface="Estrangelo Edessa"/>
+        <a:font script="Syre" typeface="Estrangelo Edessa"/>
+        <a:font script="Sora" typeface="Nirmala UI"/>
+        <a:font script="Tale" typeface="Microsoft Tai Le"/>
+        <a:font script="Talu" typeface="Microsoft New Tai Lue"/>
+        <a:font script="Tfng" typeface="Ebrima"/>
+      </a:minorFont>
+    </a:fontScheme>
+    <a:fmtScheme name="Office">
+      <a:fillStyleLst>
+        <a:solidFill>
+          <a:schemeClr val="phClr"/>
+        </a:solidFill>
+        <a:gradFill rotWithShape="1">
+          <a:gsLst>
+            <a:gs pos="0">
+              <a:schemeClr val="phClr">
+                <a:lumMod val="110000"/>
+                <a:satMod val="105000"/>
+                <a:tint val="67000"/>
+              </a:schemeClr>
+            </a:gs>
+            <a:gs pos="50000">
+              <a:schemeClr val="phClr">
+                <a:lumMod val="105000"/>
+                <a:satMod val="103000"/>
+                <a:tint val="73000"/>
+              </a:schemeClr>
+            </a:gs>
+            <a:gs pos="100000">
+              <a:schemeClr val="phClr">
+                <a:lumMod val="105000"/>
+                <a:satMod val="109000"/>
+                <a:tint val="81000"/>
+              </a:schemeClr>
+            </a:gs>
+          </a:gsLst>
+          <a:lin ang="5400000" scaled="0"/>
+        </a:gradFill>
+        <a:gradFill rotWithShape="1">
+          <a:gsLst>
+            <a:gs pos="0">
+              <a:schemeClr val="phClr">
+                <a:satMod val="103000"/>
+                <a:lumMod val="102000"/>
+                <a:tint val="94000"/>
+              </a:schemeClr>
+            </a:gs>
+            <a:gs pos="50000">
+              <a:schemeClr val="phClr">
+                <a:satMod val="110000"/>
+                <a:lumMod val="100000"/>
+                <a:shade val="100000"/>
+              </a:schemeClr>
+            </a:gs>
+            <a:gs pos="100000">
+              <a:schemeClr val="phClr">
+                <a:lumMod val="99000"/>
+                <a:satMod val="120000"/>
+                <a:shade val="78000"/>
+              </a:schemeClr>
+            </a:gs>
+          </a:gsLst>
+          <a:lin ang="5400000" scaled="0"/>
+        </a:gradFill>
+      </a:fillStyleLst>
+      <a:lnStyleLst>
+        <a:ln w="12700" cap="flat" cmpd="sng" algn="ctr">
+          <a:solidFill>
+            <a:schemeClr val="phClr"/>
+          </a:solidFill>
+          <a:prstDash val="solid"/>
+          <a:miter lim="800000"/>
+        </a:ln>
+        <a:ln w="19050" cap="flat" cmpd="sng" algn="ctr">
+          <a:solidFill>
+            <a:schemeClr val="phClr"/>
+          </a:solidFill>
+          <a:prstDash val="solid"/>
+          <a:miter lim="800000"/>
+        </a:ln>
+        <a:ln w="25400" cap="flat" cmpd="sng" algn="ctr">
+          <a:solidFill>
+            <a:schemeClr val="phClr"/>
+          </a:solidFill>
+          <a:prstDash val="solid"/>
+          <a:miter lim="800000"/>
+        </a:ln>
+      </a:lnStyleLst>
+      <a:effectStyleLst>
+        <a:effectStyle>
+          <a:effectLst/>
+        </a:effectStyle>
+        <a:effectStyle>
+          <a:effectLst/>
+        </a:effectStyle>
+        <a:effectStyle>
+          <a:effectLst>
+            <a:outerShdw blurRad="57150" dist="19050" dir="5400000" algn="ctr" rotWithShape="0">
+              <a:srgbClr val="000000">
+                <a:alpha val="63000"/>
+              </a:srgbClr>
+            </a:outerShdw>
+          </a:effectLst>
+        </a:effectStyle>
+      </a:effectStyleLst>
+      <a:bgFillStyleLst>
+        <a:solidFill>
+          <a:schemeClr val="phClr"/>
+        </a:solidFill>
+        <a:solidFill>
+          <a:schemeClr val="phClr">
+            <a:tint val="95000"/>
+            <a:satMod val="170000"/>
+          </a:schemeClr>
+        </a:solidFill>
+        <a:gradFill rotWithShape="1">
+          <a:gsLst>
+            <a:gs pos="0">
+              <a:schemeClr val="phClr">
+                <a:tint val="93000"/>
+                <a:satMod val="150000"/>
+                <a:shade val="98000"/>
+                <a:lumMod val="102000"/>
+              </a:schemeClr>
+            </a:gs>
+            <a:gs pos="50000">
+              <a:schemeClr val="phClr">
+                <a:tint val="98000"/>
+                <a:satMod val="130000"/>
+                <a:shade val="90000"/>
+                <a:lumMod val="103000"/>
+              </a:schemeClr>
+            </a:gs>
+            <a:gs pos="100000">
+              <a:schemeClr val="phClr">
+                <a:shade val="63000"/>
+                <a:satMod val="120000"/>
+              </a:schemeClr>
+            </a:gs>
+          </a:gsLst>
+          <a:lin ang="5400000" scaled="0"/>
+        </a:gradFill>
+      </a:bgFillStyleLst>
+    </a:fmtScheme>
+  </a:themeElements>
+  <a:objectDefaults>
+    <a:lnDef>
+      <a:spPr/>
+      <a:bodyPr/>
+      <a:lstStyle/>
+      <a:style>
+        <a:lnRef idx="2">
+          <a:schemeClr val="accent1"/>
+        </a:lnRef>
+        <a:fillRef idx="0">
+          <a:schemeClr val="accent1"/>
+        </a:fillRef>
+        <a:effectRef idx="1">
+          <a:schemeClr val="accent1"/>
+        </a:effectRef>
+        <a:fontRef idx="minor">
+          <a:schemeClr val="tx1"/>
+        </a:fontRef>
+      </a:style>
+    </a:lnDef>
+  </a:objectDefaults>
+  <a:extraClrSchemeLst/>
+  <a:extLst>
+    <a:ext uri="{05A4C25C-085E-4340-85A3-A5531E510DB2}">
+      <thm15:themeFamily xmlns:thm15="http://schemas.microsoft.com/office/thememl/2012/main" name="Office Theme" id="{2E142A2C-CD16-42D6-873A-C26D2A0506FA}" vid="{1BDDFF52-6CD6-40A5-AB3C-68EB2F1E4D0A}"/>
+    </a:ext>
+  </a:extLst>
+</a:theme>
+</file>
+
+<file path=customXml/item1.xml><?xml version="1.0" encoding="utf-8"?>
+<p:properties xmlns:p="http://schemas.microsoft.com/office/2006/metadata/properties" xmlns:xsi="http://www.w3.org/2001/XMLSchema-instance" xmlns:pc="http://schemas.microsoft.com/office/infopath/2007/PartnerControls">
+  <documentManagement>
+    <_activity xmlns="bf0484fb-39aa-440e-a7f6-ce6b10828c56" xsi:nil="true"/>
+  </documentManagement>
+</p:properties>
+</file>
+
+<file path=customXml/item2.xml><?xml version="1.0" encoding="utf-8"?>
+<?mso-contentType ?>
+<FormTemplates xmlns="http://schemas.microsoft.com/sharepoint/v3/contenttype/forms">
+  <Display>DocumentLibraryForm</Display>
+  <Edit>DocumentLibraryForm</Edit>
+  <New>DocumentLibraryForm</New>
+</FormTemplates>
+</file>
+
+<file path=customXml/item3.xml><?xml version="1.0" encoding="utf-8"?>
+<ct:contentTypeSchema xmlns:ct="http://schemas.microsoft.com/office/2006/metadata/contentType" xmlns:ma="http://schemas.microsoft.com/office/2006/metadata/properties/metaAttributes" ct:_="" ma:_="" ma:contentTypeName="Document" ma:contentTypeID="0x0101006A4E12A0CEF6A047A2ED39F3719482AA" ma:contentTypeVersion="16" ma:contentTypeDescription="Create a new document." ma:contentTypeScope="" ma:versionID="0e1d78e459d7e83271e38b16816bc458">
+  <xsd:schema xmlns:xsd="http://www.w3.org/2001/XMLSchema" xmlns:xs="http://www.w3.org/2001/XMLSchema" xmlns:p="http://schemas.microsoft.com/office/2006/metadata/properties" xmlns:ns3="9dd65258-3995-4e6a-8867-aed9b661a0cf" xmlns:ns4="bf0484fb-39aa-440e-a7f6-ce6b10828c56" targetNamespace="http://schemas.microsoft.com/office/2006/metadata/properties" ma:root="true" ma:fieldsID="177a938d7b189453f861ba34050ac94d" ns3:_="" ns4:_="">
+    <xsd:import namespace="9dd65258-3995-4e6a-8867-aed9b661a0cf"/>
+    <xsd:import namespace="bf0484fb-39aa-440e-a7f6-ce6b10828c56"/>
+    <xsd:element name="properties">
+      <xsd:complexType>
+        <xsd:sequence>
+          <xsd:element name="documentManagement">
+            <xsd:complexType>
+              <xsd:all>
+                <xsd:element ref="ns3:SharedWithUsers" minOccurs="0"/>
+                <xsd:element ref="ns3:SharedWithDetails" minOccurs="0"/>
+                <xsd:element ref="ns3:SharingHintHash" minOccurs="0"/>
+                <xsd:element ref="ns4:_activity" minOccurs="0"/>
+                <xsd:element ref="ns4:MediaServiceMetadata" minOccurs="0"/>
+                <xsd:element ref="ns4:MediaServiceFastMetadata" minOccurs="0"/>
+                <xsd:element ref="ns4:MediaServiceObjectDetectorVersions" minOccurs="0"/>
+                <xsd:element ref="ns4:MediaServiceAutoTags" minOccurs="0"/>
+                <xsd:element ref="ns4:MediaServiceOCR" minOccurs="0"/>
+                <xsd:element ref="ns4:MediaServiceGenerationTime" minOccurs="0"/>
+                <xsd:element ref="ns4:MediaServiceEventHashCode" minOccurs="0"/>
+                <xsd:element ref="ns4:MediaServiceDateTaken" minOccurs="0"/>
+                <xsd:element ref="ns4:MediaLengthInSeconds" minOccurs="0"/>
+                <xsd:element ref="ns4:MediaServiceLocation" minOccurs="0"/>
+                <xsd:element ref="ns4:MediaServiceSearchProperties" minOccurs="0"/>
+                <xsd:element ref="ns4:MediaServiceSystemTags" minOccurs="0"/>
+              </xsd:all>
+            </xsd:complexType>
+          </xsd:element>
+        </xsd:sequence>
+      </xsd:complexType>
+    </xsd:element>
+  </xsd:schema>
+  <xsd:schema xmlns:xsd="http://www.w3.org/2001/XMLSchema" xmlns:xs="http://www.w3.org/2001/XMLSchema" xmlns:dms="http://schemas.microsoft.com/office/2006/documentManagement/types" xmlns:pc="http://schemas.microsoft.com/office/infopath/2007/PartnerControls" targetNamespace="9dd65258-3995-4e6a-8867-aed9b661a0cf" elementFormDefault="qualified">
+    <xsd:import namespace="http://schemas.microsoft.com/office/2006/documentManagement/types"/>
+    <xsd:import namespace="http://schemas.microsoft.com/office/infopath/2007/PartnerControls"/>
+    <xsd:element name="SharedWithUsers" ma:index="8" nillable="true" ma:displayName="Shared With" ma:internalName="SharedWithUsers" ma:readOnly="true">
+      <xsd:complexType>
+        <xsd:complexContent>
+          <xsd:extension base="dms:UserMulti">
+            <xsd:sequence>
+              <xsd:element name="UserInfo" minOccurs="0" maxOccurs="unbounded">
+                <xsd:complexType>
+                  <xsd:sequence>
+                    <xsd:element name="DisplayName" type="xsd:string" minOccurs="0"/>
+                    <xsd:element name="AccountId" type="dms:UserId" minOccurs="0" nillable="true"/>
+                    <xsd:element name="AccountType" type="xsd:string" minOccurs="0"/>
+                  </xsd:sequence>
+                </xsd:complexType>
+              </xsd:element>
+            </xsd:sequence>
+          </xsd:extension>
+        </xsd:complexContent>
+      </xsd:complexType>
+    </xsd:element>
+    <xsd:element name="SharedWithDetails" ma:index="9" nillable="true" ma:displayName="Shared With Details" ma:internalName="SharedWithDetails" ma:readOnly="true">
+      <xsd:simpleType>
+        <xsd:restriction base="dms:Note">
+          <xsd:maxLength value="255"/>
+        </xsd:restriction>
+      </xsd:simpleType>
+    </xsd:element>
+    <xsd:element name="SharingHintHash" ma:index="10" nillable="true" ma:displayName="Sharing Hint Hash" ma:hidden="true" ma:internalName="SharingHintHash" ma:readOnly="true">
+      <xsd:simpleType>
+        <xsd:restriction base="dms:Text"/>
+      </xsd:simpleType>
+    </xsd:element>
+  </xsd:schema>
+  <xsd:schema xmlns:xsd="http://www.w3.org/2001/XMLSchema" xmlns:xs="http://www.w3.org/2001/XMLSchema" xmlns:dms="http://schemas.microsoft.com/office/2006/documentManagement/types" xmlns:pc="http://schemas.microsoft.com/office/infopath/2007/PartnerControls" targetNamespace="bf0484fb-39aa-440e-a7f6-ce6b10828c56" elementFormDefault="qualified">
+    <xsd:import namespace="http://schemas.microsoft.com/office/2006/documentManagement/types"/>
+    <xsd:import namespace="http://schemas.microsoft.com/office/infopath/2007/PartnerControls"/>
+    <xsd:element name="_activity" ma:index="11" nillable="true" ma:displayName="_activity" ma:hidden="true" ma:internalName="_activity">
+      <xsd:simpleType>
+        <xsd:restriction base="dms:Note"/>
+      </xsd:simpleType>
+    </xsd:element>
+    <xsd:element name="MediaServiceMetadata" ma:index="12" nillable="true" ma:displayName="MediaServiceMetadata" ma:hidden="true" ma:internalName="MediaServiceMetadata" ma:readOnly="true">
+      <xsd:simpleType>
+        <xsd:restriction base="dms:Note"/>
+      </xsd:simpleType>
+    </xsd:element>
+    <xsd:element name="MediaServiceFastMetadata" ma:index="13" nillable="true" ma:displayName="MediaServiceFastMetadata" ma:hidden="true" ma:internalName="MediaServiceFastMetadata" ma:readOnly="true">
+      <xsd:simpleType>
+        <xsd:restriction base="dms:Note"/>
+      </xsd:simpleType>
+    </xsd:element>
+    <xsd:element name="MediaServiceObjectDetectorVersions" ma:index="14" nillable="true" ma:displayName="MediaServiceObjectDetectorVersions" ma:hidden="true" ma:indexed="true" ma:internalName="MediaServiceObjectDetectorVersions" ma:readOnly="true">
+      <xsd:simpleType>
+        <xsd:restriction base="dms:Text"/>
+      </xsd:simpleType>
+    </xsd:element>
+    <xsd:element name="MediaServiceAutoTags" ma:index="15" nillable="true" ma:displayName="Tags" ma:internalName="MediaServiceAutoTags" ma:readOnly="true">
+      <xsd:simpleType>
+        <xsd:restriction base="dms:Text"/>
+      </xsd:simpleType>
+    </xsd:element>
+    <xsd:element name="MediaServiceOCR" ma:index="16" nillable="true" ma:displayName="Extracted Text" ma:internalName="MediaServiceOCR" ma:readOnly="true">
+      <xsd:simpleType>
+        <xsd:restriction base="dms:Note">
+          <xsd:maxLength value="255"/>
+        </xsd:restriction>
+      </xsd:simpleType>
+    </xsd:element>
+    <xsd:element name="MediaServiceGenerationTime" ma:index="17" nillable="true" ma:displayName="MediaServiceGenerationTime" ma:hidden="true" ma:internalName="MediaServiceGenerationTime" ma:readOnly="true">
+      <xsd:simpleType>
+        <xsd:restriction base="dms:Text"/>
+      </xsd:simpleType>
+    </xsd:element>
+    <xsd:element name="MediaServiceEventHashCode" ma:index="18" nillable="true" ma:displayName="MediaServiceEventHashCode" ma:hidden="true" ma:internalName="MediaServiceEventHashCode" ma:readOnly="true">
+      <xsd:simpleType>
+        <xsd:restriction base="dms:Text"/>
+      </xsd:simpleType>
+    </xsd:element>
+    <xsd:element name="MediaServiceDateTaken" ma:index="19" nillable="true" ma:displayName="MediaServiceDateTaken" ma:hidden="true" ma:indexed="true" ma:internalName="MediaServiceDateTaken" ma:readOnly="true">
+      <xsd:simpleType>
+        <xsd:restriction base="dms:Text"/>
+      </xsd:simpleType>
+    </xsd:element>
+    <xsd:element name="MediaLengthInSeconds" ma:index="20" nillable="true" ma:displayName="MediaLengthInSeconds" ma:hidden="true" ma:internalName="MediaLengthInSeconds" ma:readOnly="true">
+      <xsd:simpleType>
+        <xsd:restriction base="dms:Unknown"/>
+      </xsd:simpleType>
+    </xsd:element>
+    <xsd:element name="MediaServiceLocation" ma:index="21" nillable="true" ma:displayName="Location" ma:indexed="true" ma:internalName="MediaServiceLocation" ma:readOnly="true">
+      <xsd:simpleType>
+        <xsd:restriction base="dms:Text"/>
+      </xsd:simpleType>
+    </xsd:element>
+    <xsd:element name="MediaServiceSearchProperties" ma:index="22" nillable="true" ma:displayName="MediaServiceSearchProperties" ma:hidden="true" ma:internalName="MediaServiceSearchProperties" ma:readOnly="true">
+      <xsd:simpleType>
+        <xsd:restriction base="dms:Note"/>
+      </xsd:simpleType>
+    </xsd:element>
+    <xsd:element name="MediaServiceSystemTags" ma:index="23" nillable="true" ma:displayName="MediaServiceSystemTags" ma:hidden="true" ma:internalName="MediaServiceSystemTags" ma:readOnly="true">
+      <xsd:simpleType>
+        <xsd:restriction base="dms:Note"/>
+      </xsd:simpleType>
+    </xsd:element>
+  </xsd:schema>
+  <xsd:schema xmlns="http://schemas.openxmlformats.org/package/2006/metadata/core-properties" xmlns:xsd="http://www.w3.org/2001/XMLSchema" xmlns:xsi="http://www.w3.org/2001/XMLSchema-instance" xmlns:dc="http://purl.org/dc/elements/1.1/" xmlns:dcterms="http://purl.org/dc/terms/" xmlns:odoc="http://schemas.microsoft.com/internal/obd" targetNamespace="http://schemas.openxmlformats.org/package/2006/metadata/core-properties" elementFormDefault="qualified" attributeFormDefault="unqualified" blockDefault="#all">
+    <xsd:import namespace="http://purl.org/dc/elements/1.1/" schemaLocation="http://dublincore.org/schemas/xmls/qdc/2003/04/02/dc.xsd"/>
+    <xsd:import namespace="http://purl.org/dc/terms/" schemaLocation="http://dublincore.org/schemas/xmls/qdc/2003/04/02/dcterms.xsd"/>
+    <xsd:element name="coreProperties" type="CT_coreProperties"/>
+    <xsd:complexType name="CT_coreProperties">
+      <xsd:all>
+        <xsd:element ref="dc:creator" minOccurs="0" maxOccurs="1"/>
+        <xsd:element ref="dcterms:created" minOccurs="0" maxOccurs="1"/>
+        <xsd:element ref="dc:identifier" minOccurs="0" maxOccurs="1"/>
+        <xsd:element name="contentType" minOccurs="0" maxOccurs="1" type="xsd:string" ma:index="0" ma:displayName="Content Type"/>
+        <xsd:element ref="dc:title" minOccurs="0" maxOccurs="1" ma:index="4" ma:displayName="Title"/>
+        <xsd:element ref="dc:subject" minOccurs="0" maxOccurs="1"/>
+        <xsd:element ref="dc:description" minOccurs="0" maxOccurs="1"/>
+        <xsd:element name="keywords" minOccurs="0" maxOccurs="1" type="xsd:string"/>
+        <xsd:element ref="dc:language" minOccurs="0" maxOccurs="1"/>
+        <xsd:element name="category" minOccurs="0" maxOccurs="1" type="xsd:string"/>
+        <xsd:element name="version" minOccurs="0" maxOccurs="1" type="xsd:string"/>
+        <xsd:element name="revision" minOccurs="0" maxOccurs="1" type="xsd:string">
+          <xsd:annotation>
+            <xsd:documentation>
+                        This value indicates the number of saves or revisions. The application is responsible for updating this value after each revision.
+                    </xsd:documentation>
+          </xsd:annotation>
+        </xsd:element>
+        <xsd:element name="lastModifiedBy" minOccurs="0" maxOccurs="1" type="xsd:string"/>
+        <xsd:element ref="dcterms:modified" minOccurs="0" maxOccurs="1"/>
+        <xsd:element name="contentStatus" minOccurs="0" maxOccurs="1" type="xsd:string"/>
+      </xsd:all>
+    </xsd:complexType>
+  </xsd:schema>
+  <xs:schema xmlns:pc="http://schemas.microsoft.com/office/infopath/2007/PartnerControls" xmlns:xs="http://www.w3.org/2001/XMLSchema" targetNamespace="http://schemas.microsoft.com/office/infopath/2007/PartnerControls" elementFormDefault="qualified" attributeFormDefault="unqualified">
+    <xs:element name="Person">
+      <xs:complexType>
+        <xs:sequence>
+          <xs:element ref="pc:DisplayName" minOccurs="0"/>
+          <xs:element ref="pc:AccountId" minOccurs="0"/>
+          <xs:element ref="pc:AccountType" minOccurs="0"/>
+        </xs:sequence>
+      </xs:complexType>
+    </xs:element>
+    <xs:element name="DisplayName" type="xs:string"/>
+    <xs:element name="AccountId" type="xs:string"/>
+    <xs:element name="AccountType" type="xs:string"/>
+    <xs:element name="BDCAssociatedEntity">
+      <xs:complexType>
+        <xs:sequence>
+          <xs:element ref="pc:BDCEntity" minOccurs="0" maxOccurs="unbounded"/>
+        </xs:sequence>
+        <xs:attribute ref="pc:EntityNamespace"/>
+        <xs:attribute ref="pc:EntityName"/>
+        <xs:attribute ref="pc:SystemInstanceName"/>
+        <xs:attribute ref="pc:AssociationName"/>
+      </xs:complexType>
+    </xs:element>
+    <xs:attribute name="EntityNamespace" type="xs:string"/>
+    <xs:attribute name="EntityName" type="xs:string"/>
+    <xs:attribute name="SystemInstanceName" type="xs:string"/>
+    <xs:attribute name="AssociationName" type="xs:string"/>
+    <xs:element name="BDCEntity">
+      <xs:complexType>
+        <xs:sequence>
+          <xs:element ref="pc:EntityDisplayName" minOccurs="0"/>
+          <xs:element ref="pc:EntityInstanceReference" minOccurs="0"/>
+          <xs:element ref="pc:EntityId1" minOccurs="0"/>
+          <xs:element ref="pc:EntityId2" minOccurs="0"/>
+          <xs:element ref="pc:EntityId3" minOccurs="0"/>
+          <xs:element ref="pc:EntityId4" minOccurs="0"/>
+          <xs:element ref="pc:EntityId5" minOccurs="0"/>
+        </xs:sequence>
+      </xs:complexType>
+    </xs:element>
+    <xs:element name="EntityDisplayName" type="xs:string"/>
+    <xs:element name="EntityInstanceReference" type="xs:string"/>
+    <xs:element name="EntityId1" type="xs:string"/>
+    <xs:element name="EntityId2" type="xs:string"/>
+    <xs:element name="EntityId3" type="xs:string"/>
+    <xs:element name="EntityId4" type="xs:string"/>
+    <xs:element name="EntityId5" type="xs:string"/>
+    <xs:element name="Terms">
+      <xs:complexType>
+        <xs:sequence>
+          <xs:element ref="pc:TermInfo" minOccurs="0" maxOccurs="unbounded"/>
+        </xs:sequence>
+      </xs:complexType>
+    </xs:element>
+    <xs:element name="TermInfo">
+      <xs:complexType>
+        <xs:sequence>
+          <xs:element ref="pc:TermName" minOccurs="0"/>
+          <xs:element ref="pc:TermId" minOccurs="0"/>
+        </xs:sequence>
+      </xs:complexType>
+    </xs:element>
+    <xs:element name="TermName" type="xs:string"/>
+    <xs:element name="TermId" type="xs:string"/>
+  </xs:schema>
+</ct:contentTypeSchema>
+</file>
+
+<file path=customXml/itemProps1.xml><?xml version="1.0" encoding="utf-8"?>
+<ds:datastoreItem xmlns:ds="http://schemas.openxmlformats.org/officeDocument/2006/customXml" ds:itemID="{2E6CBD86-C09C-470A-88E8-4B08832346BE}">
+  <ds:schemaRefs>
+    <ds:schemaRef ds:uri="http://schemas.microsoft.com/office/infopath/2007/PartnerControls"/>
+    <ds:schemaRef ds:uri="http://schemas.microsoft.com/office/2006/documentManagement/types"/>
+    <ds:schemaRef ds:uri="bf0484fb-39aa-440e-a7f6-ce6b10828c56"/>
+    <ds:schemaRef ds:uri="9dd65258-3995-4e6a-8867-aed9b661a0cf"/>
+    <ds:schemaRef ds:uri="http://purl.org/dc/elements/1.1/"/>
+    <ds:schemaRef ds:uri="http://www.w3.org/XML/1998/namespace"/>
+    <ds:schemaRef ds:uri="http://purl.org/dc/terms/"/>
+    <ds:schemaRef ds:uri="http://schemas.openxmlformats.org/package/2006/metadata/core-properties"/>
+    <ds:schemaRef ds:uri="http://schemas.microsoft.com/office/2006/metadata/properties"/>
+    <ds:schemaRef ds:uri="http://purl.org/dc/dcmitype/"/>
+  </ds:schemaRefs>
+</ds:datastoreItem>
+</file>
+
+<file path=customXml/itemProps2.xml><?xml version="1.0" encoding="utf-8"?>
+<ds:datastoreItem xmlns:ds="http://schemas.openxmlformats.org/officeDocument/2006/customXml" ds:itemID="{6204957A-1A48-4EA0-8205-DDDFF95B0C42}">
+  <ds:schemaRefs>
+    <ds:schemaRef ds:uri="http://schemas.microsoft.com/sharepoint/v3/contenttype/forms"/>
+  </ds:schemaRefs>
+</ds:datastoreItem>
+</file>
+
+<file path=customXml/itemProps3.xml><?xml version="1.0" encoding="utf-8"?>
+<ds:datastoreItem xmlns:ds="http://schemas.openxmlformats.org/officeDocument/2006/customXml" ds:itemID="{D9FCC86B-1F9D-4A3C-8003-88B96C469389}">
+  <ds:schemaRefs>
+    <ds:schemaRef ds:uri="http://schemas.microsoft.com/office/2006/metadata/contentType"/>
+    <ds:schemaRef ds:uri="http://schemas.microsoft.com/office/2006/metadata/properties/metaAttributes"/>
+    <ds:schemaRef ds:uri="http://www.w3.org/2001/XMLSchema"/>
+    <ds:schemaRef ds:uri="http://schemas.microsoft.com/office/2006/metadata/properties"/>
+    <ds:schemaRef ds:uri="9dd65258-3995-4e6a-8867-aed9b661a0cf"/>
+    <ds:schemaRef ds:uri="bf0484fb-39aa-440e-a7f6-ce6b10828c56"/>
+    <ds:schemaRef ds:uri="http://schemas.microsoft.com/office/2006/documentManagement/types"/>
+    <ds:schemaRef ds:uri="http://schemas.microsoft.com/office/infopath/2007/PartnerControls"/>
+    <ds:schemaRef ds:uri="http://schemas.openxmlformats.org/package/2006/metadata/core-properties"/>
+    <ds:schemaRef ds:uri="http://purl.org/dc/elements/1.1/"/>
+    <ds:schemaRef ds:uri="http://purl.org/dc/terms/"/>
+    <ds:schemaRef ds:uri="http://schemas.microsoft.com/internal/obd"/>
+  </ds:schemaRefs>
+</ds:datastoreItem>
 </file>
--- a/flowchart.pptx
+++ b/flowchart.pptx
@@ -13378,6 +13378,7 @@
                     </m:oMath>
                   </m:oMathPara>
                 </a14:m>
+                <a:endParaRPr/>
               </a:p>
             </p:txBody>
           </p:sp>
@@ -14713,7 +14714,7 @@
           <p:nvPr>
             <p:extLst>
               <p:ext uri="{D42A27DB-BD31-4B8C-83A1-F6EECF244321}">
-                <p14:modId xmlns:p14="http://schemas.microsoft.com/office/powerpoint/2010/main" val="2192175263"/>
+                <p14:modId xmlns:p14="http://schemas.microsoft.com/office/powerpoint/2010/main" val="2108108017"/>
               </p:ext>
             </p:extLst>
           </p:nvPr>
@@ -15878,7 +15879,7 @@
           <p:nvPr>
             <p:extLst>
               <p:ext uri="{D42A27DB-BD31-4B8C-83A1-F6EECF244321}">
-                <p14:modId xmlns:p14="http://schemas.microsoft.com/office/powerpoint/2010/main" val="3911475041"/>
+                <p14:modId xmlns:p14="http://schemas.microsoft.com/office/powerpoint/2010/main" val="1096760880"/>
               </p:ext>
             </p:extLst>
           </p:nvPr>
@@ -16632,7 +16633,7 @@
           <p:nvPr>
             <p:extLst>
               <p:ext uri="{D42A27DB-BD31-4B8C-83A1-F6EECF244321}">
-                <p14:modId xmlns:p14="http://schemas.microsoft.com/office/powerpoint/2010/main" val="440301040"/>
+                <p14:modId xmlns:p14="http://schemas.microsoft.com/office/powerpoint/2010/main" val="4096963464"/>
               </p:ext>
             </p:extLst>
           </p:nvPr>
@@ -18850,7 +18851,7 @@
           <p:nvPr>
             <p:extLst>
               <p:ext uri="{D42A27DB-BD31-4B8C-83A1-F6EECF244321}">
-                <p14:modId xmlns:p14="http://schemas.microsoft.com/office/powerpoint/2010/main" val="4038628213"/>
+                <p14:modId xmlns:p14="http://schemas.microsoft.com/office/powerpoint/2010/main" val="1226728353"/>
               </p:ext>
             </p:extLst>
           </p:nvPr>
@@ -18950,7 +18951,7 @@
           <p:nvPr>
             <p:extLst>
               <p:ext uri="{D42A27DB-BD31-4B8C-83A1-F6EECF244321}">
-                <p14:modId xmlns:p14="http://schemas.microsoft.com/office/powerpoint/2010/main" val="2190125510"/>
+                <p14:modId xmlns:p14="http://schemas.microsoft.com/office/powerpoint/2010/main" val="3391861667"/>
               </p:ext>
             </p:extLst>
           </p:nvPr>
@@ -19107,7 +19108,7 @@
           <p:nvPr>
             <p:extLst>
               <p:ext uri="{D42A27DB-BD31-4B8C-83A1-F6EECF244321}">
-                <p14:modId xmlns:p14="http://schemas.microsoft.com/office/powerpoint/2010/main" val="3928180372"/>
+                <p14:modId xmlns:p14="http://schemas.microsoft.com/office/powerpoint/2010/main" val="4083600471"/>
               </p:ext>
             </p:extLst>
           </p:nvPr>
@@ -19207,7 +19208,7 @@
           <p:nvPr>
             <p:extLst>
               <p:ext uri="{D42A27DB-BD31-4B8C-83A1-F6EECF244321}">
-                <p14:modId xmlns:p14="http://schemas.microsoft.com/office/powerpoint/2010/main" val="1742814554"/>
+                <p14:modId xmlns:p14="http://schemas.microsoft.com/office/powerpoint/2010/main" val="3627206346"/>
               </p:ext>
             </p:extLst>
           </p:nvPr>
@@ -19307,7 +19308,7 @@
           <p:nvPr>
             <p:extLst>
               <p:ext uri="{D42A27DB-BD31-4B8C-83A1-F6EECF244321}">
-                <p14:modId xmlns:p14="http://schemas.microsoft.com/office/powerpoint/2010/main" val="2280214929"/>
+                <p14:modId xmlns:p14="http://schemas.microsoft.com/office/powerpoint/2010/main" val="3972624393"/>
               </p:ext>
             </p:extLst>
           </p:nvPr>
@@ -19407,7 +19408,7 @@
           <p:nvPr>
             <p:extLst>
               <p:ext uri="{D42A27DB-BD31-4B8C-83A1-F6EECF244321}">
-                <p14:modId xmlns:p14="http://schemas.microsoft.com/office/powerpoint/2010/main" val="434218861"/>
+                <p14:modId xmlns:p14="http://schemas.microsoft.com/office/powerpoint/2010/main" val="1890745715"/>
               </p:ext>
             </p:extLst>
           </p:nvPr>
@@ -19507,7 +19508,7 @@
           <p:nvPr>
             <p:extLst>
               <p:ext uri="{D42A27DB-BD31-4B8C-83A1-F6EECF244321}">
-                <p14:modId xmlns:p14="http://schemas.microsoft.com/office/powerpoint/2010/main" val="2094147417"/>
+                <p14:modId xmlns:p14="http://schemas.microsoft.com/office/powerpoint/2010/main" val="460955946"/>
               </p:ext>
             </p:extLst>
           </p:nvPr>
@@ -19607,7 +19608,7 @@
           <p:nvPr>
             <p:extLst>
               <p:ext uri="{D42A27DB-BD31-4B8C-83A1-F6EECF244321}">
-                <p14:modId xmlns:p14="http://schemas.microsoft.com/office/powerpoint/2010/main" val="4283304711"/>
+                <p14:modId xmlns:p14="http://schemas.microsoft.com/office/powerpoint/2010/main" val="1366349256"/>
               </p:ext>
             </p:extLst>
           </p:nvPr>
@@ -19837,7 +19838,7 @@
           <p:nvPr>
             <p:extLst>
               <p:ext uri="{D42A27DB-BD31-4B8C-83A1-F6EECF244321}">
-                <p14:modId xmlns:p14="http://schemas.microsoft.com/office/powerpoint/2010/main" val="4240326915"/>
+                <p14:modId xmlns:p14="http://schemas.microsoft.com/office/powerpoint/2010/main" val="10294614"/>
               </p:ext>
             </p:extLst>
           </p:nvPr>
@@ -20499,6 +20500,7 @@
               </a:bodyPr>
               <a:lstStyle/>
               <a:p>
+                <a:pPr/>
                 <a14:m>
                   <m:oMathPara xmlns:m="http://schemas.openxmlformats.org/officeDocument/2006/math">
                     <m:oMathParaPr>
@@ -20836,6 +20838,7 @@
                     </m:oMath>
                   </m:oMathPara>
                 </a14:m>
+                <a:endParaRPr/>
               </a:p>
             </p:txBody>
           </p:sp>
@@ -20912,7 +20915,7 @@
           <p:nvPr>
             <p:extLst>
               <p:ext uri="{D42A27DB-BD31-4B8C-83A1-F6EECF244321}">
-                <p14:modId xmlns:p14="http://schemas.microsoft.com/office/powerpoint/2010/main" val="3234922496"/>
+                <p14:modId xmlns:p14="http://schemas.microsoft.com/office/powerpoint/2010/main" val="3639690587"/>
               </p:ext>
             </p:extLst>
           </p:nvPr>
@@ -21462,7 +21465,7 @@
           <p:nvPr>
             <p:extLst>
               <p:ext uri="{D42A27DB-BD31-4B8C-83A1-F6EECF244321}">
-                <p14:modId xmlns:p14="http://schemas.microsoft.com/office/powerpoint/2010/main" val="203947564"/>
+                <p14:modId xmlns:p14="http://schemas.microsoft.com/office/powerpoint/2010/main" val="1728969688"/>
               </p:ext>
             </p:extLst>
           </p:nvPr>
@@ -21977,7 +21980,7 @@
           <p:nvPr>
             <p:extLst>
               <p:ext uri="{D42A27DB-BD31-4B8C-83A1-F6EECF244321}">
-                <p14:modId xmlns:p14="http://schemas.microsoft.com/office/powerpoint/2010/main" val="4289422585"/>
+                <p14:modId xmlns:p14="http://schemas.microsoft.com/office/powerpoint/2010/main" val="3529942541"/>
               </p:ext>
             </p:extLst>
           </p:nvPr>
@@ -23165,6 +23168,15 @@
 </file>
 
 <file path=customXml/item2.xml><?xml version="1.0" encoding="utf-8"?>
+<?mso-contentType ?>
+<FormTemplates xmlns="http://schemas.microsoft.com/sharepoint/v3/contenttype/forms">
+  <Display>DocumentLibraryForm</Display>
+  <Edit>DocumentLibraryForm</Edit>
+  <New>DocumentLibraryForm</New>
+</FormTemplates>
+</file>
+
+<file path=customXml/item3.xml><?xml version="1.0" encoding="utf-8"?>
 <ct:contentTypeSchema xmlns:ct="http://schemas.microsoft.com/office/2006/metadata/contentType" xmlns:ma="http://schemas.microsoft.com/office/2006/metadata/properties/metaAttributes" ct:_="" ma:_="" ma:contentTypeName="Document" ma:contentTypeID="0x0101006A4E12A0CEF6A047A2ED39F3719482AA" ma:contentTypeVersion="16" ma:contentTypeDescription="Create a new document." ma:contentTypeScope="" ma:versionID="0e1d78e459d7e83271e38b16816bc458">
   <xsd:schema xmlns:xsd="http://www.w3.org/2001/XMLSchema" xmlns:xs="http://www.w3.org/2001/XMLSchema" xmlns:p="http://schemas.microsoft.com/office/2006/metadata/properties" xmlns:ns3="9dd65258-3995-4e6a-8867-aed9b661a0cf" xmlns:ns4="bf0484fb-39aa-440e-a7f6-ce6b10828c56" targetNamespace="http://schemas.microsoft.com/office/2006/metadata/properties" ma:root="true" ma:fieldsID="177a938d7b189453f861ba34050ac94d" ns3:_="" ns4:_="">
     <xsd:import namespace="9dd65258-3995-4e6a-8867-aed9b661a0cf"/>
@@ -23403,15 +23415,6 @@
 </ct:contentTypeSchema>
 </file>
 
-<file path=customXml/item3.xml><?xml version="1.0" encoding="utf-8"?>
-<?mso-contentType ?>
-<FormTemplates xmlns="http://schemas.microsoft.com/sharepoint/v3/contenttype/forms">
-  <Display>DocumentLibraryForm</Display>
-  <Edit>DocumentLibraryForm</Edit>
-  <New>DocumentLibraryForm</New>
-</FormTemplates>
-</file>
-
 <file path=customXml/itemProps1.xml><?xml version="1.0" encoding="utf-8"?>
 <ds:datastoreItem xmlns:ds="http://schemas.openxmlformats.org/officeDocument/2006/customXml" ds:itemID="{2E6CBD86-C09C-470A-88E8-4B08832346BE}">
   <ds:schemaRefs>
@@ -23430,6 +23433,14 @@
 </file>
 
 <file path=customXml/itemProps2.xml><?xml version="1.0" encoding="utf-8"?>
+<ds:datastoreItem xmlns:ds="http://schemas.openxmlformats.org/officeDocument/2006/customXml" ds:itemID="{6204957A-1A48-4EA0-8205-DDDFF95B0C42}">
+  <ds:schemaRefs>
+    <ds:schemaRef ds:uri="http://schemas.microsoft.com/sharepoint/v3/contenttype/forms"/>
+  </ds:schemaRefs>
+</ds:datastoreItem>
+</file>
+
+<file path=customXml/itemProps3.xml><?xml version="1.0" encoding="utf-8"?>
 <ds:datastoreItem xmlns:ds="http://schemas.openxmlformats.org/officeDocument/2006/customXml" ds:itemID="{D9FCC86B-1F9D-4A3C-8003-88B96C469389}">
   <ds:schemaRefs>
     <ds:schemaRef ds:uri="http://schemas.microsoft.com/office/2006/metadata/contentType"/>
@@ -23446,12 +23457,4 @@
     <ds:schemaRef ds:uri="http://schemas.microsoft.com/internal/obd"/>
   </ds:schemaRefs>
 </ds:datastoreItem>
-</file>
-
-<file path=customXml/itemProps3.xml><?xml version="1.0" encoding="utf-8"?>
-<ds:datastoreItem xmlns:ds="http://schemas.openxmlformats.org/officeDocument/2006/customXml" ds:itemID="{6204957A-1A48-4EA0-8205-DDDFF95B0C42}">
-  <ds:schemaRefs>
-    <ds:schemaRef ds:uri="http://schemas.microsoft.com/sharepoint/v3/contenttype/forms"/>
-  </ds:schemaRefs>
-</ds:datastoreItem>
 </file>
--- a/flowchart.pptx
+++ b/flowchart.pptx
@@ -126,6 +126,315 @@
 </p:presentation>
 </file>
 
+<file path=ppt/revisionInfo.xml><?xml version="1.0" encoding="utf-8"?>
+<p1510:revInfo xmlns:a="http://schemas.openxmlformats.org/drawingml/2006/main" xmlns:r="http://schemas.openxmlformats.org/officeDocument/2006/relationships" xmlns:p1510="http://schemas.microsoft.com/office/powerpoint/2015/10/main">
+  <p1510:revLst>
+    <p1510:client id="{8DA7E4E1-7D8D-4606-82B6-1CC56AB5C36E}" v="8" dt="2026-03-09T20:11:36.316"/>
+  </p1510:revLst>
+</p1510:revInfo>
+</file>
+
+<file path=ppt/changesInfos/changesInfo1.xml><?xml version="1.0" encoding="utf-8"?>
+<pc:chgInfo xmlns:a="http://schemas.openxmlformats.org/drawingml/2006/main" xmlns:r="http://schemas.openxmlformats.org/officeDocument/2006/relationships" xmlns:ac="http://schemas.microsoft.com/office/drawing/2013/main/command" xmlns:pc="http://schemas.microsoft.com/office/powerpoint/2013/main/command">
+  <pc:docChgLst>
+    <pc:chgData name="An, Xiaodong" userId="434b1142-3ad5-4172-9476-605417564d6b" providerId="ADAL" clId="{0FD67F35-79CA-4212-80DA-F518049104B4}"/>
+    <pc:docChg chg="modSld">
+      <pc:chgData name="An, Xiaodong" userId="434b1142-3ad5-4172-9476-605417564d6b" providerId="ADAL" clId="{0FD67F35-79CA-4212-80DA-F518049104B4}" dt="2026-03-09T20:11:36.316" v="25" actId="5736"/>
+      <pc:docMkLst>
+        <pc:docMk/>
+      </pc:docMkLst>
+      <pc:sldChg chg="modSp mod">
+        <pc:chgData name="An, Xiaodong" userId="434b1142-3ad5-4172-9476-605417564d6b" providerId="ADAL" clId="{0FD67F35-79CA-4212-80DA-F518049104B4}" dt="2026-03-09T20:11:36.316" v="25" actId="5736"/>
+        <pc:sldMkLst>
+          <pc:docMk/>
+          <pc:sldMk cId="156328664" sldId="257"/>
+        </pc:sldMkLst>
+        <pc:spChg chg="mod">
+          <ac:chgData name="An, Xiaodong" userId="434b1142-3ad5-4172-9476-605417564d6b" providerId="ADAL" clId="{0FD67F35-79CA-4212-80DA-F518049104B4}" dt="2026-03-09T20:10:15.886" v="24" actId="5736"/>
+          <ac:spMkLst>
+            <pc:docMk/>
+            <pc:sldMk cId="156328664" sldId="257"/>
+            <ac:spMk id="12" creationId="{FA55095C-4D71-AC55-99AF-EAFD74B94045}"/>
+          </ac:spMkLst>
+        </pc:spChg>
+        <pc:spChg chg="mod">
+          <ac:chgData name="An, Xiaodong" userId="434b1142-3ad5-4172-9476-605417564d6b" providerId="ADAL" clId="{0FD67F35-79CA-4212-80DA-F518049104B4}" dt="2026-03-09T20:11:36.316" v="25" actId="5736"/>
+          <ac:spMkLst>
+            <pc:docMk/>
+            <pc:sldMk cId="156328664" sldId="257"/>
+            <ac:spMk id="18" creationId="{6A0B3956-98E9-DC00-3E7E-BE15265FFCA2}"/>
+          </ac:spMkLst>
+        </pc:spChg>
+        <pc:spChg chg="mod">
+          <ac:chgData name="An, Xiaodong" userId="434b1142-3ad5-4172-9476-605417564d6b" providerId="ADAL" clId="{0FD67F35-79CA-4212-80DA-F518049104B4}" dt="2026-03-09T20:10:15.886" v="24" actId="5736"/>
+          <ac:spMkLst>
+            <pc:docMk/>
+            <pc:sldMk cId="156328664" sldId="257"/>
+            <ac:spMk id="29" creationId="{633703C6-2B33-B815-6E66-DB7D2439B0A2}"/>
+          </ac:spMkLst>
+        </pc:spChg>
+        <pc:spChg chg="mod">
+          <ac:chgData name="An, Xiaodong" userId="434b1142-3ad5-4172-9476-605417564d6b" providerId="ADAL" clId="{0FD67F35-79CA-4212-80DA-F518049104B4}" dt="2026-03-09T20:08:22.520" v="0" actId="207"/>
+          <ac:spMkLst>
+            <pc:docMk/>
+            <pc:sldMk cId="156328664" sldId="257"/>
+            <ac:spMk id="35" creationId="{DF71F242-0BF6-8D0E-6732-BB5D721164D3}"/>
+          </ac:spMkLst>
+        </pc:spChg>
+        <pc:spChg chg="mod">
+          <ac:chgData name="An, Xiaodong" userId="434b1142-3ad5-4172-9476-605417564d6b" providerId="ADAL" clId="{0FD67F35-79CA-4212-80DA-F518049104B4}" dt="2026-03-09T20:11:36.316" v="25" actId="5736"/>
+          <ac:spMkLst>
+            <pc:docMk/>
+            <pc:sldMk cId="156328664" sldId="257"/>
+            <ac:spMk id="40" creationId="{CB6D4584-EE74-F7B8-81FC-E3D143C07931}"/>
+          </ac:spMkLst>
+        </pc:spChg>
+        <pc:spChg chg="mod">
+          <ac:chgData name="An, Xiaodong" userId="434b1142-3ad5-4172-9476-605417564d6b" providerId="ADAL" clId="{0FD67F35-79CA-4212-80DA-F518049104B4}" dt="2026-03-09T20:11:36.316" v="25" actId="5736"/>
+          <ac:spMkLst>
+            <pc:docMk/>
+            <pc:sldMk cId="156328664" sldId="257"/>
+            <ac:spMk id="43" creationId="{912DA76F-B000-7CFF-FEA2-7E30552A362A}"/>
+          </ac:spMkLst>
+        </pc:spChg>
+        <pc:spChg chg="mod">
+          <ac:chgData name="An, Xiaodong" userId="434b1142-3ad5-4172-9476-605417564d6b" providerId="ADAL" clId="{0FD67F35-79CA-4212-80DA-F518049104B4}" dt="2026-03-09T20:10:15.886" v="24" actId="5736"/>
+          <ac:spMkLst>
+            <pc:docMk/>
+            <pc:sldMk cId="156328664" sldId="257"/>
+            <ac:spMk id="57" creationId="{6880C309-9020-FBDA-01E3-9F8902335090}"/>
+          </ac:spMkLst>
+        </pc:spChg>
+        <pc:spChg chg="mod">
+          <ac:chgData name="An, Xiaodong" userId="434b1142-3ad5-4172-9476-605417564d6b" providerId="ADAL" clId="{0FD67F35-79CA-4212-80DA-F518049104B4}" dt="2026-03-09T20:09:19.186" v="23" actId="1035"/>
+          <ac:spMkLst>
+            <pc:docMk/>
+            <pc:sldMk cId="156328664" sldId="257"/>
+            <ac:spMk id="1051" creationId="{C17AB70D-A43A-BF80-4CC9-88DA45597C2D}"/>
+          </ac:spMkLst>
+        </pc:spChg>
+        <pc:spChg chg="mod">
+          <ac:chgData name="An, Xiaodong" userId="434b1142-3ad5-4172-9476-605417564d6b" providerId="ADAL" clId="{0FD67F35-79CA-4212-80DA-F518049104B4}" dt="2026-03-09T20:10:15.886" v="24" actId="5736"/>
+          <ac:spMkLst>
+            <pc:docMk/>
+            <pc:sldMk cId="156328664" sldId="257"/>
+            <ac:spMk id="1066" creationId="{A1E3D48B-F4DA-0586-1B37-59C62EF6F158}"/>
+          </ac:spMkLst>
+        </pc:spChg>
+        <pc:spChg chg="mod">
+          <ac:chgData name="An, Xiaodong" userId="434b1142-3ad5-4172-9476-605417564d6b" providerId="ADAL" clId="{0FD67F35-79CA-4212-80DA-F518049104B4}" dt="2026-03-09T20:11:36.316" v="25" actId="5736"/>
+          <ac:spMkLst>
+            <pc:docMk/>
+            <pc:sldMk cId="156328664" sldId="257"/>
+            <ac:spMk id="1068" creationId="{E9728DF8-6483-954D-6F40-1E151C8A40BA}"/>
+          </ac:spMkLst>
+        </pc:spChg>
+        <pc:spChg chg="mod">
+          <ac:chgData name="An, Xiaodong" userId="434b1142-3ad5-4172-9476-605417564d6b" providerId="ADAL" clId="{0FD67F35-79CA-4212-80DA-F518049104B4}" dt="2026-03-09T20:09:19.186" v="23" actId="1035"/>
+          <ac:spMkLst>
+            <pc:docMk/>
+            <pc:sldMk cId="156328664" sldId="257"/>
+            <ac:spMk id="1072" creationId="{6201495F-B92F-1F95-5403-54D10419CECC}"/>
+          </ac:spMkLst>
+        </pc:spChg>
+        <pc:spChg chg="mod">
+          <ac:chgData name="An, Xiaodong" userId="434b1142-3ad5-4172-9476-605417564d6b" providerId="ADAL" clId="{0FD67F35-79CA-4212-80DA-F518049104B4}" dt="2026-03-09T20:11:36.316" v="25" actId="5736"/>
+          <ac:spMkLst>
+            <pc:docMk/>
+            <pc:sldMk cId="156328664" sldId="257"/>
+            <ac:spMk id="1089" creationId="{2FCDC34B-04DD-5E4A-261C-84485EA60375}"/>
+          </ac:spMkLst>
+        </pc:spChg>
+        <pc:spChg chg="mod">
+          <ac:chgData name="An, Xiaodong" userId="434b1142-3ad5-4172-9476-605417564d6b" providerId="ADAL" clId="{0FD67F35-79CA-4212-80DA-F518049104B4}" dt="2026-03-09T20:08:56.894" v="14" actId="20577"/>
+          <ac:spMkLst>
+            <pc:docMk/>
+            <pc:sldMk cId="156328664" sldId="257"/>
+            <ac:spMk id="1101" creationId="{152F06F1-F805-CCE5-1EE4-1411EFF17F04}"/>
+          </ac:spMkLst>
+        </pc:spChg>
+        <pc:spChg chg="mod">
+          <ac:chgData name="An, Xiaodong" userId="434b1142-3ad5-4172-9476-605417564d6b" providerId="ADAL" clId="{0FD67F35-79CA-4212-80DA-F518049104B4}" dt="2026-03-09T20:09:19.186" v="23" actId="1035"/>
+          <ac:spMkLst>
+            <pc:docMk/>
+            <pc:sldMk cId="156328664" sldId="257"/>
+            <ac:spMk id="1102" creationId="{69E7DFCA-D2FA-44B1-8F62-74DF1E5B5CA0}"/>
+          </ac:spMkLst>
+        </pc:spChg>
+        <pc:spChg chg="mod">
+          <ac:chgData name="An, Xiaodong" userId="434b1142-3ad5-4172-9476-605417564d6b" providerId="ADAL" clId="{0FD67F35-79CA-4212-80DA-F518049104B4}" dt="2026-03-09T20:10:15.886" v="24" actId="5736"/>
+          <ac:spMkLst>
+            <pc:docMk/>
+            <pc:sldMk cId="156328664" sldId="257"/>
+            <ac:spMk id="1103" creationId="{B7B57513-A521-07A4-88D6-D302BEF734FB}"/>
+          </ac:spMkLst>
+        </pc:spChg>
+        <pc:spChg chg="mod">
+          <ac:chgData name="An, Xiaodong" userId="434b1142-3ad5-4172-9476-605417564d6b" providerId="ADAL" clId="{0FD67F35-79CA-4212-80DA-F518049104B4}" dt="2026-03-09T20:09:19.186" v="23" actId="1035"/>
+          <ac:spMkLst>
+            <pc:docMk/>
+            <pc:sldMk cId="156328664" sldId="257"/>
+            <ac:spMk id="1106" creationId="{64DA7E74-F80F-6C6D-E58D-685297476B1E}"/>
+          </ac:spMkLst>
+        </pc:spChg>
+        <pc:spChg chg="mod">
+          <ac:chgData name="An, Xiaodong" userId="434b1142-3ad5-4172-9476-605417564d6b" providerId="ADAL" clId="{0FD67F35-79CA-4212-80DA-F518049104B4}" dt="2026-03-09T20:11:36.316" v="25" actId="5736"/>
+          <ac:spMkLst>
+            <pc:docMk/>
+            <pc:sldMk cId="156328664" sldId="257"/>
+            <ac:spMk id="1111" creationId="{109B5A2C-51AD-0F8F-8D57-4B5B4FF16D79}"/>
+          </ac:spMkLst>
+        </pc:spChg>
+        <pc:spChg chg="mod">
+          <ac:chgData name="An, Xiaodong" userId="434b1142-3ad5-4172-9476-605417564d6b" providerId="ADAL" clId="{0FD67F35-79CA-4212-80DA-F518049104B4}" dt="2026-03-09T20:11:36.316" v="25" actId="5736"/>
+          <ac:spMkLst>
+            <pc:docMk/>
+            <pc:sldMk cId="156328664" sldId="257"/>
+            <ac:spMk id="1121" creationId="{C03ABD8C-E5E2-1B3B-95BE-B26F3E72B848}"/>
+          </ac:spMkLst>
+        </pc:spChg>
+        <pc:spChg chg="mod">
+          <ac:chgData name="An, Xiaodong" userId="434b1142-3ad5-4172-9476-605417564d6b" providerId="ADAL" clId="{0FD67F35-79CA-4212-80DA-F518049104B4}" dt="2026-03-09T20:09:19.186" v="23" actId="1035"/>
+          <ac:spMkLst>
+            <pc:docMk/>
+            <pc:sldMk cId="156328664" sldId="257"/>
+            <ac:spMk id="1131" creationId="{432040D7-E661-133A-DFAC-50ADA333F164}"/>
+          </ac:spMkLst>
+        </pc:spChg>
+        <pc:spChg chg="mod">
+          <ac:chgData name="An, Xiaodong" userId="434b1142-3ad5-4172-9476-605417564d6b" providerId="ADAL" clId="{0FD67F35-79CA-4212-80DA-F518049104B4}" dt="2026-03-09T20:08:54.750" v="12" actId="20577"/>
+          <ac:spMkLst>
+            <pc:docMk/>
+            <pc:sldMk cId="156328664" sldId="257"/>
+            <ac:spMk id="1145" creationId="{9C3546C0-D3D8-85F9-DE43-BC5FA48CC673}"/>
+          </ac:spMkLst>
+        </pc:spChg>
+        <pc:spChg chg="mod">
+          <ac:chgData name="An, Xiaodong" userId="434b1142-3ad5-4172-9476-605417564d6b" providerId="ADAL" clId="{0FD67F35-79CA-4212-80DA-F518049104B4}" dt="2026-03-09T20:09:19.186" v="23" actId="1035"/>
+          <ac:spMkLst>
+            <pc:docMk/>
+            <pc:sldMk cId="156328664" sldId="257"/>
+            <ac:spMk id="1155" creationId="{76A45E06-872E-D4FE-6543-BEA8F8285509}"/>
+          </ac:spMkLst>
+        </pc:spChg>
+        <pc:spChg chg="mod">
+          <ac:chgData name="An, Xiaodong" userId="434b1142-3ad5-4172-9476-605417564d6b" providerId="ADAL" clId="{0FD67F35-79CA-4212-80DA-F518049104B4}" dt="2026-03-09T20:09:19.186" v="23" actId="1035"/>
+          <ac:spMkLst>
+            <pc:docMk/>
+            <pc:sldMk cId="156328664" sldId="257"/>
+            <ac:spMk id="1159" creationId="{D2F85AEE-683C-9EF5-3425-6E148E4759D1}"/>
+          </ac:spMkLst>
+        </pc:spChg>
+        <pc:spChg chg="mod">
+          <ac:chgData name="An, Xiaodong" userId="434b1142-3ad5-4172-9476-605417564d6b" providerId="ADAL" clId="{0FD67F35-79CA-4212-80DA-F518049104B4}" dt="2026-03-09T20:10:15.886" v="24" actId="5736"/>
+          <ac:spMkLst>
+            <pc:docMk/>
+            <pc:sldMk cId="156328664" sldId="257"/>
+            <ac:spMk id="1161" creationId="{2796C9CE-0804-2EFF-10EF-232BD4213C8A}"/>
+          </ac:spMkLst>
+        </pc:spChg>
+        <pc:spChg chg="mod">
+          <ac:chgData name="An, Xiaodong" userId="434b1142-3ad5-4172-9476-605417564d6b" providerId="ADAL" clId="{0FD67F35-79CA-4212-80DA-F518049104B4}" dt="2026-03-09T20:11:36.316" v="25" actId="5736"/>
+          <ac:spMkLst>
+            <pc:docMk/>
+            <pc:sldMk cId="156328664" sldId="257"/>
+            <ac:spMk id="1166" creationId="{B984E505-767F-7114-934C-D19FC3F81C13}"/>
+          </ac:spMkLst>
+        </pc:spChg>
+        <pc:spChg chg="mod">
+          <ac:chgData name="An, Xiaodong" userId="434b1142-3ad5-4172-9476-605417564d6b" providerId="ADAL" clId="{0FD67F35-79CA-4212-80DA-F518049104B4}" dt="2026-03-09T20:08:30.263" v="2" actId="207"/>
+          <ac:spMkLst>
+            <pc:docMk/>
+            <pc:sldMk cId="156328664" sldId="257"/>
+            <ac:spMk id="1172" creationId="{D372CBD4-7CC1-7E0F-359E-B5D72319D96E}"/>
+          </ac:spMkLst>
+        </pc:spChg>
+        <pc:spChg chg="mod">
+          <ac:chgData name="An, Xiaodong" userId="434b1142-3ad5-4172-9476-605417564d6b" providerId="ADAL" clId="{0FD67F35-79CA-4212-80DA-F518049104B4}" dt="2026-03-09T20:10:15.886" v="24" actId="5736"/>
+          <ac:spMkLst>
+            <pc:docMk/>
+            <pc:sldMk cId="156328664" sldId="257"/>
+            <ac:spMk id="1177" creationId="{67118463-1120-D153-23EC-C43AE3D2F7C2}"/>
+          </ac:spMkLst>
+        </pc:spChg>
+        <pc:spChg chg="mod">
+          <ac:chgData name="An, Xiaodong" userId="434b1142-3ad5-4172-9476-605417564d6b" providerId="ADAL" clId="{0FD67F35-79CA-4212-80DA-F518049104B4}" dt="2026-03-09T20:11:36.316" v="25" actId="5736"/>
+          <ac:spMkLst>
+            <pc:docMk/>
+            <pc:sldMk cId="156328664" sldId="257"/>
+            <ac:spMk id="1180" creationId="{0BFD70BA-BF4E-BBB8-CE1C-78790498A896}"/>
+          </ac:spMkLst>
+        </pc:spChg>
+        <pc:spChg chg="mod">
+          <ac:chgData name="An, Xiaodong" userId="434b1142-3ad5-4172-9476-605417564d6b" providerId="ADAL" clId="{0FD67F35-79CA-4212-80DA-F518049104B4}" dt="2026-03-09T20:10:15.886" v="24" actId="5736"/>
+          <ac:spMkLst>
+            <pc:docMk/>
+            <pc:sldMk cId="156328664" sldId="257"/>
+            <ac:spMk id="1187" creationId="{11E21D6A-80C9-36C0-66CC-2D0C82D99E71}"/>
+          </ac:spMkLst>
+        </pc:spChg>
+        <pc:spChg chg="mod">
+          <ac:chgData name="An, Xiaodong" userId="434b1142-3ad5-4172-9476-605417564d6b" providerId="ADAL" clId="{0FD67F35-79CA-4212-80DA-F518049104B4}" dt="2026-03-09T20:09:19.186" v="23" actId="1035"/>
+          <ac:spMkLst>
+            <pc:docMk/>
+            <pc:sldMk cId="156328664" sldId="257"/>
+            <ac:spMk id="1191" creationId="{3B6137DF-E3A3-8388-47C7-5D13569FEA22}"/>
+          </ac:spMkLst>
+        </pc:spChg>
+        <pc:spChg chg="mod">
+          <ac:chgData name="An, Xiaodong" userId="434b1142-3ad5-4172-9476-605417564d6b" providerId="ADAL" clId="{0FD67F35-79CA-4212-80DA-F518049104B4}" dt="2026-03-09T20:08:59.279" v="16" actId="20577"/>
+          <ac:spMkLst>
+            <pc:docMk/>
+            <pc:sldMk cId="156328664" sldId="257"/>
+            <ac:spMk id="1192" creationId="{6942C20D-3A08-3BA1-2342-34850F0448D6}"/>
+          </ac:spMkLst>
+        </pc:spChg>
+        <pc:spChg chg="mod">
+          <ac:chgData name="An, Xiaodong" userId="434b1142-3ad5-4172-9476-605417564d6b" providerId="ADAL" clId="{0FD67F35-79CA-4212-80DA-F518049104B4}" dt="2026-03-09T20:09:01.622" v="18" actId="20577"/>
+          <ac:spMkLst>
+            <pc:docMk/>
+            <pc:sldMk cId="156328664" sldId="257"/>
+            <ac:spMk id="1230" creationId="{69F31ECE-10A9-B6FE-719C-F0DAEC6FEE00}"/>
+          </ac:spMkLst>
+        </pc:spChg>
+        <pc:spChg chg="mod">
+          <ac:chgData name="An, Xiaodong" userId="434b1142-3ad5-4172-9476-605417564d6b" providerId="ADAL" clId="{0FD67F35-79CA-4212-80DA-F518049104B4}" dt="2026-03-09T20:09:19.186" v="23" actId="1035"/>
+          <ac:spMkLst>
+            <pc:docMk/>
+            <pc:sldMk cId="156328664" sldId="257"/>
+            <ac:spMk id="1253" creationId="{50275093-0C0F-12AB-15BB-F97077DE2D45}"/>
+          </ac:spMkLst>
+        </pc:spChg>
+        <pc:spChg chg="mod">
+          <ac:chgData name="An, Xiaodong" userId="434b1142-3ad5-4172-9476-605417564d6b" providerId="ADAL" clId="{0FD67F35-79CA-4212-80DA-F518049104B4}" dt="2026-03-09T20:08:41.287" v="6" actId="20577"/>
+          <ac:spMkLst>
+            <pc:docMk/>
+            <pc:sldMk cId="156328664" sldId="257"/>
+            <ac:spMk id="1262" creationId="{1B85DF34-2B2D-E6F6-12A3-2DABD88838F1}"/>
+          </ac:spMkLst>
+        </pc:spChg>
+        <pc:spChg chg="mod">
+          <ac:chgData name="An, Xiaodong" userId="434b1142-3ad5-4172-9476-605417564d6b" providerId="ADAL" clId="{0FD67F35-79CA-4212-80DA-F518049104B4}" dt="2026-03-09T20:11:36.316" v="25" actId="5736"/>
+          <ac:spMkLst>
+            <pc:docMk/>
+            <pc:sldMk cId="156328664" sldId="257"/>
+            <ac:spMk id="1265" creationId="{28375DE6-4E9B-6A2C-0427-C1D21833946F}"/>
+          </ac:spMkLst>
+        </pc:spChg>
+        <pc:spChg chg="mod">
+          <ac:chgData name="An, Xiaodong" userId="434b1142-3ad5-4172-9476-605417564d6b" providerId="ADAL" clId="{0FD67F35-79CA-4212-80DA-F518049104B4}" dt="2026-03-09T20:10:15.886" v="24" actId="5736"/>
+          <ac:spMkLst>
+            <pc:docMk/>
+            <pc:sldMk cId="156328664" sldId="257"/>
+            <ac:spMk id="1276" creationId="{FFCFD4AA-882F-09D7-F92D-B6B053E3D03C}"/>
+          </ac:spMkLst>
+        </pc:spChg>
+      </pc:sldChg>
+    </pc:docChg>
+  </pc:docChgLst>
+</pc:chgInfo>
+</file>
+
 <file path=ppt/notesMasters/notesMaster1.xml><?xml version="1.0" encoding="utf-8"?>
 <p:notesMaster xmlns:a="http://schemas.openxmlformats.org/drawingml/2006/main" xmlns:r="http://schemas.openxmlformats.org/officeDocument/2006/relationships" xmlns:p="http://schemas.openxmlformats.org/presentationml/2006/main">
   <p:cSld>
@@ -208,7 +517,7 @@
           <a:p>
             <a:fld id="{861AD860-6EA9-4119-A999-7E65F9394C29}" type="datetimeFigureOut">
               <a:rPr lang="en-US" smtClean="0"/>
-              <a:t>11/20/2025</a:t>
+              <a:t>3/9/2026</a:t>
             </a:fld>
             <a:endParaRPr lang="en-US"/>
           </a:p>
@@ -695,7 +1004,7 @@
           <a:p>
             <a:fld id="{605D2A03-21FB-4445-B0CA-50857B6CED06}" type="datetimeFigureOut">
               <a:rPr lang="en-US" smtClean="0"/>
-              <a:t>11/20/2025</a:t>
+              <a:t>3/9/2026</a:t>
             </a:fld>
             <a:endParaRPr lang="en-US"/>
           </a:p>
@@ -865,7 +1174,7 @@
           <a:p>
             <a:fld id="{605D2A03-21FB-4445-B0CA-50857B6CED06}" type="datetimeFigureOut">
               <a:rPr lang="en-US" smtClean="0"/>
-              <a:t>11/20/2025</a:t>
+              <a:t>3/9/2026</a:t>
             </a:fld>
             <a:endParaRPr lang="en-US"/>
           </a:p>
@@ -1045,7 +1354,7 @@
           <a:p>
             <a:fld id="{605D2A03-21FB-4445-B0CA-50857B6CED06}" type="datetimeFigureOut">
               <a:rPr lang="en-US" smtClean="0"/>
-              <a:t>11/20/2025</a:t>
+              <a:t>3/9/2026</a:t>
             </a:fld>
             <a:endParaRPr lang="en-US"/>
           </a:p>
@@ -1215,7 +1524,7 @@
           <a:p>
             <a:fld id="{605D2A03-21FB-4445-B0CA-50857B6CED06}" type="datetimeFigureOut">
               <a:rPr lang="en-US" smtClean="0"/>
-              <a:t>11/20/2025</a:t>
+              <a:t>3/9/2026</a:t>
             </a:fld>
             <a:endParaRPr lang="en-US"/>
           </a:p>
@@ -1461,7 +1770,7 @@
           <a:p>
             <a:fld id="{605D2A03-21FB-4445-B0CA-50857B6CED06}" type="datetimeFigureOut">
               <a:rPr lang="en-US" smtClean="0"/>
-              <a:t>11/20/2025</a:t>
+              <a:t>3/9/2026</a:t>
             </a:fld>
             <a:endParaRPr lang="en-US"/>
           </a:p>
@@ -1693,7 +2002,7 @@
           <a:p>
             <a:fld id="{605D2A03-21FB-4445-B0CA-50857B6CED06}" type="datetimeFigureOut">
               <a:rPr lang="en-US" smtClean="0"/>
-              <a:t>11/20/2025</a:t>
+              <a:t>3/9/2026</a:t>
             </a:fld>
             <a:endParaRPr lang="en-US"/>
           </a:p>
@@ -2060,7 +2369,7 @@
           <a:p>
             <a:fld id="{605D2A03-21FB-4445-B0CA-50857B6CED06}" type="datetimeFigureOut">
               <a:rPr lang="en-US" smtClean="0"/>
-              <a:t>11/20/2025</a:t>
+              <a:t>3/9/2026</a:t>
             </a:fld>
             <a:endParaRPr lang="en-US"/>
           </a:p>
@@ -2178,7 +2487,7 @@
           <a:p>
             <a:fld id="{605D2A03-21FB-4445-B0CA-50857B6CED06}" type="datetimeFigureOut">
               <a:rPr lang="en-US" smtClean="0"/>
-              <a:t>11/20/2025</a:t>
+              <a:t>3/9/2026</a:t>
             </a:fld>
             <a:endParaRPr lang="en-US"/>
           </a:p>
@@ -2273,7 +2582,7 @@
           <a:p>
             <a:fld id="{605D2A03-21FB-4445-B0CA-50857B6CED06}" type="datetimeFigureOut">
               <a:rPr lang="en-US" smtClean="0"/>
-              <a:t>11/20/2025</a:t>
+              <a:t>3/9/2026</a:t>
             </a:fld>
             <a:endParaRPr lang="en-US"/>
           </a:p>
@@ -2550,7 +2859,7 @@
           <a:p>
             <a:fld id="{605D2A03-21FB-4445-B0CA-50857B6CED06}" type="datetimeFigureOut">
               <a:rPr lang="en-US" smtClean="0"/>
-              <a:t>11/20/2025</a:t>
+              <a:t>3/9/2026</a:t>
             </a:fld>
             <a:endParaRPr lang="en-US"/>
           </a:p>
@@ -2807,7 +3116,7 @@
           <a:p>
             <a:fld id="{605D2A03-21FB-4445-B0CA-50857B6CED06}" type="datetimeFigureOut">
               <a:rPr lang="en-US" smtClean="0"/>
-              <a:t>11/20/2025</a:t>
+              <a:t>3/9/2026</a:t>
             </a:fld>
             <a:endParaRPr lang="en-US"/>
           </a:p>
@@ -3020,7 +3329,7 @@
           <a:p>
             <a:fld id="{605D2A03-21FB-4445-B0CA-50857B6CED06}" type="datetimeFigureOut">
               <a:rPr lang="en-US" smtClean="0"/>
-              <a:t>11/20/2025</a:t>
+              <a:t>3/9/2026</a:t>
             </a:fld>
             <a:endParaRPr lang="en-US"/>
           </a:p>
@@ -3496,7 +3805,7 @@
         </p:nvSpPr>
         <p:spPr>
           <a:xfrm>
-            <a:off x="12818633" y="486028"/>
+            <a:off x="12818633" y="413458"/>
             <a:ext cx="11890302" cy="10938004"/>
           </a:xfrm>
           <a:prstGeom prst="roundRect">
@@ -3553,7 +3862,7 @@
         </p:nvSpPr>
         <p:spPr>
           <a:xfrm>
-            <a:off x="12966968" y="558203"/>
+            <a:off x="12966968" y="485633"/>
             <a:ext cx="11561484" cy="2914490"/>
           </a:xfrm>
           <a:prstGeom prst="roundRect">
@@ -3940,10 +4249,20 @@
           <a:p>
             <a:r>
               <a:rPr lang="en-US" sz="2790" b="1" dirty="0">
+                <a:solidFill>
+                  <a:srgbClr val="FF0000"/>
+                </a:solidFill>
                 <a:latin typeface="Times New Roman" panose="02020603050405020304" pitchFamily="18" charset="0"/>
                 <a:cs typeface="Times New Roman" panose="02020603050405020304" pitchFamily="18" charset="0"/>
               </a:rPr>
-              <a:t>(a) Simulation</a:t>
+              <a:t>(a)</a:t>
+            </a:r>
+            <a:r>
+              <a:rPr lang="en-US" sz="2790" b="1" dirty="0">
+                <a:latin typeface="Times New Roman" panose="02020603050405020304" pitchFamily="18" charset="0"/>
+                <a:cs typeface="Times New Roman" panose="02020603050405020304" pitchFamily="18" charset="0"/>
+              </a:rPr>
+              <a:t> Simulation</a:t>
             </a:r>
           </a:p>
         </p:txBody>
@@ -4070,10 +4389,20 @@
               <a:p>
                 <a:r>
                   <a:rPr lang="en-US" sz="2790" b="1" dirty="0">
+                    <a:solidFill>
+                      <a:srgbClr val="FF0000"/>
+                    </a:solidFill>
                     <a:latin typeface="Times New Roman" panose="02020603050405020304" pitchFamily="18" charset="0"/>
                     <a:cs typeface="Times New Roman" panose="02020603050405020304" pitchFamily="18" charset="0"/>
                   </a:rPr>
-                  <a:t>(b) Data</a:t>
+                  <a:t>(b)</a:t>
+                </a:r>
+                <a:r>
+                  <a:rPr lang="en-US" sz="2790" b="1" dirty="0">
+                    <a:latin typeface="Times New Roman" panose="02020603050405020304" pitchFamily="18" charset="0"/>
+                    <a:cs typeface="Times New Roman" panose="02020603050405020304" pitchFamily="18" charset="0"/>
+                  </a:rPr>
+                  <a:t> Data</a:t>
                 </a:r>
                 <a14:m>
                   <m:oMath xmlns:m="http://schemas.openxmlformats.org/officeDocument/2006/math">
@@ -6218,8 +6547,8 @@
         </p:nvSpPr>
         <p:spPr>
           <a:xfrm>
-            <a:off x="12953412" y="486031"/>
-            <a:ext cx="4200958" cy="521681"/>
+            <a:off x="12953412" y="413461"/>
+            <a:ext cx="4680192" cy="521681"/>
           </a:xfrm>
           <a:prstGeom prst="rect">
             <a:avLst/>
@@ -6237,7 +6566,7 @@
                 <a:latin typeface="Times New Roman" panose="02020603050405020304" pitchFamily="18" charset="0"/>
                 <a:cs typeface="Times New Roman" panose="02020603050405020304" pitchFamily="18" charset="0"/>
               </a:rPr>
-              <a:t>Temporal Calculator (TC)</a:t>
+              <a:t>(e) Temporal Calculator (TC)</a:t>
             </a:r>
           </a:p>
         </p:txBody>
@@ -6258,7 +6587,7 @@
             </p:nvSpPr>
             <p:spPr>
               <a:xfrm>
-                <a:off x="13196156" y="1010303"/>
+                <a:off x="13196156" y="937733"/>
                 <a:ext cx="679512" cy="518714"/>
               </a:xfrm>
               <a:prstGeom prst="roundRect">
@@ -6404,7 +6733,7 @@
             </p:nvSpPr>
             <p:spPr>
               <a:xfrm>
-                <a:off x="13196156" y="1010303"/>
+                <a:off x="13196156" y="937733"/>
                 <a:ext cx="679512" cy="518714"/>
               </a:xfrm>
               <a:prstGeom prst="roundRect">
@@ -6460,7 +6789,7 @@
             </p:nvSpPr>
             <p:spPr>
               <a:xfrm>
-                <a:off x="13196156" y="1875145"/>
+                <a:off x="13196156" y="1802575"/>
                 <a:ext cx="679512" cy="518714"/>
               </a:xfrm>
               <a:prstGeom prst="roundRect">
@@ -6606,7 +6935,7 @@
             </p:nvSpPr>
             <p:spPr>
               <a:xfrm>
-                <a:off x="13196156" y="1875145"/>
+                <a:off x="13196156" y="1802575"/>
                 <a:ext cx="679512" cy="518714"/>
               </a:xfrm>
               <a:prstGeom prst="roundRect">
@@ -6660,7 +6989,7 @@
         </p:nvSpPr>
         <p:spPr>
           <a:xfrm>
-            <a:off x="13321533" y="2508076"/>
+            <a:off x="13321533" y="2435506"/>
             <a:ext cx="421910" cy="200055"/>
           </a:xfrm>
           <a:prstGeom prst="rect">
@@ -6697,7 +7026,7 @@
             </p:nvSpPr>
             <p:spPr>
               <a:xfrm>
-                <a:off x="13196156" y="2797019"/>
+                <a:off x="13196156" y="2724449"/>
                 <a:ext cx="679512" cy="518714"/>
               </a:xfrm>
               <a:prstGeom prst="roundRect">
@@ -6843,7 +7172,7 @@
             </p:nvSpPr>
             <p:spPr>
               <a:xfrm>
-                <a:off x="13196156" y="2797019"/>
+                <a:off x="13196156" y="2724449"/>
                 <a:ext cx="679512" cy="518714"/>
               </a:xfrm>
               <a:prstGeom prst="roundRect">
@@ -6897,7 +7226,7 @@
         </p:nvSpPr>
         <p:spPr>
           <a:xfrm>
-            <a:off x="14008357" y="1211471"/>
+            <a:off x="14008357" y="1138901"/>
             <a:ext cx="500610" cy="98766"/>
           </a:xfrm>
           <a:prstGeom prst="rightArrow">
@@ -6954,7 +7283,7 @@
         </p:nvSpPr>
         <p:spPr>
           <a:xfrm>
-            <a:off x="14008357" y="2062271"/>
+            <a:off x="14008357" y="1989701"/>
             <a:ext cx="500610" cy="98766"/>
           </a:xfrm>
           <a:prstGeom prst="rightArrow">
@@ -7011,7 +7340,7 @@
         </p:nvSpPr>
         <p:spPr>
           <a:xfrm>
-            <a:off x="14008355" y="2994581"/>
+            <a:off x="14008355" y="2922011"/>
             <a:ext cx="500610" cy="98766"/>
           </a:xfrm>
           <a:prstGeom prst="rightArrow">
@@ -7068,7 +7397,7 @@
         </p:nvSpPr>
         <p:spPr>
           <a:xfrm>
-            <a:off x="14602957" y="995527"/>
+            <a:off x="14602957" y="922957"/>
             <a:ext cx="1064970" cy="518714"/>
           </a:xfrm>
           <a:prstGeom prst="roundRect">
@@ -7143,7 +7472,7 @@
         </p:nvSpPr>
         <p:spPr>
           <a:xfrm>
-            <a:off x="14602957" y="1860369"/>
+            <a:off x="14602957" y="1787799"/>
             <a:ext cx="1064970" cy="518714"/>
           </a:xfrm>
           <a:prstGeom prst="roundRect">
@@ -7218,7 +7547,7 @@
         </p:nvSpPr>
         <p:spPr>
           <a:xfrm>
-            <a:off x="14602957" y="2782243"/>
+            <a:off x="14602957" y="2709673"/>
             <a:ext cx="1064970" cy="518714"/>
           </a:xfrm>
           <a:prstGeom prst="roundRect">
@@ -7293,7 +7622,7 @@
         </p:nvSpPr>
         <p:spPr>
           <a:xfrm>
-            <a:off x="15800017" y="1211471"/>
+            <a:off x="15800017" y="1138901"/>
             <a:ext cx="500610" cy="98766"/>
           </a:xfrm>
           <a:prstGeom prst="rightArrow">
@@ -7350,7 +7679,7 @@
         </p:nvSpPr>
         <p:spPr>
           <a:xfrm>
-            <a:off x="15800017" y="2077021"/>
+            <a:off x="15800017" y="2004451"/>
             <a:ext cx="500610" cy="98766"/>
           </a:xfrm>
           <a:prstGeom prst="rightArrow">
@@ -7407,7 +7736,7 @@
         </p:nvSpPr>
         <p:spPr>
           <a:xfrm>
-            <a:off x="15800017" y="3000547"/>
+            <a:off x="15800017" y="2927977"/>
             <a:ext cx="500610" cy="98766"/>
           </a:xfrm>
           <a:prstGeom prst="rightArrow">
@@ -7464,7 +7793,7 @@
         </p:nvSpPr>
         <p:spPr>
           <a:xfrm>
-            <a:off x="14924487" y="2490948"/>
+            <a:off x="14924487" y="2418378"/>
             <a:ext cx="421910" cy="200055"/>
           </a:xfrm>
           <a:prstGeom prst="rect">
@@ -7501,7 +7830,7 @@
             </p:nvSpPr>
             <p:spPr>
               <a:xfrm>
-                <a:off x="16393114" y="995527"/>
+                <a:off x="16393114" y="922957"/>
                 <a:ext cx="1064968" cy="518714"/>
               </a:xfrm>
               <a:prstGeom prst="roundRect">
@@ -7647,7 +7976,7 @@
             </p:nvSpPr>
             <p:spPr>
               <a:xfrm>
-                <a:off x="16393114" y="995527"/>
+                <a:off x="16393114" y="922957"/>
                 <a:ext cx="1064968" cy="518714"/>
               </a:xfrm>
               <a:prstGeom prst="roundRect">
@@ -7703,7 +8032,7 @@
             </p:nvSpPr>
             <p:spPr>
               <a:xfrm>
-                <a:off x="16393112" y="1860369"/>
+                <a:off x="16393112" y="1787799"/>
                 <a:ext cx="1064968" cy="518714"/>
               </a:xfrm>
               <a:prstGeom prst="roundRect">
@@ -7888,7 +8217,7 @@
             </p:nvSpPr>
             <p:spPr>
               <a:xfrm>
-                <a:off x="16393112" y="1860369"/>
+                <a:off x="16393112" y="1787799"/>
                 <a:ext cx="1064968" cy="518714"/>
               </a:xfrm>
               <a:prstGeom prst="roundRect">
@@ -7944,7 +8273,7 @@
             </p:nvSpPr>
             <p:spPr>
               <a:xfrm>
-                <a:off x="16393114" y="2782243"/>
+                <a:off x="16393114" y="2709673"/>
                 <a:ext cx="1064968" cy="518714"/>
               </a:xfrm>
               <a:prstGeom prst="roundRect">
@@ -8090,7 +8419,7 @@
             </p:nvSpPr>
             <p:spPr>
               <a:xfrm>
-                <a:off x="16393114" y="2782243"/>
+                <a:off x="16393114" y="2709673"/>
                 <a:ext cx="1064968" cy="518714"/>
               </a:xfrm>
               <a:prstGeom prst="roundRect">
@@ -9037,7 +9366,7 @@
             </p:nvSpPr>
             <p:spPr>
               <a:xfrm>
-                <a:off x="19936815" y="995527"/>
+                <a:off x="19936815" y="922957"/>
                 <a:ext cx="1064966" cy="518714"/>
               </a:xfrm>
               <a:prstGeom prst="roundRect">
@@ -9181,7 +9510,7 @@
             </p:nvSpPr>
             <p:spPr>
               <a:xfrm>
-                <a:off x="19936815" y="995527"/>
+                <a:off x="19936815" y="922957"/>
                 <a:ext cx="1064966" cy="518714"/>
               </a:xfrm>
               <a:prstGeom prst="roundRect">
@@ -9237,7 +9566,7 @@
             </p:nvSpPr>
             <p:spPr>
               <a:xfrm>
-                <a:off x="19936811" y="1895175"/>
+                <a:off x="19936811" y="1822605"/>
                 <a:ext cx="1064970" cy="518714"/>
               </a:xfrm>
               <a:prstGeom prst="roundRect">
@@ -9381,7 +9710,7 @@
             </p:nvSpPr>
             <p:spPr>
               <a:xfrm>
-                <a:off x="19936811" y="1895175"/>
+                <a:off x="19936811" y="1822605"/>
                 <a:ext cx="1064970" cy="518714"/>
               </a:xfrm>
               <a:prstGeom prst="roundRect">
@@ -9435,7 +9764,7 @@
         </p:nvSpPr>
         <p:spPr>
           <a:xfrm>
-            <a:off x="20251829" y="1617560"/>
+            <a:off x="20251829" y="1544990"/>
             <a:ext cx="421910" cy="200055"/>
           </a:xfrm>
           <a:prstGeom prst="rect">
@@ -9472,7 +9801,7 @@
             </p:nvSpPr>
             <p:spPr>
               <a:xfrm>
-                <a:off x="23475826" y="1010303"/>
+                <a:off x="23475826" y="937733"/>
                 <a:ext cx="508168" cy="518714"/>
               </a:xfrm>
               <a:prstGeom prst="roundRect">
@@ -9619,7 +9948,7 @@
             </p:nvSpPr>
             <p:spPr>
               <a:xfrm>
-                <a:off x="23475826" y="1010303"/>
+                <a:off x="23475826" y="937733"/>
                 <a:ext cx="508168" cy="518714"/>
               </a:xfrm>
               <a:prstGeom prst="roundRect">
@@ -9673,7 +10002,7 @@
         </p:nvSpPr>
         <p:spPr>
           <a:xfrm>
-            <a:off x="16714643" y="2490948"/>
+            <a:off x="16714643" y="2418378"/>
             <a:ext cx="421910" cy="200055"/>
           </a:xfrm>
           <a:prstGeom prst="rect">
@@ -9708,7 +10037,7 @@
         </p:nvSpPr>
         <p:spPr>
           <a:xfrm>
-            <a:off x="14924487" y="1587906"/>
+            <a:off x="14924487" y="1515336"/>
             <a:ext cx="421910" cy="200055"/>
           </a:xfrm>
           <a:prstGeom prst="rect">
@@ -9743,7 +10072,7 @@
         </p:nvSpPr>
         <p:spPr>
           <a:xfrm>
-            <a:off x="17550569" y="1219937"/>
+            <a:off x="17550569" y="1147367"/>
             <a:ext cx="500610" cy="98766"/>
           </a:xfrm>
           <a:prstGeom prst="rightArrow">
@@ -9800,7 +10129,7 @@
         </p:nvSpPr>
         <p:spPr>
           <a:xfrm>
-            <a:off x="18183271" y="995527"/>
+            <a:off x="18183271" y="922957"/>
             <a:ext cx="1064970" cy="518714"/>
           </a:xfrm>
           <a:prstGeom prst="roundRect">
@@ -9875,7 +10204,7 @@
         </p:nvSpPr>
         <p:spPr>
           <a:xfrm rot="18356451">
-            <a:off x="17434037" y="1731583"/>
+            <a:off x="17434037" y="1659013"/>
             <a:ext cx="805274" cy="102690"/>
           </a:xfrm>
           <a:prstGeom prst="rightArrow">
@@ -9932,7 +10261,7 @@
         </p:nvSpPr>
         <p:spPr>
           <a:xfrm rot="17331730">
-            <a:off x="17140261" y="2270181"/>
+            <a:off x="17140261" y="2197611"/>
             <a:ext cx="1502954" cy="102690"/>
           </a:xfrm>
           <a:prstGeom prst="rightArrow">
@@ -9989,7 +10318,7 @@
         </p:nvSpPr>
         <p:spPr>
           <a:xfrm>
-            <a:off x="16714643" y="1594896"/>
+            <a:off x="16714643" y="1522326"/>
             <a:ext cx="421910" cy="200055"/>
           </a:xfrm>
           <a:prstGeom prst="rect">
@@ -10024,7 +10353,7 @@
         </p:nvSpPr>
         <p:spPr>
           <a:xfrm>
-            <a:off x="13321149" y="1602284"/>
+            <a:off x="13321149" y="1529714"/>
             <a:ext cx="421910" cy="200055"/>
           </a:xfrm>
           <a:prstGeom prst="rect">
@@ -10059,7 +10388,7 @@
         </p:nvSpPr>
         <p:spPr>
           <a:xfrm>
-            <a:off x="19335201" y="1211471"/>
+            <a:off x="19335201" y="1138901"/>
             <a:ext cx="500610" cy="98766"/>
           </a:xfrm>
           <a:prstGeom prst="rightArrow">
@@ -10116,7 +10445,7 @@
         </p:nvSpPr>
         <p:spPr>
           <a:xfrm>
-            <a:off x="21105943" y="1211471"/>
+            <a:off x="21105943" y="1138901"/>
             <a:ext cx="500610" cy="98766"/>
           </a:xfrm>
           <a:prstGeom prst="rightArrow">
@@ -10173,7 +10502,7 @@
         </p:nvSpPr>
         <p:spPr>
           <a:xfrm rot="18356451">
-            <a:off x="20957877" y="1746333"/>
+            <a:off x="20957877" y="1673763"/>
             <a:ext cx="805274" cy="102690"/>
           </a:xfrm>
           <a:prstGeom prst="rightArrow">
@@ -10230,7 +10559,7 @@
         </p:nvSpPr>
         <p:spPr>
           <a:xfrm>
-            <a:off x="21702703" y="995527"/>
+            <a:off x="21702703" y="922957"/>
             <a:ext cx="1064970" cy="518714"/>
           </a:xfrm>
           <a:prstGeom prst="roundRect">
@@ -10305,7 +10634,7 @@
         </p:nvSpPr>
         <p:spPr>
           <a:xfrm>
-            <a:off x="22854633" y="1211471"/>
+            <a:off x="22854633" y="1138901"/>
             <a:ext cx="500610" cy="98766"/>
           </a:xfrm>
           <a:prstGeom prst="rightArrow">
@@ -10362,7 +10691,7 @@
         </p:nvSpPr>
         <p:spPr>
           <a:xfrm>
-            <a:off x="12966968" y="3672639"/>
+            <a:off x="12966968" y="3600069"/>
             <a:ext cx="11561484" cy="2914490"/>
           </a:xfrm>
           <a:prstGeom prst="roundRect">
@@ -10416,8 +10745,8 @@
         </p:nvSpPr>
         <p:spPr>
           <a:xfrm>
-            <a:off x="12953415" y="3600467"/>
-            <a:ext cx="3756093" cy="521681"/>
+            <a:off x="12953415" y="3527897"/>
+            <a:ext cx="4201728" cy="521681"/>
           </a:xfrm>
           <a:prstGeom prst="rect">
             <a:avLst/>
@@ -10435,7 +10764,7 @@
                 <a:latin typeface="Times New Roman" panose="02020603050405020304" pitchFamily="18" charset="0"/>
                 <a:cs typeface="Times New Roman" panose="02020603050405020304" pitchFamily="18" charset="0"/>
               </a:rPr>
-              <a:t>Spatial Calculator (SC)</a:t>
+              <a:t>(f) Spatial Calculator (SC)</a:t>
             </a:r>
           </a:p>
         </p:txBody>
@@ -10456,7 +10785,7 @@
             </p:nvSpPr>
             <p:spPr>
               <a:xfrm>
-                <a:off x="13196156" y="4124739"/>
+                <a:off x="13196156" y="4052169"/>
                 <a:ext cx="679512" cy="518714"/>
               </a:xfrm>
               <a:prstGeom prst="roundRect">
@@ -10602,7 +10931,7 @@
             </p:nvSpPr>
             <p:spPr>
               <a:xfrm>
-                <a:off x="13196156" y="4124739"/>
+                <a:off x="13196156" y="4052169"/>
                 <a:ext cx="679512" cy="518714"/>
               </a:xfrm>
               <a:prstGeom prst="roundRect">
@@ -10658,7 +10987,7 @@
             </p:nvSpPr>
             <p:spPr>
               <a:xfrm>
-                <a:off x="13196156" y="4989581"/>
+                <a:off x="13196156" y="4917011"/>
                 <a:ext cx="679512" cy="518714"/>
               </a:xfrm>
               <a:prstGeom prst="roundRect">
@@ -10804,7 +11133,7 @@
             </p:nvSpPr>
             <p:spPr>
               <a:xfrm>
-                <a:off x="13196156" y="4989581"/>
+                <a:off x="13196156" y="4917011"/>
                 <a:ext cx="679512" cy="518714"/>
               </a:xfrm>
               <a:prstGeom prst="roundRect">
@@ -10858,7 +11187,7 @@
         </p:nvSpPr>
         <p:spPr>
           <a:xfrm>
-            <a:off x="13321149" y="5662008"/>
+            <a:off x="13321149" y="5589438"/>
             <a:ext cx="421910" cy="200055"/>
           </a:xfrm>
           <a:prstGeom prst="rect">
@@ -10895,7 +11224,7 @@
             </p:nvSpPr>
             <p:spPr>
               <a:xfrm>
-                <a:off x="13196156" y="5911455"/>
+                <a:off x="13196156" y="5838885"/>
                 <a:ext cx="679512" cy="518714"/>
               </a:xfrm>
               <a:prstGeom prst="roundRect">
@@ -11041,7 +11370,7 @@
             </p:nvSpPr>
             <p:spPr>
               <a:xfrm>
-                <a:off x="13196156" y="5911455"/>
+                <a:off x="13196156" y="5838885"/>
                 <a:ext cx="679512" cy="518714"/>
               </a:xfrm>
               <a:prstGeom prst="roundRect">
@@ -11095,7 +11424,7 @@
         </p:nvSpPr>
         <p:spPr>
           <a:xfrm rot="3460468">
-            <a:off x="13834714" y="4648821"/>
+            <a:off x="13834714" y="4576251"/>
             <a:ext cx="770740" cy="102690"/>
           </a:xfrm>
           <a:prstGeom prst="rightArrow">
@@ -11152,7 +11481,7 @@
         </p:nvSpPr>
         <p:spPr>
           <a:xfrm>
-            <a:off x="14008357" y="5176707"/>
+            <a:off x="14008357" y="5104137"/>
             <a:ext cx="500610" cy="98766"/>
           </a:xfrm>
           <a:prstGeom prst="rightArrow">
@@ -11209,7 +11538,7 @@
         </p:nvSpPr>
         <p:spPr>
           <a:xfrm rot="18016408">
-            <a:off x="13814479" y="5719933"/>
+            <a:off x="13814479" y="5647363"/>
             <a:ext cx="883050" cy="102690"/>
           </a:xfrm>
           <a:prstGeom prst="rightArrow">
@@ -11266,7 +11595,7 @@
         </p:nvSpPr>
         <p:spPr>
           <a:xfrm>
-            <a:off x="14602957" y="4974805"/>
+            <a:off x="14602957" y="4902235"/>
             <a:ext cx="1064970" cy="518714"/>
           </a:xfrm>
           <a:prstGeom prst="roundRect">
@@ -11341,7 +11670,7 @@
         </p:nvSpPr>
         <p:spPr>
           <a:xfrm>
-            <a:off x="15800017" y="5191457"/>
+            <a:off x="15800017" y="5118887"/>
             <a:ext cx="500610" cy="98766"/>
           </a:xfrm>
           <a:prstGeom prst="rightArrow">
@@ -11400,7 +11729,7 @@
             </p:nvSpPr>
             <p:spPr>
               <a:xfrm>
-                <a:off x="16393119" y="4975027"/>
+                <a:off x="16393119" y="4902457"/>
                 <a:ext cx="1064966" cy="518714"/>
               </a:xfrm>
               <a:prstGeom prst="roundRect">
@@ -11544,7 +11873,7 @@
             </p:nvSpPr>
             <p:spPr>
               <a:xfrm>
-                <a:off x="16393119" y="4975027"/>
+                <a:off x="16393119" y="4902457"/>
                 <a:ext cx="1064966" cy="518714"/>
               </a:xfrm>
               <a:prstGeom prst="roundRect">
@@ -11600,7 +11929,7 @@
             </p:nvSpPr>
             <p:spPr>
               <a:xfrm>
-                <a:off x="16393115" y="5874675"/>
+                <a:off x="16393115" y="5802105"/>
                 <a:ext cx="1064970" cy="518714"/>
               </a:xfrm>
               <a:prstGeom prst="roundRect">
@@ -11744,7 +12073,7 @@
             </p:nvSpPr>
             <p:spPr>
               <a:xfrm>
-                <a:off x="16393115" y="5874675"/>
+                <a:off x="16393115" y="5802105"/>
                 <a:ext cx="1064970" cy="518714"/>
               </a:xfrm>
               <a:prstGeom prst="roundRect">
@@ -11798,7 +12127,7 @@
         </p:nvSpPr>
         <p:spPr>
           <a:xfrm>
-            <a:off x="16708133" y="5597060"/>
+            <a:off x="16708133" y="5524490"/>
             <a:ext cx="421910" cy="200055"/>
           </a:xfrm>
           <a:prstGeom prst="rect">
@@ -11835,7 +12164,7 @@
             </p:nvSpPr>
             <p:spPr>
               <a:xfrm>
-                <a:off x="19932130" y="4989803"/>
+                <a:off x="19932130" y="4917233"/>
                 <a:ext cx="508168" cy="518714"/>
               </a:xfrm>
               <a:prstGeom prst="roundRect">
@@ -11982,7 +12311,7 @@
             </p:nvSpPr>
             <p:spPr>
               <a:xfrm>
-                <a:off x="19932130" y="4989803"/>
+                <a:off x="19932130" y="4917233"/>
                 <a:ext cx="508168" cy="518714"/>
               </a:xfrm>
               <a:prstGeom prst="roundRect">
@@ -12036,7 +12365,7 @@
         </p:nvSpPr>
         <p:spPr>
           <a:xfrm>
-            <a:off x="13321149" y="4716720"/>
+            <a:off x="13321149" y="4644150"/>
             <a:ext cx="421910" cy="200055"/>
           </a:xfrm>
           <a:prstGeom prst="rect">
@@ -12071,7 +12400,7 @@
         </p:nvSpPr>
         <p:spPr>
           <a:xfrm>
-            <a:off x="17562247" y="5190971"/>
+            <a:off x="17562247" y="5118401"/>
             <a:ext cx="500610" cy="98766"/>
           </a:xfrm>
           <a:prstGeom prst="rightArrow">
@@ -12128,7 +12457,7 @@
         </p:nvSpPr>
         <p:spPr>
           <a:xfrm rot="18356451">
-            <a:off x="17414181" y="5725833"/>
+            <a:off x="17414181" y="5653263"/>
             <a:ext cx="805274" cy="102690"/>
           </a:xfrm>
           <a:prstGeom prst="rightArrow">
@@ -12185,7 +12514,7 @@
         </p:nvSpPr>
         <p:spPr>
           <a:xfrm>
-            <a:off x="18159007" y="4975027"/>
+            <a:off x="18159007" y="4902457"/>
             <a:ext cx="1064970" cy="518714"/>
           </a:xfrm>
           <a:prstGeom prst="roundRect">
@@ -12260,7 +12589,7 @@
         </p:nvSpPr>
         <p:spPr>
           <a:xfrm>
-            <a:off x="19310937" y="5190971"/>
+            <a:off x="19310937" y="5118401"/>
             <a:ext cx="500610" cy="98766"/>
           </a:xfrm>
           <a:prstGeom prst="rightArrow">
@@ -13072,10 +13401,20 @@
           <a:p>
             <a:r>
               <a:rPr lang="en-US" sz="2790" b="1" dirty="0">
+                <a:solidFill>
+                  <a:srgbClr val="FF0000"/>
+                </a:solidFill>
                 <a:latin typeface="Times New Roman" panose="02020603050405020304" pitchFamily="18" charset="0"/>
                 <a:cs typeface="Times New Roman" panose="02020603050405020304" pitchFamily="18" charset="0"/>
               </a:rPr>
-              <a:t>(c) LE Calculation</a:t>
+              <a:t>(c)</a:t>
+            </a:r>
+            <a:r>
+              <a:rPr lang="en-US" sz="2790" b="1" dirty="0">
+                <a:latin typeface="Times New Roman" panose="02020603050405020304" pitchFamily="18" charset="0"/>
+                <a:cs typeface="Times New Roman" panose="02020603050405020304" pitchFamily="18" charset="0"/>
+              </a:rPr>
+              <a:t> LE Calculation</a:t>
             </a:r>
           </a:p>
         </p:txBody>
@@ -14621,7 +14960,7 @@
         </p:nvSpPr>
         <p:spPr>
           <a:xfrm>
-            <a:off x="12982514" y="6751490"/>
+            <a:off x="12982514" y="6678920"/>
             <a:ext cx="11561484" cy="4453540"/>
           </a:xfrm>
           <a:prstGeom prst="roundRect">
@@ -14675,8 +15014,8 @@
         </p:nvSpPr>
         <p:spPr>
           <a:xfrm>
-            <a:off x="13031481" y="6774866"/>
-            <a:ext cx="3274486" cy="521681"/>
+            <a:off x="13031481" y="6702296"/>
+            <a:ext cx="3774559" cy="521681"/>
           </a:xfrm>
           <a:prstGeom prst="rect">
             <a:avLst/>
@@ -14694,7 +15033,7 @@
                 <a:latin typeface="Times New Roman" panose="02020603050405020304" pitchFamily="18" charset="0"/>
                 <a:cs typeface="Times New Roman" panose="02020603050405020304" pitchFamily="18" charset="0"/>
               </a:rPr>
-              <a:t>Temporal LE (TLE)</a:t>
+              <a:t>(g) Temporal LE (TLE)</a:t>
             </a:r>
           </a:p>
         </p:txBody>
@@ -14714,13 +15053,13 @@
           <p:nvPr>
             <p:extLst>
               <p:ext uri="{D42A27DB-BD31-4B8C-83A1-F6EECF244321}">
-                <p14:modId xmlns:p14="http://schemas.microsoft.com/office/powerpoint/2010/main" val="2108108017"/>
+                <p14:modId xmlns:p14="http://schemas.microsoft.com/office/powerpoint/2010/main" val="1965456062"/>
               </p:ext>
             </p:extLst>
           </p:nvPr>
         </p:nvGraphicFramePr>
         <p:xfrm>
-          <a:off x="14319752" y="8911384"/>
+          <a:off x="14319752" y="8838814"/>
           <a:ext cx="4565580" cy="330148"/>
         </p:xfrm>
         <a:graphic>
@@ -15643,7 +15982,7 @@
         </p:nvSpPr>
         <p:spPr>
           <a:xfrm>
-            <a:off x="18917273" y="8988491"/>
+            <a:off x="18917273" y="8915921"/>
             <a:ext cx="421910" cy="200055"/>
           </a:xfrm>
           <a:prstGeom prst="rect">
@@ -15680,7 +16019,7 @@
             </p:nvSpPr>
             <p:spPr>
               <a:xfrm>
-                <a:off x="13138020" y="8792059"/>
+                <a:off x="13138020" y="8719489"/>
                 <a:ext cx="480108" cy="518714"/>
               </a:xfrm>
               <a:prstGeom prst="roundRect">
@@ -15824,7 +16163,7 @@
             </p:nvSpPr>
             <p:spPr>
               <a:xfrm>
-                <a:off x="13138020" y="8792059"/>
+                <a:off x="13138020" y="8719489"/>
                 <a:ext cx="480108" cy="518714"/>
               </a:xfrm>
               <a:prstGeom prst="roundRect">
@@ -15879,13 +16218,13 @@
           <p:nvPr>
             <p:extLst>
               <p:ext uri="{D42A27DB-BD31-4B8C-83A1-F6EECF244321}">
-                <p14:modId xmlns:p14="http://schemas.microsoft.com/office/powerpoint/2010/main" val="1096760880"/>
+                <p14:modId xmlns:p14="http://schemas.microsoft.com/office/powerpoint/2010/main" val="1818014495"/>
               </p:ext>
             </p:extLst>
           </p:nvPr>
         </p:nvGraphicFramePr>
         <p:xfrm>
-          <a:off x="14321994" y="7759382"/>
+          <a:off x="14321994" y="7686812"/>
           <a:ext cx="1826232" cy="330148"/>
         </p:xfrm>
         <a:graphic>
@@ -16277,7 +16616,7 @@
         </p:nvCxnSpPr>
         <p:spPr>
           <a:xfrm>
-            <a:off x="14450556" y="8354235"/>
+            <a:off x="14450556" y="8281665"/>
             <a:ext cx="0" cy="304442"/>
           </a:xfrm>
           <a:prstGeom prst="straightConnector1">
@@ -16322,7 +16661,7 @@
         </p:nvCxnSpPr>
         <p:spPr>
           <a:xfrm>
-            <a:off x="15987256" y="8122079"/>
+            <a:off x="15987256" y="8049509"/>
             <a:ext cx="0" cy="767014"/>
           </a:xfrm>
           <a:prstGeom prst="straightConnector1">
@@ -16367,7 +16706,7 @@
         </p:nvCxnSpPr>
         <p:spPr>
           <a:xfrm>
-            <a:off x="15693336" y="8213469"/>
+            <a:off x="15693336" y="8140899"/>
             <a:ext cx="0" cy="517630"/>
           </a:xfrm>
           <a:prstGeom prst="straightConnector1">
@@ -16412,7 +16751,7 @@
         </p:nvCxnSpPr>
         <p:spPr>
           <a:xfrm>
-            <a:off x="15396156" y="8323010"/>
+            <a:off x="15396156" y="8250440"/>
             <a:ext cx="0" cy="356788"/>
           </a:xfrm>
           <a:prstGeom prst="straightConnector1">
@@ -16455,7 +16794,7 @@
         </p:nvSpPr>
         <p:spPr>
           <a:xfrm>
-            <a:off x="13073465" y="9834348"/>
+            <a:off x="13073465" y="9761778"/>
             <a:ext cx="5953714" cy="951030"/>
           </a:xfrm>
           <a:prstGeom prst="rect">
@@ -16493,7 +16832,7 @@
         </p:nvSpPr>
         <p:spPr>
           <a:xfrm>
-            <a:off x="13746127" y="9007387"/>
+            <a:off x="13746127" y="8934817"/>
             <a:ext cx="500610" cy="98766"/>
           </a:xfrm>
           <a:prstGeom prst="rightArrow">
@@ -16552,7 +16891,7 @@
         </p:nvCxnSpPr>
         <p:spPr>
           <a:xfrm>
-            <a:off x="19386550" y="6807271"/>
+            <a:off x="19386550" y="6734701"/>
             <a:ext cx="0" cy="4412274"/>
           </a:xfrm>
           <a:prstGeom prst="line">
@@ -16594,8 +16933,8 @@
         </p:nvSpPr>
         <p:spPr>
           <a:xfrm>
-            <a:off x="19456471" y="6760244"/>
-            <a:ext cx="2829621" cy="521681"/>
+            <a:off x="19456471" y="6687674"/>
+            <a:ext cx="3355406" cy="521681"/>
           </a:xfrm>
           <a:prstGeom prst="rect">
             <a:avLst/>
@@ -16613,7 +16952,7 @@
                 <a:latin typeface="Times New Roman" panose="02020603050405020304" pitchFamily="18" charset="0"/>
                 <a:cs typeface="Times New Roman" panose="02020603050405020304" pitchFamily="18" charset="0"/>
               </a:rPr>
-              <a:t>Spatial LE (SLE)</a:t>
+              <a:t>(h) Spatial LE (SLE)</a:t>
             </a:r>
           </a:p>
         </p:txBody>
@@ -16633,13 +16972,13 @@
           <p:nvPr>
             <p:extLst>
               <p:ext uri="{D42A27DB-BD31-4B8C-83A1-F6EECF244321}">
-                <p14:modId xmlns:p14="http://schemas.microsoft.com/office/powerpoint/2010/main" val="4096963464"/>
+                <p14:modId xmlns:p14="http://schemas.microsoft.com/office/powerpoint/2010/main" val="3665308916"/>
               </p:ext>
             </p:extLst>
           </p:nvPr>
         </p:nvGraphicFramePr>
         <p:xfrm>
-          <a:off x="21017362" y="7610228"/>
+          <a:off x="21017362" y="7537658"/>
           <a:ext cx="1843320" cy="1854200"/>
         </p:xfrm>
         <a:graphic>
@@ -18011,7 +18350,7 @@
             </p:nvSpPr>
             <p:spPr>
               <a:xfrm>
-                <a:off x="19603308" y="7397821"/>
+                <a:off x="19603308" y="7325251"/>
                 <a:ext cx="599674" cy="518714"/>
               </a:xfrm>
               <a:prstGeom prst="roundRect">
@@ -18155,7 +18494,7 @@
             </p:nvSpPr>
             <p:spPr>
               <a:xfrm>
-                <a:off x="19603308" y="7397821"/>
+                <a:off x="19603308" y="7325251"/>
                 <a:ext cx="599674" cy="518714"/>
               </a:xfrm>
               <a:prstGeom prst="roundRect">
@@ -18211,7 +18550,7 @@
             </p:nvSpPr>
             <p:spPr>
               <a:xfrm>
-                <a:off x="19603307" y="8262665"/>
+                <a:off x="19603307" y="8190095"/>
                 <a:ext cx="628702" cy="518714"/>
               </a:xfrm>
               <a:prstGeom prst="roundRect">
@@ -18355,7 +18694,7 @@
             </p:nvSpPr>
             <p:spPr>
               <a:xfrm>
-                <a:off x="19603307" y="8262665"/>
+                <a:off x="19603307" y="8190095"/>
                 <a:ext cx="628702" cy="518714"/>
               </a:xfrm>
               <a:prstGeom prst="roundRect">
@@ -18409,7 +18748,7 @@
         </p:nvSpPr>
         <p:spPr>
           <a:xfrm>
-            <a:off x="19728299" y="8935093"/>
+            <a:off x="19728299" y="8862523"/>
             <a:ext cx="421910" cy="200055"/>
           </a:xfrm>
           <a:prstGeom prst="rect">
@@ -18446,7 +18785,7 @@
             </p:nvSpPr>
             <p:spPr>
               <a:xfrm>
-                <a:off x="19603307" y="9184539"/>
+                <a:off x="19603307" y="9111969"/>
                 <a:ext cx="628702" cy="518714"/>
               </a:xfrm>
               <a:prstGeom prst="roundRect">
@@ -18590,7 +18929,7 @@
             </p:nvSpPr>
             <p:spPr>
               <a:xfrm>
-                <a:off x="19603307" y="9184539"/>
+                <a:off x="19603307" y="9111969"/>
                 <a:ext cx="628702" cy="518714"/>
               </a:xfrm>
               <a:prstGeom prst="roundRect">
@@ -18644,7 +18983,7 @@
         </p:nvSpPr>
         <p:spPr>
           <a:xfrm rot="3460468">
-            <a:off x="20154780" y="7921905"/>
+            <a:off x="20154780" y="7849335"/>
             <a:ext cx="770740" cy="102690"/>
           </a:xfrm>
           <a:prstGeom prst="rightArrow">
@@ -18701,7 +19040,7 @@
         </p:nvSpPr>
         <p:spPr>
           <a:xfrm>
-            <a:off x="20328421" y="8449789"/>
+            <a:off x="20328421" y="8377219"/>
             <a:ext cx="500610" cy="98766"/>
           </a:xfrm>
           <a:prstGeom prst="rightArrow">
@@ -18758,7 +19097,7 @@
         </p:nvSpPr>
         <p:spPr>
           <a:xfrm rot="18016408">
-            <a:off x="20134546" y="8993015"/>
+            <a:off x="20134546" y="8920445"/>
             <a:ext cx="883050" cy="102690"/>
           </a:xfrm>
           <a:prstGeom prst="rightArrow">
@@ -18815,7 +19154,7 @@
         </p:nvSpPr>
         <p:spPr>
           <a:xfrm>
-            <a:off x="19728299" y="7989805"/>
+            <a:off x="19728299" y="7917235"/>
             <a:ext cx="421910" cy="200055"/>
           </a:xfrm>
           <a:prstGeom prst="rect">
@@ -18851,13 +19190,13 @@
           <p:nvPr>
             <p:extLst>
               <p:ext uri="{D42A27DB-BD31-4B8C-83A1-F6EECF244321}">
-                <p14:modId xmlns:p14="http://schemas.microsoft.com/office/powerpoint/2010/main" val="1226728353"/>
+                <p14:modId xmlns:p14="http://schemas.microsoft.com/office/powerpoint/2010/main" val="1618263606"/>
               </p:ext>
             </p:extLst>
           </p:nvPr>
         </p:nvGraphicFramePr>
         <p:xfrm>
-          <a:off x="23600910" y="7594782"/>
+          <a:off x="23600910" y="7522212"/>
           <a:ext cx="374904" cy="370840"/>
         </p:xfrm>
         <a:graphic>
@@ -18951,13 +19290,13 @@
           <p:nvPr>
             <p:extLst>
               <p:ext uri="{D42A27DB-BD31-4B8C-83A1-F6EECF244321}">
-                <p14:modId xmlns:p14="http://schemas.microsoft.com/office/powerpoint/2010/main" val="3391861667"/>
+                <p14:modId xmlns:p14="http://schemas.microsoft.com/office/powerpoint/2010/main" val="3975113031"/>
               </p:ext>
             </p:extLst>
           </p:nvPr>
         </p:nvGraphicFramePr>
         <p:xfrm>
-          <a:off x="24061284" y="7594782"/>
+          <a:off x="24061284" y="7522212"/>
           <a:ext cx="374904" cy="370840"/>
         </p:xfrm>
         <a:graphic>
@@ -19050,7 +19389,7 @@
         </p:nvSpPr>
         <p:spPr>
           <a:xfrm>
-            <a:off x="22931921" y="8443439"/>
+            <a:off x="22931921" y="8370869"/>
             <a:ext cx="500610" cy="98766"/>
           </a:xfrm>
           <a:prstGeom prst="rightArrow">
@@ -19108,13 +19447,13 @@
           <p:nvPr>
             <p:extLst>
               <p:ext uri="{D42A27DB-BD31-4B8C-83A1-F6EECF244321}">
-                <p14:modId xmlns:p14="http://schemas.microsoft.com/office/powerpoint/2010/main" val="4083600471"/>
+                <p14:modId xmlns:p14="http://schemas.microsoft.com/office/powerpoint/2010/main" val="1736288081"/>
               </p:ext>
             </p:extLst>
           </p:nvPr>
         </p:nvGraphicFramePr>
         <p:xfrm>
-          <a:off x="23596148" y="8117288"/>
+          <a:off x="23596148" y="8044718"/>
           <a:ext cx="374904" cy="370840"/>
         </p:xfrm>
         <a:graphic>
@@ -19208,13 +19547,13 @@
           <p:nvPr>
             <p:extLst>
               <p:ext uri="{D42A27DB-BD31-4B8C-83A1-F6EECF244321}">
-                <p14:modId xmlns:p14="http://schemas.microsoft.com/office/powerpoint/2010/main" val="3627206346"/>
+                <p14:modId xmlns:p14="http://schemas.microsoft.com/office/powerpoint/2010/main" val="475402909"/>
               </p:ext>
             </p:extLst>
           </p:nvPr>
         </p:nvGraphicFramePr>
         <p:xfrm>
-          <a:off x="24056522" y="8117288"/>
+          <a:off x="24056522" y="8044718"/>
           <a:ext cx="374904" cy="370840"/>
         </p:xfrm>
         <a:graphic>
@@ -19308,13 +19647,13 @@
           <p:nvPr>
             <p:extLst>
               <p:ext uri="{D42A27DB-BD31-4B8C-83A1-F6EECF244321}">
-                <p14:modId xmlns:p14="http://schemas.microsoft.com/office/powerpoint/2010/main" val="3972624393"/>
+                <p14:modId xmlns:p14="http://schemas.microsoft.com/office/powerpoint/2010/main" val="1028162338"/>
               </p:ext>
             </p:extLst>
           </p:nvPr>
         </p:nvGraphicFramePr>
         <p:xfrm>
-          <a:off x="23596148" y="8615758"/>
+          <a:off x="23596148" y="8543188"/>
           <a:ext cx="374904" cy="370840"/>
         </p:xfrm>
         <a:graphic>
@@ -19408,13 +19747,13 @@
           <p:nvPr>
             <p:extLst>
               <p:ext uri="{D42A27DB-BD31-4B8C-83A1-F6EECF244321}">
-                <p14:modId xmlns:p14="http://schemas.microsoft.com/office/powerpoint/2010/main" val="1890745715"/>
+                <p14:modId xmlns:p14="http://schemas.microsoft.com/office/powerpoint/2010/main" val="1744421932"/>
               </p:ext>
             </p:extLst>
           </p:nvPr>
         </p:nvGraphicFramePr>
         <p:xfrm>
-          <a:off x="24056522" y="8615758"/>
+          <a:off x="24056522" y="8543188"/>
           <a:ext cx="374904" cy="370840"/>
         </p:xfrm>
         <a:graphic>
@@ -19508,13 +19847,13 @@
           <p:nvPr>
             <p:extLst>
               <p:ext uri="{D42A27DB-BD31-4B8C-83A1-F6EECF244321}">
-                <p14:modId xmlns:p14="http://schemas.microsoft.com/office/powerpoint/2010/main" val="460955946"/>
+                <p14:modId xmlns:p14="http://schemas.microsoft.com/office/powerpoint/2010/main" val="4129954059"/>
               </p:ext>
             </p:extLst>
           </p:nvPr>
         </p:nvGraphicFramePr>
         <p:xfrm>
-          <a:off x="23596148" y="9106298"/>
+          <a:off x="23596148" y="9033728"/>
           <a:ext cx="374904" cy="370840"/>
         </p:xfrm>
         <a:graphic>
@@ -19608,13 +19947,13 @@
           <p:nvPr>
             <p:extLst>
               <p:ext uri="{D42A27DB-BD31-4B8C-83A1-F6EECF244321}">
-                <p14:modId xmlns:p14="http://schemas.microsoft.com/office/powerpoint/2010/main" val="1366349256"/>
+                <p14:modId xmlns:p14="http://schemas.microsoft.com/office/powerpoint/2010/main" val="4207728615"/>
               </p:ext>
             </p:extLst>
           </p:nvPr>
         </p:nvGraphicFramePr>
         <p:xfrm>
-          <a:off x="24056522" y="9106298"/>
+          <a:off x="24056522" y="9033728"/>
           <a:ext cx="374904" cy="370840"/>
         </p:xfrm>
         <a:graphic>
@@ -19707,7 +20046,7 @@
         </p:nvSpPr>
         <p:spPr>
           <a:xfrm>
-            <a:off x="19468512" y="9834348"/>
+            <a:off x="19468512" y="9761778"/>
             <a:ext cx="4944064" cy="951030"/>
           </a:xfrm>
           <a:prstGeom prst="rect">
@@ -19800,7 +20139,7 @@
         <p:spPr>
           <a:xfrm>
             <a:off x="5803794" y="541289"/>
-            <a:ext cx="5333448" cy="521681"/>
+            <a:ext cx="5839997" cy="521681"/>
           </a:xfrm>
           <a:prstGeom prst="rect">
             <a:avLst/>
@@ -19813,6 +20152,23 @@
           </a:bodyPr>
           <a:lstStyle/>
           <a:p>
+            <a:r>
+              <a:rPr lang="en-US" sz="2790" b="1" dirty="0">
+                <a:latin typeface="Times New Roman" panose="02020603050405020304" pitchFamily="18" charset="0"/>
+                <a:cs typeface="Times New Roman" panose="02020603050405020304" pitchFamily="18" charset="0"/>
+              </a:rPr>
+              <a:t>(d)</a:t>
+            </a:r>
+            <a:r>
+              <a:rPr lang="en-US" sz="2790" b="1" dirty="0">
+                <a:solidFill>
+                  <a:srgbClr val="FF0000"/>
+                </a:solidFill>
+                <a:latin typeface="Times New Roman" panose="02020603050405020304" pitchFamily="18" charset="0"/>
+                <a:cs typeface="Times New Roman" panose="02020603050405020304" pitchFamily="18" charset="0"/>
+              </a:rPr>
+              <a:t> </a:t>
+            </a:r>
             <a:r>
               <a:rPr lang="en-US" sz="2790" b="1" dirty="0">
                 <a:latin typeface="Times New Roman" panose="02020603050405020304" pitchFamily="18" charset="0"/>
@@ -19838,7 +20194,7 @@
           <p:nvPr>
             <p:extLst>
               <p:ext uri="{D42A27DB-BD31-4B8C-83A1-F6EECF244321}">
-                <p14:modId xmlns:p14="http://schemas.microsoft.com/office/powerpoint/2010/main" val="10294614"/>
+                <p14:modId xmlns:p14="http://schemas.microsoft.com/office/powerpoint/2010/main" val="1410280236"/>
               </p:ext>
             </p:extLst>
           </p:nvPr>
@@ -20915,7 +21271,7 @@
           <p:nvPr>
             <p:extLst>
               <p:ext uri="{D42A27DB-BD31-4B8C-83A1-F6EECF244321}">
-                <p14:modId xmlns:p14="http://schemas.microsoft.com/office/powerpoint/2010/main" val="3639690587"/>
+                <p14:modId xmlns:p14="http://schemas.microsoft.com/office/powerpoint/2010/main" val="1584928737"/>
               </p:ext>
             </p:extLst>
           </p:nvPr>
@@ -21465,7 +21821,7 @@
           <p:nvPr>
             <p:extLst>
               <p:ext uri="{D42A27DB-BD31-4B8C-83A1-F6EECF244321}">
-                <p14:modId xmlns:p14="http://schemas.microsoft.com/office/powerpoint/2010/main" val="1728969688"/>
+                <p14:modId xmlns:p14="http://schemas.microsoft.com/office/powerpoint/2010/main" val="3379789495"/>
               </p:ext>
             </p:extLst>
           </p:nvPr>
@@ -21980,7 +22336,7 @@
           <p:nvPr>
             <p:extLst>
               <p:ext uri="{D42A27DB-BD31-4B8C-83A1-F6EECF244321}">
-                <p14:modId xmlns:p14="http://schemas.microsoft.com/office/powerpoint/2010/main" val="3529942541"/>
+                <p14:modId xmlns:p14="http://schemas.microsoft.com/office/powerpoint/2010/main" val="4266371733"/>
               </p:ext>
             </p:extLst>
           </p:nvPr>
@@ -23160,23 +23516,6 @@
 </file>
 
 <file path=customXml/item1.xml><?xml version="1.0" encoding="utf-8"?>
-<p:properties xmlns:p="http://schemas.microsoft.com/office/2006/metadata/properties" xmlns:xsi="http://www.w3.org/2001/XMLSchema-instance" xmlns:pc="http://schemas.microsoft.com/office/infopath/2007/PartnerControls">
-  <documentManagement>
-    <_activity xmlns="bf0484fb-39aa-440e-a7f6-ce6b10828c56" xsi:nil="true"/>
-  </documentManagement>
-</p:properties>
-</file>
-
-<file path=customXml/item2.xml><?xml version="1.0" encoding="utf-8"?>
-<?mso-contentType ?>
-<FormTemplates xmlns="http://schemas.microsoft.com/sharepoint/v3/contenttype/forms">
-  <Display>DocumentLibraryForm</Display>
-  <Edit>DocumentLibraryForm</Edit>
-  <New>DocumentLibraryForm</New>
-</FormTemplates>
-</file>
-
-<file path=customXml/item3.xml><?xml version="1.0" encoding="utf-8"?>
 <ct:contentTypeSchema xmlns:ct="http://schemas.microsoft.com/office/2006/metadata/contentType" xmlns:ma="http://schemas.microsoft.com/office/2006/metadata/properties/metaAttributes" ct:_="" ma:_="" ma:contentTypeName="Document" ma:contentTypeID="0x0101006A4E12A0CEF6A047A2ED39F3719482AA" ma:contentTypeVersion="16" ma:contentTypeDescription="Create a new document." ma:contentTypeScope="" ma:versionID="0e1d78e459d7e83271e38b16816bc458">
   <xsd:schema xmlns:xsd="http://www.w3.org/2001/XMLSchema" xmlns:xs="http://www.w3.org/2001/XMLSchema" xmlns:p="http://schemas.microsoft.com/office/2006/metadata/properties" xmlns:ns3="9dd65258-3995-4e6a-8867-aed9b661a0cf" xmlns:ns4="bf0484fb-39aa-440e-a7f6-ce6b10828c56" targetNamespace="http://schemas.microsoft.com/office/2006/metadata/properties" ma:root="true" ma:fieldsID="177a938d7b189453f861ba34050ac94d" ns3:_="" ns4:_="">
     <xsd:import namespace="9dd65258-3995-4e6a-8867-aed9b661a0cf"/>
@@ -23415,7 +23754,43 @@
 </ct:contentTypeSchema>
 </file>
 
+<file path=customXml/item2.xml><?xml version="1.0" encoding="utf-8"?>
+<p:properties xmlns:p="http://schemas.microsoft.com/office/2006/metadata/properties" xmlns:xsi="http://www.w3.org/2001/XMLSchema-instance" xmlns:pc="http://schemas.microsoft.com/office/infopath/2007/PartnerControls">
+  <documentManagement>
+    <_activity xmlns="bf0484fb-39aa-440e-a7f6-ce6b10828c56" xsi:nil="true"/>
+  </documentManagement>
+</p:properties>
+</file>
+
+<file path=customXml/item3.xml><?xml version="1.0" encoding="utf-8"?>
+<?mso-contentType ?>
+<FormTemplates xmlns="http://schemas.microsoft.com/sharepoint/v3/contenttype/forms">
+  <Display>DocumentLibraryForm</Display>
+  <Edit>DocumentLibraryForm</Edit>
+  <New>DocumentLibraryForm</New>
+</FormTemplates>
+</file>
+
 <file path=customXml/itemProps1.xml><?xml version="1.0" encoding="utf-8"?>
+<ds:datastoreItem xmlns:ds="http://schemas.openxmlformats.org/officeDocument/2006/customXml" ds:itemID="{D9FCC86B-1F9D-4A3C-8003-88B96C469389}">
+  <ds:schemaRefs>
+    <ds:schemaRef ds:uri="http://schemas.microsoft.com/office/2006/metadata/contentType"/>
+    <ds:schemaRef ds:uri="http://schemas.microsoft.com/office/2006/metadata/properties/metaAttributes"/>
+    <ds:schemaRef ds:uri="http://www.w3.org/2001/XMLSchema"/>
+    <ds:schemaRef ds:uri="http://schemas.microsoft.com/office/2006/metadata/properties"/>
+    <ds:schemaRef ds:uri="9dd65258-3995-4e6a-8867-aed9b661a0cf"/>
+    <ds:schemaRef ds:uri="bf0484fb-39aa-440e-a7f6-ce6b10828c56"/>
+    <ds:schemaRef ds:uri="http://schemas.microsoft.com/office/2006/documentManagement/types"/>
+    <ds:schemaRef ds:uri="http://schemas.microsoft.com/office/infopath/2007/PartnerControls"/>
+    <ds:schemaRef ds:uri="http://schemas.openxmlformats.org/package/2006/metadata/core-properties"/>
+    <ds:schemaRef ds:uri="http://purl.org/dc/elements/1.1/"/>
+    <ds:schemaRef ds:uri="http://purl.org/dc/terms/"/>
+    <ds:schemaRef ds:uri="http://schemas.microsoft.com/internal/obd"/>
+  </ds:schemaRefs>
+</ds:datastoreItem>
+</file>
+
+<file path=customXml/itemProps2.xml><?xml version="1.0" encoding="utf-8"?>
 <ds:datastoreItem xmlns:ds="http://schemas.openxmlformats.org/officeDocument/2006/customXml" ds:itemID="{2E6CBD86-C09C-470A-88E8-4B08832346BE}">
   <ds:schemaRefs>
     <ds:schemaRef ds:uri="http://schemas.microsoft.com/office/infopath/2007/PartnerControls"/>
@@ -23432,29 +23807,10 @@
 </ds:datastoreItem>
 </file>
 
-<file path=customXml/itemProps2.xml><?xml version="1.0" encoding="utf-8"?>
+<file path=customXml/itemProps3.xml><?xml version="1.0" encoding="utf-8"?>
 <ds:datastoreItem xmlns:ds="http://schemas.openxmlformats.org/officeDocument/2006/customXml" ds:itemID="{6204957A-1A48-4EA0-8205-DDDFF95B0C42}">
   <ds:schemaRefs>
     <ds:schemaRef ds:uri="http://schemas.microsoft.com/sharepoint/v3/contenttype/forms"/>
   </ds:schemaRefs>
 </ds:datastoreItem>
-</file>
-
-<file path=customXml/itemProps3.xml><?xml version="1.0" encoding="utf-8"?>
-<ds:datastoreItem xmlns:ds="http://schemas.openxmlformats.org/officeDocument/2006/customXml" ds:itemID="{D9FCC86B-1F9D-4A3C-8003-88B96C469389}">
-  <ds:schemaRefs>
-    <ds:schemaRef ds:uri="http://schemas.microsoft.com/office/2006/metadata/contentType"/>
-    <ds:schemaRef ds:uri="http://schemas.microsoft.com/office/2006/metadata/properties/metaAttributes"/>
-    <ds:schemaRef ds:uri="http://www.w3.org/2001/XMLSchema"/>
-    <ds:schemaRef ds:uri="http://schemas.microsoft.com/office/2006/metadata/properties"/>
-    <ds:schemaRef ds:uri="9dd65258-3995-4e6a-8867-aed9b661a0cf"/>
-    <ds:schemaRef ds:uri="bf0484fb-39aa-440e-a7f6-ce6b10828c56"/>
-    <ds:schemaRef ds:uri="http://schemas.microsoft.com/office/2006/documentManagement/types"/>
-    <ds:schemaRef ds:uri="http://schemas.microsoft.com/office/infopath/2007/PartnerControls"/>
-    <ds:schemaRef ds:uri="http://schemas.openxmlformats.org/package/2006/metadata/core-properties"/>
-    <ds:schemaRef ds:uri="http://purl.org/dc/elements/1.1/"/>
-    <ds:schemaRef ds:uri="http://purl.org/dc/terms/"/>
-    <ds:schemaRef ds:uri="http://schemas.microsoft.com/internal/obd"/>
-  </ds:schemaRefs>
-</ds:datastoreItem>
 </file>
--- a/flowchart.pptx
+++ b/flowchart.pptx
@@ -517,7 +517,7 @@
           <a:p>
             <a:fld id="{861AD860-6EA9-4119-A999-7E65F9394C29}" type="datetimeFigureOut">
               <a:rPr lang="en-US" smtClean="0"/>
-              <a:t>3/9/2026</a:t>
+              <a:t>3/11/2026</a:t>
             </a:fld>
             <a:endParaRPr lang="en-US"/>
           </a:p>
@@ -1004,7 +1004,7 @@
           <a:p>
             <a:fld id="{605D2A03-21FB-4445-B0CA-50857B6CED06}" type="datetimeFigureOut">
               <a:rPr lang="en-US" smtClean="0"/>
-              <a:t>3/9/2026</a:t>
+              <a:t>3/11/2026</a:t>
             </a:fld>
             <a:endParaRPr lang="en-US"/>
           </a:p>
@@ -1174,7 +1174,7 @@
           <a:p>
             <a:fld id="{605D2A03-21FB-4445-B0CA-50857B6CED06}" type="datetimeFigureOut">
               <a:rPr lang="en-US" smtClean="0"/>
-              <a:t>3/9/2026</a:t>
+              <a:t>3/11/2026</a:t>
             </a:fld>
             <a:endParaRPr lang="en-US"/>
           </a:p>
@@ -1354,7 +1354,7 @@
           <a:p>
             <a:fld id="{605D2A03-21FB-4445-B0CA-50857B6CED06}" type="datetimeFigureOut">
               <a:rPr lang="en-US" smtClean="0"/>
-              <a:t>3/9/2026</a:t>
+              <a:t>3/11/2026</a:t>
             </a:fld>
             <a:endParaRPr lang="en-US"/>
           </a:p>
@@ -1524,7 +1524,7 @@
           <a:p>
             <a:fld id="{605D2A03-21FB-4445-B0CA-50857B6CED06}" type="datetimeFigureOut">
               <a:rPr lang="en-US" smtClean="0"/>
-              <a:t>3/9/2026</a:t>
+              <a:t>3/11/2026</a:t>
             </a:fld>
             <a:endParaRPr lang="en-US"/>
           </a:p>
@@ -1770,7 +1770,7 @@
           <a:p>
             <a:fld id="{605D2A03-21FB-4445-B0CA-50857B6CED06}" type="datetimeFigureOut">
               <a:rPr lang="en-US" smtClean="0"/>
-              <a:t>3/9/2026</a:t>
+              <a:t>3/11/2026</a:t>
             </a:fld>
             <a:endParaRPr lang="en-US"/>
           </a:p>
@@ -2002,7 +2002,7 @@
           <a:p>
             <a:fld id="{605D2A03-21FB-4445-B0CA-50857B6CED06}" type="datetimeFigureOut">
               <a:rPr lang="en-US" smtClean="0"/>
-              <a:t>3/9/2026</a:t>
+              <a:t>3/11/2026</a:t>
             </a:fld>
             <a:endParaRPr lang="en-US"/>
           </a:p>
@@ -2369,7 +2369,7 @@
           <a:p>
             <a:fld id="{605D2A03-21FB-4445-B0CA-50857B6CED06}" type="datetimeFigureOut">
               <a:rPr lang="en-US" smtClean="0"/>
-              <a:t>3/9/2026</a:t>
+              <a:t>3/11/2026</a:t>
             </a:fld>
             <a:endParaRPr lang="en-US"/>
           </a:p>
@@ -2487,7 +2487,7 @@
           <a:p>
             <a:fld id="{605D2A03-21FB-4445-B0CA-50857B6CED06}" type="datetimeFigureOut">
               <a:rPr lang="en-US" smtClean="0"/>
-              <a:t>3/9/2026</a:t>
+              <a:t>3/11/2026</a:t>
             </a:fld>
             <a:endParaRPr lang="en-US"/>
           </a:p>
@@ -2582,7 +2582,7 @@
           <a:p>
             <a:fld id="{605D2A03-21FB-4445-B0CA-50857B6CED06}" type="datetimeFigureOut">
               <a:rPr lang="en-US" smtClean="0"/>
-              <a:t>3/9/2026</a:t>
+              <a:t>3/11/2026</a:t>
             </a:fld>
             <a:endParaRPr lang="en-US"/>
           </a:p>
@@ -2859,7 +2859,7 @@
           <a:p>
             <a:fld id="{605D2A03-21FB-4445-B0CA-50857B6CED06}" type="datetimeFigureOut">
               <a:rPr lang="en-US" smtClean="0"/>
-              <a:t>3/9/2026</a:t>
+              <a:t>3/11/2026</a:t>
             </a:fld>
             <a:endParaRPr lang="en-US"/>
           </a:p>
@@ -3116,7 +3116,7 @@
           <a:p>
             <a:fld id="{605D2A03-21FB-4445-B0CA-50857B6CED06}" type="datetimeFigureOut">
               <a:rPr lang="en-US" smtClean="0"/>
-              <a:t>3/9/2026</a:t>
+              <a:t>3/11/2026</a:t>
             </a:fld>
             <a:endParaRPr lang="en-US"/>
           </a:p>
@@ -3329,7 +3329,7 @@
           <a:p>
             <a:fld id="{605D2A03-21FB-4445-B0CA-50857B6CED06}" type="datetimeFigureOut">
               <a:rPr lang="en-US" smtClean="0"/>
-              <a:t>3/9/2026</a:t>
+              <a:t>3/11/2026</a:t>
             </a:fld>
             <a:endParaRPr lang="en-US"/>
           </a:p>
@@ -4402,16 +4402,16 @@
                     <a:latin typeface="Times New Roman" panose="02020603050405020304" pitchFamily="18" charset="0"/>
                     <a:cs typeface="Times New Roman" panose="02020603050405020304" pitchFamily="18" charset="0"/>
                   </a:rPr>
-                  <a:t> Data</a:t>
+                  <a:t> Data(</a:t>
                 </a:r>
                 <a14:m>
                   <m:oMath xmlns:m="http://schemas.openxmlformats.org/officeDocument/2006/math">
                     <m:r>
-                      <a:rPr lang="en-US" sz="2790" b="1" i="1" baseline="-25000" dirty="0">
+                      <a:rPr lang="en-US" sz="2800" b="1" i="1" dirty="0">
                         <a:latin typeface="Cambria Math" panose="02040503050406030204" pitchFamily="18" charset="0"/>
                         <a:cs typeface="Times New Roman" panose="02020603050405020304" pitchFamily="18" charset="0"/>
                       </a:rPr>
-                      <m:t>𝒊</m:t>
+                      <m:t>𝒌</m:t>
                     </m:r>
                   </m:oMath>
                 </a14:m>
@@ -4420,16 +4420,16 @@
                     <a:latin typeface="Times New Roman" panose="02020603050405020304" pitchFamily="18" charset="0"/>
                     <a:cs typeface="Times New Roman" panose="02020603050405020304" pitchFamily="18" charset="0"/>
                   </a:rPr>
-                  <a:t> (point </a:t>
+                  <a:t>) (point </a:t>
                 </a:r>
                 <a14:m>
                   <m:oMath xmlns:m="http://schemas.openxmlformats.org/officeDocument/2006/math">
                     <m:r>
-                      <a:rPr lang="en-US" sz="2790" b="1" i="1" dirty="0">
+                      <a:rPr lang="en-US" sz="2790" b="1" i="1" smtClean="0">
                         <a:latin typeface="Cambria Math" panose="02040503050406030204" pitchFamily="18" charset="0"/>
                         <a:cs typeface="Times New Roman" panose="02020603050405020304" pitchFamily="18" charset="0"/>
                       </a:rPr>
-                      <m:t>𝒊</m:t>
+                      <m:t>𝒌</m:t>
                     </m:r>
                   </m:oMath>
                 </a14:m>
@@ -4489,7 +4489,7 @@
               <a:blipFill>
                 <a:blip r:embed="rId8"/>
                 <a:stretch>
-                  <a:fillRect l="-3571" t="-11628" b="-31395"/>
+                  <a:fillRect l="-3571" t="-11628" r="-5612" b="-31395"/>
                 </a:stretch>
               </a:blipFill>
             </p:spPr>
@@ -4842,8 +4842,8 @@
         </p:nvSpPr>
         <p:spPr>
           <a:xfrm>
-            <a:off x="2798227" y="7594783"/>
-            <a:ext cx="1025409" cy="338554"/>
+            <a:off x="2671487" y="7486194"/>
+            <a:ext cx="1444242" cy="461665"/>
           </a:xfrm>
           <a:prstGeom prst="rect">
             <a:avLst/>
@@ -4857,7 +4857,7 @@
           <a:lstStyle/>
           <a:p>
             <a:r>
-              <a:rPr lang="en-US" sz="1600" b="1" dirty="0">
+              <a:rPr lang="en-US" sz="2400" b="1" dirty="0">
                 <a:latin typeface="Times New Roman" panose="02020603050405020304" pitchFamily="18" charset="0"/>
                 <a:cs typeface="Times New Roman" panose="02020603050405020304" pitchFamily="18" charset="0"/>
               </a:rPr>
@@ -4882,8 +4882,8 @@
             </p:nvSpPr>
             <p:spPr>
               <a:xfrm>
-                <a:off x="5280202" y="7585336"/>
-                <a:ext cx="470513" cy="356380"/>
+                <a:off x="5091905" y="7465280"/>
+                <a:ext cx="984500" cy="461665"/>
               </a:xfrm>
               <a:prstGeom prst="rect">
                 <a:avLst/>
@@ -4903,47 +4903,60 @@
                       <m:jc m:val="centerGroup"/>
                     </m:oMathParaPr>
                     <m:oMath xmlns:m="http://schemas.openxmlformats.org/officeDocument/2006/math">
-                      <m:sSubSup>
-                        <m:sSubSupPr>
+                      <m:sSub>
+                        <m:sSubPr>
                           <m:ctrlPr>
-                            <a:rPr lang="en-US" sz="1600" b="1" i="1" dirty="0">
+                            <a:rPr lang="en-US" sz="2400" b="1" i="1" dirty="0" smtClean="0">
                               <a:latin typeface="Cambria Math" panose="02040503050406030204" pitchFamily="18" charset="0"/>
                               <a:cs typeface="Times New Roman" panose="02020603050405020304" pitchFamily="18" charset="0"/>
                             </a:rPr>
                           </m:ctrlPr>
-                        </m:sSubSupPr>
+                        </m:sSubPr>
                         <m:e>
                           <m:r>
-                            <a:rPr lang="en-US" sz="1600" b="1" i="1" dirty="0">
+                            <a:rPr lang="en-US" sz="2400" b="1" i="1" dirty="0" smtClean="0">
                               <a:latin typeface="Cambria Math" panose="02040503050406030204" pitchFamily="18" charset="0"/>
+                              <a:ea typeface="Cambria Math" panose="02040503050406030204" pitchFamily="18" charset="0"/>
                               <a:cs typeface="Times New Roman" panose="02020603050405020304" pitchFamily="18" charset="0"/>
                             </a:rPr>
-                            <m:t>𝑹</m:t>
+                            <m:t>𝚪</m:t>
                           </m:r>
                         </m:e>
                         <m:sub>
                           <m:r>
-                            <a:rPr lang="en-US" sz="1600" b="1" i="1" dirty="0">
-                              <a:latin typeface="Cambria Math" panose="02040503050406030204" pitchFamily="18" charset="0"/>
-                              <a:cs typeface="Times New Roman" panose="02020603050405020304" pitchFamily="18" charset="0"/>
-                            </a:rPr>
-                            <m:t>𝒊</m:t>
-                          </m:r>
-                        </m:sub>
-                        <m:sup>
-                          <m:r>
-                            <a:rPr lang="en-US" sz="1600" b="1" i="1" dirty="0">
+                            <a:rPr lang="en-US" sz="2400" b="1" i="1" dirty="0" smtClean="0">
                               <a:latin typeface="Cambria Math" panose="02040503050406030204" pitchFamily="18" charset="0"/>
                               <a:cs typeface="Times New Roman" panose="02020603050405020304" pitchFamily="18" charset="0"/>
                             </a:rPr>
                             <m:t>𝟏</m:t>
                           </m:r>
-                        </m:sup>
-                      </m:sSubSup>
+                        </m:sub>
+                      </m:sSub>
+                      <m:r>
+                        <a:rPr lang="en-US" sz="2400" b="1" i="1" dirty="0" smtClean="0">
+                          <a:latin typeface="Cambria Math" panose="02040503050406030204" pitchFamily="18" charset="0"/>
+                          <a:cs typeface="Times New Roman" panose="02020603050405020304" pitchFamily="18" charset="0"/>
+                        </a:rPr>
+                        <m:t>(</m:t>
+                      </m:r>
+                      <m:r>
+                        <a:rPr lang="en-US" sz="2400" b="1" i="1" dirty="0" smtClean="0">
+                          <a:latin typeface="Cambria Math" panose="02040503050406030204" pitchFamily="18" charset="0"/>
+                          <a:cs typeface="Times New Roman" panose="02020603050405020304" pitchFamily="18" charset="0"/>
+                        </a:rPr>
+                        <m:t>𝒌</m:t>
+                      </m:r>
+                      <m:r>
+                        <a:rPr lang="en-US" sz="2400" b="1" i="1" dirty="0" smtClean="0">
+                          <a:latin typeface="Cambria Math" panose="02040503050406030204" pitchFamily="18" charset="0"/>
+                          <a:cs typeface="Times New Roman" panose="02020603050405020304" pitchFamily="18" charset="0"/>
+                        </a:rPr>
+                        <m:t>)</m:t>
+                      </m:r>
                     </m:oMath>
                   </m:oMathPara>
                 </a14:m>
-                <a:endParaRPr lang="en-US" sz="1600" b="1" i="1" dirty="0">
+                <a:endParaRPr lang="en-US" sz="2400" b="1" i="1" dirty="0">
                   <a:latin typeface="Cambria Math" panose="02040503050406030204" pitchFamily="18" charset="0"/>
                   <a:cs typeface="Times New Roman" panose="02020603050405020304" pitchFamily="18" charset="0"/>
                 </a:endParaRPr>
@@ -4968,8 +4981,8 @@
             </p:nvSpPr>
             <p:spPr>
               <a:xfrm>
-                <a:off x="5280202" y="7585336"/>
-                <a:ext cx="470513" cy="356380"/>
+                <a:off x="5091905" y="7465280"/>
+                <a:ext cx="984500" cy="461665"/>
               </a:xfrm>
               <a:prstGeom prst="rect">
                 <a:avLst/>
@@ -4977,7 +4990,7 @@
               <a:blipFill>
                 <a:blip r:embed="rId9"/>
                 <a:stretch>
-                  <a:fillRect b="-1695"/>
+                  <a:fillRect r="-1852" b="-21333"/>
                 </a:stretch>
               </a:blipFill>
             </p:spPr>
@@ -5176,8 +5189,8 @@
             </p:nvSpPr>
             <p:spPr>
               <a:xfrm>
-                <a:off x="6782118" y="7587940"/>
-                <a:ext cx="470513" cy="356380"/>
+                <a:off x="6510948" y="7478170"/>
+                <a:ext cx="984500" cy="461665"/>
               </a:xfrm>
               <a:prstGeom prst="rect">
                 <a:avLst/>
@@ -5197,47 +5210,61 @@
                       <m:jc m:val="centerGroup"/>
                     </m:oMathParaPr>
                     <m:oMath xmlns:m="http://schemas.openxmlformats.org/officeDocument/2006/math">
-                      <m:sSubSup>
-                        <m:sSubSupPr>
+                      <m:sSub>
+                        <m:sSubPr>
                           <m:ctrlPr>
-                            <a:rPr lang="en-US" sz="1600" b="1" i="1" dirty="0">
+                            <a:rPr lang="en-US" sz="2400" b="1" i="1" dirty="0" smtClean="0">
                               <a:latin typeface="Cambria Math" panose="02040503050406030204" pitchFamily="18" charset="0"/>
                               <a:cs typeface="Times New Roman" panose="02020603050405020304" pitchFamily="18" charset="0"/>
                             </a:rPr>
                           </m:ctrlPr>
-                        </m:sSubSupPr>
+                        </m:sSubPr>
                         <m:e>
                           <m:r>
-                            <a:rPr lang="en-US" sz="1600" b="1" i="1" dirty="0">
+                            <a:rPr lang="en-US" sz="2400" b="1" i="1" dirty="0">
                               <a:latin typeface="Cambria Math" panose="02040503050406030204" pitchFamily="18" charset="0"/>
+                              <a:ea typeface="Cambria Math" panose="02040503050406030204" pitchFamily="18" charset="0"/>
                               <a:cs typeface="Times New Roman" panose="02020603050405020304" pitchFamily="18" charset="0"/>
                             </a:rPr>
-                            <m:t>𝑹</m:t>
+                            <m:t>𝚪</m:t>
                           </m:r>
                         </m:e>
                         <m:sub>
                           <m:r>
-                            <a:rPr lang="en-US" sz="1600" b="1" i="1" dirty="0">
+                            <a:rPr lang="en-US" sz="2400" b="1" i="1" dirty="0" smtClean="0">
                               <a:latin typeface="Cambria Math" panose="02040503050406030204" pitchFamily="18" charset="0"/>
-                              <a:cs typeface="Times New Roman" panose="02020603050405020304" pitchFamily="18" charset="0"/>
-                            </a:rPr>
-                            <m:t>𝒊</m:t>
-                          </m:r>
-                        </m:sub>
-                        <m:sup>
-                          <m:r>
-                            <a:rPr lang="en-US" sz="1600" b="1" i="1" dirty="0">
-                              <a:latin typeface="Cambria Math" panose="02040503050406030204" pitchFamily="18" charset="0"/>
+                              <a:ea typeface="Cambria Math" panose="02040503050406030204" pitchFamily="18" charset="0"/>
                               <a:cs typeface="Times New Roman" panose="02020603050405020304" pitchFamily="18" charset="0"/>
                             </a:rPr>
                             <m:t>𝟐</m:t>
                           </m:r>
-                        </m:sup>
-                      </m:sSubSup>
+                        </m:sub>
+                      </m:sSub>
+                      <m:r>
+                        <a:rPr lang="en-US" sz="2400" b="1" i="1" dirty="0">
+                          <a:latin typeface="Cambria Math" panose="02040503050406030204" pitchFamily="18" charset="0"/>
+                          <a:cs typeface="Times New Roman" panose="02020603050405020304" pitchFamily="18" charset="0"/>
+                        </a:rPr>
+                        <m:t>(</m:t>
+                      </m:r>
+                      <m:r>
+                        <a:rPr lang="en-US" sz="2400" b="1" i="1" dirty="0">
+                          <a:latin typeface="Cambria Math" panose="02040503050406030204" pitchFamily="18" charset="0"/>
+                          <a:cs typeface="Times New Roman" panose="02020603050405020304" pitchFamily="18" charset="0"/>
+                        </a:rPr>
+                        <m:t>𝒌</m:t>
+                      </m:r>
+                      <m:r>
+                        <a:rPr lang="en-US" sz="2400" b="1" i="1" dirty="0">
+                          <a:latin typeface="Cambria Math" panose="02040503050406030204" pitchFamily="18" charset="0"/>
+                          <a:cs typeface="Times New Roman" panose="02020603050405020304" pitchFamily="18" charset="0"/>
+                        </a:rPr>
+                        <m:t>)</m:t>
+                      </m:r>
                     </m:oMath>
                   </m:oMathPara>
                 </a14:m>
-                <a:endParaRPr lang="en-US" sz="1600" b="1" i="1" dirty="0">
+                <a:endParaRPr lang="en-US" sz="2400" b="1" i="1" dirty="0">
                   <a:latin typeface="Cambria Math" panose="02040503050406030204" pitchFamily="18" charset="0"/>
                   <a:cs typeface="Times New Roman" panose="02020603050405020304" pitchFamily="18" charset="0"/>
                 </a:endParaRPr>
@@ -5262,8 +5289,8 @@
             </p:nvSpPr>
             <p:spPr>
               <a:xfrm>
-                <a:off x="6782118" y="7587940"/>
-                <a:ext cx="470513" cy="356380"/>
+                <a:off x="6510948" y="7478170"/>
+                <a:ext cx="984500" cy="461665"/>
               </a:xfrm>
               <a:prstGeom prst="rect">
                 <a:avLst/>
@@ -5271,7 +5298,7 @@
               <a:blipFill>
                 <a:blip r:embed="rId10"/>
                 <a:stretch>
-                  <a:fillRect b="-3448"/>
+                  <a:fillRect r="-1852" b="-21333"/>
                 </a:stretch>
               </a:blipFill>
             </p:spPr>
@@ -5306,8 +5333,8 @@
             </p:nvSpPr>
             <p:spPr>
               <a:xfrm>
-                <a:off x="8210976" y="7586964"/>
-                <a:ext cx="470513" cy="357534"/>
+                <a:off x="7940789" y="7459914"/>
+                <a:ext cx="984500" cy="461665"/>
               </a:xfrm>
               <a:prstGeom prst="rect">
                 <a:avLst/>
@@ -5327,47 +5354,61 @@
                       <m:jc m:val="centerGroup"/>
                     </m:oMathParaPr>
                     <m:oMath xmlns:m="http://schemas.openxmlformats.org/officeDocument/2006/math">
-                      <m:sSubSup>
-                        <m:sSubSupPr>
+                      <m:sSub>
+                        <m:sSubPr>
                           <m:ctrlPr>
-                            <a:rPr lang="en-US" sz="1600" b="1" i="1" dirty="0">
+                            <a:rPr lang="en-US" sz="2400" b="1" i="1" dirty="0" smtClean="0">
                               <a:latin typeface="Cambria Math" panose="02040503050406030204" pitchFamily="18" charset="0"/>
                               <a:cs typeface="Times New Roman" panose="02020603050405020304" pitchFamily="18" charset="0"/>
                             </a:rPr>
                           </m:ctrlPr>
-                        </m:sSubSupPr>
+                        </m:sSubPr>
                         <m:e>
                           <m:r>
-                            <a:rPr lang="en-US" sz="1600" b="1" i="1" dirty="0">
+                            <a:rPr lang="en-US" sz="2400" b="1" i="1" dirty="0">
                               <a:latin typeface="Cambria Math" panose="02040503050406030204" pitchFamily="18" charset="0"/>
+                              <a:ea typeface="Cambria Math" panose="02040503050406030204" pitchFamily="18" charset="0"/>
                               <a:cs typeface="Times New Roman" panose="02020603050405020304" pitchFamily="18" charset="0"/>
                             </a:rPr>
-                            <m:t>𝑹</m:t>
+                            <m:t>𝚪</m:t>
                           </m:r>
                         </m:e>
                         <m:sub>
                           <m:r>
-                            <a:rPr lang="en-US" sz="1600" b="1" i="1" dirty="0">
+                            <a:rPr lang="en-US" sz="2400" b="1" i="1" dirty="0" smtClean="0">
                               <a:latin typeface="Cambria Math" panose="02040503050406030204" pitchFamily="18" charset="0"/>
-                              <a:cs typeface="Times New Roman" panose="02020603050405020304" pitchFamily="18" charset="0"/>
-                            </a:rPr>
-                            <m:t>𝒊</m:t>
-                          </m:r>
-                        </m:sub>
-                        <m:sup>
-                          <m:r>
-                            <a:rPr lang="en-US" sz="1600" b="1" i="1" dirty="0">
-                              <a:latin typeface="Cambria Math" panose="02040503050406030204" pitchFamily="18" charset="0"/>
+                              <a:ea typeface="Cambria Math" panose="02040503050406030204" pitchFamily="18" charset="0"/>
                               <a:cs typeface="Times New Roman" panose="02020603050405020304" pitchFamily="18" charset="0"/>
                             </a:rPr>
                             <m:t>𝟑</m:t>
                           </m:r>
-                        </m:sup>
-                      </m:sSubSup>
+                        </m:sub>
+                      </m:sSub>
+                      <m:r>
+                        <a:rPr lang="en-US" sz="2400" b="1" i="1" dirty="0">
+                          <a:latin typeface="Cambria Math" panose="02040503050406030204" pitchFamily="18" charset="0"/>
+                          <a:cs typeface="Times New Roman" panose="02020603050405020304" pitchFamily="18" charset="0"/>
+                        </a:rPr>
+                        <m:t>(</m:t>
+                      </m:r>
+                      <m:r>
+                        <a:rPr lang="en-US" sz="2400" b="1" i="1" dirty="0">
+                          <a:latin typeface="Cambria Math" panose="02040503050406030204" pitchFamily="18" charset="0"/>
+                          <a:cs typeface="Times New Roman" panose="02020603050405020304" pitchFamily="18" charset="0"/>
+                        </a:rPr>
+                        <m:t>𝒌</m:t>
+                      </m:r>
+                      <m:r>
+                        <a:rPr lang="en-US" sz="2400" b="1" i="1" dirty="0">
+                          <a:latin typeface="Cambria Math" panose="02040503050406030204" pitchFamily="18" charset="0"/>
+                          <a:cs typeface="Times New Roman" panose="02020603050405020304" pitchFamily="18" charset="0"/>
+                        </a:rPr>
+                        <m:t>)</m:t>
+                      </m:r>
                     </m:oMath>
                   </m:oMathPara>
                 </a14:m>
-                <a:endParaRPr lang="en-US" sz="1600" b="1" i="1" dirty="0">
+                <a:endParaRPr lang="en-US" sz="2400" b="1" i="1" dirty="0">
                   <a:latin typeface="Cambria Math" panose="02040503050406030204" pitchFamily="18" charset="0"/>
                   <a:cs typeface="Times New Roman" panose="02020603050405020304" pitchFamily="18" charset="0"/>
                 </a:endParaRPr>
@@ -5392,8 +5433,8 @@
             </p:nvSpPr>
             <p:spPr>
               <a:xfrm>
-                <a:off x="8210976" y="7586964"/>
-                <a:ext cx="470513" cy="357534"/>
+                <a:off x="7940789" y="7459914"/>
+                <a:ext cx="984500" cy="461665"/>
               </a:xfrm>
               <a:prstGeom prst="rect">
                 <a:avLst/>
@@ -5401,7 +5442,7 @@
               <a:blipFill>
                 <a:blip r:embed="rId11"/>
                 <a:stretch>
-                  <a:fillRect b="-3448"/>
+                  <a:fillRect r="-1863" b="-21333"/>
                 </a:stretch>
               </a:blipFill>
             </p:spPr>
@@ -5436,8 +5477,8 @@
             </p:nvSpPr>
             <p:spPr>
               <a:xfrm>
-                <a:off x="9595892" y="7586914"/>
-                <a:ext cx="470513" cy="355738"/>
+                <a:off x="9333421" y="7460315"/>
+                <a:ext cx="984500" cy="461665"/>
               </a:xfrm>
               <a:prstGeom prst="rect">
                 <a:avLst/>
@@ -5457,47 +5498,61 @@
                       <m:jc m:val="centerGroup"/>
                     </m:oMathParaPr>
                     <m:oMath xmlns:m="http://schemas.openxmlformats.org/officeDocument/2006/math">
-                      <m:sSubSup>
-                        <m:sSubSupPr>
+                      <m:sSub>
+                        <m:sSubPr>
                           <m:ctrlPr>
-                            <a:rPr lang="en-US" sz="1600" b="1" i="1" dirty="0">
+                            <a:rPr lang="en-US" sz="2400" b="1" i="1" dirty="0" smtClean="0">
                               <a:latin typeface="Cambria Math" panose="02040503050406030204" pitchFamily="18" charset="0"/>
                               <a:cs typeface="Times New Roman" panose="02020603050405020304" pitchFamily="18" charset="0"/>
                             </a:rPr>
                           </m:ctrlPr>
-                        </m:sSubSupPr>
+                        </m:sSubPr>
                         <m:e>
                           <m:r>
-                            <a:rPr lang="en-US" sz="1600" b="1" i="1" dirty="0">
+                            <a:rPr lang="en-US" sz="2400" b="1" i="1" dirty="0">
                               <a:latin typeface="Cambria Math" panose="02040503050406030204" pitchFamily="18" charset="0"/>
+                              <a:ea typeface="Cambria Math" panose="02040503050406030204" pitchFamily="18" charset="0"/>
                               <a:cs typeface="Times New Roman" panose="02020603050405020304" pitchFamily="18" charset="0"/>
                             </a:rPr>
-                            <m:t>𝑹</m:t>
+                            <m:t>𝚪</m:t>
                           </m:r>
                         </m:e>
                         <m:sub>
                           <m:r>
-                            <a:rPr lang="en-US" sz="1600" b="1" i="1" dirty="0">
+                            <a:rPr lang="en-US" sz="2400" b="1" i="1" dirty="0" smtClean="0">
                               <a:latin typeface="Cambria Math" panose="02040503050406030204" pitchFamily="18" charset="0"/>
-                              <a:cs typeface="Times New Roman" panose="02020603050405020304" pitchFamily="18" charset="0"/>
-                            </a:rPr>
-                            <m:t>𝒊</m:t>
-                          </m:r>
-                        </m:sub>
-                        <m:sup>
-                          <m:r>
-                            <a:rPr lang="en-US" sz="1600" b="1" i="1" dirty="0">
-                              <a:latin typeface="Cambria Math" panose="02040503050406030204" pitchFamily="18" charset="0"/>
+                              <a:ea typeface="Cambria Math" panose="02040503050406030204" pitchFamily="18" charset="0"/>
                               <a:cs typeface="Times New Roman" panose="02020603050405020304" pitchFamily="18" charset="0"/>
                             </a:rPr>
                             <m:t>𝟒</m:t>
                           </m:r>
-                        </m:sup>
-                      </m:sSubSup>
+                        </m:sub>
+                      </m:sSub>
+                      <m:r>
+                        <a:rPr lang="en-US" sz="2400" b="1" i="1" dirty="0">
+                          <a:latin typeface="Cambria Math" panose="02040503050406030204" pitchFamily="18" charset="0"/>
+                          <a:cs typeface="Times New Roman" panose="02020603050405020304" pitchFamily="18" charset="0"/>
+                        </a:rPr>
+                        <m:t>(</m:t>
+                      </m:r>
+                      <m:r>
+                        <a:rPr lang="en-US" sz="2400" b="1" i="1" dirty="0">
+                          <a:latin typeface="Cambria Math" panose="02040503050406030204" pitchFamily="18" charset="0"/>
+                          <a:cs typeface="Times New Roman" panose="02020603050405020304" pitchFamily="18" charset="0"/>
+                        </a:rPr>
+                        <m:t>𝒌</m:t>
+                      </m:r>
+                      <m:r>
+                        <a:rPr lang="en-US" sz="2400" b="1" i="1" dirty="0">
+                          <a:latin typeface="Cambria Math" panose="02040503050406030204" pitchFamily="18" charset="0"/>
+                          <a:cs typeface="Times New Roman" panose="02020603050405020304" pitchFamily="18" charset="0"/>
+                        </a:rPr>
+                        <m:t>)</m:t>
+                      </m:r>
                     </m:oMath>
                   </m:oMathPara>
                 </a14:m>
-                <a:endParaRPr lang="en-US" sz="1600" b="1" i="1" dirty="0">
+                <a:endParaRPr lang="en-US" sz="2400" b="1" i="1" dirty="0">
                   <a:latin typeface="Cambria Math" panose="02040503050406030204" pitchFamily="18" charset="0"/>
                   <a:cs typeface="Times New Roman" panose="02020603050405020304" pitchFamily="18" charset="0"/>
                 </a:endParaRPr>
@@ -5522,8 +5577,8 @@
             </p:nvSpPr>
             <p:spPr>
               <a:xfrm>
-                <a:off x="9595892" y="7586914"/>
-                <a:ext cx="470513" cy="355738"/>
+                <a:off x="9333421" y="7460315"/>
+                <a:ext cx="984500" cy="461665"/>
               </a:xfrm>
               <a:prstGeom prst="rect">
                 <a:avLst/>
@@ -5531,7 +5586,7 @@
               <a:blipFill>
                 <a:blip r:embed="rId12"/>
                 <a:stretch>
-                  <a:fillRect b="-3448"/>
+                  <a:fillRect r="-1852" b="-19737"/>
                 </a:stretch>
               </a:blipFill>
             </p:spPr>
@@ -5566,8 +5621,8 @@
             </p:nvSpPr>
             <p:spPr>
               <a:xfrm>
-                <a:off x="11031926" y="7585263"/>
-                <a:ext cx="470513" cy="361189"/>
+                <a:off x="10722164" y="7458336"/>
+                <a:ext cx="984500" cy="461665"/>
               </a:xfrm>
               <a:prstGeom prst="rect">
                 <a:avLst/>
@@ -5587,47 +5642,61 @@
                       <m:jc m:val="centerGroup"/>
                     </m:oMathParaPr>
                     <m:oMath xmlns:m="http://schemas.openxmlformats.org/officeDocument/2006/math">
-                      <m:sSubSup>
-                        <m:sSubSupPr>
+                      <m:sSub>
+                        <m:sSubPr>
                           <m:ctrlPr>
-                            <a:rPr lang="en-US" sz="1600" b="1" i="1" dirty="0">
+                            <a:rPr lang="en-US" sz="2400" b="1" i="1" dirty="0" smtClean="0">
                               <a:latin typeface="Cambria Math" panose="02040503050406030204" pitchFamily="18" charset="0"/>
                               <a:cs typeface="Times New Roman" panose="02020603050405020304" pitchFamily="18" charset="0"/>
                             </a:rPr>
                           </m:ctrlPr>
-                        </m:sSubSupPr>
+                        </m:sSubPr>
                         <m:e>
                           <m:r>
-                            <a:rPr lang="en-US" sz="1600" b="1" i="1" dirty="0">
+                            <a:rPr lang="en-US" sz="2400" b="1" i="1" dirty="0">
                               <a:latin typeface="Cambria Math" panose="02040503050406030204" pitchFamily="18" charset="0"/>
+                              <a:ea typeface="Cambria Math" panose="02040503050406030204" pitchFamily="18" charset="0"/>
                               <a:cs typeface="Times New Roman" panose="02020603050405020304" pitchFamily="18" charset="0"/>
                             </a:rPr>
-                            <m:t>𝑹</m:t>
+                            <m:t>𝚪</m:t>
                           </m:r>
                         </m:e>
                         <m:sub>
                           <m:r>
-                            <a:rPr lang="en-US" sz="1600" b="1" i="1" dirty="0">
+                            <a:rPr lang="en-US" sz="2400" b="1" i="1" dirty="0" smtClean="0">
                               <a:latin typeface="Cambria Math" panose="02040503050406030204" pitchFamily="18" charset="0"/>
-                              <a:cs typeface="Times New Roman" panose="02020603050405020304" pitchFamily="18" charset="0"/>
-                            </a:rPr>
-                            <m:t>𝒊</m:t>
-                          </m:r>
-                        </m:sub>
-                        <m:sup>
-                          <m:r>
-                            <a:rPr lang="en-US" sz="1600" b="1" i="1" dirty="0">
-                              <a:latin typeface="Cambria Math" panose="02040503050406030204" pitchFamily="18" charset="0"/>
+                              <a:ea typeface="Cambria Math" panose="02040503050406030204" pitchFamily="18" charset="0"/>
                               <a:cs typeface="Times New Roman" panose="02020603050405020304" pitchFamily="18" charset="0"/>
                             </a:rPr>
                             <m:t>𝟓</m:t>
                           </m:r>
-                        </m:sup>
-                      </m:sSubSup>
+                        </m:sub>
+                      </m:sSub>
+                      <m:r>
+                        <a:rPr lang="en-US" sz="2400" b="1" i="1" dirty="0">
+                          <a:latin typeface="Cambria Math" panose="02040503050406030204" pitchFamily="18" charset="0"/>
+                          <a:cs typeface="Times New Roman" panose="02020603050405020304" pitchFamily="18" charset="0"/>
+                        </a:rPr>
+                        <m:t>(</m:t>
+                      </m:r>
+                      <m:r>
+                        <a:rPr lang="en-US" sz="2400" b="1" i="1" dirty="0">
+                          <a:latin typeface="Cambria Math" panose="02040503050406030204" pitchFamily="18" charset="0"/>
+                          <a:cs typeface="Times New Roman" panose="02020603050405020304" pitchFamily="18" charset="0"/>
+                        </a:rPr>
+                        <m:t>𝒌</m:t>
+                      </m:r>
+                      <m:r>
+                        <a:rPr lang="en-US" sz="2400" b="1" i="1" dirty="0">
+                          <a:latin typeface="Cambria Math" panose="02040503050406030204" pitchFamily="18" charset="0"/>
+                          <a:cs typeface="Times New Roman" panose="02020603050405020304" pitchFamily="18" charset="0"/>
+                        </a:rPr>
+                        <m:t>)</m:t>
+                      </m:r>
                     </m:oMath>
                   </m:oMathPara>
                 </a14:m>
-                <a:endParaRPr lang="en-US" sz="1600" b="1" i="1" dirty="0">
+                <a:endParaRPr lang="en-US" sz="2400" b="1" i="1" dirty="0">
                   <a:latin typeface="Cambria Math" panose="02040503050406030204" pitchFamily="18" charset="0"/>
                   <a:cs typeface="Times New Roman" panose="02020603050405020304" pitchFamily="18" charset="0"/>
                 </a:endParaRPr>
@@ -5652,8 +5721,8 @@
             </p:nvSpPr>
             <p:spPr>
               <a:xfrm>
-                <a:off x="11031926" y="7585263"/>
-                <a:ext cx="470513" cy="361189"/>
+                <a:off x="10722164" y="7458336"/>
+                <a:ext cx="984500" cy="461665"/>
               </a:xfrm>
               <a:prstGeom prst="rect">
                 <a:avLst/>
@@ -5661,7 +5730,7 @@
               <a:blipFill>
                 <a:blip r:embed="rId13"/>
                 <a:stretch>
-                  <a:fillRect/>
+                  <a:fillRect r="-1863" b="-19737"/>
                 </a:stretch>
               </a:blipFill>
             </p:spPr>
@@ -5743,7 +5812,7 @@
         </p:nvSpPr>
         <p:spPr>
           <a:xfrm>
-            <a:off x="3291689" y="3899132"/>
+            <a:off x="3739364" y="3899132"/>
             <a:ext cx="150726" cy="144208"/>
           </a:xfrm>
           <a:prstGeom prst="flowChartConnector">
@@ -6587,8 +6656,8 @@
             </p:nvSpPr>
             <p:spPr>
               <a:xfrm>
-                <a:off x="13196156" y="937733"/>
-                <a:ext cx="679512" cy="518714"/>
+                <a:off x="13196155" y="937733"/>
+                <a:ext cx="1137310" cy="518714"/>
               </a:xfrm>
               <a:prstGeom prst="roundRect">
                 <a:avLst>
@@ -6631,85 +6700,89 @@
               <a:bodyPr rtlCol="0" anchor="ctr"/>
               <a:lstStyle/>
               <a:p>
-                <a:pPr algn="ctr"/>
+                <a:pPr/>
                 <a14:m>
                   <m:oMathPara xmlns:m="http://schemas.openxmlformats.org/officeDocument/2006/math">
                     <m:oMathParaPr>
                       <m:jc m:val="centerGroup"/>
                     </m:oMathParaPr>
                     <m:oMath xmlns:m="http://schemas.openxmlformats.org/officeDocument/2006/math">
-                      <m:sSubSup>
-                        <m:sSubSupPr>
+                      <m:sSub>
+                        <m:sSubPr>
                           <m:ctrlPr>
-                            <a:rPr lang="en-US" sz="2790" b="1" i="1">
+                            <a:rPr lang="en-US" sz="2800" b="1" i="1" dirty="0" smtClean="0">
                               <a:solidFill>
-                                <a:schemeClr val="tx1">
-                                  <a:lumMod val="95000"/>
-                                  <a:lumOff val="5000"/>
-                                </a:schemeClr>
+                                <a:schemeClr val="tx1"/>
                               </a:solidFill>
                               <a:latin typeface="Cambria Math" panose="02040503050406030204" pitchFamily="18" charset="0"/>
                               <a:cs typeface="Times New Roman" panose="02020603050405020304" pitchFamily="18" charset="0"/>
                             </a:rPr>
                           </m:ctrlPr>
-                        </m:sSubSupPr>
+                        </m:sSubPr>
                         <m:e>
                           <m:r>
-                            <a:rPr lang="en-US" sz="2790" b="1" i="1">
+                            <a:rPr lang="en-US" sz="2800" b="1" i="1" dirty="0">
                               <a:solidFill>
-                                <a:schemeClr val="tx1">
-                                  <a:lumMod val="95000"/>
-                                  <a:lumOff val="5000"/>
-                                </a:schemeClr>
+                                <a:schemeClr val="tx1"/>
                               </a:solidFill>
                               <a:latin typeface="Cambria Math" panose="02040503050406030204" pitchFamily="18" charset="0"/>
+                              <a:ea typeface="Cambria Math" panose="02040503050406030204" pitchFamily="18" charset="0"/>
                               <a:cs typeface="Times New Roman" panose="02020603050405020304" pitchFamily="18" charset="0"/>
                             </a:rPr>
-                            <m:t>𝑹</m:t>
+                            <m:t>𝚪</m:t>
                           </m:r>
                         </m:e>
                         <m:sub>
                           <m:r>
-                            <a:rPr lang="en-US" sz="2790" b="1" i="1">
+                            <a:rPr lang="en-US" sz="2800" b="1" i="1" dirty="0">
                               <a:solidFill>
-                                <a:schemeClr val="tx1">
-                                  <a:lumMod val="95000"/>
-                                  <a:lumOff val="5000"/>
-                                </a:schemeClr>
-                              </a:solidFill>
-                              <a:latin typeface="Cambria Math" panose="02040503050406030204" pitchFamily="18" charset="0"/>
-                              <a:cs typeface="Times New Roman" panose="02020603050405020304" pitchFamily="18" charset="0"/>
-                            </a:rPr>
-                            <m:t>𝟎</m:t>
-                          </m:r>
-                        </m:sub>
-                        <m:sup>
-                          <m:r>
-                            <a:rPr lang="en-US" sz="2790" b="1" i="1">
-                              <a:solidFill>
-                                <a:schemeClr val="tx1">
-                                  <a:lumMod val="95000"/>
-                                  <a:lumOff val="5000"/>
-                                </a:schemeClr>
+                                <a:schemeClr val="tx1"/>
                               </a:solidFill>
                               <a:latin typeface="Cambria Math" panose="02040503050406030204" pitchFamily="18" charset="0"/>
                               <a:cs typeface="Times New Roman" panose="02020603050405020304" pitchFamily="18" charset="0"/>
                             </a:rPr>
                             <m:t>𝟏</m:t>
                           </m:r>
-                        </m:sup>
-                      </m:sSubSup>
+                        </m:sub>
+                      </m:sSub>
+                      <m:r>
+                        <a:rPr lang="en-US" sz="2800" b="1" i="1" dirty="0">
+                          <a:solidFill>
+                            <a:schemeClr val="tx1"/>
+                          </a:solidFill>
+                          <a:latin typeface="Cambria Math" panose="02040503050406030204" pitchFamily="18" charset="0"/>
+                          <a:cs typeface="Times New Roman" panose="02020603050405020304" pitchFamily="18" charset="0"/>
+                        </a:rPr>
+                        <m:t>(</m:t>
+                      </m:r>
+                      <m:r>
+                        <a:rPr lang="en-US" sz="2800" b="1" i="1" dirty="0" smtClean="0">
+                          <a:solidFill>
+                            <a:schemeClr val="tx1"/>
+                          </a:solidFill>
+                          <a:latin typeface="Cambria Math" panose="02040503050406030204" pitchFamily="18" charset="0"/>
+                          <a:cs typeface="Times New Roman" panose="02020603050405020304" pitchFamily="18" charset="0"/>
+                        </a:rPr>
+                        <m:t>𝟎</m:t>
+                      </m:r>
+                      <m:r>
+                        <a:rPr lang="en-US" sz="2800" b="1" i="1" dirty="0">
+                          <a:solidFill>
+                            <a:schemeClr val="tx1"/>
+                          </a:solidFill>
+                          <a:latin typeface="Cambria Math" panose="02040503050406030204" pitchFamily="18" charset="0"/>
+                          <a:cs typeface="Times New Roman" panose="02020603050405020304" pitchFamily="18" charset="0"/>
+                        </a:rPr>
+                        <m:t>)</m:t>
+                      </m:r>
                     </m:oMath>
                   </m:oMathPara>
                 </a14:m>
-                <a:endParaRPr lang="en-US" sz="2790" b="1" dirty="0">
+                <a:endParaRPr lang="en-US" sz="2800" b="1" i="1" dirty="0">
                   <a:solidFill>
-                    <a:schemeClr val="tx1">
-                      <a:lumMod val="95000"/>
-                      <a:lumOff val="5000"/>
-                    </a:schemeClr>
+                    <a:schemeClr val="tx1"/>
                   </a:solidFill>
-                  <a:latin typeface="Times New Roman" panose="02020603050405020304" pitchFamily="18" charset="0"/>
+                  <a:latin typeface="Cambria Math" panose="02040503050406030204" pitchFamily="18" charset="0"/>
                   <a:cs typeface="Times New Roman" panose="02020603050405020304" pitchFamily="18" charset="0"/>
                 </a:endParaRPr>
               </a:p>
@@ -6733,8 +6806,8 @@
             </p:nvSpPr>
             <p:spPr>
               <a:xfrm>
-                <a:off x="13196156" y="937733"/>
-                <a:ext cx="679512" cy="518714"/>
+                <a:off x="13196155" y="937733"/>
+                <a:ext cx="1137310" cy="518714"/>
               </a:xfrm>
               <a:prstGeom prst="roundRect">
                 <a:avLst>
@@ -6789,8 +6862,8 @@
             </p:nvSpPr>
             <p:spPr>
               <a:xfrm>
-                <a:off x="13196156" y="1802575"/>
-                <a:ext cx="679512" cy="518714"/>
+                <a:off x="13196155" y="1802575"/>
+                <a:ext cx="1137309" cy="518714"/>
               </a:xfrm>
               <a:prstGeom prst="roundRect">
                 <a:avLst>
@@ -6833,85 +6906,89 @@
               <a:bodyPr rtlCol="0" anchor="ctr"/>
               <a:lstStyle/>
               <a:p>
-                <a:pPr algn="ctr"/>
+                <a:pPr/>
                 <a14:m>
                   <m:oMathPara xmlns:m="http://schemas.openxmlformats.org/officeDocument/2006/math">
                     <m:oMathParaPr>
                       <m:jc m:val="centerGroup"/>
                     </m:oMathParaPr>
                     <m:oMath xmlns:m="http://schemas.openxmlformats.org/officeDocument/2006/math">
-                      <m:sSubSup>
-                        <m:sSubSupPr>
+                      <m:sSub>
+                        <m:sSubPr>
                           <m:ctrlPr>
-                            <a:rPr lang="en-US" sz="2790" b="1" i="1">
+                            <a:rPr lang="en-US" sz="2800" b="1" i="1" dirty="0" smtClean="0">
                               <a:solidFill>
-                                <a:schemeClr val="tx1">
-                                  <a:lumMod val="95000"/>
-                                  <a:lumOff val="5000"/>
-                                </a:schemeClr>
+                                <a:schemeClr val="tx1"/>
                               </a:solidFill>
                               <a:latin typeface="Cambria Math" panose="02040503050406030204" pitchFamily="18" charset="0"/>
                               <a:cs typeface="Times New Roman" panose="02020603050405020304" pitchFamily="18" charset="0"/>
                             </a:rPr>
                           </m:ctrlPr>
-                        </m:sSubSupPr>
+                        </m:sSubPr>
                         <m:e>
                           <m:r>
-                            <a:rPr lang="en-US" sz="2790" b="1" i="1">
+                            <a:rPr lang="en-US" sz="2800" b="1" i="1" dirty="0">
                               <a:solidFill>
-                                <a:schemeClr val="tx1">
-                                  <a:lumMod val="95000"/>
-                                  <a:lumOff val="5000"/>
-                                </a:schemeClr>
+                                <a:schemeClr val="tx1"/>
                               </a:solidFill>
                               <a:latin typeface="Cambria Math" panose="02040503050406030204" pitchFamily="18" charset="0"/>
+                              <a:ea typeface="Cambria Math" panose="02040503050406030204" pitchFamily="18" charset="0"/>
                               <a:cs typeface="Times New Roman" panose="02020603050405020304" pitchFamily="18" charset="0"/>
                             </a:rPr>
-                            <m:t>𝑹</m:t>
+                            <m:t>𝚪</m:t>
                           </m:r>
                         </m:e>
                         <m:sub>
                           <m:r>
-                            <a:rPr lang="en-US" sz="2790" b="1" i="1">
+                            <a:rPr lang="en-US" sz="2800" b="1" i="1" dirty="0">
                               <a:solidFill>
-                                <a:schemeClr val="tx1">
-                                  <a:lumMod val="95000"/>
-                                  <a:lumOff val="5000"/>
-                                </a:schemeClr>
-                              </a:solidFill>
-                              <a:latin typeface="Cambria Math" panose="02040503050406030204" pitchFamily="18" charset="0"/>
-                              <a:cs typeface="Times New Roman" panose="02020603050405020304" pitchFamily="18" charset="0"/>
-                            </a:rPr>
-                            <m:t>𝒊</m:t>
-                          </m:r>
-                        </m:sub>
-                        <m:sup>
-                          <m:r>
-                            <a:rPr lang="en-US" sz="2790" b="1" i="1">
-                              <a:solidFill>
-                                <a:schemeClr val="tx1">
-                                  <a:lumMod val="95000"/>
-                                  <a:lumOff val="5000"/>
-                                </a:schemeClr>
+                                <a:schemeClr val="tx1"/>
                               </a:solidFill>
                               <a:latin typeface="Cambria Math" panose="02040503050406030204" pitchFamily="18" charset="0"/>
                               <a:cs typeface="Times New Roman" panose="02020603050405020304" pitchFamily="18" charset="0"/>
                             </a:rPr>
                             <m:t>𝟏</m:t>
                           </m:r>
-                        </m:sup>
-                      </m:sSubSup>
+                        </m:sub>
+                      </m:sSub>
+                      <m:r>
+                        <a:rPr lang="en-US" sz="2800" b="1" i="1" dirty="0">
+                          <a:solidFill>
+                            <a:schemeClr val="tx1"/>
+                          </a:solidFill>
+                          <a:latin typeface="Cambria Math" panose="02040503050406030204" pitchFamily="18" charset="0"/>
+                          <a:cs typeface="Times New Roman" panose="02020603050405020304" pitchFamily="18" charset="0"/>
+                        </a:rPr>
+                        <m:t>(</m:t>
+                      </m:r>
+                      <m:r>
+                        <a:rPr lang="en-US" sz="2800" b="1" i="1" dirty="0" smtClean="0">
+                          <a:solidFill>
+                            <a:schemeClr val="tx1"/>
+                          </a:solidFill>
+                          <a:latin typeface="Cambria Math" panose="02040503050406030204" pitchFamily="18" charset="0"/>
+                          <a:cs typeface="Times New Roman" panose="02020603050405020304" pitchFamily="18" charset="0"/>
+                        </a:rPr>
+                        <m:t>𝒌</m:t>
+                      </m:r>
+                      <m:r>
+                        <a:rPr lang="en-US" sz="2800" b="1" i="1" dirty="0">
+                          <a:solidFill>
+                            <a:schemeClr val="tx1"/>
+                          </a:solidFill>
+                          <a:latin typeface="Cambria Math" panose="02040503050406030204" pitchFamily="18" charset="0"/>
+                          <a:cs typeface="Times New Roman" panose="02020603050405020304" pitchFamily="18" charset="0"/>
+                        </a:rPr>
+                        <m:t>)</m:t>
+                      </m:r>
                     </m:oMath>
                   </m:oMathPara>
                 </a14:m>
-                <a:endParaRPr lang="en-US" sz="2790" b="1" dirty="0">
+                <a:endParaRPr lang="en-US" sz="2800" b="1" i="1" dirty="0">
                   <a:solidFill>
-                    <a:schemeClr val="tx1">
-                      <a:lumMod val="95000"/>
-                      <a:lumOff val="5000"/>
-                    </a:schemeClr>
+                    <a:schemeClr val="tx1"/>
                   </a:solidFill>
-                  <a:latin typeface="Times New Roman" panose="02020603050405020304" pitchFamily="18" charset="0"/>
+                  <a:latin typeface="Cambria Math" panose="02040503050406030204" pitchFamily="18" charset="0"/>
                   <a:cs typeface="Times New Roman" panose="02020603050405020304" pitchFamily="18" charset="0"/>
                 </a:endParaRPr>
               </a:p>
@@ -6935,8 +7012,8 @@
             </p:nvSpPr>
             <p:spPr>
               <a:xfrm>
-                <a:off x="13196156" y="1802575"/>
-                <a:ext cx="679512" cy="518714"/>
+                <a:off x="13196155" y="1802575"/>
+                <a:ext cx="1137309" cy="518714"/>
               </a:xfrm>
               <a:prstGeom prst="roundRect">
                 <a:avLst>
@@ -6989,7 +7066,7 @@
         </p:nvSpPr>
         <p:spPr>
           <a:xfrm>
-            <a:off x="13321533" y="2435506"/>
+            <a:off x="13575533" y="2435506"/>
             <a:ext cx="421910" cy="200055"/>
           </a:xfrm>
           <a:prstGeom prst="rect">
@@ -7026,8 +7103,8 @@
             </p:nvSpPr>
             <p:spPr>
               <a:xfrm>
-                <a:off x="13196156" y="2724449"/>
-                <a:ext cx="679512" cy="518714"/>
+                <a:off x="13196155" y="2724449"/>
+                <a:ext cx="1137308" cy="518714"/>
               </a:xfrm>
               <a:prstGeom prst="roundRect">
                 <a:avLst>
@@ -7070,85 +7147,89 @@
               <a:bodyPr rtlCol="0" anchor="ctr"/>
               <a:lstStyle/>
               <a:p>
-                <a:pPr algn="ctr"/>
+                <a:pPr/>
                 <a14:m>
                   <m:oMathPara xmlns:m="http://schemas.openxmlformats.org/officeDocument/2006/math">
                     <m:oMathParaPr>
                       <m:jc m:val="centerGroup"/>
                     </m:oMathParaPr>
                     <m:oMath xmlns:m="http://schemas.openxmlformats.org/officeDocument/2006/math">
-                      <m:sSubSup>
-                        <m:sSubSupPr>
+                      <m:sSub>
+                        <m:sSubPr>
                           <m:ctrlPr>
-                            <a:rPr lang="en-US" sz="2790" b="1" i="1">
+                            <a:rPr lang="en-US" sz="2800" b="1" i="1" dirty="0" smtClean="0">
                               <a:solidFill>
-                                <a:schemeClr val="tx1">
-                                  <a:lumMod val="95000"/>
-                                  <a:lumOff val="5000"/>
-                                </a:schemeClr>
+                                <a:schemeClr val="tx1"/>
                               </a:solidFill>
                               <a:latin typeface="Cambria Math" panose="02040503050406030204" pitchFamily="18" charset="0"/>
                               <a:cs typeface="Times New Roman" panose="02020603050405020304" pitchFamily="18" charset="0"/>
                             </a:rPr>
                           </m:ctrlPr>
-                        </m:sSubSupPr>
+                        </m:sSubPr>
                         <m:e>
                           <m:r>
-                            <a:rPr lang="en-US" sz="2790" b="1" i="1">
+                            <a:rPr lang="en-US" sz="2800" b="1" i="1" dirty="0">
                               <a:solidFill>
-                                <a:schemeClr val="tx1">
-                                  <a:lumMod val="95000"/>
-                                  <a:lumOff val="5000"/>
-                                </a:schemeClr>
+                                <a:schemeClr val="tx1"/>
                               </a:solidFill>
                               <a:latin typeface="Cambria Math" panose="02040503050406030204" pitchFamily="18" charset="0"/>
+                              <a:ea typeface="Cambria Math" panose="02040503050406030204" pitchFamily="18" charset="0"/>
                               <a:cs typeface="Times New Roman" panose="02020603050405020304" pitchFamily="18" charset="0"/>
                             </a:rPr>
-                            <m:t>𝑹</m:t>
+                            <m:t>𝚪</m:t>
                           </m:r>
                         </m:e>
                         <m:sub>
                           <m:r>
-                            <a:rPr lang="en-US" sz="2790" b="1" i="1">
+                            <a:rPr lang="en-US" sz="2800" b="1" i="1" dirty="0">
                               <a:solidFill>
-                                <a:schemeClr val="tx1">
-                                  <a:lumMod val="95000"/>
-                                  <a:lumOff val="5000"/>
-                                </a:schemeClr>
-                              </a:solidFill>
-                              <a:latin typeface="Cambria Math" panose="02040503050406030204" pitchFamily="18" charset="0"/>
-                              <a:cs typeface="Times New Roman" panose="02020603050405020304" pitchFamily="18" charset="0"/>
-                            </a:rPr>
-                            <m:t>𝑵</m:t>
-                          </m:r>
-                        </m:sub>
-                        <m:sup>
-                          <m:r>
-                            <a:rPr lang="en-US" sz="2790" b="1" i="1">
-                              <a:solidFill>
-                                <a:schemeClr val="tx1">
-                                  <a:lumMod val="95000"/>
-                                  <a:lumOff val="5000"/>
-                                </a:schemeClr>
+                                <a:schemeClr val="tx1"/>
                               </a:solidFill>
                               <a:latin typeface="Cambria Math" panose="02040503050406030204" pitchFamily="18" charset="0"/>
                               <a:cs typeface="Times New Roman" panose="02020603050405020304" pitchFamily="18" charset="0"/>
                             </a:rPr>
                             <m:t>𝟏</m:t>
                           </m:r>
-                        </m:sup>
-                      </m:sSubSup>
+                        </m:sub>
+                      </m:sSub>
+                      <m:r>
+                        <a:rPr lang="en-US" sz="2800" b="1" i="1" dirty="0">
+                          <a:solidFill>
+                            <a:schemeClr val="tx1"/>
+                          </a:solidFill>
+                          <a:latin typeface="Cambria Math" panose="02040503050406030204" pitchFamily="18" charset="0"/>
+                          <a:cs typeface="Times New Roman" panose="02020603050405020304" pitchFamily="18" charset="0"/>
+                        </a:rPr>
+                        <m:t>(</m:t>
+                      </m:r>
+                      <m:r>
+                        <a:rPr lang="en-US" sz="2800" b="1" i="1" dirty="0" smtClean="0">
+                          <a:solidFill>
+                            <a:schemeClr val="tx1"/>
+                          </a:solidFill>
+                          <a:latin typeface="Cambria Math" panose="02040503050406030204" pitchFamily="18" charset="0"/>
+                          <a:cs typeface="Times New Roman" panose="02020603050405020304" pitchFamily="18" charset="0"/>
+                        </a:rPr>
+                        <m:t>𝟔𝟒</m:t>
+                      </m:r>
+                      <m:r>
+                        <a:rPr lang="en-US" sz="2800" b="1" i="1" dirty="0">
+                          <a:solidFill>
+                            <a:schemeClr val="tx1"/>
+                          </a:solidFill>
+                          <a:latin typeface="Cambria Math" panose="02040503050406030204" pitchFamily="18" charset="0"/>
+                          <a:cs typeface="Times New Roman" panose="02020603050405020304" pitchFamily="18" charset="0"/>
+                        </a:rPr>
+                        <m:t>)</m:t>
+                      </m:r>
                     </m:oMath>
                   </m:oMathPara>
                 </a14:m>
-                <a:endParaRPr lang="en-US" sz="2790" b="1" dirty="0">
+                <a:endParaRPr lang="en-US" sz="2800" b="1" i="1" dirty="0">
                   <a:solidFill>
-                    <a:schemeClr val="tx1">
-                      <a:lumMod val="95000"/>
-                      <a:lumOff val="5000"/>
-                    </a:schemeClr>
+                    <a:schemeClr val="tx1"/>
                   </a:solidFill>
-                  <a:latin typeface="Times New Roman" panose="02020603050405020304" pitchFamily="18" charset="0"/>
+                  <a:latin typeface="Cambria Math" panose="02040503050406030204" pitchFamily="18" charset="0"/>
                   <a:cs typeface="Times New Roman" panose="02020603050405020304" pitchFamily="18" charset="0"/>
                 </a:endParaRPr>
               </a:p>
@@ -7172,8 +7253,8 @@
             </p:nvSpPr>
             <p:spPr>
               <a:xfrm>
-                <a:off x="13196156" y="2724449"/>
-                <a:ext cx="679512" cy="518714"/>
+                <a:off x="13196155" y="2724449"/>
+                <a:ext cx="1137308" cy="518714"/>
               </a:xfrm>
               <a:prstGeom prst="roundRect">
                 <a:avLst>
@@ -7226,7 +7307,7 @@
         </p:nvSpPr>
         <p:spPr>
           <a:xfrm>
-            <a:off x="14008357" y="1138901"/>
+            <a:off x="14427457" y="1138901"/>
             <a:ext cx="500610" cy="98766"/>
           </a:xfrm>
           <a:prstGeom prst="rightArrow">
@@ -7283,7 +7364,7 @@
         </p:nvSpPr>
         <p:spPr>
           <a:xfrm>
-            <a:off x="14008357" y="1989701"/>
+            <a:off x="14427457" y="1989701"/>
             <a:ext cx="500610" cy="98766"/>
           </a:xfrm>
           <a:prstGeom prst="rightArrow">
@@ -7340,7 +7421,7 @@
         </p:nvSpPr>
         <p:spPr>
           <a:xfrm>
-            <a:off x="14008355" y="2922011"/>
+            <a:off x="14427455" y="2922011"/>
             <a:ext cx="500610" cy="98766"/>
           </a:xfrm>
           <a:prstGeom prst="rightArrow">
@@ -7397,7 +7478,7 @@
         </p:nvSpPr>
         <p:spPr>
           <a:xfrm>
-            <a:off x="14602957" y="922957"/>
+            <a:off x="15022057" y="922957"/>
             <a:ext cx="1064970" cy="518714"/>
           </a:xfrm>
           <a:prstGeom prst="roundRect">
@@ -7472,7 +7553,7 @@
         </p:nvSpPr>
         <p:spPr>
           <a:xfrm>
-            <a:off x="14602957" y="1787799"/>
+            <a:off x="15022057" y="1787799"/>
             <a:ext cx="1064970" cy="518714"/>
           </a:xfrm>
           <a:prstGeom prst="roundRect">
@@ -7547,7 +7628,7 @@
         </p:nvSpPr>
         <p:spPr>
           <a:xfrm>
-            <a:off x="14602957" y="2709673"/>
+            <a:off x="15022057" y="2709673"/>
             <a:ext cx="1064970" cy="518714"/>
           </a:xfrm>
           <a:prstGeom prst="roundRect">
@@ -7622,7 +7703,7 @@
         </p:nvSpPr>
         <p:spPr>
           <a:xfrm>
-            <a:off x="15800017" y="1138901"/>
+            <a:off x="16219117" y="1138901"/>
             <a:ext cx="500610" cy="98766"/>
           </a:xfrm>
           <a:prstGeom prst="rightArrow">
@@ -7679,7 +7760,7 @@
         </p:nvSpPr>
         <p:spPr>
           <a:xfrm>
-            <a:off x="15800017" y="2004451"/>
+            <a:off x="16219117" y="2004451"/>
             <a:ext cx="500610" cy="98766"/>
           </a:xfrm>
           <a:prstGeom prst="rightArrow">
@@ -7736,7 +7817,7 @@
         </p:nvSpPr>
         <p:spPr>
           <a:xfrm>
-            <a:off x="15800017" y="2927977"/>
+            <a:off x="16219117" y="2927977"/>
             <a:ext cx="500610" cy="98766"/>
           </a:xfrm>
           <a:prstGeom prst="rightArrow">
@@ -7793,7 +7874,7 @@
         </p:nvSpPr>
         <p:spPr>
           <a:xfrm>
-            <a:off x="14924487" y="2418378"/>
+            <a:off x="15343587" y="2418378"/>
             <a:ext cx="421910" cy="200055"/>
           </a:xfrm>
           <a:prstGeom prst="rect">
@@ -7830,7 +7911,7 @@
             </p:nvSpPr>
             <p:spPr>
               <a:xfrm>
-                <a:off x="16393114" y="922957"/>
+                <a:off x="16812214" y="922957"/>
                 <a:ext cx="1064968" cy="518714"/>
               </a:xfrm>
               <a:prstGeom prst="roundRect">
@@ -7976,7 +8057,7 @@
             </p:nvSpPr>
             <p:spPr>
               <a:xfrm>
-                <a:off x="16393114" y="922957"/>
+                <a:off x="16812214" y="922957"/>
                 <a:ext cx="1064968" cy="518714"/>
               </a:xfrm>
               <a:prstGeom prst="roundRect">
@@ -8032,7 +8113,7 @@
             </p:nvSpPr>
             <p:spPr>
               <a:xfrm>
-                <a:off x="16393112" y="1787799"/>
+                <a:off x="16812212" y="1787799"/>
                 <a:ext cx="1064968" cy="518714"/>
               </a:xfrm>
               <a:prstGeom prst="roundRect">
@@ -8217,7 +8298,7 @@
             </p:nvSpPr>
             <p:spPr>
               <a:xfrm>
-                <a:off x="16393112" y="1787799"/>
+                <a:off x="16812212" y="1787799"/>
                 <a:ext cx="1064968" cy="518714"/>
               </a:xfrm>
               <a:prstGeom prst="roundRect">
@@ -8273,7 +8354,7 @@
             </p:nvSpPr>
             <p:spPr>
               <a:xfrm>
-                <a:off x="16393114" y="2709673"/>
+                <a:off x="16812214" y="2709673"/>
                 <a:ext cx="1064968" cy="518714"/>
               </a:xfrm>
               <a:prstGeom prst="roundRect">
@@ -8419,7 +8500,7 @@
             </p:nvSpPr>
             <p:spPr>
               <a:xfrm>
-                <a:off x="16393114" y="2709673"/>
+                <a:off x="16812214" y="2709673"/>
                 <a:ext cx="1064968" cy="518714"/>
               </a:xfrm>
               <a:prstGeom prst="roundRect">
@@ -9270,7 +9351,7 @@
             <p:spPr>
               <a:xfrm>
                 <a:off x="5045702" y="1384895"/>
-                <a:ext cx="360996" cy="461665"/>
+                <a:ext cx="434734" cy="461665"/>
               </a:xfrm>
               <a:prstGeom prst="rect">
                 <a:avLst/>
@@ -9291,11 +9372,11 @@
                     </m:oMathParaPr>
                     <m:oMath xmlns:m="http://schemas.openxmlformats.org/officeDocument/2006/math">
                       <m:r>
-                        <a:rPr lang="en-US" sz="2400" b="1" i="1" dirty="0">
+                        <a:rPr lang="en-US" sz="2400" b="1" i="1" dirty="0" smtClean="0">
                           <a:latin typeface="Cambria Math" panose="02040503050406030204" pitchFamily="18" charset="0"/>
                           <a:cs typeface="Times New Roman" panose="02020603050405020304" pitchFamily="18" charset="0"/>
                         </a:rPr>
-                        <m:t>𝒊</m:t>
+                        <m:t>𝒌</m:t>
                       </m:r>
                     </m:oMath>
                   </m:oMathPara>
@@ -9323,7 +9404,7 @@
             <p:spPr>
               <a:xfrm>
                 <a:off x="5045702" y="1384895"/>
-                <a:ext cx="360996" cy="461665"/>
+                <a:ext cx="434734" cy="461665"/>
               </a:xfrm>
               <a:prstGeom prst="rect">
                 <a:avLst/>
@@ -9366,7 +9447,7 @@
             </p:nvSpPr>
             <p:spPr>
               <a:xfrm>
-                <a:off x="19936815" y="922957"/>
+                <a:off x="20355915" y="922957"/>
                 <a:ext cx="1064966" cy="518714"/>
               </a:xfrm>
               <a:prstGeom prst="roundRect">
@@ -9510,7 +9591,7 @@
             </p:nvSpPr>
             <p:spPr>
               <a:xfrm>
-                <a:off x="19936815" y="922957"/>
+                <a:off x="20355915" y="922957"/>
                 <a:ext cx="1064966" cy="518714"/>
               </a:xfrm>
               <a:prstGeom prst="roundRect">
@@ -9566,7 +9647,7 @@
             </p:nvSpPr>
             <p:spPr>
               <a:xfrm>
-                <a:off x="19936811" y="1822605"/>
+                <a:off x="20355911" y="1822605"/>
                 <a:ext cx="1064970" cy="518714"/>
               </a:xfrm>
               <a:prstGeom prst="roundRect">
@@ -9710,7 +9791,7 @@
             </p:nvSpPr>
             <p:spPr>
               <a:xfrm>
-                <a:off x="19936811" y="1822605"/>
+                <a:off x="20355911" y="1822605"/>
                 <a:ext cx="1064970" cy="518714"/>
               </a:xfrm>
               <a:prstGeom prst="roundRect">
@@ -9764,7 +9845,7 @@
         </p:nvSpPr>
         <p:spPr>
           <a:xfrm>
-            <a:off x="20251829" y="1544990"/>
+            <a:off x="20670929" y="1544990"/>
             <a:ext cx="421910" cy="200055"/>
           </a:xfrm>
           <a:prstGeom prst="rect">
@@ -9801,7 +9882,7 @@
             </p:nvSpPr>
             <p:spPr>
               <a:xfrm>
-                <a:off x="23475826" y="937733"/>
+                <a:off x="23894926" y="937733"/>
                 <a:ext cx="508168" cy="518714"/>
               </a:xfrm>
               <a:prstGeom prst="roundRect">
@@ -9948,7 +10029,7 @@
             </p:nvSpPr>
             <p:spPr>
               <a:xfrm>
-                <a:off x="23475826" y="937733"/>
+                <a:off x="23894926" y="937733"/>
                 <a:ext cx="508168" cy="518714"/>
               </a:xfrm>
               <a:prstGeom prst="roundRect">
@@ -10002,7 +10083,7 @@
         </p:nvSpPr>
         <p:spPr>
           <a:xfrm>
-            <a:off x="16714643" y="2418378"/>
+            <a:off x="17133743" y="2418378"/>
             <a:ext cx="421910" cy="200055"/>
           </a:xfrm>
           <a:prstGeom prst="rect">
@@ -10037,7 +10118,7 @@
         </p:nvSpPr>
         <p:spPr>
           <a:xfrm>
-            <a:off x="14924487" y="1515336"/>
+            <a:off x="15343587" y="1515336"/>
             <a:ext cx="421910" cy="200055"/>
           </a:xfrm>
           <a:prstGeom prst="rect">
@@ -10072,7 +10153,7 @@
         </p:nvSpPr>
         <p:spPr>
           <a:xfrm>
-            <a:off x="17550569" y="1147367"/>
+            <a:off x="17969669" y="1147367"/>
             <a:ext cx="500610" cy="98766"/>
           </a:xfrm>
           <a:prstGeom prst="rightArrow">
@@ -10129,7 +10210,7 @@
         </p:nvSpPr>
         <p:spPr>
           <a:xfrm>
-            <a:off x="18183271" y="922957"/>
+            <a:off x="18602371" y="922957"/>
             <a:ext cx="1064970" cy="518714"/>
           </a:xfrm>
           <a:prstGeom prst="roundRect">
@@ -10204,7 +10285,7 @@
         </p:nvSpPr>
         <p:spPr>
           <a:xfrm rot="18356451">
-            <a:off x="17434037" y="1659013"/>
+            <a:off x="17853137" y="1659013"/>
             <a:ext cx="805274" cy="102690"/>
           </a:xfrm>
           <a:prstGeom prst="rightArrow">
@@ -10261,7 +10342,7 @@
         </p:nvSpPr>
         <p:spPr>
           <a:xfrm rot="17331730">
-            <a:off x="17140261" y="2197611"/>
+            <a:off x="17559361" y="2197611"/>
             <a:ext cx="1502954" cy="102690"/>
           </a:xfrm>
           <a:prstGeom prst="rightArrow">
@@ -10318,7 +10399,7 @@
         </p:nvSpPr>
         <p:spPr>
           <a:xfrm>
-            <a:off x="16714643" y="1522326"/>
+            <a:off x="17133743" y="1522326"/>
             <a:ext cx="421910" cy="200055"/>
           </a:xfrm>
           <a:prstGeom prst="rect">
@@ -10353,7 +10434,7 @@
         </p:nvSpPr>
         <p:spPr>
           <a:xfrm>
-            <a:off x="13321149" y="1529714"/>
+            <a:off x="13575149" y="1529714"/>
             <a:ext cx="421910" cy="200055"/>
           </a:xfrm>
           <a:prstGeom prst="rect">
@@ -10388,7 +10469,7 @@
         </p:nvSpPr>
         <p:spPr>
           <a:xfrm>
-            <a:off x="19335201" y="1138901"/>
+            <a:off x="19754301" y="1138901"/>
             <a:ext cx="500610" cy="98766"/>
           </a:xfrm>
           <a:prstGeom prst="rightArrow">
@@ -10445,7 +10526,7 @@
         </p:nvSpPr>
         <p:spPr>
           <a:xfrm>
-            <a:off x="21105943" y="1138901"/>
+            <a:off x="21525043" y="1138901"/>
             <a:ext cx="500610" cy="98766"/>
           </a:xfrm>
           <a:prstGeom prst="rightArrow">
@@ -10502,7 +10583,7 @@
         </p:nvSpPr>
         <p:spPr>
           <a:xfrm rot="18356451">
-            <a:off x="20957877" y="1673763"/>
+            <a:off x="21376977" y="1673763"/>
             <a:ext cx="805274" cy="102690"/>
           </a:xfrm>
           <a:prstGeom prst="rightArrow">
@@ -10559,7 +10640,7 @@
         </p:nvSpPr>
         <p:spPr>
           <a:xfrm>
-            <a:off x="21702703" y="922957"/>
+            <a:off x="22121803" y="922957"/>
             <a:ext cx="1064970" cy="518714"/>
           </a:xfrm>
           <a:prstGeom prst="roundRect">
@@ -10634,7 +10715,7 @@
         </p:nvSpPr>
         <p:spPr>
           <a:xfrm>
-            <a:off x="22854633" y="1138901"/>
+            <a:off x="23273733" y="1138901"/>
             <a:ext cx="500610" cy="98766"/>
           </a:xfrm>
           <a:prstGeom prst="rightArrow">
@@ -10785,8 +10866,8 @@
             </p:nvSpPr>
             <p:spPr>
               <a:xfrm>
-                <a:off x="13196156" y="4052169"/>
-                <a:ext cx="679512" cy="518714"/>
+                <a:off x="13196155" y="4052169"/>
+                <a:ext cx="1137307" cy="518714"/>
               </a:xfrm>
               <a:prstGeom prst="roundRect">
                 <a:avLst>
@@ -10829,85 +10910,89 @@
               <a:bodyPr rtlCol="0" anchor="ctr"/>
               <a:lstStyle/>
               <a:p>
-                <a:pPr algn="ctr"/>
+                <a:pPr/>
                 <a14:m>
                   <m:oMathPara xmlns:m="http://schemas.openxmlformats.org/officeDocument/2006/math">
                     <m:oMathParaPr>
                       <m:jc m:val="centerGroup"/>
                     </m:oMathParaPr>
                     <m:oMath xmlns:m="http://schemas.openxmlformats.org/officeDocument/2006/math">
-                      <m:sSubSup>
-                        <m:sSubSupPr>
+                      <m:sSub>
+                        <m:sSubPr>
                           <m:ctrlPr>
-                            <a:rPr lang="en-US" sz="2790" b="1" i="1">
+                            <a:rPr lang="en-US" sz="2800" b="1" i="1" dirty="0">
                               <a:solidFill>
-                                <a:schemeClr val="tx1">
-                                  <a:lumMod val="95000"/>
-                                  <a:lumOff val="5000"/>
-                                </a:schemeClr>
+                                <a:schemeClr val="tx1"/>
                               </a:solidFill>
                               <a:latin typeface="Cambria Math" panose="02040503050406030204" pitchFamily="18" charset="0"/>
                               <a:cs typeface="Times New Roman" panose="02020603050405020304" pitchFamily="18" charset="0"/>
                             </a:rPr>
                           </m:ctrlPr>
-                        </m:sSubSupPr>
+                        </m:sSubPr>
                         <m:e>
                           <m:r>
-                            <a:rPr lang="en-US" sz="2790" b="1" i="1">
+                            <a:rPr lang="en-US" sz="2800" b="1" i="1" dirty="0">
                               <a:solidFill>
-                                <a:schemeClr val="tx1">
-                                  <a:lumMod val="95000"/>
-                                  <a:lumOff val="5000"/>
-                                </a:schemeClr>
+                                <a:schemeClr val="tx1"/>
                               </a:solidFill>
                               <a:latin typeface="Cambria Math" panose="02040503050406030204" pitchFamily="18" charset="0"/>
+                              <a:ea typeface="Cambria Math" panose="02040503050406030204" pitchFamily="18" charset="0"/>
                               <a:cs typeface="Times New Roman" panose="02020603050405020304" pitchFamily="18" charset="0"/>
                             </a:rPr>
-                            <m:t>𝑹</m:t>
+                            <m:t>𝚪</m:t>
                           </m:r>
                         </m:e>
                         <m:sub>
                           <m:r>
-                            <a:rPr lang="en-US" sz="2790" b="1" i="1">
+                            <a:rPr lang="en-US" sz="2800" b="1" i="1" dirty="0">
                               <a:solidFill>
-                                <a:schemeClr val="tx1">
-                                  <a:lumMod val="95000"/>
-                                  <a:lumOff val="5000"/>
-                                </a:schemeClr>
-                              </a:solidFill>
-                              <a:latin typeface="Cambria Math" panose="02040503050406030204" pitchFamily="18" charset="0"/>
-                              <a:cs typeface="Times New Roman" panose="02020603050405020304" pitchFamily="18" charset="0"/>
-                            </a:rPr>
-                            <m:t>𝟎</m:t>
-                          </m:r>
-                        </m:sub>
-                        <m:sup>
-                          <m:r>
-                            <a:rPr lang="en-US" sz="2790" b="1" i="1">
-                              <a:solidFill>
-                                <a:schemeClr val="tx1">
-                                  <a:lumMod val="95000"/>
-                                  <a:lumOff val="5000"/>
-                                </a:schemeClr>
+                                <a:schemeClr val="tx1"/>
                               </a:solidFill>
                               <a:latin typeface="Cambria Math" panose="02040503050406030204" pitchFamily="18" charset="0"/>
                               <a:cs typeface="Times New Roman" panose="02020603050405020304" pitchFamily="18" charset="0"/>
                             </a:rPr>
                             <m:t>𝟏</m:t>
                           </m:r>
-                        </m:sup>
-                      </m:sSubSup>
+                        </m:sub>
+                      </m:sSub>
+                      <m:r>
+                        <a:rPr lang="en-US" sz="2800" b="1" i="1" dirty="0">
+                          <a:solidFill>
+                            <a:schemeClr val="tx1"/>
+                          </a:solidFill>
+                          <a:latin typeface="Cambria Math" panose="02040503050406030204" pitchFamily="18" charset="0"/>
+                          <a:cs typeface="Times New Roman" panose="02020603050405020304" pitchFamily="18" charset="0"/>
+                        </a:rPr>
+                        <m:t>(</m:t>
+                      </m:r>
+                      <m:r>
+                        <a:rPr lang="en-US" sz="2800" b="1" i="1" dirty="0">
+                          <a:solidFill>
+                            <a:schemeClr val="tx1"/>
+                          </a:solidFill>
+                          <a:latin typeface="Cambria Math" panose="02040503050406030204" pitchFamily="18" charset="0"/>
+                          <a:cs typeface="Times New Roman" panose="02020603050405020304" pitchFamily="18" charset="0"/>
+                        </a:rPr>
+                        <m:t>𝟎</m:t>
+                      </m:r>
+                      <m:r>
+                        <a:rPr lang="en-US" sz="2800" b="1" i="1" dirty="0">
+                          <a:solidFill>
+                            <a:schemeClr val="tx1"/>
+                          </a:solidFill>
+                          <a:latin typeface="Cambria Math" panose="02040503050406030204" pitchFamily="18" charset="0"/>
+                          <a:cs typeface="Times New Roman" panose="02020603050405020304" pitchFamily="18" charset="0"/>
+                        </a:rPr>
+                        <m:t>)</m:t>
+                      </m:r>
                     </m:oMath>
                   </m:oMathPara>
                 </a14:m>
-                <a:endParaRPr lang="en-US" sz="2790" b="1" dirty="0">
+                <a:endParaRPr lang="en-US" sz="2800" b="1" i="1" dirty="0">
                   <a:solidFill>
-                    <a:schemeClr val="tx1">
-                      <a:lumMod val="95000"/>
-                      <a:lumOff val="5000"/>
-                    </a:schemeClr>
+                    <a:schemeClr val="tx1"/>
                   </a:solidFill>
-                  <a:latin typeface="Times New Roman" panose="02020603050405020304" pitchFamily="18" charset="0"/>
+                  <a:latin typeface="Cambria Math" panose="02040503050406030204" pitchFamily="18" charset="0"/>
                   <a:cs typeface="Times New Roman" panose="02020603050405020304" pitchFamily="18" charset="0"/>
                 </a:endParaRPr>
               </a:p>
@@ -10931,8 +11016,8 @@
             </p:nvSpPr>
             <p:spPr>
               <a:xfrm>
-                <a:off x="13196156" y="4052169"/>
-                <a:ext cx="679512" cy="518714"/>
+                <a:off x="13196155" y="4052169"/>
+                <a:ext cx="1137307" cy="518714"/>
               </a:xfrm>
               <a:prstGeom prst="roundRect">
                 <a:avLst>
@@ -10987,8 +11072,8 @@
             </p:nvSpPr>
             <p:spPr>
               <a:xfrm>
-                <a:off x="13196156" y="4917011"/>
-                <a:ext cx="679512" cy="518714"/>
+                <a:off x="13196155" y="4917011"/>
+                <a:ext cx="1137307" cy="518714"/>
               </a:xfrm>
               <a:prstGeom prst="roundRect">
                 <a:avLst>
@@ -11031,85 +11116,89 @@
               <a:bodyPr rtlCol="0" anchor="ctr"/>
               <a:lstStyle/>
               <a:p>
-                <a:pPr algn="ctr"/>
+                <a:pPr/>
                 <a14:m>
                   <m:oMathPara xmlns:m="http://schemas.openxmlformats.org/officeDocument/2006/math">
                     <m:oMathParaPr>
                       <m:jc m:val="centerGroup"/>
                     </m:oMathParaPr>
                     <m:oMath xmlns:m="http://schemas.openxmlformats.org/officeDocument/2006/math">
-                      <m:sSubSup>
-                        <m:sSubSupPr>
+                      <m:sSub>
+                        <m:sSubPr>
                           <m:ctrlPr>
-                            <a:rPr lang="en-US" sz="2790" b="1" i="1">
+                            <a:rPr lang="en-US" sz="2800" b="1" i="1" dirty="0">
                               <a:solidFill>
-                                <a:schemeClr val="tx1">
-                                  <a:lumMod val="95000"/>
-                                  <a:lumOff val="5000"/>
-                                </a:schemeClr>
+                                <a:schemeClr val="tx1"/>
                               </a:solidFill>
                               <a:latin typeface="Cambria Math" panose="02040503050406030204" pitchFamily="18" charset="0"/>
                               <a:cs typeface="Times New Roman" panose="02020603050405020304" pitchFamily="18" charset="0"/>
                             </a:rPr>
                           </m:ctrlPr>
-                        </m:sSubSupPr>
+                        </m:sSubPr>
                         <m:e>
                           <m:r>
-                            <a:rPr lang="en-US" sz="2790" b="1" i="1">
+                            <a:rPr lang="en-US" sz="2800" b="1" i="1" dirty="0">
                               <a:solidFill>
-                                <a:schemeClr val="tx1">
-                                  <a:lumMod val="95000"/>
-                                  <a:lumOff val="5000"/>
-                                </a:schemeClr>
+                                <a:schemeClr val="tx1"/>
                               </a:solidFill>
                               <a:latin typeface="Cambria Math" panose="02040503050406030204" pitchFamily="18" charset="0"/>
+                              <a:ea typeface="Cambria Math" panose="02040503050406030204" pitchFamily="18" charset="0"/>
                               <a:cs typeface="Times New Roman" panose="02020603050405020304" pitchFamily="18" charset="0"/>
                             </a:rPr>
-                            <m:t>𝑹</m:t>
+                            <m:t>𝚪</m:t>
                           </m:r>
                         </m:e>
                         <m:sub>
                           <m:r>
-                            <a:rPr lang="en-US" sz="2790" b="1" i="1">
+                            <a:rPr lang="en-US" sz="2800" b="1" i="1" dirty="0">
                               <a:solidFill>
-                                <a:schemeClr val="tx1">
-                                  <a:lumMod val="95000"/>
-                                  <a:lumOff val="5000"/>
-                                </a:schemeClr>
-                              </a:solidFill>
-                              <a:latin typeface="Cambria Math" panose="02040503050406030204" pitchFamily="18" charset="0"/>
-                              <a:cs typeface="Times New Roman" panose="02020603050405020304" pitchFamily="18" charset="0"/>
-                            </a:rPr>
-                            <m:t>𝒊</m:t>
-                          </m:r>
-                        </m:sub>
-                        <m:sup>
-                          <m:r>
-                            <a:rPr lang="en-US" sz="2790" b="1" i="1">
-                              <a:solidFill>
-                                <a:schemeClr val="tx1">
-                                  <a:lumMod val="95000"/>
-                                  <a:lumOff val="5000"/>
-                                </a:schemeClr>
+                                <a:schemeClr val="tx1"/>
                               </a:solidFill>
                               <a:latin typeface="Cambria Math" panose="02040503050406030204" pitchFamily="18" charset="0"/>
                               <a:cs typeface="Times New Roman" panose="02020603050405020304" pitchFamily="18" charset="0"/>
                             </a:rPr>
                             <m:t>𝟏</m:t>
                           </m:r>
-                        </m:sup>
-                      </m:sSubSup>
+                        </m:sub>
+                      </m:sSub>
+                      <m:r>
+                        <a:rPr lang="en-US" sz="2800" b="1" i="1" dirty="0">
+                          <a:solidFill>
+                            <a:schemeClr val="tx1"/>
+                          </a:solidFill>
+                          <a:latin typeface="Cambria Math" panose="02040503050406030204" pitchFamily="18" charset="0"/>
+                          <a:cs typeface="Times New Roman" panose="02020603050405020304" pitchFamily="18" charset="0"/>
+                        </a:rPr>
+                        <m:t>(</m:t>
+                      </m:r>
+                      <m:r>
+                        <a:rPr lang="en-US" sz="2800" b="1" i="1" dirty="0">
+                          <a:solidFill>
+                            <a:schemeClr val="tx1"/>
+                          </a:solidFill>
+                          <a:latin typeface="Cambria Math" panose="02040503050406030204" pitchFamily="18" charset="0"/>
+                          <a:cs typeface="Times New Roman" panose="02020603050405020304" pitchFamily="18" charset="0"/>
+                        </a:rPr>
+                        <m:t>𝒌</m:t>
+                      </m:r>
+                      <m:r>
+                        <a:rPr lang="en-US" sz="2800" b="1" i="1" dirty="0">
+                          <a:solidFill>
+                            <a:schemeClr val="tx1"/>
+                          </a:solidFill>
+                          <a:latin typeface="Cambria Math" panose="02040503050406030204" pitchFamily="18" charset="0"/>
+                          <a:cs typeface="Times New Roman" panose="02020603050405020304" pitchFamily="18" charset="0"/>
+                        </a:rPr>
+                        <m:t>)</m:t>
+                      </m:r>
                     </m:oMath>
                   </m:oMathPara>
                 </a14:m>
-                <a:endParaRPr lang="en-US" sz="2790" b="1" dirty="0">
+                <a:endParaRPr lang="en-US" sz="2800" b="1" i="1" dirty="0">
                   <a:solidFill>
-                    <a:schemeClr val="tx1">
-                      <a:lumMod val="95000"/>
-                      <a:lumOff val="5000"/>
-                    </a:schemeClr>
+                    <a:schemeClr val="tx1"/>
                   </a:solidFill>
-                  <a:latin typeface="Times New Roman" panose="02020603050405020304" pitchFamily="18" charset="0"/>
+                  <a:latin typeface="Cambria Math" panose="02040503050406030204" pitchFamily="18" charset="0"/>
                   <a:cs typeface="Times New Roman" panose="02020603050405020304" pitchFamily="18" charset="0"/>
                 </a:endParaRPr>
               </a:p>
@@ -11133,8 +11222,8 @@
             </p:nvSpPr>
             <p:spPr>
               <a:xfrm>
-                <a:off x="13196156" y="4917011"/>
-                <a:ext cx="679512" cy="518714"/>
+                <a:off x="13196155" y="4917011"/>
+                <a:ext cx="1137307" cy="518714"/>
               </a:xfrm>
               <a:prstGeom prst="roundRect">
                 <a:avLst>
@@ -11187,7 +11276,7 @@
         </p:nvSpPr>
         <p:spPr>
           <a:xfrm>
-            <a:off x="13321149" y="5589438"/>
+            <a:off x="13575149" y="5589438"/>
             <a:ext cx="421910" cy="200055"/>
           </a:xfrm>
           <a:prstGeom prst="rect">
@@ -11224,8 +11313,8 @@
             </p:nvSpPr>
             <p:spPr>
               <a:xfrm>
-                <a:off x="13196156" y="5838885"/>
-                <a:ext cx="679512" cy="518714"/>
+                <a:off x="13196155" y="5838885"/>
+                <a:ext cx="1137307" cy="518714"/>
               </a:xfrm>
               <a:prstGeom prst="roundRect">
                 <a:avLst>
@@ -11268,85 +11357,89 @@
               <a:bodyPr rtlCol="0" anchor="ctr"/>
               <a:lstStyle/>
               <a:p>
-                <a:pPr algn="ctr"/>
+                <a:pPr/>
                 <a14:m>
                   <m:oMathPara xmlns:m="http://schemas.openxmlformats.org/officeDocument/2006/math">
                     <m:oMathParaPr>
                       <m:jc m:val="centerGroup"/>
                     </m:oMathParaPr>
                     <m:oMath xmlns:m="http://schemas.openxmlformats.org/officeDocument/2006/math">
-                      <m:sSubSup>
-                        <m:sSubSupPr>
+                      <m:sSub>
+                        <m:sSubPr>
                           <m:ctrlPr>
-                            <a:rPr lang="en-US" sz="2790" b="1" i="1">
+                            <a:rPr lang="en-US" sz="2800" b="1" i="1" dirty="0">
                               <a:solidFill>
-                                <a:schemeClr val="tx1">
-                                  <a:lumMod val="95000"/>
-                                  <a:lumOff val="5000"/>
-                                </a:schemeClr>
+                                <a:schemeClr val="tx1"/>
                               </a:solidFill>
                               <a:latin typeface="Cambria Math" panose="02040503050406030204" pitchFamily="18" charset="0"/>
                               <a:cs typeface="Times New Roman" panose="02020603050405020304" pitchFamily="18" charset="0"/>
                             </a:rPr>
                           </m:ctrlPr>
-                        </m:sSubSupPr>
+                        </m:sSubPr>
                         <m:e>
                           <m:r>
-                            <a:rPr lang="en-US" sz="2790" b="1" i="1">
+                            <a:rPr lang="en-US" sz="2800" b="1" i="1" dirty="0">
                               <a:solidFill>
-                                <a:schemeClr val="tx1">
-                                  <a:lumMod val="95000"/>
-                                  <a:lumOff val="5000"/>
-                                </a:schemeClr>
+                                <a:schemeClr val="tx1"/>
                               </a:solidFill>
                               <a:latin typeface="Cambria Math" panose="02040503050406030204" pitchFamily="18" charset="0"/>
+                              <a:ea typeface="Cambria Math" panose="02040503050406030204" pitchFamily="18" charset="0"/>
                               <a:cs typeface="Times New Roman" panose="02020603050405020304" pitchFamily="18" charset="0"/>
                             </a:rPr>
-                            <m:t>𝑹</m:t>
+                            <m:t>𝚪</m:t>
                           </m:r>
                         </m:e>
                         <m:sub>
                           <m:r>
-                            <a:rPr lang="en-US" sz="2790" b="1" i="1">
+                            <a:rPr lang="en-US" sz="2800" b="1" i="1" dirty="0">
                               <a:solidFill>
-                                <a:schemeClr val="tx1">
-                                  <a:lumMod val="95000"/>
-                                  <a:lumOff val="5000"/>
-                                </a:schemeClr>
-                              </a:solidFill>
-                              <a:latin typeface="Cambria Math" panose="02040503050406030204" pitchFamily="18" charset="0"/>
-                              <a:cs typeface="Times New Roman" panose="02020603050405020304" pitchFamily="18" charset="0"/>
-                            </a:rPr>
-                            <m:t>𝑵</m:t>
-                          </m:r>
-                        </m:sub>
-                        <m:sup>
-                          <m:r>
-                            <a:rPr lang="en-US" sz="2790" b="1" i="1">
-                              <a:solidFill>
-                                <a:schemeClr val="tx1">
-                                  <a:lumMod val="95000"/>
-                                  <a:lumOff val="5000"/>
-                                </a:schemeClr>
+                                <a:schemeClr val="tx1"/>
                               </a:solidFill>
                               <a:latin typeface="Cambria Math" panose="02040503050406030204" pitchFamily="18" charset="0"/>
                               <a:cs typeface="Times New Roman" panose="02020603050405020304" pitchFamily="18" charset="0"/>
                             </a:rPr>
                             <m:t>𝟏</m:t>
                           </m:r>
-                        </m:sup>
-                      </m:sSubSup>
+                        </m:sub>
+                      </m:sSub>
+                      <m:r>
+                        <a:rPr lang="en-US" sz="2800" b="1" i="1" dirty="0">
+                          <a:solidFill>
+                            <a:schemeClr val="tx1"/>
+                          </a:solidFill>
+                          <a:latin typeface="Cambria Math" panose="02040503050406030204" pitchFamily="18" charset="0"/>
+                          <a:cs typeface="Times New Roman" panose="02020603050405020304" pitchFamily="18" charset="0"/>
+                        </a:rPr>
+                        <m:t>(</m:t>
+                      </m:r>
+                      <m:r>
+                        <a:rPr lang="en-US" sz="2800" b="1" i="1" dirty="0">
+                          <a:solidFill>
+                            <a:schemeClr val="tx1"/>
+                          </a:solidFill>
+                          <a:latin typeface="Cambria Math" panose="02040503050406030204" pitchFamily="18" charset="0"/>
+                          <a:cs typeface="Times New Roman" panose="02020603050405020304" pitchFamily="18" charset="0"/>
+                        </a:rPr>
+                        <m:t>𝟔𝟒</m:t>
+                      </m:r>
+                      <m:r>
+                        <a:rPr lang="en-US" sz="2800" b="1" i="1" dirty="0">
+                          <a:solidFill>
+                            <a:schemeClr val="tx1"/>
+                          </a:solidFill>
+                          <a:latin typeface="Cambria Math" panose="02040503050406030204" pitchFamily="18" charset="0"/>
+                          <a:cs typeface="Times New Roman" panose="02020603050405020304" pitchFamily="18" charset="0"/>
+                        </a:rPr>
+                        <m:t>)</m:t>
+                      </m:r>
                     </m:oMath>
                   </m:oMathPara>
                 </a14:m>
-                <a:endParaRPr lang="en-US" sz="2790" b="1" dirty="0">
+                <a:endParaRPr lang="en-US" sz="2800" b="1" i="1" dirty="0">
                   <a:solidFill>
-                    <a:schemeClr val="tx1">
-                      <a:lumMod val="95000"/>
-                      <a:lumOff val="5000"/>
-                    </a:schemeClr>
+                    <a:schemeClr val="tx1"/>
                   </a:solidFill>
-                  <a:latin typeface="Times New Roman" panose="02020603050405020304" pitchFamily="18" charset="0"/>
+                  <a:latin typeface="Cambria Math" panose="02040503050406030204" pitchFamily="18" charset="0"/>
                   <a:cs typeface="Times New Roman" panose="02020603050405020304" pitchFamily="18" charset="0"/>
                 </a:endParaRPr>
               </a:p>
@@ -11370,8 +11463,8 @@
             </p:nvSpPr>
             <p:spPr>
               <a:xfrm>
-                <a:off x="13196156" y="5838885"/>
-                <a:ext cx="679512" cy="518714"/>
+                <a:off x="13196155" y="5838885"/>
+                <a:ext cx="1137307" cy="518714"/>
               </a:xfrm>
               <a:prstGeom prst="roundRect">
                 <a:avLst>
@@ -11424,7 +11517,7 @@
         </p:nvSpPr>
         <p:spPr>
           <a:xfrm rot="3460468">
-            <a:off x="13834714" y="4576251"/>
+            <a:off x="14279214" y="4576251"/>
             <a:ext cx="770740" cy="102690"/>
           </a:xfrm>
           <a:prstGeom prst="rightArrow">
@@ -11481,7 +11574,7 @@
         </p:nvSpPr>
         <p:spPr>
           <a:xfrm>
-            <a:off x="14008357" y="5104137"/>
+            <a:off x="14452857" y="5104137"/>
             <a:ext cx="500610" cy="98766"/>
           </a:xfrm>
           <a:prstGeom prst="rightArrow">
@@ -11538,7 +11631,7 @@
         </p:nvSpPr>
         <p:spPr>
           <a:xfrm rot="18016408">
-            <a:off x="13814479" y="5647363"/>
+            <a:off x="14258979" y="5647363"/>
             <a:ext cx="883050" cy="102690"/>
           </a:xfrm>
           <a:prstGeom prst="rightArrow">
@@ -11595,7 +11688,7 @@
         </p:nvSpPr>
         <p:spPr>
           <a:xfrm>
-            <a:off x="14602957" y="4902235"/>
+            <a:off x="15047457" y="4902235"/>
             <a:ext cx="1064970" cy="518714"/>
           </a:xfrm>
           <a:prstGeom prst="roundRect">
@@ -11670,7 +11763,7 @@
         </p:nvSpPr>
         <p:spPr>
           <a:xfrm>
-            <a:off x="15800017" y="5118887"/>
+            <a:off x="16244517" y="5118887"/>
             <a:ext cx="500610" cy="98766"/>
           </a:xfrm>
           <a:prstGeom prst="rightArrow">
@@ -11729,7 +11822,7 @@
             </p:nvSpPr>
             <p:spPr>
               <a:xfrm>
-                <a:off x="16393119" y="4902457"/>
+                <a:off x="16837619" y="4902457"/>
                 <a:ext cx="1064966" cy="518714"/>
               </a:xfrm>
               <a:prstGeom prst="roundRect">
@@ -11873,7 +11966,7 @@
             </p:nvSpPr>
             <p:spPr>
               <a:xfrm>
-                <a:off x="16393119" y="4902457"/>
+                <a:off x="16837619" y="4902457"/>
                 <a:ext cx="1064966" cy="518714"/>
               </a:xfrm>
               <a:prstGeom prst="roundRect">
@@ -11929,7 +12022,7 @@
             </p:nvSpPr>
             <p:spPr>
               <a:xfrm>
-                <a:off x="16393115" y="5802105"/>
+                <a:off x="16837615" y="5802105"/>
                 <a:ext cx="1064970" cy="518714"/>
               </a:xfrm>
               <a:prstGeom prst="roundRect">
@@ -12073,7 +12166,7 @@
             </p:nvSpPr>
             <p:spPr>
               <a:xfrm>
-                <a:off x="16393115" y="5802105"/>
+                <a:off x="16837615" y="5802105"/>
                 <a:ext cx="1064970" cy="518714"/>
               </a:xfrm>
               <a:prstGeom prst="roundRect">
@@ -12127,7 +12220,7 @@
         </p:nvSpPr>
         <p:spPr>
           <a:xfrm>
-            <a:off x="16708133" y="5524490"/>
+            <a:off x="17152633" y="5524490"/>
             <a:ext cx="421910" cy="200055"/>
           </a:xfrm>
           <a:prstGeom prst="rect">
@@ -12164,7 +12257,7 @@
             </p:nvSpPr>
             <p:spPr>
               <a:xfrm>
-                <a:off x="19932130" y="4917233"/>
+                <a:off x="20376630" y="4917233"/>
                 <a:ext cx="508168" cy="518714"/>
               </a:xfrm>
               <a:prstGeom prst="roundRect">
@@ -12311,7 +12404,7 @@
             </p:nvSpPr>
             <p:spPr>
               <a:xfrm>
-                <a:off x="19932130" y="4917233"/>
+                <a:off x="20376630" y="4917233"/>
                 <a:ext cx="508168" cy="518714"/>
               </a:xfrm>
               <a:prstGeom prst="roundRect">
@@ -12365,7 +12458,7 @@
         </p:nvSpPr>
         <p:spPr>
           <a:xfrm>
-            <a:off x="13321149" y="4644150"/>
+            <a:off x="13575149" y="4644150"/>
             <a:ext cx="421910" cy="200055"/>
           </a:xfrm>
           <a:prstGeom prst="rect">
@@ -12400,7 +12493,7 @@
         </p:nvSpPr>
         <p:spPr>
           <a:xfrm>
-            <a:off x="17562247" y="5118401"/>
+            <a:off x="18006747" y="5118401"/>
             <a:ext cx="500610" cy="98766"/>
           </a:xfrm>
           <a:prstGeom prst="rightArrow">
@@ -12457,7 +12550,7 @@
         </p:nvSpPr>
         <p:spPr>
           <a:xfrm rot="18356451">
-            <a:off x="17414181" y="5653263"/>
+            <a:off x="17858681" y="5653263"/>
             <a:ext cx="805274" cy="102690"/>
           </a:xfrm>
           <a:prstGeom prst="rightArrow">
@@ -12514,7 +12607,7 @@
         </p:nvSpPr>
         <p:spPr>
           <a:xfrm>
-            <a:off x="18159007" y="4902457"/>
+            <a:off x="18603507" y="4902457"/>
             <a:ext cx="1064970" cy="518714"/>
           </a:xfrm>
           <a:prstGeom prst="roundRect">
@@ -12589,7 +12682,7 @@
         </p:nvSpPr>
         <p:spPr>
           <a:xfrm>
-            <a:off x="19310937" y="5118401"/>
+            <a:off x="19755437" y="5118401"/>
             <a:ext cx="500610" cy="98766"/>
           </a:xfrm>
           <a:prstGeom prst="rightArrow">
@@ -13618,10 +13711,10 @@
                       <m:jc m:val="centerGroup"/>
                     </m:oMathParaPr>
                     <m:oMath xmlns:m="http://schemas.openxmlformats.org/officeDocument/2006/math">
-                      <m:sSub>
-                        <m:sSubPr>
+                      <m:sSup>
+                        <m:sSupPr>
                           <m:ctrlPr>
-                            <a:rPr lang="en-US" sz="2790" b="1" i="1" dirty="0">
+                            <a:rPr lang="en-US" sz="2790" b="1" i="1">
                               <a:solidFill>
                                 <a:schemeClr val="tx1">
                                   <a:lumMod val="95000"/>
@@ -13632,48 +13725,44 @@
                               <a:cs typeface="Times New Roman" panose="02020603050405020304" pitchFamily="18" charset="0"/>
                             </a:rPr>
                           </m:ctrlPr>
-                        </m:sSubPr>
+                        </m:sSupPr>
                         <m:e>
-                          <m:d>
-                            <m:dPr>
-                              <m:begChr m:val="{"/>
-                              <m:endChr m:val="}"/>
-                              <m:ctrlPr>
-                                <a:rPr lang="en-US" sz="2790" b="1" i="1" dirty="0">
-                                  <a:solidFill>
-                                    <a:schemeClr val="tx1">
-                                      <a:lumMod val="95000"/>
-                                      <a:lumOff val="5000"/>
-                                    </a:schemeClr>
-                                  </a:solidFill>
-                                  <a:latin typeface="Cambria Math" panose="02040503050406030204" pitchFamily="18" charset="0"/>
-                                  <a:cs typeface="Times New Roman" panose="02020603050405020304" pitchFamily="18" charset="0"/>
-                                </a:rPr>
-                              </m:ctrlPr>
-                            </m:dPr>
-                            <m:e>
-                              <m:r>
-                                <m:rPr>
-                                  <m:nor/>
-                                </m:rPr>
-                                <a:rPr lang="en-US" sz="2790" b="1" dirty="0">
-                                  <a:solidFill>
-                                    <a:schemeClr val="tx1">
-                                      <a:lumMod val="95000"/>
-                                      <a:lumOff val="5000"/>
-                                    </a:schemeClr>
-                                  </a:solidFill>
-                                  <a:latin typeface="Times New Roman" panose="02020603050405020304" pitchFamily="18" charset="0"/>
-                                  <a:cs typeface="Times New Roman" panose="02020603050405020304" pitchFamily="18" charset="0"/>
-                                </a:rPr>
-                                <m:t>APD</m:t>
-                              </m:r>
-                            </m:e>
-                          </m:d>
+                          <m:r>
+                            <m:rPr>
+                              <m:nor/>
+                            </m:rPr>
+                            <a:rPr lang="en-US" sz="2790" b="1">
+                              <a:solidFill>
+                                <a:schemeClr val="tx1">
+                                  <a:lumMod val="95000"/>
+                                  <a:lumOff val="5000"/>
+                                </a:schemeClr>
+                              </a:solidFill>
+                              <a:latin typeface="Cambria Math" panose="02040503050406030204" pitchFamily="18" charset="0"/>
+                              <a:cs typeface="Times New Roman" panose="02020603050405020304" pitchFamily="18" charset="0"/>
+                            </a:rPr>
+                            <m:t>  </m:t>
+                          </m:r>
+                          <m:r>
+                            <m:rPr>
+                              <m:nor/>
+                            </m:rPr>
+                            <a:rPr lang="en-US" sz="2790" b="1" dirty="0">
+                              <a:solidFill>
+                                <a:schemeClr val="tx1">
+                                  <a:lumMod val="95000"/>
+                                  <a:lumOff val="5000"/>
+                                </a:schemeClr>
+                              </a:solidFill>
+                              <a:latin typeface="Times New Roman" panose="02020603050405020304" pitchFamily="18" charset="0"/>
+                              <a:cs typeface="Times New Roman" panose="02020603050405020304" pitchFamily="18" charset="0"/>
+                            </a:rPr>
+                            <m:t>APD</m:t>
+                          </m:r>
                         </m:e>
-                        <m:sub>
+                        <m:sup>
                           <m:r>
-                            <a:rPr lang="en-US" sz="2790" b="1" i="1" dirty="0">
+                            <a:rPr lang="en-US" sz="2790" b="1" i="1">
                               <a:solidFill>
                                 <a:schemeClr val="tx1">
                                   <a:lumMod val="95000"/>
@@ -13686,7 +13775,7 @@
                             <m:t>𝒎</m:t>
                           </m:r>
                           <m:r>
-                            <a:rPr lang="en-US" sz="2790" b="1" i="1" dirty="0">
+                            <a:rPr lang="en-US" sz="2790" b="1" i="1">
                               <a:solidFill>
                                 <a:schemeClr val="tx1">
                                   <a:lumMod val="95000"/>
@@ -13699,7 +13788,7 @@
                             <m:t>,</m:t>
                           </m:r>
                           <m:r>
-                            <a:rPr lang="en-US" sz="2790" b="1" i="1" dirty="0">
+                            <a:rPr lang="en-US" sz="2790" b="1" i="1">
                               <a:solidFill>
                                 <a:schemeClr val="tx1">
                                   <a:lumMod val="95000"/>
@@ -13712,12 +13801,21 @@
                             </a:rPr>
                             <m:t>𝝉</m:t>
                           </m:r>
-                        </m:sub>
-                      </m:sSub>
+                        </m:sup>
+                      </m:sSup>
                     </m:oMath>
                   </m:oMathPara>
                 </a14:m>
-                <a:endParaRPr/>
+                <a:endParaRPr lang="en-US" sz="2790" b="1" dirty="0">
+                  <a:solidFill>
+                    <a:schemeClr val="tx1">
+                      <a:lumMod val="95000"/>
+                      <a:lumOff val="5000"/>
+                    </a:schemeClr>
+                  </a:solidFill>
+                  <a:latin typeface="Times New Roman" panose="02020603050405020304" pitchFamily="18" charset="0"/>
+                  <a:cs typeface="Times New Roman" panose="02020603050405020304" pitchFamily="18" charset="0"/>
+                </a:endParaRPr>
               </a:p>
             </p:txBody>
           </p:sp>
@@ -15053,13 +15151,13 @@
           <p:nvPr>
             <p:extLst>
               <p:ext uri="{D42A27DB-BD31-4B8C-83A1-F6EECF244321}">
-                <p14:modId xmlns:p14="http://schemas.microsoft.com/office/powerpoint/2010/main" val="1965456062"/>
+                <p14:modId xmlns:p14="http://schemas.microsoft.com/office/powerpoint/2010/main" val="484828101"/>
               </p:ext>
             </p:extLst>
           </p:nvPr>
         </p:nvGraphicFramePr>
         <p:xfrm>
-          <a:off x="14319752" y="8838814"/>
+          <a:off x="14395952" y="8838814"/>
           <a:ext cx="4565580" cy="330148"/>
         </p:xfrm>
         <a:graphic>
@@ -15982,7 +16080,7 @@
         </p:nvSpPr>
         <p:spPr>
           <a:xfrm>
-            <a:off x="18917273" y="8915921"/>
+            <a:off x="18993473" y="8915921"/>
             <a:ext cx="421910" cy="200055"/>
           </a:xfrm>
           <a:prstGeom prst="rect">
@@ -16019,8 +16117,8 @@
             </p:nvSpPr>
             <p:spPr>
               <a:xfrm>
-                <a:off x="13138020" y="8719489"/>
-                <a:ext cx="480108" cy="518714"/>
+                <a:off x="13107064" y="8719489"/>
+                <a:ext cx="837536" cy="518714"/>
               </a:xfrm>
               <a:prstGeom prst="roundRect">
                 <a:avLst>
@@ -16063,35 +16161,19 @@
               <a:bodyPr rtlCol="0" anchor="ctr"/>
               <a:lstStyle/>
               <a:p>
-                <a:pPr algn="ctr"/>
+                <a:pPr/>
                 <a14:m>
                   <m:oMathPara xmlns:m="http://schemas.openxmlformats.org/officeDocument/2006/math">
                     <m:oMathParaPr>
                       <m:jc m:val="centerGroup"/>
                     </m:oMathParaPr>
                     <m:oMath xmlns:m="http://schemas.openxmlformats.org/officeDocument/2006/math">
-                      <m:r>
-                        <a:rPr lang="en-US" sz="2790" b="1" i="1">
-                          <a:solidFill>
-                            <a:schemeClr val="tx1">
-                              <a:lumMod val="95000"/>
-                              <a:lumOff val="5000"/>
-                            </a:schemeClr>
-                          </a:solidFill>
-                          <a:latin typeface="Cambria Math" panose="02040503050406030204" pitchFamily="18" charset="0"/>
-                          <a:cs typeface="Times New Roman" panose="02020603050405020304" pitchFamily="18" charset="0"/>
-                        </a:rPr>
-                        <m:t> </m:t>
-                      </m:r>
                       <m:sSub>
                         <m:sSubPr>
                           <m:ctrlPr>
-                            <a:rPr lang="en-US" sz="2790" b="1" i="1">
+                            <a:rPr lang="en-US" sz="2400" b="1" i="1" dirty="0" smtClean="0">
                               <a:solidFill>
-                                <a:schemeClr val="tx1">
-                                  <a:lumMod val="95000"/>
-                                  <a:lumOff val="5000"/>
-                                </a:schemeClr>
+                                <a:schemeClr val="tx1"/>
                               </a:solidFill>
                               <a:latin typeface="Cambria Math" panose="02040503050406030204" pitchFamily="18" charset="0"/>
                               <a:cs typeface="Times New Roman" panose="02020603050405020304" pitchFamily="18" charset="0"/>
@@ -16100,46 +16182,68 @@
                         </m:sSubPr>
                         <m:e>
                           <m:r>
-                            <a:rPr lang="en-US" sz="2790" b="1" i="1">
+                            <a:rPr lang="en-US" sz="2400" b="1" i="1" dirty="0">
                               <a:solidFill>
-                                <a:schemeClr val="tx1">
-                                  <a:lumMod val="95000"/>
-                                  <a:lumOff val="5000"/>
-                                </a:schemeClr>
+                                <a:schemeClr val="tx1"/>
+                              </a:solidFill>
+                              <a:latin typeface="Cambria Math" panose="02040503050406030204" pitchFamily="18" charset="0"/>
+                              <a:ea typeface="Cambria Math" panose="02040503050406030204" pitchFamily="18" charset="0"/>
+                              <a:cs typeface="Times New Roman" panose="02020603050405020304" pitchFamily="18" charset="0"/>
+                            </a:rPr>
+                            <m:t>𝚪</m:t>
+                          </m:r>
+                        </m:e>
+                        <m:sub>
+                          <m:r>
+                            <a:rPr lang="en-US" sz="2400" b="1" i="1" dirty="0">
+                              <a:solidFill>
+                                <a:schemeClr val="tx1"/>
                               </a:solidFill>
                               <a:latin typeface="Cambria Math" panose="02040503050406030204" pitchFamily="18" charset="0"/>
                               <a:cs typeface="Times New Roman" panose="02020603050405020304" pitchFamily="18" charset="0"/>
                             </a:rPr>
-                            <m:t>𝑹</m:t>
-                          </m:r>
-                        </m:e>
-                        <m:sub>
-                          <m:r>
-                            <a:rPr lang="en-US" sz="2790" b="1" i="1">
-                              <a:solidFill>
-                                <a:schemeClr val="tx1">
-                                  <a:lumMod val="95000"/>
-                                  <a:lumOff val="5000"/>
-                                </a:schemeClr>
-                              </a:solidFill>
-                              <a:latin typeface="Cambria Math" panose="02040503050406030204" pitchFamily="18" charset="0"/>
-                              <a:cs typeface="Times New Roman" panose="02020603050405020304" pitchFamily="18" charset="0"/>
-                            </a:rPr>
-                            <m:t>𝒊</m:t>
+                            <m:t>𝟏</m:t>
                           </m:r>
                         </m:sub>
                       </m:sSub>
+                      <m:r>
+                        <a:rPr lang="en-US" sz="2400" b="1" i="1" dirty="0">
+                          <a:solidFill>
+                            <a:schemeClr val="tx1"/>
+                          </a:solidFill>
+                          <a:latin typeface="Cambria Math" panose="02040503050406030204" pitchFamily="18" charset="0"/>
+                          <a:cs typeface="Times New Roman" panose="02020603050405020304" pitchFamily="18" charset="0"/>
+                        </a:rPr>
+                        <m:t>(</m:t>
+                      </m:r>
+                      <m:r>
+                        <a:rPr lang="en-US" sz="2400" b="1" i="1" dirty="0">
+                          <a:solidFill>
+                            <a:schemeClr val="tx1"/>
+                          </a:solidFill>
+                          <a:latin typeface="Cambria Math" panose="02040503050406030204" pitchFamily="18" charset="0"/>
+                          <a:cs typeface="Times New Roman" panose="02020603050405020304" pitchFamily="18" charset="0"/>
+                        </a:rPr>
+                        <m:t>𝒌</m:t>
+                      </m:r>
+                      <m:r>
+                        <a:rPr lang="en-US" sz="2400" b="1" i="1" dirty="0">
+                          <a:solidFill>
+                            <a:schemeClr val="tx1"/>
+                          </a:solidFill>
+                          <a:latin typeface="Cambria Math" panose="02040503050406030204" pitchFamily="18" charset="0"/>
+                          <a:cs typeface="Times New Roman" panose="02020603050405020304" pitchFamily="18" charset="0"/>
+                        </a:rPr>
+                        <m:t>)</m:t>
+                      </m:r>
                     </m:oMath>
                   </m:oMathPara>
                 </a14:m>
-                <a:endParaRPr lang="en-US" sz="2790" b="1" dirty="0">
+                <a:endParaRPr lang="en-US" sz="2400" b="1" i="1" dirty="0">
                   <a:solidFill>
-                    <a:schemeClr val="tx1">
-                      <a:lumMod val="95000"/>
-                      <a:lumOff val="5000"/>
-                    </a:schemeClr>
+                    <a:schemeClr val="tx1"/>
                   </a:solidFill>
-                  <a:latin typeface="Times New Roman" panose="02020603050405020304" pitchFamily="18" charset="0"/>
+                  <a:latin typeface="Cambria Math" panose="02040503050406030204" pitchFamily="18" charset="0"/>
                   <a:cs typeface="Times New Roman" panose="02020603050405020304" pitchFamily="18" charset="0"/>
                 </a:endParaRPr>
               </a:p>
@@ -16163,8 +16267,8 @@
             </p:nvSpPr>
             <p:spPr>
               <a:xfrm>
-                <a:off x="13138020" y="8719489"/>
-                <a:ext cx="480108" cy="518714"/>
+                <a:off x="13107064" y="8719489"/>
+                <a:ext cx="837536" cy="518714"/>
               </a:xfrm>
               <a:prstGeom prst="roundRect">
                 <a:avLst>
@@ -16218,13 +16322,13 @@
           <p:nvPr>
             <p:extLst>
               <p:ext uri="{D42A27DB-BD31-4B8C-83A1-F6EECF244321}">
-                <p14:modId xmlns:p14="http://schemas.microsoft.com/office/powerpoint/2010/main" val="1818014495"/>
+                <p14:modId xmlns:p14="http://schemas.microsoft.com/office/powerpoint/2010/main" val="4237552901"/>
               </p:ext>
             </p:extLst>
           </p:nvPr>
         </p:nvGraphicFramePr>
         <p:xfrm>
-          <a:off x="14321994" y="7686812"/>
+          <a:off x="14398194" y="7686812"/>
           <a:ext cx="1826232" cy="330148"/>
         </p:xfrm>
         <a:graphic>
@@ -16616,7 +16720,7 @@
         </p:nvCxnSpPr>
         <p:spPr>
           <a:xfrm>
-            <a:off x="14450556" y="8281665"/>
+            <a:off x="14526756" y="8281665"/>
             <a:ext cx="0" cy="304442"/>
           </a:xfrm>
           <a:prstGeom prst="straightConnector1">
@@ -16661,7 +16765,7 @@
         </p:nvCxnSpPr>
         <p:spPr>
           <a:xfrm>
-            <a:off x="15987256" y="8049509"/>
+            <a:off x="16063456" y="8049509"/>
             <a:ext cx="0" cy="767014"/>
           </a:xfrm>
           <a:prstGeom prst="straightConnector1">
@@ -16706,7 +16810,7 @@
         </p:nvCxnSpPr>
         <p:spPr>
           <a:xfrm>
-            <a:off x="15693336" y="8140899"/>
+            <a:off x="15769536" y="8140899"/>
             <a:ext cx="0" cy="517630"/>
           </a:xfrm>
           <a:prstGeom prst="straightConnector1">
@@ -16751,7 +16855,7 @@
         </p:nvCxnSpPr>
         <p:spPr>
           <a:xfrm>
-            <a:off x="15396156" y="8250440"/>
+            <a:off x="15472356" y="8250440"/>
             <a:ext cx="0" cy="356788"/>
           </a:xfrm>
           <a:prstGeom prst="straightConnector1">
@@ -16832,8 +16936,8 @@
         </p:nvSpPr>
         <p:spPr>
           <a:xfrm>
-            <a:off x="13746127" y="8934817"/>
-            <a:ext cx="500610" cy="98766"/>
+            <a:off x="14010005" y="8934817"/>
+            <a:ext cx="330712" cy="98766"/>
           </a:xfrm>
           <a:prstGeom prst="rightArrow">
             <a:avLst>
@@ -16972,13 +17076,13 @@
           <p:nvPr>
             <p:extLst>
               <p:ext uri="{D42A27DB-BD31-4B8C-83A1-F6EECF244321}">
-                <p14:modId xmlns:p14="http://schemas.microsoft.com/office/powerpoint/2010/main" val="3665308916"/>
+                <p14:modId xmlns:p14="http://schemas.microsoft.com/office/powerpoint/2010/main" val="3818962781"/>
               </p:ext>
             </p:extLst>
           </p:nvPr>
         </p:nvGraphicFramePr>
         <p:xfrm>
-          <a:off x="21017362" y="7537658"/>
+          <a:off x="21182462" y="7537658"/>
           <a:ext cx="1843320" cy="1854200"/>
         </p:xfrm>
         <a:graphic>
@@ -17186,7 +17290,7 @@
                     <a:bodyPr/>
                     <a:lstStyle/>
                     <a:p>
-                      <a:endParaRPr lang="en-US" sz="1600"/>
+                      <a:endParaRPr lang="en-US" sz="1600" dirty="0"/>
                     </a:p>
                   </a:txBody>
                   <a:tcPr>
@@ -18350,8 +18454,8 @@
             </p:nvSpPr>
             <p:spPr>
               <a:xfrm>
-                <a:off x="19603308" y="7325251"/>
-                <a:ext cx="599674" cy="518714"/>
+                <a:off x="19538211" y="7325251"/>
+                <a:ext cx="984989" cy="518714"/>
               </a:xfrm>
               <a:prstGeom prst="roundRect">
                 <a:avLst>
@@ -18394,7 +18498,7 @@
               <a:bodyPr rtlCol="0" anchor="ctr"/>
               <a:lstStyle/>
               <a:p>
-                <a:pPr algn="ctr"/>
+                <a:pPr/>
                 <a14:m>
                   <m:oMathPara xmlns:m="http://schemas.openxmlformats.org/officeDocument/2006/math">
                     <m:oMathParaPr>
@@ -18404,12 +18508,9 @@
                       <m:sSub>
                         <m:sSubPr>
                           <m:ctrlPr>
-                            <a:rPr lang="en-US" sz="2790" b="1" i="1">
+                            <a:rPr lang="en-US" sz="2400" b="1" i="1" dirty="0">
                               <a:solidFill>
-                                <a:schemeClr val="tx1">
-                                  <a:lumMod val="95000"/>
-                                  <a:lumOff val="5000"/>
-                                </a:schemeClr>
+                                <a:schemeClr val="tx1"/>
                               </a:solidFill>
                               <a:latin typeface="Cambria Math" panose="02040503050406030204" pitchFamily="18" charset="0"/>
                               <a:cs typeface="Times New Roman" panose="02020603050405020304" pitchFamily="18" charset="0"/>
@@ -18418,59 +18519,68 @@
                         </m:sSubPr>
                         <m:e>
                           <m:r>
-                            <a:rPr lang="en-US" sz="2790" b="1" i="1">
+                            <a:rPr lang="en-US" sz="2400" b="1" i="1" dirty="0">
                               <a:solidFill>
-                                <a:schemeClr val="tx1">
-                                  <a:lumMod val="95000"/>
-                                  <a:lumOff val="5000"/>
-                                </a:schemeClr>
+                                <a:schemeClr val="tx1"/>
+                              </a:solidFill>
+                              <a:latin typeface="Cambria Math" panose="02040503050406030204" pitchFamily="18" charset="0"/>
+                              <a:ea typeface="Cambria Math" panose="02040503050406030204" pitchFamily="18" charset="0"/>
+                              <a:cs typeface="Times New Roman" panose="02020603050405020304" pitchFamily="18" charset="0"/>
+                            </a:rPr>
+                            <m:t>𝚪</m:t>
+                          </m:r>
+                        </m:e>
+                        <m:sub>
+                          <m:r>
+                            <a:rPr lang="en-US" sz="2400" b="1" i="1" dirty="0">
+                              <a:solidFill>
+                                <a:schemeClr val="tx1"/>
                               </a:solidFill>
                               <a:latin typeface="Cambria Math" panose="02040503050406030204" pitchFamily="18" charset="0"/>
                               <a:cs typeface="Times New Roman" panose="02020603050405020304" pitchFamily="18" charset="0"/>
                             </a:rPr>
-                            <m:t> </m:t>
-                          </m:r>
-                          <m:r>
-                            <a:rPr lang="en-US" sz="2790" b="1" i="1">
-                              <a:solidFill>
-                                <a:schemeClr val="tx1">
-                                  <a:lumMod val="95000"/>
-                                  <a:lumOff val="5000"/>
-                                </a:schemeClr>
-                              </a:solidFill>
-                              <a:latin typeface="Cambria Math" panose="02040503050406030204" pitchFamily="18" charset="0"/>
-                              <a:cs typeface="Times New Roman" panose="02020603050405020304" pitchFamily="18" charset="0"/>
-                            </a:rPr>
-                            <m:t>𝑹</m:t>
-                          </m:r>
-                        </m:e>
-                        <m:sub>
-                          <m:r>
-                            <a:rPr lang="en-US" sz="2790" b="1" i="1">
-                              <a:solidFill>
-                                <a:schemeClr val="tx1">
-                                  <a:lumMod val="95000"/>
-                                  <a:lumOff val="5000"/>
-                                </a:schemeClr>
-                              </a:solidFill>
-                              <a:latin typeface="Cambria Math" panose="02040503050406030204" pitchFamily="18" charset="0"/>
-                              <a:cs typeface="Times New Roman" panose="02020603050405020304" pitchFamily="18" charset="0"/>
-                            </a:rPr>
-                            <m:t>𝟎</m:t>
+                            <m:t>𝟏</m:t>
                           </m:r>
                         </m:sub>
                       </m:sSub>
+                      <m:r>
+                        <a:rPr lang="en-US" sz="2400" b="1" i="1" dirty="0">
+                          <a:solidFill>
+                            <a:schemeClr val="tx1"/>
+                          </a:solidFill>
+                          <a:latin typeface="Cambria Math" panose="02040503050406030204" pitchFamily="18" charset="0"/>
+                          <a:cs typeface="Times New Roman" panose="02020603050405020304" pitchFamily="18" charset="0"/>
+                        </a:rPr>
+                        <m:t>(</m:t>
+                      </m:r>
+                      <m:r>
+                        <a:rPr lang="en-US" sz="2400" b="1" i="1" dirty="0">
+                          <a:solidFill>
+                            <a:schemeClr val="tx1"/>
+                          </a:solidFill>
+                          <a:latin typeface="Cambria Math" panose="02040503050406030204" pitchFamily="18" charset="0"/>
+                          <a:cs typeface="Times New Roman" panose="02020603050405020304" pitchFamily="18" charset="0"/>
+                        </a:rPr>
+                        <m:t>𝟎</m:t>
+                      </m:r>
+                      <m:r>
+                        <a:rPr lang="en-US" sz="2400" b="1" i="1" dirty="0">
+                          <a:solidFill>
+                            <a:schemeClr val="tx1"/>
+                          </a:solidFill>
+                          <a:latin typeface="Cambria Math" panose="02040503050406030204" pitchFamily="18" charset="0"/>
+                          <a:cs typeface="Times New Roman" panose="02020603050405020304" pitchFamily="18" charset="0"/>
+                        </a:rPr>
+                        <m:t>)</m:t>
+                      </m:r>
                     </m:oMath>
                   </m:oMathPara>
                 </a14:m>
-                <a:endParaRPr lang="en-US" sz="2790" b="1" dirty="0">
+                <a:endParaRPr lang="en-US" sz="2400" b="1" i="1" dirty="0">
                   <a:solidFill>
-                    <a:schemeClr val="tx1">
-                      <a:lumMod val="95000"/>
-                      <a:lumOff val="5000"/>
-                    </a:schemeClr>
+                    <a:schemeClr val="tx1"/>
                   </a:solidFill>
-                  <a:latin typeface="Times New Roman" panose="02020603050405020304" pitchFamily="18" charset="0"/>
+                  <a:latin typeface="Cambria Math" panose="02040503050406030204" pitchFamily="18" charset="0"/>
                   <a:cs typeface="Times New Roman" panose="02020603050405020304" pitchFamily="18" charset="0"/>
                 </a:endParaRPr>
               </a:p>
@@ -18494,8 +18604,8 @@
             </p:nvSpPr>
             <p:spPr>
               <a:xfrm>
-                <a:off x="19603308" y="7325251"/>
-                <a:ext cx="599674" cy="518714"/>
+                <a:off x="19538211" y="7325251"/>
+                <a:ext cx="984989" cy="518714"/>
               </a:xfrm>
               <a:prstGeom prst="roundRect">
                 <a:avLst>
@@ -18550,8 +18660,8 @@
             </p:nvSpPr>
             <p:spPr>
               <a:xfrm>
-                <a:off x="19603307" y="8190095"/>
-                <a:ext cx="628702" cy="518714"/>
+                <a:off x="19532600" y="8190095"/>
+                <a:ext cx="1032669" cy="518714"/>
               </a:xfrm>
               <a:prstGeom prst="roundRect">
                 <a:avLst>
@@ -18594,7 +18704,7 @@
               <a:bodyPr rtlCol="0" anchor="ctr"/>
               <a:lstStyle/>
               <a:p>
-                <a:pPr algn="ctr"/>
+                <a:pPr/>
                 <a14:m>
                   <m:oMathPara xmlns:m="http://schemas.openxmlformats.org/officeDocument/2006/math">
                     <m:oMathParaPr>
@@ -18604,12 +18714,9 @@
                       <m:sSub>
                         <m:sSubPr>
                           <m:ctrlPr>
-                            <a:rPr lang="en-US" sz="2790" b="1" i="1">
+                            <a:rPr lang="en-US" sz="2400" b="1" i="1" dirty="0">
                               <a:solidFill>
-                                <a:schemeClr val="tx1">
-                                  <a:lumMod val="95000"/>
-                                  <a:lumOff val="5000"/>
-                                </a:schemeClr>
+                                <a:schemeClr val="tx1"/>
                               </a:solidFill>
                               <a:latin typeface="Cambria Math" panose="02040503050406030204" pitchFamily="18" charset="0"/>
                               <a:cs typeface="Times New Roman" panose="02020603050405020304" pitchFamily="18" charset="0"/>
@@ -18618,59 +18725,68 @@
                         </m:sSubPr>
                         <m:e>
                           <m:r>
-                            <a:rPr lang="en-US" sz="2790" b="1" i="1">
+                            <a:rPr lang="en-US" sz="2400" b="1" i="1" dirty="0">
                               <a:solidFill>
-                                <a:schemeClr val="tx1">
-                                  <a:lumMod val="95000"/>
-                                  <a:lumOff val="5000"/>
-                                </a:schemeClr>
+                                <a:schemeClr val="tx1"/>
+                              </a:solidFill>
+                              <a:latin typeface="Cambria Math" panose="02040503050406030204" pitchFamily="18" charset="0"/>
+                              <a:ea typeface="Cambria Math" panose="02040503050406030204" pitchFamily="18" charset="0"/>
+                              <a:cs typeface="Times New Roman" panose="02020603050405020304" pitchFamily="18" charset="0"/>
+                            </a:rPr>
+                            <m:t>𝚪</m:t>
+                          </m:r>
+                        </m:e>
+                        <m:sub>
+                          <m:r>
+                            <a:rPr lang="en-US" sz="2400" b="1" i="1" dirty="0">
+                              <a:solidFill>
+                                <a:schemeClr val="tx1"/>
                               </a:solidFill>
                               <a:latin typeface="Cambria Math" panose="02040503050406030204" pitchFamily="18" charset="0"/>
                               <a:cs typeface="Times New Roman" panose="02020603050405020304" pitchFamily="18" charset="0"/>
                             </a:rPr>
-                            <m:t> </m:t>
-                          </m:r>
-                          <m:r>
-                            <a:rPr lang="en-US" sz="2790" b="1" i="1">
-                              <a:solidFill>
-                                <a:schemeClr val="tx1">
-                                  <a:lumMod val="95000"/>
-                                  <a:lumOff val="5000"/>
-                                </a:schemeClr>
-                              </a:solidFill>
-                              <a:latin typeface="Cambria Math" panose="02040503050406030204" pitchFamily="18" charset="0"/>
-                              <a:cs typeface="Times New Roman" panose="02020603050405020304" pitchFamily="18" charset="0"/>
-                            </a:rPr>
-                            <m:t>𝑹</m:t>
-                          </m:r>
-                        </m:e>
-                        <m:sub>
-                          <m:r>
-                            <a:rPr lang="en-US" sz="2790" b="1" i="1">
-                              <a:solidFill>
-                                <a:schemeClr val="tx1">
-                                  <a:lumMod val="95000"/>
-                                  <a:lumOff val="5000"/>
-                                </a:schemeClr>
-                              </a:solidFill>
-                              <a:latin typeface="Cambria Math" panose="02040503050406030204" pitchFamily="18" charset="0"/>
-                              <a:cs typeface="Times New Roman" panose="02020603050405020304" pitchFamily="18" charset="0"/>
-                            </a:rPr>
-                            <m:t>𝒊</m:t>
+                            <m:t>𝟏</m:t>
                           </m:r>
                         </m:sub>
                       </m:sSub>
+                      <m:r>
+                        <a:rPr lang="en-US" sz="2400" b="1" i="1" dirty="0">
+                          <a:solidFill>
+                            <a:schemeClr val="tx1"/>
+                          </a:solidFill>
+                          <a:latin typeface="Cambria Math" panose="02040503050406030204" pitchFamily="18" charset="0"/>
+                          <a:cs typeface="Times New Roman" panose="02020603050405020304" pitchFamily="18" charset="0"/>
+                        </a:rPr>
+                        <m:t>(</m:t>
+                      </m:r>
+                      <m:r>
+                        <a:rPr lang="en-US" sz="2400" b="1" i="1" dirty="0">
+                          <a:solidFill>
+                            <a:schemeClr val="tx1"/>
+                          </a:solidFill>
+                          <a:latin typeface="Cambria Math" panose="02040503050406030204" pitchFamily="18" charset="0"/>
+                          <a:cs typeface="Times New Roman" panose="02020603050405020304" pitchFamily="18" charset="0"/>
+                        </a:rPr>
+                        <m:t>𝒌</m:t>
+                      </m:r>
+                      <m:r>
+                        <a:rPr lang="en-US" sz="2400" b="1" i="1" dirty="0">
+                          <a:solidFill>
+                            <a:schemeClr val="tx1"/>
+                          </a:solidFill>
+                          <a:latin typeface="Cambria Math" panose="02040503050406030204" pitchFamily="18" charset="0"/>
+                          <a:cs typeface="Times New Roman" panose="02020603050405020304" pitchFamily="18" charset="0"/>
+                        </a:rPr>
+                        <m:t>)</m:t>
+                      </m:r>
                     </m:oMath>
                   </m:oMathPara>
                 </a14:m>
-                <a:endParaRPr lang="en-US" sz="2790" b="1" dirty="0">
+                <a:endParaRPr lang="en-US" sz="2400" b="1" i="1" dirty="0">
                   <a:solidFill>
-                    <a:schemeClr val="tx1">
-                      <a:lumMod val="95000"/>
-                      <a:lumOff val="5000"/>
-                    </a:schemeClr>
+                    <a:schemeClr val="tx1"/>
                   </a:solidFill>
-                  <a:latin typeface="Times New Roman" panose="02020603050405020304" pitchFamily="18" charset="0"/>
+                  <a:latin typeface="Cambria Math" panose="02040503050406030204" pitchFamily="18" charset="0"/>
                   <a:cs typeface="Times New Roman" panose="02020603050405020304" pitchFamily="18" charset="0"/>
                 </a:endParaRPr>
               </a:p>
@@ -18694,8 +18810,8 @@
             </p:nvSpPr>
             <p:spPr>
               <a:xfrm>
-                <a:off x="19603307" y="8190095"/>
-                <a:ext cx="628702" cy="518714"/>
+                <a:off x="19532600" y="8190095"/>
+                <a:ext cx="1032669" cy="518714"/>
               </a:xfrm>
               <a:prstGeom prst="roundRect">
                 <a:avLst>
@@ -18748,7 +18864,7 @@
         </p:nvSpPr>
         <p:spPr>
           <a:xfrm>
-            <a:off x="19728299" y="8862523"/>
+            <a:off x="19829899" y="8862523"/>
             <a:ext cx="421910" cy="200055"/>
           </a:xfrm>
           <a:prstGeom prst="rect">
@@ -18785,8 +18901,8 @@
             </p:nvSpPr>
             <p:spPr>
               <a:xfrm>
-                <a:off x="19603307" y="9111969"/>
-                <a:ext cx="628702" cy="518714"/>
+                <a:off x="19532600" y="9111969"/>
+                <a:ext cx="1032669" cy="518714"/>
               </a:xfrm>
               <a:prstGeom prst="roundRect">
                 <a:avLst>
@@ -18829,7 +18945,7 @@
               <a:bodyPr rtlCol="0" anchor="ctr"/>
               <a:lstStyle/>
               <a:p>
-                <a:pPr algn="ctr"/>
+                <a:pPr/>
                 <a14:m>
                   <m:oMathPara xmlns:m="http://schemas.openxmlformats.org/officeDocument/2006/math">
                     <m:oMathParaPr>
@@ -18839,12 +18955,9 @@
                       <m:sSub>
                         <m:sSubPr>
                           <m:ctrlPr>
-                            <a:rPr lang="en-US" sz="2790" b="1" i="1">
+                            <a:rPr lang="en-US" sz="2400" b="1" i="1" dirty="0">
                               <a:solidFill>
-                                <a:schemeClr val="tx1">
-                                  <a:lumMod val="95000"/>
-                                  <a:lumOff val="5000"/>
-                                </a:schemeClr>
+                                <a:schemeClr val="tx1"/>
                               </a:solidFill>
                               <a:latin typeface="Cambria Math" panose="02040503050406030204" pitchFamily="18" charset="0"/>
                               <a:cs typeface="Times New Roman" panose="02020603050405020304" pitchFamily="18" charset="0"/>
@@ -18853,59 +18966,68 @@
                         </m:sSubPr>
                         <m:e>
                           <m:r>
-                            <a:rPr lang="en-US" sz="2790" b="1" i="1">
+                            <a:rPr lang="en-US" sz="2400" b="1" i="1" dirty="0">
                               <a:solidFill>
-                                <a:schemeClr val="tx1">
-                                  <a:lumMod val="95000"/>
-                                  <a:lumOff val="5000"/>
-                                </a:schemeClr>
+                                <a:schemeClr val="tx1"/>
+                              </a:solidFill>
+                              <a:latin typeface="Cambria Math" panose="02040503050406030204" pitchFamily="18" charset="0"/>
+                              <a:ea typeface="Cambria Math" panose="02040503050406030204" pitchFamily="18" charset="0"/>
+                              <a:cs typeface="Times New Roman" panose="02020603050405020304" pitchFamily="18" charset="0"/>
+                            </a:rPr>
+                            <m:t>𝚪</m:t>
+                          </m:r>
+                        </m:e>
+                        <m:sub>
+                          <m:r>
+                            <a:rPr lang="en-US" sz="2400" b="1" i="1" dirty="0">
+                              <a:solidFill>
+                                <a:schemeClr val="tx1"/>
                               </a:solidFill>
                               <a:latin typeface="Cambria Math" panose="02040503050406030204" pitchFamily="18" charset="0"/>
                               <a:cs typeface="Times New Roman" panose="02020603050405020304" pitchFamily="18" charset="0"/>
                             </a:rPr>
-                            <m:t> </m:t>
-                          </m:r>
-                          <m:r>
-                            <a:rPr lang="en-US" sz="2790" b="1" i="1">
-                              <a:solidFill>
-                                <a:schemeClr val="tx1">
-                                  <a:lumMod val="95000"/>
-                                  <a:lumOff val="5000"/>
-                                </a:schemeClr>
-                              </a:solidFill>
-                              <a:latin typeface="Cambria Math" panose="02040503050406030204" pitchFamily="18" charset="0"/>
-                              <a:cs typeface="Times New Roman" panose="02020603050405020304" pitchFamily="18" charset="0"/>
-                            </a:rPr>
-                            <m:t>𝑹</m:t>
-                          </m:r>
-                        </m:e>
-                        <m:sub>
-                          <m:r>
-                            <a:rPr lang="en-US" sz="2790" b="1" i="1">
-                              <a:solidFill>
-                                <a:schemeClr val="tx1">
-                                  <a:lumMod val="95000"/>
-                                  <a:lumOff val="5000"/>
-                                </a:schemeClr>
-                              </a:solidFill>
-                              <a:latin typeface="Cambria Math" panose="02040503050406030204" pitchFamily="18" charset="0"/>
-                              <a:cs typeface="Times New Roman" panose="02020603050405020304" pitchFamily="18" charset="0"/>
-                            </a:rPr>
-                            <m:t>𝑵</m:t>
+                            <m:t>𝟏</m:t>
                           </m:r>
                         </m:sub>
                       </m:sSub>
+                      <m:r>
+                        <a:rPr lang="en-US" sz="2400" b="1" i="1" dirty="0">
+                          <a:solidFill>
+                            <a:schemeClr val="tx1"/>
+                          </a:solidFill>
+                          <a:latin typeface="Cambria Math" panose="02040503050406030204" pitchFamily="18" charset="0"/>
+                          <a:cs typeface="Times New Roman" panose="02020603050405020304" pitchFamily="18" charset="0"/>
+                        </a:rPr>
+                        <m:t>(</m:t>
+                      </m:r>
+                      <m:r>
+                        <a:rPr lang="en-US" sz="2400" b="1" i="1" dirty="0">
+                          <a:solidFill>
+                            <a:schemeClr val="tx1"/>
+                          </a:solidFill>
+                          <a:latin typeface="Cambria Math" panose="02040503050406030204" pitchFamily="18" charset="0"/>
+                          <a:cs typeface="Times New Roman" panose="02020603050405020304" pitchFamily="18" charset="0"/>
+                        </a:rPr>
+                        <m:t>𝟔𝟒</m:t>
+                      </m:r>
+                      <m:r>
+                        <a:rPr lang="en-US" sz="2400" b="1" i="1" dirty="0">
+                          <a:solidFill>
+                            <a:schemeClr val="tx1"/>
+                          </a:solidFill>
+                          <a:latin typeface="Cambria Math" panose="02040503050406030204" pitchFamily="18" charset="0"/>
+                          <a:cs typeface="Times New Roman" panose="02020603050405020304" pitchFamily="18" charset="0"/>
+                        </a:rPr>
+                        <m:t>)</m:t>
+                      </m:r>
                     </m:oMath>
                   </m:oMathPara>
                 </a14:m>
-                <a:endParaRPr lang="en-US" sz="2790" b="1" dirty="0">
+                <a:endParaRPr lang="en-US" sz="2400" b="1" i="1" dirty="0">
                   <a:solidFill>
-                    <a:schemeClr val="tx1">
-                      <a:lumMod val="95000"/>
-                      <a:lumOff val="5000"/>
-                    </a:schemeClr>
+                    <a:schemeClr val="tx1"/>
                   </a:solidFill>
-                  <a:latin typeface="Times New Roman" panose="02020603050405020304" pitchFamily="18" charset="0"/>
+                  <a:latin typeface="Cambria Math" panose="02040503050406030204" pitchFamily="18" charset="0"/>
                   <a:cs typeface="Times New Roman" panose="02020603050405020304" pitchFamily="18" charset="0"/>
                 </a:endParaRPr>
               </a:p>
@@ -18929,8 +19051,8 @@
             </p:nvSpPr>
             <p:spPr>
               <a:xfrm>
-                <a:off x="19603307" y="9111969"/>
-                <a:ext cx="628702" cy="518714"/>
+                <a:off x="19532600" y="9111969"/>
+                <a:ext cx="1032669" cy="518714"/>
               </a:xfrm>
               <a:prstGeom prst="roundRect">
                 <a:avLst>
@@ -18983,7 +19105,7 @@
         </p:nvSpPr>
         <p:spPr>
           <a:xfrm rot="3460468">
-            <a:off x="20154780" y="7849335"/>
+            <a:off x="20459580" y="7849335"/>
             <a:ext cx="770740" cy="102690"/>
           </a:xfrm>
           <a:prstGeom prst="rightArrow">
@@ -19040,7 +19162,7 @@
         </p:nvSpPr>
         <p:spPr>
           <a:xfrm>
-            <a:off x="20328421" y="8377219"/>
+            <a:off x="20633221" y="8377219"/>
             <a:ext cx="500610" cy="98766"/>
           </a:xfrm>
           <a:prstGeom prst="rightArrow">
@@ -19097,7 +19219,7 @@
         </p:nvSpPr>
         <p:spPr>
           <a:xfrm rot="18016408">
-            <a:off x="20134546" y="8920445"/>
+            <a:off x="20439346" y="8920445"/>
             <a:ext cx="883050" cy="102690"/>
           </a:xfrm>
           <a:prstGeom prst="rightArrow">
@@ -19154,7 +19276,7 @@
         </p:nvSpPr>
         <p:spPr>
           <a:xfrm>
-            <a:off x="19728299" y="7917235"/>
+            <a:off x="19829899" y="7917235"/>
             <a:ext cx="421910" cy="200055"/>
           </a:xfrm>
           <a:prstGeom prst="rect">
@@ -19190,7 +19312,7 @@
           <p:nvPr>
             <p:extLst>
               <p:ext uri="{D42A27DB-BD31-4B8C-83A1-F6EECF244321}">
-                <p14:modId xmlns:p14="http://schemas.microsoft.com/office/powerpoint/2010/main" val="1618263606"/>
+                <p14:modId xmlns:p14="http://schemas.microsoft.com/office/powerpoint/2010/main" val="2028769991"/>
               </p:ext>
             </p:extLst>
           </p:nvPr>
@@ -19290,7 +19412,7 @@
           <p:nvPr>
             <p:extLst>
               <p:ext uri="{D42A27DB-BD31-4B8C-83A1-F6EECF244321}">
-                <p14:modId xmlns:p14="http://schemas.microsoft.com/office/powerpoint/2010/main" val="3975113031"/>
+                <p14:modId xmlns:p14="http://schemas.microsoft.com/office/powerpoint/2010/main" val="1157661875"/>
               </p:ext>
             </p:extLst>
           </p:nvPr>
@@ -19389,7 +19511,7 @@
         </p:nvSpPr>
         <p:spPr>
           <a:xfrm>
-            <a:off x="22931921" y="8370869"/>
+            <a:off x="23071621" y="8370869"/>
             <a:ext cx="500610" cy="98766"/>
           </a:xfrm>
           <a:prstGeom prst="rightArrow">
@@ -19447,7 +19569,7 @@
           <p:nvPr>
             <p:extLst>
               <p:ext uri="{D42A27DB-BD31-4B8C-83A1-F6EECF244321}">
-                <p14:modId xmlns:p14="http://schemas.microsoft.com/office/powerpoint/2010/main" val="1736288081"/>
+                <p14:modId xmlns:p14="http://schemas.microsoft.com/office/powerpoint/2010/main" val="1249470004"/>
               </p:ext>
             </p:extLst>
           </p:nvPr>
@@ -19547,7 +19669,7 @@
           <p:nvPr>
             <p:extLst>
               <p:ext uri="{D42A27DB-BD31-4B8C-83A1-F6EECF244321}">
-                <p14:modId xmlns:p14="http://schemas.microsoft.com/office/powerpoint/2010/main" val="475402909"/>
+                <p14:modId xmlns:p14="http://schemas.microsoft.com/office/powerpoint/2010/main" val="536249051"/>
               </p:ext>
             </p:extLst>
           </p:nvPr>
@@ -19647,7 +19769,7 @@
           <p:nvPr>
             <p:extLst>
               <p:ext uri="{D42A27DB-BD31-4B8C-83A1-F6EECF244321}">
-                <p14:modId xmlns:p14="http://schemas.microsoft.com/office/powerpoint/2010/main" val="1028162338"/>
+                <p14:modId xmlns:p14="http://schemas.microsoft.com/office/powerpoint/2010/main" val="1439885295"/>
               </p:ext>
             </p:extLst>
           </p:nvPr>
@@ -19747,7 +19869,7 @@
           <p:nvPr>
             <p:extLst>
               <p:ext uri="{D42A27DB-BD31-4B8C-83A1-F6EECF244321}">
-                <p14:modId xmlns:p14="http://schemas.microsoft.com/office/powerpoint/2010/main" val="1744421932"/>
+                <p14:modId xmlns:p14="http://schemas.microsoft.com/office/powerpoint/2010/main" val="1089995057"/>
               </p:ext>
             </p:extLst>
           </p:nvPr>
@@ -19847,7 +19969,7 @@
           <p:nvPr>
             <p:extLst>
               <p:ext uri="{D42A27DB-BD31-4B8C-83A1-F6EECF244321}">
-                <p14:modId xmlns:p14="http://schemas.microsoft.com/office/powerpoint/2010/main" val="4129954059"/>
+                <p14:modId xmlns:p14="http://schemas.microsoft.com/office/powerpoint/2010/main" val="2174135288"/>
               </p:ext>
             </p:extLst>
           </p:nvPr>
@@ -19947,7 +20069,7 @@
           <p:nvPr>
             <p:extLst>
               <p:ext uri="{D42A27DB-BD31-4B8C-83A1-F6EECF244321}">
-                <p14:modId xmlns:p14="http://schemas.microsoft.com/office/powerpoint/2010/main" val="4207728615"/>
+                <p14:modId xmlns:p14="http://schemas.microsoft.com/office/powerpoint/2010/main" val="367279100"/>
               </p:ext>
             </p:extLst>
           </p:nvPr>
@@ -20194,7 +20316,7 @@
           <p:nvPr>
             <p:extLst>
               <p:ext uri="{D42A27DB-BD31-4B8C-83A1-F6EECF244321}">
-                <p14:modId xmlns:p14="http://schemas.microsoft.com/office/powerpoint/2010/main" val="1410280236"/>
+                <p14:modId xmlns:p14="http://schemas.microsoft.com/office/powerpoint/2010/main" val="1825078374"/>
               </p:ext>
             </p:extLst>
           </p:nvPr>
@@ -20842,8 +20964,8 @@
             </p:nvSpPr>
             <p:spPr>
               <a:xfrm>
-                <a:off x="5886754" y="1790930"/>
-                <a:ext cx="1707134" cy="400110"/>
+                <a:off x="5776776" y="1841730"/>
+                <a:ext cx="1912726" cy="400110"/>
               </a:xfrm>
               <a:prstGeom prst="rect">
                 <a:avLst/>
@@ -20851,7 +20973,7 @@
               <a:noFill/>
             </p:spPr>
             <p:txBody>
-              <a:bodyPr wrap="none" rtlCol="0">
+              <a:bodyPr wrap="square" rtlCol="0">
                 <a:spAutoFit/>
               </a:bodyPr>
               <a:lstStyle/>
@@ -20864,32 +20986,32 @@
                     </m:oMathParaPr>
                     <m:oMath xmlns:m="http://schemas.openxmlformats.org/officeDocument/2006/math">
                       <m:r>
-                        <a:rPr lang="en-US" sz="2000" b="1" i="1">
+                        <a:rPr lang="en-US" sz="2000" b="1" i="1" smtClean="0">
                           <a:latin typeface="Cambria Math" panose="02040503050406030204" pitchFamily="18" charset="0"/>
                           <a:cs typeface="Times New Roman" panose="02020603050405020304" pitchFamily="18" charset="0"/>
                         </a:rPr>
                         <m:t>𝒎</m:t>
                       </m:r>
                       <m:r>
-                        <a:rPr lang="en-US" sz="2000" b="1" i="1">
+                        <a:rPr lang="en-US" sz="2000" b="1" i="1" smtClean="0">
                           <a:latin typeface="Cambria Math" panose="02040503050406030204" pitchFamily="18" charset="0"/>
                           <a:cs typeface="Times New Roman" panose="02020603050405020304" pitchFamily="18" charset="0"/>
                         </a:rPr>
                         <m:t>=</m:t>
                       </m:r>
                       <m:r>
-                        <a:rPr lang="en-US" sz="2000" b="1" i="1">
+                        <a:rPr lang="en-US" sz="2000" b="1" i="1" smtClean="0">
                           <a:latin typeface="Cambria Math" panose="02040503050406030204" pitchFamily="18" charset="0"/>
                           <a:cs typeface="Times New Roman" panose="02020603050405020304" pitchFamily="18" charset="0"/>
                         </a:rPr>
                         <m:t>𝟑</m:t>
                       </m:r>
                       <m:r>
-                        <a:rPr lang="en-US" sz="2000" b="1" i="1">
+                        <a:rPr lang="en-US" sz="2000" b="1" i="1" smtClean="0">
                           <a:latin typeface="Cambria Math" panose="02040503050406030204" pitchFamily="18" charset="0"/>
                           <a:cs typeface="Times New Roman" panose="02020603050405020304" pitchFamily="18" charset="0"/>
                         </a:rPr>
-                        <m:t>  </m:t>
+                        <m:t>   </m:t>
                       </m:r>
                       <m:r>
                         <a:rPr lang="en-US" sz="2000" b="1" i="1">
@@ -20943,8 +21065,8 @@
             </p:nvSpPr>
             <p:spPr>
               <a:xfrm>
-                <a:off x="5886754" y="1790930"/>
-                <a:ext cx="1707134" cy="400110"/>
+                <a:off x="5776776" y="1841730"/>
+                <a:ext cx="1912726" cy="400110"/>
               </a:xfrm>
               <a:prstGeom prst="rect">
                 <a:avLst/>
@@ -21095,10 +21217,10 @@
                       <m:jc m:val="centerGroup"/>
                     </m:oMathParaPr>
                     <m:oMath xmlns:m="http://schemas.openxmlformats.org/officeDocument/2006/math">
-                      <m:sSub>
-                        <m:sSubPr>
+                      <m:sSup>
+                        <m:sSupPr>
                           <m:ctrlPr>
-                            <a:rPr lang="en-US" sz="2790" b="1" i="1" dirty="0">
+                            <a:rPr lang="en-US" sz="2790" b="1" i="1" smtClean="0">
                               <a:solidFill>
                                 <a:schemeClr val="tx1">
                                   <a:lumMod val="95000"/>
@@ -21109,48 +21231,44 @@
                               <a:cs typeface="Times New Roman" panose="02020603050405020304" pitchFamily="18" charset="0"/>
                             </a:rPr>
                           </m:ctrlPr>
-                        </m:sSubPr>
+                        </m:sSupPr>
                         <m:e>
-                          <m:d>
-                            <m:dPr>
-                              <m:begChr m:val="{"/>
-                              <m:endChr m:val="}"/>
-                              <m:ctrlPr>
-                                <a:rPr lang="en-US" sz="2790" b="1" i="1" dirty="0">
-                                  <a:solidFill>
-                                    <a:schemeClr val="tx1">
-                                      <a:lumMod val="95000"/>
-                                      <a:lumOff val="5000"/>
-                                    </a:schemeClr>
-                                  </a:solidFill>
-                                  <a:latin typeface="Cambria Math" panose="02040503050406030204" pitchFamily="18" charset="0"/>
-                                  <a:cs typeface="Times New Roman" panose="02020603050405020304" pitchFamily="18" charset="0"/>
-                                </a:rPr>
-                              </m:ctrlPr>
-                            </m:dPr>
-                            <m:e>
-                              <m:r>
-                                <m:rPr>
-                                  <m:nor/>
-                                </m:rPr>
-                                <a:rPr lang="en-US" sz="2790" b="1" dirty="0">
-                                  <a:solidFill>
-                                    <a:schemeClr val="tx1">
-                                      <a:lumMod val="95000"/>
-                                      <a:lumOff val="5000"/>
-                                    </a:schemeClr>
-                                  </a:solidFill>
-                                  <a:latin typeface="Times New Roman" panose="02020603050405020304" pitchFamily="18" charset="0"/>
-                                  <a:cs typeface="Times New Roman" panose="02020603050405020304" pitchFamily="18" charset="0"/>
-                                </a:rPr>
-                                <m:t>APD</m:t>
-                              </m:r>
-                            </m:e>
-                          </m:d>
+                          <m:r>
+                            <m:rPr>
+                              <m:nor/>
+                            </m:rPr>
+                            <a:rPr lang="en-US" sz="2790" b="1" i="0" smtClean="0">
+                              <a:solidFill>
+                                <a:schemeClr val="tx1">
+                                  <a:lumMod val="95000"/>
+                                  <a:lumOff val="5000"/>
+                                </a:schemeClr>
+                              </a:solidFill>
+                              <a:latin typeface="Cambria Math" panose="02040503050406030204" pitchFamily="18" charset="0"/>
+                              <a:cs typeface="Times New Roman" panose="02020603050405020304" pitchFamily="18" charset="0"/>
+                            </a:rPr>
+                            <m:t>  </m:t>
+                          </m:r>
+                          <m:r>
+                            <m:rPr>
+                              <m:nor/>
+                            </m:rPr>
+                            <a:rPr lang="en-US" sz="2790" b="1" dirty="0">
+                              <a:solidFill>
+                                <a:schemeClr val="tx1">
+                                  <a:lumMod val="95000"/>
+                                  <a:lumOff val="5000"/>
+                                </a:schemeClr>
+                              </a:solidFill>
+                              <a:latin typeface="Times New Roman" panose="02020603050405020304" pitchFamily="18" charset="0"/>
+                              <a:cs typeface="Times New Roman" panose="02020603050405020304" pitchFamily="18" charset="0"/>
+                            </a:rPr>
+                            <m:t>APD</m:t>
+                          </m:r>
                         </m:e>
-                        <m:sub>
+                        <m:sup>
                           <m:r>
-                            <a:rPr lang="en-US" sz="2790" b="1" i="1" dirty="0">
+                            <a:rPr lang="en-US" sz="2790" b="1" i="1" smtClean="0">
                               <a:solidFill>
                                 <a:schemeClr val="tx1">
                                   <a:lumMod val="95000"/>
@@ -21163,7 +21281,7 @@
                             <m:t>𝒎</m:t>
                           </m:r>
                           <m:r>
-                            <a:rPr lang="en-US" sz="2790" b="1" i="1" dirty="0">
+                            <a:rPr lang="en-US" sz="2790" b="1" i="1" smtClean="0">
                               <a:solidFill>
                                 <a:schemeClr val="tx1">
                                   <a:lumMod val="95000"/>
@@ -21176,7 +21294,7 @@
                             <m:t>,</m:t>
                           </m:r>
                           <m:r>
-                            <a:rPr lang="en-US" sz="2790" b="1" i="1" dirty="0">
+                            <a:rPr lang="en-US" sz="2790" b="1" i="1" smtClean="0">
                               <a:solidFill>
                                 <a:schemeClr val="tx1">
                                   <a:lumMod val="95000"/>
@@ -21189,12 +21307,21 @@
                             </a:rPr>
                             <m:t>𝝉</m:t>
                           </m:r>
-                        </m:sub>
-                      </m:sSub>
+                        </m:sup>
+                      </m:sSup>
                     </m:oMath>
                   </m:oMathPara>
                 </a14:m>
-                <a:endParaRPr/>
+                <a:endParaRPr lang="en-US" sz="2790" b="1" dirty="0">
+                  <a:solidFill>
+                    <a:schemeClr val="tx1">
+                      <a:lumMod val="95000"/>
+                      <a:lumOff val="5000"/>
+                    </a:schemeClr>
+                  </a:solidFill>
+                  <a:latin typeface="Times New Roman" panose="02020603050405020304" pitchFamily="18" charset="0"/>
+                  <a:cs typeface="Times New Roman" panose="02020603050405020304" pitchFamily="18" charset="0"/>
+                </a:endParaRPr>
               </a:p>
             </p:txBody>
           </p:sp>
@@ -21271,7 +21398,7 @@
           <p:nvPr>
             <p:extLst>
               <p:ext uri="{D42A27DB-BD31-4B8C-83A1-F6EECF244321}">
-                <p14:modId xmlns:p14="http://schemas.microsoft.com/office/powerpoint/2010/main" val="1584928737"/>
+                <p14:modId xmlns:p14="http://schemas.microsoft.com/office/powerpoint/2010/main" val="127619040"/>
               </p:ext>
             </p:extLst>
           </p:nvPr>
@@ -21821,7 +21948,7 @@
           <p:nvPr>
             <p:extLst>
               <p:ext uri="{D42A27DB-BD31-4B8C-83A1-F6EECF244321}">
-                <p14:modId xmlns:p14="http://schemas.microsoft.com/office/powerpoint/2010/main" val="3379789495"/>
+                <p14:modId xmlns:p14="http://schemas.microsoft.com/office/powerpoint/2010/main" val="3621510939"/>
               </p:ext>
             </p:extLst>
           </p:nvPr>
@@ -22336,7 +22463,7 @@
           <p:nvPr>
             <p:extLst>
               <p:ext uri="{D42A27DB-BD31-4B8C-83A1-F6EECF244321}">
-                <p14:modId xmlns:p14="http://schemas.microsoft.com/office/powerpoint/2010/main" val="4266371733"/>
+                <p14:modId xmlns:p14="http://schemas.microsoft.com/office/powerpoint/2010/main" val="2307178815"/>
               </p:ext>
             </p:extLst>
           </p:nvPr>
@@ -23516,6 +23643,14 @@
 </file>
 
 <file path=customXml/item1.xml><?xml version="1.0" encoding="utf-8"?>
+<p:properties xmlns:p="http://schemas.microsoft.com/office/2006/metadata/properties" xmlns:xsi="http://www.w3.org/2001/XMLSchema-instance" xmlns:pc="http://schemas.microsoft.com/office/infopath/2007/PartnerControls">
+  <documentManagement>
+    <_activity xmlns="bf0484fb-39aa-440e-a7f6-ce6b10828c56" xsi:nil="true"/>
+  </documentManagement>
+</p:properties>
+</file>
+
+<file path=customXml/item2.xml><?xml version="1.0" encoding="utf-8"?>
 <ct:contentTypeSchema xmlns:ct="http://schemas.microsoft.com/office/2006/metadata/contentType" xmlns:ma="http://schemas.microsoft.com/office/2006/metadata/properties/metaAttributes" ct:_="" ma:_="" ma:contentTypeName="Document" ma:contentTypeID="0x0101006A4E12A0CEF6A047A2ED39F3719482AA" ma:contentTypeVersion="16" ma:contentTypeDescription="Create a new document." ma:contentTypeScope="" ma:versionID="0e1d78e459d7e83271e38b16816bc458">
   <xsd:schema xmlns:xsd="http://www.w3.org/2001/XMLSchema" xmlns:xs="http://www.w3.org/2001/XMLSchema" xmlns:p="http://schemas.microsoft.com/office/2006/metadata/properties" xmlns:ns3="9dd65258-3995-4e6a-8867-aed9b661a0cf" xmlns:ns4="bf0484fb-39aa-440e-a7f6-ce6b10828c56" targetNamespace="http://schemas.microsoft.com/office/2006/metadata/properties" ma:root="true" ma:fieldsID="177a938d7b189453f861ba34050ac94d" ns3:_="" ns4:_="">
     <xsd:import namespace="9dd65258-3995-4e6a-8867-aed9b661a0cf"/>
@@ -23754,14 +23889,6 @@
 </ct:contentTypeSchema>
 </file>
 
-<file path=customXml/item2.xml><?xml version="1.0" encoding="utf-8"?>
-<p:properties xmlns:p="http://schemas.microsoft.com/office/2006/metadata/properties" xmlns:xsi="http://www.w3.org/2001/XMLSchema-instance" xmlns:pc="http://schemas.microsoft.com/office/infopath/2007/PartnerControls">
-  <documentManagement>
-    <_activity xmlns="bf0484fb-39aa-440e-a7f6-ce6b10828c56" xsi:nil="true"/>
-  </documentManagement>
-</p:properties>
-</file>
-
 <file path=customXml/item3.xml><?xml version="1.0" encoding="utf-8"?>
 <?mso-contentType ?>
 <FormTemplates xmlns="http://schemas.microsoft.com/sharepoint/v3/contenttype/forms">
@@ -23772,6 +23899,23 @@
 </file>
 
 <file path=customXml/itemProps1.xml><?xml version="1.0" encoding="utf-8"?>
+<ds:datastoreItem xmlns:ds="http://schemas.openxmlformats.org/officeDocument/2006/customXml" ds:itemID="{2E6CBD86-C09C-470A-88E8-4B08832346BE}">
+  <ds:schemaRefs>
+    <ds:schemaRef ds:uri="http://schemas.microsoft.com/office/infopath/2007/PartnerControls"/>
+    <ds:schemaRef ds:uri="http://schemas.microsoft.com/office/2006/documentManagement/types"/>
+    <ds:schemaRef ds:uri="bf0484fb-39aa-440e-a7f6-ce6b10828c56"/>
+    <ds:schemaRef ds:uri="9dd65258-3995-4e6a-8867-aed9b661a0cf"/>
+    <ds:schemaRef ds:uri="http://purl.org/dc/elements/1.1/"/>
+    <ds:schemaRef ds:uri="http://www.w3.org/XML/1998/namespace"/>
+    <ds:schemaRef ds:uri="http://purl.org/dc/terms/"/>
+    <ds:schemaRef ds:uri="http://schemas.openxmlformats.org/package/2006/metadata/core-properties"/>
+    <ds:schemaRef ds:uri="http://schemas.microsoft.com/office/2006/metadata/properties"/>
+    <ds:schemaRef ds:uri="http://purl.org/dc/dcmitype/"/>
+  </ds:schemaRefs>
+</ds:datastoreItem>
+</file>
+
+<file path=customXml/itemProps2.xml><?xml version="1.0" encoding="utf-8"?>
 <ds:datastoreItem xmlns:ds="http://schemas.openxmlformats.org/officeDocument/2006/customXml" ds:itemID="{D9FCC86B-1F9D-4A3C-8003-88B96C469389}">
   <ds:schemaRefs>
     <ds:schemaRef ds:uri="http://schemas.microsoft.com/office/2006/metadata/contentType"/>
@@ -23790,23 +23934,6 @@
 </ds:datastoreItem>
 </file>
 
-<file path=customXml/itemProps2.xml><?xml version="1.0" encoding="utf-8"?>
-<ds:datastoreItem xmlns:ds="http://schemas.openxmlformats.org/officeDocument/2006/customXml" ds:itemID="{2E6CBD86-C09C-470A-88E8-4B08832346BE}">
-  <ds:schemaRefs>
-    <ds:schemaRef ds:uri="http://schemas.microsoft.com/office/infopath/2007/PartnerControls"/>
-    <ds:schemaRef ds:uri="http://schemas.microsoft.com/office/2006/documentManagement/types"/>
-    <ds:schemaRef ds:uri="bf0484fb-39aa-440e-a7f6-ce6b10828c56"/>
-    <ds:schemaRef ds:uri="9dd65258-3995-4e6a-8867-aed9b661a0cf"/>
-    <ds:schemaRef ds:uri="http://purl.org/dc/elements/1.1/"/>
-    <ds:schemaRef ds:uri="http://www.w3.org/XML/1998/namespace"/>
-    <ds:schemaRef ds:uri="http://purl.org/dc/terms/"/>
-    <ds:schemaRef ds:uri="http://schemas.openxmlformats.org/package/2006/metadata/core-properties"/>
-    <ds:schemaRef ds:uri="http://schemas.microsoft.com/office/2006/metadata/properties"/>
-    <ds:schemaRef ds:uri="http://purl.org/dc/dcmitype/"/>
-  </ds:schemaRefs>
-</ds:datastoreItem>
-</file>
-
 <file path=customXml/itemProps3.xml><?xml version="1.0" encoding="utf-8"?>
 <ds:datastoreItem xmlns:ds="http://schemas.openxmlformats.org/officeDocument/2006/customXml" ds:itemID="{6204957A-1A48-4EA0-8205-DDDFF95B0C42}">
   <ds:schemaRefs>
